--- a/docs/talk.pptx
+++ b/docs/talk.pptx
@@ -165,14 +165,14 @@
   <p:extLst>
     <p:ext uri="{521415D9-36F7-43E2-AB2F-B90AF26B5E84}">
       <p14:sectionLst xmlns:p14="http://schemas.microsoft.com/office/powerpoint/2010/main">
-        <p14:section name="Intro" id="{6df75ba0-29ab-0e4c-d51b-1a9d5e0f8769}">
+        <p14:section name="Intro" id="{a378ecd6-e0db-322b-2b53-9511faa17f13}">
           <p14:sldIdLst>
             <p14:sldId id="256"/>
             <p14:sldId id="257"/>
             <p14:sldId id="258"/>
           </p14:sldIdLst>
         </p14:section>
-        <p14:section name="Parity" id="{78865b51-d8eb-ec35-67ff-991d12c2954e}">
+        <p14:section name="Parity" id="{fb4a0ac4-4df9-3022-e8db-7afa154e1f4c}">
           <p14:sldIdLst>
             <p14:sldId id="259"/>
             <p14:sldId id="260"/>
@@ -180,14 +180,14 @@
             <p14:sldId id="262"/>
           </p14:sldIdLst>
         </p14:section>
-        <p14:section name="Engine" id="{12daa743-2a9c-aa25-e585-7f0f2f37029f}">
+        <p14:section name="Engine" id="{6cc9dad6-02c5-1ee4-b471-b7e120ba0a6d}">
           <p14:sldIdLst>
             <p14:sldId id="263"/>
             <p14:sldId id="264"/>
             <p14:sldId id="265"/>
           </p14:sldIdLst>
         </p14:section>
-        <p14:section name="Outline" id="{d6c5ecc8-e9c9-1786-0f32-9c513c7b9c6f}">
+        <p14:section name="Outline" id="{765f63b3-a5c3-4bbb-9e56-6c5d7b8960f1}">
           <p14:sldIdLst>
             <p14:sldId id="266"/>
             <p14:sldId id="273"/>
@@ -200,7 +200,7 @@
             <p14:sldId id="302"/>
           </p14:sldIdLst>
         </p14:section>
-        <p14:section name="Execution" id="{41434308-6046-488e-5971-84753ce92d4d}">
+        <p14:section name="Execution" id="{a4c63156-76fa-36ae-3142-0972b1fd708f}">
           <p14:sldIdLst>
             <p14:sldId id="267"/>
             <p14:sldId id="268"/>
@@ -210,7 +210,7 @@
             <p14:sldId id="272"/>
           </p14:sldIdLst>
         </p14:section>
-        <p14:section name="State" id="{127f07fa-4df6-3c1f-86eb-8f331c22fa70}">
+        <p14:section name="State" id="{05cbe74b-b764-0720-59d3-2b8ded686cfa}">
           <p14:sldIdLst>
             <p14:sldId id="274"/>
             <p14:sldId id="275"/>
@@ -219,7 +219,7 @@
             <p14:sldId id="278"/>
           </p14:sldIdLst>
         </p14:section>
-        <p14:section name="Line editor and prompt" id="{f29ee639-cee9-4d3d-c6f9-7d2c685e9d57}">
+        <p14:section name="Line editor and prompt" id="{041f5a78-f88e-d459-bb03-a29f47bd56a9}">
           <p14:sldIdLst>
             <p14:sldId id="280"/>
             <p14:sldId id="281"/>
@@ -229,38 +229,38 @@
             <p14:sldId id="285"/>
           </p14:sldIdLst>
         </p14:section>
-        <p14:section name="Observability" id="{89b9f99b-6d98-9318-345c-a8f9808396d1}">
+        <p14:section name="Observability" id="{ea31ea71-449c-378d-98a2-9b00e9643bf6}">
           <p14:sldIdLst>
             <p14:sldId id="287"/>
             <p14:sldId id="288"/>
             <p14:sldId id="289"/>
           </p14:sldIdLst>
         </p14:section>
-        <p14:section name="Language" id="{e0fd9a16-1344-fe13-756f-307a5c12a171}">
+        <p14:section name="Language" id="{5c5ca2b3-dfdf-64ee-e069-fc6b63879574}">
           <p14:sldIdLst>
             <p14:sldId id="291"/>
             <p14:sldId id="292"/>
           </p14:sldIdLst>
         </p14:section>
-        <p14:section name="Extensibility" id="{3a242597-cbe5-1fef-c031-3c5df00a2b88}">
+        <p14:section name="Extensibility" id="{b8a95394-0988-0da4-6efa-6a5077bf1669}">
           <p14:sldIdLst>
             <p14:sldId id="294"/>
             <p14:sldId id="295"/>
           </p14:sldIdLst>
         </p14:section>
-        <p14:section name="Compatibility" id="{cca12748-f2c0-5a1f-75de-14c55bcdea3d}">
+        <p14:section name="Compatibility" id="{a620a47b-638e-afc2-c455-1a8cec3238a8}">
           <p14:sldIdLst>
             <p14:sldId id="297"/>
             <p14:sldId id="298"/>
           </p14:sldIdLst>
         </p14:section>
-        <p14:section name="Verification" id="{054cc0e7-7524-b3fb-c529-f916a425e563}">
+        <p14:section name="Verification" id="{894c9232-e14d-6a9d-144d-70bd51feb868}">
           <p14:sldIdLst>
             <p14:sldId id="300"/>
             <p14:sldId id="301"/>
           </p14:sldIdLst>
         </p14:section>
-        <p14:section name="Tooling" id="{80888589-7aae-7c4a-9ee2-51c08512f810}">
+        <p14:section name="Tooling" id="{de155bea-ec54-5d11-16ef-138cc1742e6c}">
           <p14:sldIdLst>
             <p14:sldId id="303"/>
             <p14:sldId id="304"/>
@@ -268,7 +268,7 @@
             <p14:sldId id="306"/>
           </p14:sldIdLst>
         </p14:section>
-        <p14:section name="Take-away" id="{c3d76002-1f2c-041e-5dc7-5777c5e29f66}">
+        <p14:section name="Take-away" id="{4b2b844e-1c90-9bc8-dd6e-75aaa6b05c15}">
           <p14:sldIdLst>
             <p14:sldId id="307"/>
             <p14:sldId id="308"/>
@@ -278,7 +278,7 @@
             <p14:sldId id="312"/>
           </p14:sldIdLst>
         </p14:section>
-        <p14:section name="Backup" id="{bb953fca-85d9-388e-1242-a974d2ca89f0}">
+        <p14:section name="Backup" id="{8706f1b1-7175-f942-15c5-9ce4576ad07e}">
           <p14:sldIdLst>
             <p14:sldId id="313"/>
             <p14:sldId id="314"/>
@@ -6095,12 +6095,36 @@
           <a:chExt cx="0" cy="0"/>
         </a:xfrm>
       </p:grpSpPr>
-      <p:sp>
-        <p:nvSpPr>
-          <p:cNvPr id="2" name="Text 0"/>
+      <p:pic>
+        <p:nvPicPr>
+          <p:cNvPr id="2" name="Image 0" descr="/private/tmp/claude-501/-Users-wizard-RustroverProjects-zshrs/2555d359-9a79-4736-9207-869cc21577b1/scratchpad/logo/logo-mark.png">    </p:cNvPr>
+          <p:cNvPicPr>
+            <a:picLocks noChangeAspect="1"/>
+          </p:cNvPicPr>
+          <p:nvPr/>
+        </p:nvPicPr>
+        <p:blipFill>
+          <a:blip r:embed="rId1"/>
+          <a:stretch>
+            <a:fillRect/>
+          </a:stretch>
+        </p:blipFill>
+        <p:spPr>
+          <a:xfrm>
+            <a:off x="11384280" y="411480"/>
+            <a:ext cx="502920" cy="502920"/>
+          </a:xfrm>
+          <a:prstGeom prst="rect">
+            <a:avLst/>
+          </a:prstGeom>
+        </p:spPr>
+      </p:pic>
+      <p:sp>
+        <p:nvSpPr>
+          <p:cNvPr id="3" name="Text 0"/>
           <p:cNvSpPr/>
           <p:nvPr>
-            <p:ph idx="100" type="title" hasCustomPrompt="1"/>
+            <p:ph idx="101" type="title" hasCustomPrompt="1"/>
           </p:nvPr>
         </p:nvSpPr>
         <p:spPr>
@@ -6214,12 +6238,36 @@
           <a:chExt cx="0" cy="0"/>
         </a:xfrm>
       </p:grpSpPr>
-      <p:sp>
-        <p:nvSpPr>
-          <p:cNvPr id="2" name="Text 0"/>
+      <p:pic>
+        <p:nvPicPr>
+          <p:cNvPr id="2" name="Image 0" descr="/private/tmp/claude-501/-Users-wizard-RustroverProjects-zshrs/2555d359-9a79-4736-9207-869cc21577b1/scratchpad/logo/logo-mark.png">    </p:cNvPr>
+          <p:cNvPicPr>
+            <a:picLocks noChangeAspect="1"/>
+          </p:cNvPicPr>
+          <p:nvPr/>
+        </p:nvPicPr>
+        <p:blipFill>
+          <a:blip r:embed="rId1"/>
+          <a:stretch>
+            <a:fillRect/>
+          </a:stretch>
+        </p:blipFill>
+        <p:spPr>
+          <a:xfrm>
+            <a:off x="11384280" y="411480"/>
+            <a:ext cx="502920" cy="502920"/>
+          </a:xfrm>
+          <a:prstGeom prst="rect">
+            <a:avLst/>
+          </a:prstGeom>
+        </p:spPr>
+      </p:pic>
+      <p:sp>
+        <p:nvSpPr>
+          <p:cNvPr id="3" name="Text 0"/>
           <p:cNvSpPr/>
           <p:nvPr>
-            <p:ph idx="100" type="title" hasCustomPrompt="1"/>
+            <p:ph idx="101" type="title" hasCustomPrompt="1"/>
           </p:nvPr>
         </p:nvSpPr>
         <p:spPr>
@@ -6767,12 +6815,36 @@
           </a:p>
         </p:txBody>
       </p:sp>
-      <p:sp>
-        <p:nvSpPr>
-          <p:cNvPr id="6" name="Text 0"/>
+      <p:pic>
+        <p:nvPicPr>
+          <p:cNvPr id="6" name="Image 0" descr="/private/tmp/claude-501/-Users-wizard-RustroverProjects-zshrs/2555d359-9a79-4736-9207-869cc21577b1/scratchpad/logo/logo.png">    </p:cNvPr>
+          <p:cNvPicPr>
+            <a:picLocks noChangeAspect="1"/>
+          </p:cNvPicPr>
+          <p:nvPr/>
+        </p:nvPicPr>
+        <p:blipFill>
+          <a:blip r:embed="rId1"/>
+          <a:stretch>
+            <a:fillRect/>
+          </a:stretch>
+        </p:blipFill>
+        <p:spPr>
+          <a:xfrm>
+            <a:off x="822960" y="320040"/>
+            <a:ext cx="4114800" cy="1234440"/>
+          </a:xfrm>
+          <a:prstGeom prst="rect">
+            <a:avLst/>
+          </a:prstGeom>
+        </p:spPr>
+      </p:pic>
+      <p:sp>
+        <p:nvSpPr>
+          <p:cNvPr id="7" name="Text 0"/>
           <p:cNvSpPr/>
           <p:nvPr>
-            <p:ph idx="100" type="title" hasCustomPrompt="1"/>
+            <p:ph idx="101" type="title" hasCustomPrompt="1"/>
           </p:nvPr>
         </p:nvSpPr>
         <p:spPr>
@@ -6875,7 +6947,7 @@
           <p:cNvPr id="2" name="Text 0"/>
           <p:cNvSpPr/>
           <p:nvPr>
-            <p:ph idx="100" type="title" hasCustomPrompt="1"/>
+            <p:ph idx="101" type="title" hasCustomPrompt="1"/>
           </p:nvPr>
         </p:nvSpPr>
         <p:spPr>
@@ -7190,7 +7262,7 @@
           <p:cNvPr id="2" name="Text 0"/>
           <p:cNvSpPr/>
           <p:nvPr>
-            <p:ph idx="100" type="title" hasCustomPrompt="1"/>
+            <p:ph idx="101" type="title" hasCustomPrompt="1"/>
           </p:nvPr>
         </p:nvSpPr>
         <p:spPr>
@@ -8555,7 +8627,7 @@
           <p:cNvPr id="2" name="Text 0"/>
           <p:cNvSpPr/>
           <p:nvPr>
-            <p:ph idx="100" type="title" hasCustomPrompt="1"/>
+            <p:ph idx="101" type="title" hasCustomPrompt="1"/>
           </p:nvPr>
         </p:nvSpPr>
         <p:spPr>
@@ -8916,7 +8988,7 @@
           <p:cNvPr id="2" name="Text 0"/>
           <p:cNvSpPr/>
           <p:nvPr>
-            <p:ph idx="100" type="title" hasCustomPrompt="1"/>
+            <p:ph idx="101" type="title" hasCustomPrompt="1"/>
           </p:nvPr>
         </p:nvSpPr>
         <p:spPr>
@@ -9277,7 +9349,7 @@
           <p:cNvPr id="2" name="Text 0"/>
           <p:cNvSpPr/>
           <p:nvPr>
-            <p:ph idx="100" type="title" hasCustomPrompt="1"/>
+            <p:ph idx="101" type="title" hasCustomPrompt="1"/>
           </p:nvPr>
         </p:nvSpPr>
         <p:spPr>
@@ -9709,7 +9781,7 @@
           <p:cNvPr id="2" name="Text 0"/>
           <p:cNvSpPr/>
           <p:nvPr>
-            <p:ph idx="100" type="title" hasCustomPrompt="1"/>
+            <p:ph idx="101" type="title" hasCustomPrompt="1"/>
           </p:nvPr>
         </p:nvSpPr>
         <p:spPr>
@@ -10121,7 +10193,7 @@
           <p:cNvPr id="2" name="Text 0"/>
           <p:cNvSpPr/>
           <p:nvPr>
-            <p:ph idx="100" type="title" hasCustomPrompt="1"/>
+            <p:ph idx="101" type="title" hasCustomPrompt="1"/>
           </p:nvPr>
         </p:nvSpPr>
         <p:spPr>
@@ -10464,7 +10536,7 @@
           <p:cNvPr id="2" name="Text 0"/>
           <p:cNvSpPr/>
           <p:nvPr>
-            <p:ph idx="100" type="title" hasCustomPrompt="1"/>
+            <p:ph idx="101" type="title" hasCustomPrompt="1"/>
           </p:nvPr>
         </p:nvSpPr>
         <p:spPr>
@@ -10898,7 +10970,7 @@
           <p:cNvPr id="2" name="Text 0"/>
           <p:cNvSpPr/>
           <p:nvPr>
-            <p:ph idx="100" type="title" hasCustomPrompt="1"/>
+            <p:ph idx="101" type="title" hasCustomPrompt="1"/>
           </p:nvPr>
         </p:nvSpPr>
         <p:spPr>
@@ -12263,7 +12335,7 @@
           <p:cNvPr id="2" name="Text 0"/>
           <p:cNvSpPr/>
           <p:nvPr>
-            <p:ph idx="100" type="title" hasCustomPrompt="1"/>
+            <p:ph idx="101" type="title" hasCustomPrompt="1"/>
           </p:nvPr>
         </p:nvSpPr>
         <p:spPr>
@@ -12606,7 +12678,7 @@
           <p:cNvPr id="2" name="Text 0"/>
           <p:cNvSpPr/>
           <p:nvPr>
-            <p:ph idx="100" type="title" hasCustomPrompt="1"/>
+            <p:ph idx="101" type="title" hasCustomPrompt="1"/>
           </p:nvPr>
         </p:nvSpPr>
         <p:spPr>
@@ -13252,7 +13324,7 @@
           <p:cNvPr id="2" name="Text 0"/>
           <p:cNvSpPr/>
           <p:nvPr>
-            <p:ph idx="100" type="title" hasCustomPrompt="1"/>
+            <p:ph idx="101" type="title" hasCustomPrompt="1"/>
           </p:nvPr>
         </p:nvSpPr>
         <p:spPr>
@@ -13595,7 +13667,7 @@
           <p:cNvPr id="2" name="Text 0"/>
           <p:cNvSpPr/>
           <p:nvPr>
-            <p:ph idx="100" type="title" hasCustomPrompt="1"/>
+            <p:ph idx="101" type="title" hasCustomPrompt="1"/>
           </p:nvPr>
         </p:nvSpPr>
         <p:spPr>
@@ -14047,7 +14119,7 @@
           <p:cNvPr id="2" name="Text 0"/>
           <p:cNvSpPr/>
           <p:nvPr>
-            <p:ph idx="100" type="title" hasCustomPrompt="1"/>
+            <p:ph idx="101" type="title" hasCustomPrompt="1"/>
           </p:nvPr>
         </p:nvSpPr>
         <p:spPr>
@@ -14408,7 +14480,7 @@
           <p:cNvPr id="2" name="Text 0"/>
           <p:cNvSpPr/>
           <p:nvPr>
-            <p:ph idx="100" type="title" hasCustomPrompt="1"/>
+            <p:ph idx="101" type="title" hasCustomPrompt="1"/>
           </p:nvPr>
         </p:nvSpPr>
         <p:spPr>
@@ -14751,7 +14823,7 @@
           <p:cNvPr id="2" name="Text 0"/>
           <p:cNvSpPr/>
           <p:nvPr>
-            <p:ph idx="100" type="title" hasCustomPrompt="1"/>
+            <p:ph idx="101" type="title" hasCustomPrompt="1"/>
           </p:nvPr>
         </p:nvSpPr>
         <p:spPr>
@@ -16116,7 +16188,7 @@
           <p:cNvPr id="2" name="Text 0"/>
           <p:cNvSpPr/>
           <p:nvPr>
-            <p:ph idx="100" type="title" hasCustomPrompt="1"/>
+            <p:ph idx="101" type="title" hasCustomPrompt="1"/>
           </p:nvPr>
         </p:nvSpPr>
         <p:spPr>
@@ -16595,7 +16667,7 @@
           <p:cNvPr id="2" name="Text 0"/>
           <p:cNvSpPr/>
           <p:nvPr>
-            <p:ph idx="100" type="title" hasCustomPrompt="1"/>
+            <p:ph idx="101" type="title" hasCustomPrompt="1"/>
           </p:nvPr>
         </p:nvSpPr>
         <p:spPr>
@@ -17153,7 +17225,7 @@
           <p:cNvPr id="2" name="Text 0"/>
           <p:cNvSpPr/>
           <p:nvPr>
-            <p:ph idx="100" type="title" hasCustomPrompt="1"/>
+            <p:ph idx="101" type="title" hasCustomPrompt="1"/>
           </p:nvPr>
         </p:nvSpPr>
         <p:spPr>
@@ -17747,7 +17819,7 @@
           <p:cNvPr id="2" name="Text 0"/>
           <p:cNvSpPr/>
           <p:nvPr>
-            <p:ph idx="100" type="title" hasCustomPrompt="1"/>
+            <p:ph idx="101" type="title" hasCustomPrompt="1"/>
           </p:nvPr>
         </p:nvSpPr>
         <p:spPr>
@@ -18635,7 +18707,7 @@
           <p:cNvPr id="2" name="Text 0"/>
           <p:cNvSpPr/>
           <p:nvPr>
-            <p:ph idx="100" type="title" hasCustomPrompt="1"/>
+            <p:ph idx="101" type="title" hasCustomPrompt="1"/>
           </p:nvPr>
         </p:nvSpPr>
         <p:spPr>
@@ -19047,7 +19119,7 @@
           <p:cNvPr id="2" name="Text 0"/>
           <p:cNvSpPr/>
           <p:nvPr>
-            <p:ph idx="100" type="title" hasCustomPrompt="1"/>
+            <p:ph idx="101" type="title" hasCustomPrompt="1"/>
           </p:nvPr>
         </p:nvSpPr>
         <p:spPr>
@@ -19392,7 +19464,7 @@
           <p:cNvPr id="2" name="Text 0"/>
           <p:cNvSpPr/>
           <p:nvPr>
-            <p:ph idx="100" type="title" hasCustomPrompt="1"/>
+            <p:ph idx="101" type="title" hasCustomPrompt="1"/>
           </p:nvPr>
         </p:nvSpPr>
         <p:spPr>
@@ -19822,7 +19894,7 @@
           <p:cNvPr id="2" name="Text 0"/>
           <p:cNvSpPr/>
           <p:nvPr>
-            <p:ph idx="100" type="title" hasCustomPrompt="1"/>
+            <p:ph idx="101" type="title" hasCustomPrompt="1"/>
           </p:nvPr>
         </p:nvSpPr>
         <p:spPr>
@@ -21187,7 +21259,7 @@
           <p:cNvPr id="2" name="Text 0"/>
           <p:cNvSpPr/>
           <p:nvPr>
-            <p:ph idx="100" type="title" hasCustomPrompt="1"/>
+            <p:ph idx="101" type="title" hasCustomPrompt="1"/>
           </p:nvPr>
         </p:nvSpPr>
         <p:spPr>
@@ -21548,7 +21620,7 @@
           <p:cNvPr id="2" name="Text 0"/>
           <p:cNvSpPr/>
           <p:nvPr>
-            <p:ph idx="100" type="title" hasCustomPrompt="1"/>
+            <p:ph idx="101" type="title" hasCustomPrompt="1"/>
           </p:nvPr>
         </p:nvSpPr>
         <p:spPr>
@@ -21980,7 +22052,7 @@
           <p:cNvPr id="2" name="Text 0"/>
           <p:cNvSpPr/>
           <p:nvPr>
-            <p:ph idx="100" type="title" hasCustomPrompt="1"/>
+            <p:ph idx="101" type="title" hasCustomPrompt="1"/>
           </p:nvPr>
         </p:nvSpPr>
         <p:spPr>
@@ -22394,7 +22466,7 @@
           <p:cNvPr id="2" name="Text 0"/>
           <p:cNvSpPr/>
           <p:nvPr>
-            <p:ph idx="100" type="title" hasCustomPrompt="1"/>
+            <p:ph idx="101" type="title" hasCustomPrompt="1"/>
           </p:nvPr>
         </p:nvSpPr>
         <p:spPr>
@@ -23759,7 +23831,7 @@
           <p:cNvPr id="2" name="Text 0"/>
           <p:cNvSpPr/>
           <p:nvPr>
-            <p:ph idx="100" type="title" hasCustomPrompt="1"/>
+            <p:ph idx="101" type="title" hasCustomPrompt="1"/>
           </p:nvPr>
         </p:nvSpPr>
         <p:spPr>
@@ -24102,7 +24174,7 @@
           <p:cNvPr id="2" name="Text 0"/>
           <p:cNvSpPr/>
           <p:nvPr>
-            <p:ph idx="100" type="title" hasCustomPrompt="1"/>
+            <p:ph idx="101" type="title" hasCustomPrompt="1"/>
           </p:nvPr>
         </p:nvSpPr>
         <p:spPr>
@@ -24445,7 +24517,7 @@
           <p:cNvPr id="2" name="Text 0"/>
           <p:cNvSpPr/>
           <p:nvPr>
-            <p:ph idx="100" type="title" hasCustomPrompt="1"/>
+            <p:ph idx="101" type="title" hasCustomPrompt="1"/>
           </p:nvPr>
         </p:nvSpPr>
         <p:spPr>
@@ -25810,7 +25882,7 @@
           <p:cNvPr id="2" name="Text 0"/>
           <p:cNvSpPr/>
           <p:nvPr>
-            <p:ph idx="100" type="title" hasCustomPrompt="1"/>
+            <p:ph idx="101" type="title" hasCustomPrompt="1"/>
           </p:nvPr>
         </p:nvSpPr>
         <p:spPr>
@@ -26262,7 +26334,7 @@
           <p:cNvPr id="2" name="Text 0"/>
           <p:cNvSpPr/>
           <p:nvPr>
-            <p:ph idx="100" type="title" hasCustomPrompt="1"/>
+            <p:ph idx="101" type="title" hasCustomPrompt="1"/>
           </p:nvPr>
         </p:nvSpPr>
         <p:spPr>
@@ -26754,7 +26826,7 @@
           <p:cNvPr id="2" name="Text 0"/>
           <p:cNvSpPr/>
           <p:nvPr>
-            <p:ph idx="100" type="title" hasCustomPrompt="1"/>
+            <p:ph idx="101" type="title" hasCustomPrompt="1"/>
           </p:nvPr>
         </p:nvSpPr>
         <p:spPr>
@@ -27115,7 +27187,7 @@
           <p:cNvPr id="2" name="Text 0"/>
           <p:cNvSpPr/>
           <p:nvPr>
-            <p:ph idx="100" type="title" hasCustomPrompt="1"/>
+            <p:ph idx="101" type="title" hasCustomPrompt="1"/>
           </p:nvPr>
         </p:nvSpPr>
         <p:spPr>
@@ -28480,7 +28552,7 @@
           <p:cNvPr id="2" name="Text 0"/>
           <p:cNvSpPr/>
           <p:nvPr>
-            <p:ph idx="100" type="title" hasCustomPrompt="1"/>
+            <p:ph idx="101" type="title" hasCustomPrompt="1"/>
           </p:nvPr>
         </p:nvSpPr>
         <p:spPr>
@@ -28841,7 +28913,7 @@
           <p:cNvPr id="2" name="Text 0"/>
           <p:cNvSpPr/>
           <p:nvPr>
-            <p:ph idx="100" type="title" hasCustomPrompt="1"/>
+            <p:ph idx="101" type="title" hasCustomPrompt="1"/>
           </p:nvPr>
         </p:nvSpPr>
         <p:spPr>
@@ -29202,7 +29274,7 @@
           <p:cNvPr id="2" name="Text 0"/>
           <p:cNvSpPr/>
           <p:nvPr>
-            <p:ph idx="100" type="title" hasCustomPrompt="1"/>
+            <p:ph idx="101" type="title" hasCustomPrompt="1"/>
           </p:nvPr>
         </p:nvSpPr>
         <p:spPr>
@@ -30567,7 +30639,7 @@
           <p:cNvPr id="2" name="Text 0"/>
           <p:cNvSpPr/>
           <p:nvPr>
-            <p:ph idx="100" type="title" hasCustomPrompt="1"/>
+            <p:ph idx="101" type="title" hasCustomPrompt="1"/>
           </p:nvPr>
         </p:nvSpPr>
         <p:spPr>
@@ -30910,7 +30982,7 @@
           <p:cNvPr id="2" name="Text 0"/>
           <p:cNvSpPr/>
           <p:nvPr>
-            <p:ph idx="100" type="title" hasCustomPrompt="1"/>
+            <p:ph idx="101" type="title" hasCustomPrompt="1"/>
           </p:nvPr>
         </p:nvSpPr>
         <p:spPr>
@@ -31287,7 +31359,7 @@
           <p:cNvPr id="2" name="Text 0"/>
           <p:cNvSpPr/>
           <p:nvPr>
-            <p:ph idx="100" type="title" hasCustomPrompt="1"/>
+            <p:ph idx="101" type="title" hasCustomPrompt="1"/>
           </p:nvPr>
         </p:nvSpPr>
         <p:spPr>
@@ -32652,7 +32724,7 @@
           <p:cNvPr id="2" name="Text 0"/>
           <p:cNvSpPr/>
           <p:nvPr>
-            <p:ph idx="100" type="title" hasCustomPrompt="1"/>
+            <p:ph idx="101" type="title" hasCustomPrompt="1"/>
           </p:nvPr>
         </p:nvSpPr>
         <p:spPr>
@@ -33046,7 +33118,7 @@
           <p:cNvPr id="2" name="Text 0"/>
           <p:cNvSpPr/>
           <p:nvPr>
-            <p:ph idx="100" type="title" hasCustomPrompt="1"/>
+            <p:ph idx="101" type="title" hasCustomPrompt="1"/>
           </p:nvPr>
         </p:nvSpPr>
         <p:spPr>
@@ -33389,7 +33461,7 @@
           <p:cNvPr id="2" name="Text 0"/>
           <p:cNvSpPr/>
           <p:nvPr>
-            <p:ph idx="100" type="title" hasCustomPrompt="1"/>
+            <p:ph idx="101" type="title" hasCustomPrompt="1"/>
           </p:nvPr>
         </p:nvSpPr>
         <p:spPr>
@@ -34251,7 +34323,7 @@
           <p:cNvPr id="2" name="Text 0"/>
           <p:cNvSpPr/>
           <p:nvPr>
-            <p:ph idx="100" type="title" hasCustomPrompt="1"/>
+            <p:ph idx="101" type="title" hasCustomPrompt="1"/>
           </p:nvPr>
         </p:nvSpPr>
         <p:spPr>
@@ -34703,7 +34775,7 @@
           <p:cNvPr id="2" name="Text 0"/>
           <p:cNvSpPr/>
           <p:nvPr>
-            <p:ph idx="100" type="title" hasCustomPrompt="1"/>
+            <p:ph idx="101" type="title" hasCustomPrompt="1"/>
           </p:nvPr>
         </p:nvSpPr>
         <p:spPr>
@@ -35046,7 +35118,7 @@
           <p:cNvPr id="2" name="Text 0"/>
           <p:cNvSpPr/>
           <p:nvPr>
-            <p:ph idx="100" type="title" hasCustomPrompt="1"/>
+            <p:ph idx="101" type="title" hasCustomPrompt="1"/>
           </p:nvPr>
         </p:nvSpPr>
         <p:spPr>
@@ -35383,7 +35455,7 @@
           <p:cNvPr id="2" name="Text 0"/>
           <p:cNvSpPr/>
           <p:nvPr>
-            <p:ph idx="100" type="title" hasCustomPrompt="1"/>
+            <p:ph idx="101" type="title" hasCustomPrompt="1"/>
           </p:nvPr>
         </p:nvSpPr>
         <p:spPr>
@@ -35720,7 +35792,7 @@
           <p:cNvPr id="2" name="Text 0"/>
           <p:cNvSpPr/>
           <p:nvPr>
-            <p:ph idx="100" type="title" hasCustomPrompt="1"/>
+            <p:ph idx="101" type="title" hasCustomPrompt="1"/>
           </p:nvPr>
         </p:nvSpPr>
         <p:spPr>
@@ -36059,7 +36131,7 @@
           <p:cNvPr id="2" name="Text 0"/>
           <p:cNvSpPr/>
           <p:nvPr>
-            <p:ph idx="100" type="title" hasCustomPrompt="1"/>
+            <p:ph idx="101" type="title" hasCustomPrompt="1"/>
           </p:nvPr>
         </p:nvSpPr>
         <p:spPr>
@@ -36704,7 +36776,7 @@
           <p:cNvPr id="2" name="Text 0"/>
           <p:cNvSpPr/>
           <p:nvPr>
-            <p:ph idx="100" type="title" hasCustomPrompt="1"/>
+            <p:ph idx="101" type="title" hasCustomPrompt="1"/>
           </p:nvPr>
         </p:nvSpPr>
         <p:spPr>
@@ -37077,7 +37149,7 @@
           <p:cNvPr id="5" name="Text 0"/>
           <p:cNvSpPr/>
           <p:nvPr>
-            <p:ph idx="100" type="title" hasCustomPrompt="1"/>
+            <p:ph idx="101" type="title" hasCustomPrompt="1"/>
           </p:nvPr>
         </p:nvSpPr>
         <p:spPr>
@@ -37180,7 +37252,7 @@
           <p:cNvPr id="2" name="Text 0"/>
           <p:cNvSpPr/>
           <p:nvPr>
-            <p:ph idx="100" type="title" hasCustomPrompt="1"/>
+            <p:ph idx="101" type="title" hasCustomPrompt="1"/>
           </p:nvPr>
         </p:nvSpPr>
         <p:spPr>
@@ -37950,7 +38022,7 @@
           <p:cNvPr id="2" name="Text 0"/>
           <p:cNvSpPr/>
           <p:nvPr>
-            <p:ph idx="100" type="title" hasCustomPrompt="1"/>
+            <p:ph idx="101" type="title" hasCustomPrompt="1"/>
           </p:nvPr>
         </p:nvSpPr>
         <p:spPr>
@@ -38384,7 +38456,7 @@
           <p:cNvPr id="2" name="Text 0"/>
           <p:cNvSpPr/>
           <p:nvPr>
-            <p:ph idx="100" type="title" hasCustomPrompt="1"/>
+            <p:ph idx="101" type="title" hasCustomPrompt="1"/>
           </p:nvPr>
         </p:nvSpPr>
         <p:spPr>
@@ -39029,7 +39101,7 @@
           <p:cNvPr id="2" name="Text 0"/>
           <p:cNvSpPr/>
           <p:nvPr>
-            <p:ph idx="100" type="title" hasCustomPrompt="1"/>
+            <p:ph idx="101" type="title" hasCustomPrompt="1"/>
           </p:nvPr>
         </p:nvSpPr>
         <p:spPr>
@@ -40266,7 +40338,7 @@
           <p:cNvPr id="2" name="Text 0"/>
           <p:cNvSpPr/>
           <p:nvPr>
-            <p:ph idx="100" type="title" hasCustomPrompt="1"/>
+            <p:ph idx="101" type="title" hasCustomPrompt="1"/>
           </p:nvPr>
         </p:nvSpPr>
         <p:spPr>
@@ -40848,7 +40920,7 @@
           <p:cNvPr id="2" name="Text 0"/>
           <p:cNvSpPr/>
           <p:nvPr>
-            <p:ph idx="100" type="title" hasCustomPrompt="1"/>
+            <p:ph idx="101" type="title" hasCustomPrompt="1"/>
           </p:nvPr>
         </p:nvSpPr>
         <p:spPr>

--- a/docs/talk.pptx
+++ b/docs/talk.pptx
@@ -165,14 +165,14 @@
   <p:extLst>
     <p:ext uri="{521415D9-36F7-43E2-AB2F-B90AF26B5E84}">
       <p14:sectionLst xmlns:p14="http://schemas.microsoft.com/office/powerpoint/2010/main">
-        <p14:section name="Intro" id="{a378ecd6-e0db-322b-2b53-9511faa17f13}">
+        <p14:section name="Intro" id="{3d38e541-11bf-3cd7-437d-3df4e6bf4933}">
           <p14:sldIdLst>
             <p14:sldId id="256"/>
             <p14:sldId id="257"/>
             <p14:sldId id="258"/>
           </p14:sldIdLst>
         </p14:section>
-        <p14:section name="Parity" id="{fb4a0ac4-4df9-3022-e8db-7afa154e1f4c}">
+        <p14:section name="Parity" id="{57c14051-640f-74e2-12e0-bef4c9a4ef9f}">
           <p14:sldIdLst>
             <p14:sldId id="259"/>
             <p14:sldId id="260"/>
@@ -180,14 +180,14 @@
             <p14:sldId id="262"/>
           </p14:sldIdLst>
         </p14:section>
-        <p14:section name="Engine" id="{6cc9dad6-02c5-1ee4-b471-b7e120ba0a6d}">
+        <p14:section name="Engine" id="{18db2ecb-5436-7c55-42c0-ea1d8295e195}">
           <p14:sldIdLst>
             <p14:sldId id="263"/>
             <p14:sldId id="264"/>
             <p14:sldId id="265"/>
           </p14:sldIdLst>
         </p14:section>
-        <p14:section name="Outline" id="{765f63b3-a5c3-4bbb-9e56-6c5d7b8960f1}">
+        <p14:section name="Outline" id="{229b1d16-3406-7594-08ba-5400a9c39cda}">
           <p14:sldIdLst>
             <p14:sldId id="266"/>
             <p14:sldId id="273"/>
@@ -200,7 +200,7 @@
             <p14:sldId id="302"/>
           </p14:sldIdLst>
         </p14:section>
-        <p14:section name="Execution" id="{a4c63156-76fa-36ae-3142-0972b1fd708f}">
+        <p14:section name="Execution" id="{f0358d8b-8d05-af9e-f42d-00ac35eb8536}">
           <p14:sldIdLst>
             <p14:sldId id="267"/>
             <p14:sldId id="268"/>
@@ -210,7 +210,7 @@
             <p14:sldId id="272"/>
           </p14:sldIdLst>
         </p14:section>
-        <p14:section name="State" id="{05cbe74b-b764-0720-59d3-2b8ded686cfa}">
+        <p14:section name="State" id="{9b21320d-5a16-65ba-90c5-99c22cffe732}">
           <p14:sldIdLst>
             <p14:sldId id="274"/>
             <p14:sldId id="275"/>
@@ -219,7 +219,7 @@
             <p14:sldId id="278"/>
           </p14:sldIdLst>
         </p14:section>
-        <p14:section name="Line editor and prompt" id="{041f5a78-f88e-d459-bb03-a29f47bd56a9}">
+        <p14:section name="Line editor and prompt" id="{81b14080-1bc6-e125-fa20-ff86f9d50e2b}">
           <p14:sldIdLst>
             <p14:sldId id="280"/>
             <p14:sldId id="281"/>
@@ -229,38 +229,38 @@
             <p14:sldId id="285"/>
           </p14:sldIdLst>
         </p14:section>
-        <p14:section name="Observability" id="{ea31ea71-449c-378d-98a2-9b00e9643bf6}">
+        <p14:section name="Observability" id="{f97126fd-7907-4639-022d-40fb1158e1eb}">
           <p14:sldIdLst>
             <p14:sldId id="287"/>
             <p14:sldId id="288"/>
             <p14:sldId id="289"/>
           </p14:sldIdLst>
         </p14:section>
-        <p14:section name="Language" id="{5c5ca2b3-dfdf-64ee-e069-fc6b63879574}">
+        <p14:section name="Language" id="{636dcf44-ff9b-1480-a8a4-410b048808dd}">
           <p14:sldIdLst>
             <p14:sldId id="291"/>
             <p14:sldId id="292"/>
           </p14:sldIdLst>
         </p14:section>
-        <p14:section name="Extensibility" id="{b8a95394-0988-0da4-6efa-6a5077bf1669}">
+        <p14:section name="Extensibility" id="{35eaddab-3ec6-cce2-d3ea-b404f82558d4}">
           <p14:sldIdLst>
             <p14:sldId id="294"/>
             <p14:sldId id="295"/>
           </p14:sldIdLst>
         </p14:section>
-        <p14:section name="Compatibility" id="{a620a47b-638e-afc2-c455-1a8cec3238a8}">
+        <p14:section name="Compatibility" id="{2df06806-249e-cad2-e28f-0ac30a7daa67}">
           <p14:sldIdLst>
             <p14:sldId id="297"/>
             <p14:sldId id="298"/>
           </p14:sldIdLst>
         </p14:section>
-        <p14:section name="Verification" id="{894c9232-e14d-6a9d-144d-70bd51feb868}">
+        <p14:section name="Verification" id="{281f6e5a-f882-570e-8785-1d963261ae6e}">
           <p14:sldIdLst>
             <p14:sldId id="300"/>
             <p14:sldId id="301"/>
           </p14:sldIdLst>
         </p14:section>
-        <p14:section name="Tooling" id="{de155bea-ec54-5d11-16ef-138cc1742e6c}">
+        <p14:section name="Tooling" id="{6c570d02-dc5b-c4d9-79c4-098887506595}">
           <p14:sldIdLst>
             <p14:sldId id="303"/>
             <p14:sldId id="304"/>
@@ -268,7 +268,7 @@
             <p14:sldId id="306"/>
           </p14:sldIdLst>
         </p14:section>
-        <p14:section name="Take-away" id="{4b2b844e-1c90-9bc8-dd6e-75aaa6b05c15}">
+        <p14:section name="Take-away" id="{86bf1587-a5dc-21ed-2e52-da0774335231}">
           <p14:sldIdLst>
             <p14:sldId id="307"/>
             <p14:sldId id="308"/>
@@ -278,7 +278,7 @@
             <p14:sldId id="312"/>
           </p14:sldIdLst>
         </p14:section>
-        <p14:section name="Backup" id="{8706f1b1-7175-f942-15c5-9ce4576ad07e}">
+        <p14:section name="Backup" id="{17405b73-6240-aba9-5914-8426c841942d}">
           <p14:sldIdLst>
             <p14:sldId id="313"/>
             <p14:sldId id="314"/>
@@ -7028,11 +7028,11 @@
         <p:spPr>
           <a:xfrm>
             <a:off x="822960" y="1737360"/>
-            <a:ext cx="10515600" cy="1600200"/>
+            <a:ext cx="10515600" cy="1513840"/>
           </a:xfrm>
           <a:prstGeom prst="roundRect">
             <a:avLst>
-              <a:gd name="adj" fmla="val 6857"/>
+              <a:gd name="adj" fmla="val 7248"/>
             </a:avLst>
           </a:prstGeom>
           <a:solidFill>
@@ -7054,8 +7054,8 @@
         </p:nvSpPr>
         <p:spPr>
           <a:xfrm>
-            <a:off x="1143000" y="1938528"/>
-            <a:ext cx="9875520" cy="1197864"/>
+            <a:off x="1143000" y="1965960"/>
+            <a:ext cx="9875520" cy="1056640"/>
           </a:xfrm>
           <a:prstGeom prst="rect">
             <a:avLst/>
@@ -7068,13 +7068,13 @@
           <a:lstStyle/>
           <a:p>
             <a:pPr indent="0" marL="0">
-              <a:spcAft>
-                <a:spcPts val="300"/>
-              </a:spcAft>
-              <a:buNone/>
-            </a:pPr>
-            <a:r>
-              <a:rPr lang="en-US" sz="2400" dirty="0">
+              <a:lnSpc>
+                <a:spcPct val="125000"/>
+              </a:lnSpc>
+              <a:buNone/>
+            </a:pPr>
+            <a:r>
+              <a:rPr lang="en-US" sz="2600" dirty="0">
                 <a:solidFill>
                   <a:schemeClr val="accent1"/>
                 </a:solidFill>
@@ -7084,17 +7084,17 @@
               </a:rPr>
               <a:t>zsh-bench</a:t>
             </a:r>
-            <a:endParaRPr lang="en-US" sz="2400" dirty="0"/>
-          </a:p>
-          <a:p>
-            <a:pPr indent="0" marL="0">
-              <a:spcAft>
-                <a:spcPts val="300"/>
-              </a:spcAft>
-              <a:buNone/>
-            </a:pPr>
-            <a:r>
-              <a:rPr lang="en-US" sz="2400" dirty="0">
+            <a:endParaRPr lang="en-US" sz="2600" dirty="0"/>
+          </a:p>
+          <a:p>
+            <a:pPr indent="0" marL="0">
+              <a:lnSpc>
+                <a:spcPct val="125000"/>
+              </a:lnSpc>
+              <a:buNone/>
+            </a:pPr>
+            <a:r>
+              <a:rPr lang="en-US" sz="2600" dirty="0">
                 <a:solidFill>
                   <a:schemeClr val="accent1"/>
                 </a:solidFill>
@@ -7104,7 +7104,7 @@
               </a:rPr>
               <a:t>ps -o rss= -p $$</a:t>
             </a:r>
-            <a:endParaRPr lang="en-US" sz="2400" dirty="0"/>
+            <a:endParaRPr lang="en-US" sz="2600" dirty="0"/>
           </a:p>
         </p:txBody>
       </p:sp>
@@ -7137,14 +7137,14 @@
               <a:buChar char="•"/>
             </a:pPr>
             <a:r>
-              <a:rPr lang="en-US" sz="2200" dirty="0">
+              <a:rPr lang="en-US" sz="2600" dirty="0">
                 <a:solidFill>
                   <a:schemeClr val="accent4"/>
                 </a:solidFill>
               </a:rPr>
               <a:t>zsh-bench reports prompt, first command, Enter-to-prompt and typing delay together</a:t>
             </a:r>
-            <a:endParaRPr lang="en-US" sz="2200" dirty="0"/>
+            <a:endParaRPr lang="en-US" sz="2600" dirty="0"/>
           </a:p>
           <a:p>
             <a:pPr marL="342900" indent="-342900">
@@ -7155,14 +7155,14 @@
               <a:buChar char="•"/>
             </a:pPr>
             <a:r>
-              <a:rPr lang="en-US" sz="2200" dirty="0">
+              <a:rPr lang="en-US" sz="2600" dirty="0">
                 <a:solidFill>
                   <a:schemeClr val="accent4"/>
                 </a:solidFill>
               </a:rPr>
               <a:t>RSS in KB for the current shell</a:t>
             </a:r>
-            <a:endParaRPr lang="en-US" sz="2200" dirty="0"/>
+            <a:endParaRPr lang="en-US" sz="2600" dirty="0"/>
           </a:p>
           <a:p>
             <a:pPr marL="342900" indent="-342900">
@@ -7173,14 +7173,14 @@
               <a:buChar char="•"/>
             </a:pPr>
             <a:r>
-              <a:rPr lang="en-US" sz="2200" dirty="0">
+              <a:rPr lang="en-US" sz="2600" dirty="0">
                 <a:solidFill>
                   <a:schemeClr val="accent4"/>
                 </a:solidFill>
               </a:rPr>
               <a:t>Post your numbers as an issue</a:t>
             </a:r>
-            <a:endParaRPr lang="en-US" sz="2200" dirty="0"/>
+            <a:endParaRPr lang="en-US" sz="2600" dirty="0"/>
           </a:p>
         </p:txBody>
       </p:sp>
@@ -8764,14 +8764,14 @@
               <a:buChar char="•"/>
             </a:pPr>
             <a:r>
-              <a:rPr lang="en-US" sz="2400" dirty="0">
+              <a:rPr lang="en-US" sz="3000" dirty="0">
                 <a:solidFill>
                   <a:schemeClr val="bg2"/>
                 </a:solidFill>
               </a:rPr>
               <a:t>Fused superinstructions</a:t>
             </a:r>
-            <a:endParaRPr lang="en-US" sz="2400" dirty="0"/>
+            <a:endParaRPr lang="en-US" sz="3000" dirty="0"/>
           </a:p>
           <a:p>
             <a:pPr marL="342900" indent="-342900">
@@ -8782,14 +8782,14 @@
               <a:buChar char="•"/>
             </a:pPr>
             <a:r>
-              <a:rPr lang="en-US" sz="2400" dirty="0">
+              <a:rPr lang="en-US" sz="3000" dirty="0">
                 <a:solidFill>
                   <a:schemeClr val="bg2"/>
                 </a:solidFill>
               </a:rPr>
               <a:t>Bytecode persisted across processes in rkyv images</a:t>
             </a:r>
-            <a:endParaRPr lang="en-US" sz="2400" dirty="0"/>
+            <a:endParaRPr lang="en-US" sz="3000" dirty="0"/>
           </a:p>
           <a:p>
             <a:pPr marL="342900" indent="-342900">
@@ -8800,14 +8800,14 @@
               <a:buChar char="•"/>
             </a:pPr>
             <a:r>
-              <a:rPr lang="en-US" sz="2400" dirty="0">
+              <a:rPr lang="en-US" sz="3000" dirty="0">
                 <a:solidFill>
                   <a:schemeClr val="bg2"/>
                 </a:solidFill>
               </a:rPr>
               <a:t>x86-64 and aarch64</a:t>
             </a:r>
-            <a:endParaRPr lang="en-US" sz="2400" dirty="0"/>
+            <a:endParaRPr lang="en-US" sz="3000" dirty="0"/>
           </a:p>
         </p:txBody>
       </p:sp>
@@ -9623,11 +9623,11 @@
         <p:spPr>
           <a:xfrm>
             <a:off x="822960" y="4434840"/>
-            <a:ext cx="10515600" cy="1179576"/>
+            <a:ext cx="10515600" cy="1351280"/>
           </a:xfrm>
           <a:prstGeom prst="roundRect">
             <a:avLst>
-              <a:gd name="adj" fmla="val 9302"/>
+              <a:gd name="adj" fmla="val 8120"/>
             </a:avLst>
           </a:prstGeom>
           <a:solidFill>
@@ -9649,8 +9649,8 @@
         </p:nvSpPr>
         <p:spPr>
           <a:xfrm>
-            <a:off x="1143000" y="4636008"/>
-            <a:ext cx="9875520" cy="777240"/>
+            <a:off x="1143000" y="4663440"/>
+            <a:ext cx="9875520" cy="894080"/>
           </a:xfrm>
           <a:prstGeom prst="rect">
             <a:avLst/>
@@ -9663,13 +9663,13 @@
           <a:lstStyle/>
           <a:p>
             <a:pPr indent="0" marL="0">
-              <a:spcAft>
-                <a:spcPts val="300"/>
-              </a:spcAft>
-              <a:buNone/>
-            </a:pPr>
-            <a:r>
-              <a:rPr lang="en-US" sz="1700" dirty="0">
+              <a:lnSpc>
+                <a:spcPct val="125000"/>
+              </a:lnSpc>
+              <a:buNone/>
+            </a:pPr>
+            <a:r>
+              <a:rPr lang="en-US" sz="2200" dirty="0">
                 <a:solidFill>
                   <a:schemeClr val="accent1"/>
                 </a:solidFill>
@@ -9679,17 +9679,17 @@
               </a:rPr>
               <a:t>zshrs --prewarm-autoloads            # every dir on $fpath</a:t>
             </a:r>
-            <a:endParaRPr lang="en-US" sz="1700" dirty="0"/>
-          </a:p>
-          <a:p>
-            <a:pPr indent="0" marL="0">
-              <a:spcAft>
-                <a:spcPts val="300"/>
-              </a:spcAft>
-              <a:buNone/>
-            </a:pPr>
-            <a:r>
-              <a:rPr lang="en-US" sz="1700" dirty="0">
+            <a:endParaRPr lang="en-US" sz="2200" dirty="0"/>
+          </a:p>
+          <a:p>
+            <a:pPr indent="0" marL="0">
+              <a:lnSpc>
+                <a:spcPct val="125000"/>
+              </a:lnSpc>
+              <a:buNone/>
+            </a:pPr>
+            <a:r>
+              <a:rPr lang="en-US" sz="2200" dirty="0">
                 <a:solidFill>
                   <a:schemeClr val="accent1"/>
                 </a:solidFill>
@@ -9699,7 +9699,7 @@
               </a:rPr>
               <a:t>zshrs --prewarm-autoloads DIR ...    # just these</a:t>
             </a:r>
-            <a:endParaRPr lang="en-US" sz="1700" dirty="0"/>
+            <a:endParaRPr lang="en-US" sz="2200" dirty="0"/>
           </a:p>
         </p:txBody>
       </p:sp>
@@ -10055,11 +10055,11 @@
         <p:spPr>
           <a:xfrm>
             <a:off x="822960" y="4434840"/>
-            <a:ext cx="10515600" cy="795528"/>
+            <a:ext cx="10515600" cy="985520"/>
           </a:xfrm>
           <a:prstGeom prst="roundRect">
             <a:avLst>
-              <a:gd name="adj" fmla="val 13793"/>
+              <a:gd name="adj" fmla="val 11134"/>
             </a:avLst>
           </a:prstGeom>
           <a:solidFill>
@@ -10081,8 +10081,8 @@
         </p:nvSpPr>
         <p:spPr>
           <a:xfrm>
-            <a:off x="1143000" y="4636008"/>
-            <a:ext cx="9875520" cy="393192"/>
+            <a:off x="1143000" y="4663440"/>
+            <a:ext cx="9875520" cy="528320"/>
           </a:xfrm>
           <a:prstGeom prst="rect">
             <a:avLst/>
@@ -10095,13 +10095,13 @@
           <a:lstStyle/>
           <a:p>
             <a:pPr indent="0" marL="0">
-              <a:spcAft>
-                <a:spcPts val="300"/>
-              </a:spcAft>
-              <a:buNone/>
-            </a:pPr>
-            <a:r>
-              <a:rPr lang="en-US" sz="1700" dirty="0">
+              <a:lnSpc>
+                <a:spcPct val="125000"/>
+              </a:lnSpc>
+              <a:buNone/>
+            </a:pPr>
+            <a:r>
+              <a:rPr lang="en-US" sz="2600" dirty="0">
                 <a:solidFill>
                   <a:schemeClr val="accent1"/>
                 </a:solidFill>
@@ -10111,7 +10111,7 @@
               </a:rPr>
               <a:t>zshrs --tiers script.zsh</a:t>
             </a:r>
-            <a:endParaRPr lang="en-US" sz="1700" dirty="0"/>
+            <a:endParaRPr lang="en-US" sz="2600" dirty="0"/>
           </a:p>
         </p:txBody>
       </p:sp>
@@ -10330,14 +10330,14 @@
               <a:buChar char="•"/>
             </a:pPr>
             <a:r>
-              <a:rPr lang="en-US" sz="2400" dirty="0">
+              <a:rPr lang="en-US" sz="3000" dirty="0">
                 <a:solidFill>
                   <a:schemeClr val="bg2"/>
                 </a:solidFill>
               </a:rPr>
               <a:t>48 coreutils commands run in-process</a:t>
             </a:r>
-            <a:endParaRPr lang="en-US" sz="2400" dirty="0"/>
+            <a:endParaRPr lang="en-US" sz="3000" dirty="0"/>
           </a:p>
           <a:p>
             <a:pPr marL="342900" indent="-342900">
@@ -10348,14 +10348,14 @@
               <a:buChar char="•"/>
             </a:pPr>
             <a:r>
-              <a:rPr lang="en-US" sz="2400" dirty="0">
+              <a:rPr lang="en-US" sz="3000" dirty="0">
                 <a:solidFill>
                   <a:schemeClr val="bg2"/>
                 </a:solidFill>
               </a:rPr>
               <a:t>A cat in a pipeline never leaves the shell</a:t>
             </a:r>
-            <a:endParaRPr lang="en-US" sz="2400" dirty="0"/>
+            <a:endParaRPr lang="en-US" sz="3000" dirty="0"/>
           </a:p>
         </p:txBody>
       </p:sp>
@@ -10673,14 +10673,14 @@
               <a:buChar char="•"/>
             </a:pPr>
             <a:r>
-              <a:rPr lang="en-US" sz="2000" dirty="0">
+              <a:rPr lang="en-US" sz="3000" dirty="0">
                 <a:solidFill>
                   <a:schemeClr val="bg2"/>
                 </a:solidFill>
               </a:rPr>
               <a:t>VM dispatch ids 210 to 215</a:t>
             </a:r>
-            <a:endParaRPr lang="en-US" sz="2000" dirty="0"/>
+            <a:endParaRPr lang="en-US" sz="3000" dirty="0"/>
           </a:p>
         </p:txBody>
       </p:sp>
@@ -10792,11 +10792,11 @@
         <p:spPr>
           <a:xfrm>
             <a:off x="822960" y="4434840"/>
-            <a:ext cx="10515600" cy="1563624"/>
+            <a:ext cx="10515600" cy="2042160"/>
           </a:xfrm>
           <a:prstGeom prst="roundRect">
             <a:avLst>
-              <a:gd name="adj" fmla="val 7018"/>
+              <a:gd name="adj" fmla="val 5373"/>
             </a:avLst>
           </a:prstGeom>
           <a:solidFill>
@@ -10818,8 +10818,8 @@
         </p:nvSpPr>
         <p:spPr>
           <a:xfrm>
-            <a:off x="1143000" y="4636008"/>
-            <a:ext cx="9875520" cy="1161288"/>
+            <a:off x="1143000" y="4663440"/>
+            <a:ext cx="9875520" cy="1584960"/>
           </a:xfrm>
           <a:prstGeom prst="rect">
             <a:avLst/>
@@ -10832,13 +10832,13 @@
           <a:lstStyle/>
           <a:p>
             <a:pPr indent="0" marL="0">
-              <a:spcAft>
-                <a:spcPts val="300"/>
-              </a:spcAft>
-              <a:buNone/>
-            </a:pPr>
-            <a:r>
-              <a:rPr lang="en-US" sz="1700" dirty="0">
+              <a:lnSpc>
+                <a:spcPct val="125000"/>
+              </a:lnSpc>
+              <a:buNone/>
+            </a:pPr>
+            <a:r>
+              <a:rPr lang="en-US" sz="2600" dirty="0">
                 <a:solidFill>
                   <a:schemeClr val="accent1"/>
                 </a:solidFill>
@@ -10848,17 +10848,17 @@
               </a:rPr>
               <a:t>pmap 'gzip {}' *.log</a:t>
             </a:r>
-            <a:endParaRPr lang="en-US" sz="1700" dirty="0"/>
-          </a:p>
-          <a:p>
-            <a:pPr indent="0" marL="0">
-              <a:spcAft>
-                <a:spcPts val="300"/>
-              </a:spcAft>
-              <a:buNone/>
-            </a:pPr>
-            <a:r>
-              <a:rPr lang="en-US" sz="1700" dirty="0">
+            <a:endParaRPr lang="en-US" sz="2600" dirty="0"/>
+          </a:p>
+          <a:p>
+            <a:pPr indent="0" marL="0">
+              <a:lnSpc>
+                <a:spcPct val="125000"/>
+              </a:lnSpc>
+              <a:buNone/>
+            </a:pPr>
+            <a:r>
+              <a:rPr lang="en-US" sz="2600" dirty="0">
                 <a:solidFill>
                   <a:schemeClr val="accent1"/>
                 </a:solidFill>
@@ -10868,17 +10868,17 @@
               </a:rPr>
               <a:t>pgrep 'grep -q TODO {}' **/*.rs</a:t>
             </a:r>
-            <a:endParaRPr lang="en-US" sz="1700" dirty="0"/>
-          </a:p>
-          <a:p>
-            <a:pPr indent="0" marL="0">
-              <a:spcAft>
-                <a:spcPts val="300"/>
-              </a:spcAft>
-              <a:buNone/>
-            </a:pPr>
-            <a:r>
-              <a:rPr lang="en-US" sz="1700" dirty="0">
+            <a:endParaRPr lang="en-US" sz="2600" dirty="0"/>
+          </a:p>
+          <a:p>
+            <a:pPr indent="0" marL="0">
+              <a:lnSpc>
+                <a:spcPct val="125000"/>
+              </a:lnSpc>
+              <a:buNone/>
+            </a:pPr>
+            <a:r>
+              <a:rPr lang="en-US" sz="2600" dirty="0">
                 <a:solidFill>
                   <a:schemeClr val="accent1"/>
                 </a:solidFill>
@@ -10888,7 +10888,7 @@
               </a:rPr>
               <a:t>barrier 'npm test' ::: 'cargo test' ::: 'pytest'</a:t>
             </a:r>
-            <a:endParaRPr lang="en-US" sz="1700" dirty="0"/>
+            <a:endParaRPr lang="en-US" sz="2600" dirty="0"/>
           </a:p>
         </p:txBody>
       </p:sp>
@@ -12802,7 +12802,7 @@
               <a:buNone/>
             </a:pPr>
             <a:r>
-              <a:rPr lang="en-US" sz="2200" b="1" dirty="0">
+              <a:rPr lang="en-US" sz="2500" b="1" dirty="0">
                 <a:solidFill>
                   <a:schemeClr val="accent2"/>
                 </a:solidFill>
@@ -12812,7 +12812,7 @@
               </a:rPr>
               <a:t>1  Try it</a:t>
             </a:r>
-            <a:endParaRPr lang="en-US" sz="2200" dirty="0"/>
+            <a:endParaRPr lang="en-US" sz="2500" dirty="0"/>
           </a:p>
         </p:txBody>
       </p:sp>
@@ -12825,7 +12825,7 @@
         <p:spPr>
           <a:xfrm>
             <a:off x="1097280" y="2651760"/>
-            <a:ext cx="1965960" cy="2103120"/>
+            <a:ext cx="1965960" cy="2057400"/>
           </a:xfrm>
           <a:prstGeom prst="rect">
             <a:avLst/>
@@ -12839,38 +12839,38 @@
           <a:p>
             <a:pPr marL="342900" indent="-342900">
               <a:spcAft>
-                <a:spcPts val="1000"/>
+                <a:spcPts val="800"/>
               </a:spcAft>
               <a:buSzPct val="100000"/>
               <a:buChar char="•"/>
             </a:pPr>
             <a:r>
-              <a:rPr lang="en-US" sz="1700" dirty="0">
+              <a:rPr lang="en-US" sz="2100" dirty="0">
                 <a:solidFill>
                   <a:schemeClr val="accent4"/>
                 </a:solidFill>
               </a:rPr>
               <a:t>Install in two commands</a:t>
             </a:r>
-            <a:endParaRPr lang="en-US" sz="1700" dirty="0"/>
+            <a:endParaRPr lang="en-US" sz="2100" dirty="0"/>
           </a:p>
           <a:p>
             <a:pPr marL="342900" indent="-342900">
               <a:spcAft>
-                <a:spcPts val="1000"/>
+                <a:spcPts val="800"/>
               </a:spcAft>
               <a:buSzPct val="100000"/>
               <a:buChar char="•"/>
             </a:pPr>
             <a:r>
-              <a:rPr lang="en-US" sz="1700" dirty="0">
+              <a:rPr lang="en-US" sz="2100" dirty="0">
                 <a:solidFill>
                   <a:schemeClr val="accent4"/>
                 </a:solidFill>
               </a:rPr>
               <a:t>Follow along live</a:t>
             </a:r>
-            <a:endParaRPr lang="en-US" sz="1700" dirty="0"/>
+            <a:endParaRPr lang="en-US" sz="2100" dirty="0"/>
           </a:p>
         </p:txBody>
       </p:sp>
@@ -12926,7 +12926,7 @@
               <a:buNone/>
             </a:pPr>
             <a:r>
-              <a:rPr lang="en-US" sz="2200" b="1" dirty="0">
+              <a:rPr lang="en-US" sz="2500" b="1" dirty="0">
                 <a:solidFill>
                   <a:schemeClr val="accent2"/>
                 </a:solidFill>
@@ -12936,7 +12936,7 @@
               </a:rPr>
               <a:t>2  Parity</a:t>
             </a:r>
-            <a:endParaRPr lang="en-US" sz="2200" dirty="0"/>
+            <a:endParaRPr lang="en-US" sz="2500" dirty="0"/>
           </a:p>
         </p:txBody>
       </p:sp>
@@ -12949,7 +12949,7 @@
         <p:spPr>
           <a:xfrm>
             <a:off x="3794760" y="2651760"/>
-            <a:ext cx="1965960" cy="2103120"/>
+            <a:ext cx="1965960" cy="2057400"/>
           </a:xfrm>
           <a:prstGeom prst="rect">
             <a:avLst/>
@@ -12963,38 +12963,38 @@
           <a:p>
             <a:pPr marL="342900" indent="-342900">
               <a:spcAft>
-                <a:spcPts val="1000"/>
+                <a:spcPts val="800"/>
               </a:spcAft>
               <a:buSzPct val="100000"/>
               <a:buChar char="•"/>
             </a:pPr>
             <a:r>
-              <a:rPr lang="en-US" sz="1700" dirty="0">
+              <a:rPr lang="en-US" sz="2100" dirty="0">
                 <a:solidFill>
                   <a:schemeClr val="accent4"/>
                 </a:solidFill>
               </a:rPr>
               <a:t>Where the port stands</a:t>
             </a:r>
-            <a:endParaRPr lang="en-US" sz="1700" dirty="0"/>
+            <a:endParaRPr lang="en-US" sz="2100" dirty="0"/>
           </a:p>
           <a:p>
             <a:pPr marL="342900" indent="-342900">
               <a:spcAft>
-                <a:spcPts val="1000"/>
+                <a:spcPts val="800"/>
               </a:spcAft>
               <a:buSzPct val="100000"/>
               <a:buChar char="•"/>
             </a:pPr>
             <a:r>
-              <a:rPr lang="en-US" sz="1700" dirty="0">
+              <a:rPr lang="en-US" sz="2100" dirty="0">
                 <a:solidFill>
                   <a:schemeClr val="accent4"/>
                 </a:solidFill>
               </a:rPr>
               <a:t>How it is measured</a:t>
             </a:r>
-            <a:endParaRPr lang="en-US" sz="1700" dirty="0"/>
+            <a:endParaRPr lang="en-US" sz="2100" dirty="0"/>
           </a:p>
         </p:txBody>
       </p:sp>
@@ -13050,7 +13050,7 @@
               <a:buNone/>
             </a:pPr>
             <a:r>
-              <a:rPr lang="en-US" sz="2200" b="1" dirty="0">
+              <a:rPr lang="en-US" sz="1500" b="1" dirty="0">
                 <a:solidFill>
                   <a:schemeClr val="accent2"/>
                 </a:solidFill>
@@ -13060,7 +13060,7 @@
               </a:rPr>
               <a:t>3  Get involved</a:t>
             </a:r>
-            <a:endParaRPr lang="en-US" sz="2200" dirty="0"/>
+            <a:endParaRPr lang="en-US" sz="1500" dirty="0"/>
           </a:p>
         </p:txBody>
       </p:sp>
@@ -13073,7 +13073,7 @@
         <p:spPr>
           <a:xfrm>
             <a:off x="6492240" y="2651760"/>
-            <a:ext cx="1965960" cy="2103120"/>
+            <a:ext cx="1965960" cy="2057400"/>
           </a:xfrm>
           <a:prstGeom prst="rect">
             <a:avLst/>
@@ -13087,38 +13087,38 @@
           <a:p>
             <a:pPr marL="342900" indent="-342900">
               <a:spcAft>
-                <a:spcPts val="1000"/>
+                <a:spcPts val="800"/>
               </a:spcAft>
               <a:buSzPct val="100000"/>
               <a:buChar char="•"/>
             </a:pPr>
             <a:r>
-              <a:rPr lang="en-US" sz="1700" dirty="0">
+              <a:rPr lang="en-US" sz="2300" dirty="0">
                 <a:solidFill>
                   <a:schemeClr val="accent4"/>
                 </a:solidFill>
               </a:rPr>
               <a:t>Five ways to help</a:t>
             </a:r>
-            <a:endParaRPr lang="en-US" sz="1700" dirty="0"/>
+            <a:endParaRPr lang="en-US" sz="2300" dirty="0"/>
           </a:p>
           <a:p>
             <a:pPr marL="342900" indent="-342900">
               <a:spcAft>
-                <a:spcPts val="1000"/>
+                <a:spcPts val="800"/>
               </a:spcAft>
               <a:buSzPct val="100000"/>
               <a:buChar char="•"/>
             </a:pPr>
             <a:r>
-              <a:rPr lang="en-US" sz="1700" dirty="0">
+              <a:rPr lang="en-US" sz="2300" dirty="0">
                 <a:solidFill>
                   <a:schemeClr val="accent4"/>
                 </a:solidFill>
               </a:rPr>
               <a:t>Where to look</a:t>
             </a:r>
-            <a:endParaRPr lang="en-US" sz="1700" dirty="0"/>
+            <a:endParaRPr lang="en-US" sz="2300" dirty="0"/>
           </a:p>
         </p:txBody>
       </p:sp>
@@ -13174,7 +13174,7 @@
               <a:buNone/>
             </a:pPr>
             <a:r>
-              <a:rPr lang="en-US" sz="2200" b="1" dirty="0">
+              <a:rPr lang="en-US" sz="1600" b="1" dirty="0">
                 <a:solidFill>
                   <a:schemeClr val="accent2"/>
                 </a:solidFill>
@@ -13184,7 +13184,7 @@
               </a:rPr>
               <a:t>4  The goodies</a:t>
             </a:r>
-            <a:endParaRPr lang="en-US" sz="2200" dirty="0"/>
+            <a:endParaRPr lang="en-US" sz="1600" dirty="0"/>
           </a:p>
         </p:txBody>
       </p:sp>
@@ -13197,7 +13197,7 @@
         <p:spPr>
           <a:xfrm>
             <a:off x="9189720" y="2651760"/>
-            <a:ext cx="1965960" cy="2103120"/>
+            <a:ext cx="1965960" cy="2057400"/>
           </a:xfrm>
           <a:prstGeom prst="rect">
             <a:avLst/>
@@ -13211,38 +13211,38 @@
           <a:p>
             <a:pPr marL="342900" indent="-342900">
               <a:spcAft>
-                <a:spcPts val="1000"/>
+                <a:spcPts val="800"/>
               </a:spcAft>
               <a:buSzPct val="100000"/>
               <a:buChar char="•"/>
             </a:pPr>
             <a:r>
-              <a:rPr lang="en-US" sz="1700" dirty="0">
+              <a:rPr lang="en-US" sz="2300" dirty="0">
                 <a:solidFill>
                   <a:schemeClr val="accent4"/>
                 </a:solidFill>
               </a:rPr>
               <a:t>Nine areas</a:t>
             </a:r>
-            <a:endParaRPr lang="en-US" sz="1700" dirty="0"/>
+            <a:endParaRPr lang="en-US" sz="2300" dirty="0"/>
           </a:p>
           <a:p>
             <a:pPr marL="342900" indent="-342900">
               <a:spcAft>
-                <a:spcPts val="1000"/>
+                <a:spcPts val="800"/>
               </a:spcAft>
               <a:buSzPct val="100000"/>
               <a:buChar char="•"/>
             </a:pPr>
             <a:r>
-              <a:rPr lang="en-US" sz="1700" dirty="0">
+              <a:rPr lang="en-US" sz="2300" dirty="0">
                 <a:solidFill>
                   <a:schemeClr val="accent4"/>
                 </a:solidFill>
               </a:rPr>
               <a:t>One slide per goodie</a:t>
             </a:r>
-            <a:endParaRPr lang="en-US" sz="1700" dirty="0"/>
+            <a:endParaRPr lang="en-US" sz="2300" dirty="0"/>
           </a:p>
         </p:txBody>
       </p:sp>
@@ -13461,14 +13461,14 @@
               <a:buChar char="•"/>
             </a:pPr>
             <a:r>
-              <a:rPr lang="en-US" sz="2400" dirty="0">
+              <a:rPr lang="en-US" sz="3000" dirty="0">
                 <a:solidFill>
                   <a:schemeClr val="accent4"/>
                 </a:solidFill>
               </a:rPr>
               <a:t>replay/ holds the non-deterministic .zshrc fragments</a:t>
             </a:r>
-            <a:endParaRPr lang="en-US" sz="2400" dirty="0"/>
+            <a:endParaRPr lang="en-US" sz="3000" dirty="0"/>
           </a:p>
           <a:p>
             <a:pPr marL="342900" indent="-342900">
@@ -13479,14 +13479,14 @@
               <a:buChar char="•"/>
             </a:pPr>
             <a:r>
-              <a:rPr lang="en-US" sz="2400" dirty="0">
+              <a:rPr lang="en-US" sz="3000" dirty="0">
                 <a:solidFill>
                   <a:schemeClr val="accent4"/>
                 </a:solidFill>
               </a:rPr>
               <a:t>The rest is replayed</a:t>
             </a:r>
-            <a:endParaRPr lang="en-US" sz="2400" dirty="0"/>
+            <a:endParaRPr lang="en-US" sz="3000" dirty="0"/>
           </a:p>
         </p:txBody>
       </p:sp>
@@ -13804,14 +13804,14 @@
               <a:buChar char="•"/>
             </a:pPr>
             <a:r>
-              <a:rPr lang="en-US" sz="2000" dirty="0">
+              <a:rPr lang="en-US" sz="2500" dirty="0">
                 <a:solidFill>
                   <a:schemeClr val="accent4"/>
                 </a:solidFill>
               </a:rPr>
               <a:t>No shared writer, no auto-spawn</a:t>
             </a:r>
-            <a:endParaRPr lang="en-US" sz="2000" dirty="0"/>
+            <a:endParaRPr lang="en-US" sz="2500" dirty="0"/>
           </a:p>
           <a:p>
             <a:pPr marL="342900" indent="-342900">
@@ -13822,14 +13822,14 @@
               <a:buChar char="•"/>
             </a:pPr>
             <a:r>
-              <a:rPr lang="en-US" sz="2000" dirty="0">
+              <a:rPr lang="en-US" sz="2500" dirty="0">
                 <a:solidFill>
                   <a:schemeClr val="accent4"/>
                 </a:solidFill>
               </a:rPr>
               <a:t>Shells read caches by mmap</a:t>
             </a:r>
-            <a:endParaRPr lang="en-US" sz="2000" dirty="0"/>
+            <a:endParaRPr lang="en-US" sz="2500" dirty="0"/>
           </a:p>
         </p:txBody>
       </p:sp>
@@ -13941,11 +13941,11 @@
         <p:spPr>
           <a:xfrm>
             <a:off x="822960" y="4434840"/>
-            <a:ext cx="10515600" cy="1563624"/>
+            <a:ext cx="10515600" cy="1920240"/>
           </a:xfrm>
           <a:prstGeom prst="roundRect">
             <a:avLst>
-              <a:gd name="adj" fmla="val 7018"/>
+              <a:gd name="adj" fmla="val 5714"/>
             </a:avLst>
           </a:prstGeom>
           <a:solidFill>
@@ -13967,8 +13967,8 @@
         </p:nvSpPr>
         <p:spPr>
           <a:xfrm>
-            <a:off x="1143000" y="4636008"/>
-            <a:ext cx="9875520" cy="1161288"/>
+            <a:off x="1143000" y="4663440"/>
+            <a:ext cx="9875520" cy="1463040"/>
           </a:xfrm>
           <a:prstGeom prst="rect">
             <a:avLst/>
@@ -13981,13 +13981,13 @@
           <a:lstStyle/>
           <a:p>
             <a:pPr indent="0" marL="0">
-              <a:spcAft>
-                <a:spcPts val="300"/>
-              </a:spcAft>
-              <a:buNone/>
-            </a:pPr>
-            <a:r>
-              <a:rPr lang="en-US" sz="1700" dirty="0">
+              <a:lnSpc>
+                <a:spcPct val="125000"/>
+              </a:lnSpc>
+              <a:buNone/>
+            </a:pPr>
+            <a:r>
+              <a:rPr lang="en-US" sz="2400" dirty="0">
                 <a:solidFill>
                   <a:schemeClr val="accent1"/>
                 </a:solidFill>
@@ -13997,17 +13997,17 @@
               </a:rPr>
               <a:t>zd daemon status</a:t>
             </a:r>
-            <a:endParaRPr lang="en-US" sz="1700" dirty="0"/>
-          </a:p>
-          <a:p>
-            <a:pPr indent="0" marL="0">
-              <a:spcAft>
-                <a:spcPts val="300"/>
-              </a:spcAft>
-              <a:buNone/>
-            </a:pPr>
-            <a:r>
-              <a:rPr lang="en-US" sz="1700" dirty="0">
+            <a:endParaRPr lang="en-US" sz="2400" dirty="0"/>
+          </a:p>
+          <a:p>
+            <a:pPr indent="0" marL="0">
+              <a:lnSpc>
+                <a:spcPct val="125000"/>
+              </a:lnSpc>
+              <a:buNone/>
+            </a:pPr>
+            <a:r>
+              <a:rPr lang="en-US" sz="2400" dirty="0">
                 <a:solidFill>
                   <a:schemeClr val="accent1"/>
                 </a:solidFill>
@@ -14017,17 +14017,17 @@
               </a:rPr>
               <a:t>zd daemon start     # idempotent</a:t>
             </a:r>
-            <a:endParaRPr lang="en-US" sz="1700" dirty="0"/>
-          </a:p>
-          <a:p>
-            <a:pPr indent="0" marL="0">
-              <a:spcAft>
-                <a:spcPts val="300"/>
-              </a:spcAft>
-              <a:buNone/>
-            </a:pPr>
-            <a:r>
-              <a:rPr lang="en-US" sz="1700" dirty="0">
+            <a:endParaRPr lang="en-US" sz="2400" dirty="0"/>
+          </a:p>
+          <a:p>
+            <a:pPr indent="0" marL="0">
+              <a:lnSpc>
+                <a:spcPct val="125000"/>
+              </a:lnSpc>
+              <a:buNone/>
+            </a:pPr>
+            <a:r>
+              <a:rPr lang="en-US" sz="2400" dirty="0">
                 <a:solidFill>
                   <a:schemeClr val="accent1"/>
                 </a:solidFill>
@@ -14037,7 +14037,7 @@
               </a:rPr>
               <a:t>zd daemon stop      # returns once the socket is gone</a:t>
             </a:r>
-            <a:endParaRPr lang="en-US" sz="1700" dirty="0"/>
+            <a:endParaRPr lang="en-US" sz="2400" dirty="0"/>
           </a:p>
         </p:txBody>
       </p:sp>
@@ -14256,14 +14256,14 @@
               <a:buChar char="•"/>
             </a:pPr>
             <a:r>
-              <a:rPr lang="en-US" sz="2400" dirty="0">
+              <a:rPr lang="en-US" sz="2500" dirty="0">
                 <a:solidFill>
                   <a:schemeClr val="accent4"/>
                 </a:solidFill>
               </a:rPr>
               <a:t>Attach puts your terminal in raw mode and forwards SIGWINCH</a:t>
             </a:r>
-            <a:endParaRPr lang="en-US" sz="2400" dirty="0"/>
+            <a:endParaRPr lang="en-US" sz="2500" dirty="0"/>
           </a:p>
           <a:p>
             <a:pPr marL="342900" indent="-342900">
@@ -14274,14 +14274,14 @@
               <a:buChar char="•"/>
             </a:pPr>
             <a:r>
-              <a:rPr lang="en-US" sz="2400" dirty="0">
+              <a:rPr lang="en-US" sz="2500" dirty="0">
                 <a:solidFill>
                   <a:schemeClr val="accent4"/>
                 </a:solidFill>
               </a:rPr>
               <a:t>Detach with Ctrl-]</a:t>
             </a:r>
-            <a:endParaRPr lang="en-US" sz="2400" dirty="0"/>
+            <a:endParaRPr lang="en-US" sz="2500" dirty="0"/>
           </a:p>
           <a:p>
             <a:pPr marL="342900" indent="-342900">
@@ -14292,14 +14292,14 @@
               <a:buChar char="•"/>
             </a:pPr>
             <a:r>
-              <a:rPr lang="en-US" sz="2400" dirty="0">
+              <a:rPr lang="en-US" sz="2500" dirty="0">
                 <a:solidFill>
                   <a:schemeClr val="accent4"/>
                 </a:solidFill>
               </a:rPr>
               <a:t>Solves a background job blocked on a prompt you cannot see</a:t>
             </a:r>
-            <a:endParaRPr lang="en-US" sz="2400" dirty="0"/>
+            <a:endParaRPr lang="en-US" sz="2500" dirty="0"/>
           </a:p>
         </p:txBody>
       </p:sp>
@@ -14617,14 +14617,14 @@
               <a:buChar char="•"/>
             </a:pPr>
             <a:r>
-              <a:rPr lang="en-US" sz="2400" dirty="0">
+              <a:rPr lang="en-US" sz="3000" dirty="0">
                 <a:solidFill>
                   <a:schemeClr val="accent4"/>
                 </a:solidFill>
               </a:rPr>
               <a:t>Release requires the original token</a:t>
             </a:r>
-            <a:endParaRPr lang="en-US" sz="2400" dirty="0"/>
+            <a:endParaRPr lang="en-US" sz="3000" dirty="0"/>
           </a:p>
           <a:p>
             <a:pPr marL="342900" indent="-342900">
@@ -14635,14 +14635,14 @@
               <a:buChar char="•"/>
             </a:pPr>
             <a:r>
-              <a:rPr lang="en-US" sz="2400" dirty="0">
+              <a:rPr lang="en-US" sz="3000" dirty="0">
                 <a:solidFill>
                   <a:schemeClr val="accent4"/>
                 </a:solidFill>
               </a:rPr>
               <a:t>A dead shell cannot free someone else's lock</a:t>
             </a:r>
-            <a:endParaRPr lang="en-US" sz="2400" dirty="0"/>
+            <a:endParaRPr lang="en-US" sz="3000" dirty="0"/>
           </a:p>
         </p:txBody>
       </p:sp>
@@ -16269,11 +16269,11 @@
         <p:spPr>
           <a:xfrm>
             <a:off x="822960" y="1737360"/>
-            <a:ext cx="5303520" cy="3429000"/>
+            <a:ext cx="5303520" cy="3627120"/>
           </a:xfrm>
           <a:prstGeom prst="roundRect">
             <a:avLst>
-              <a:gd name="adj" fmla="val 3200"/>
+              <a:gd name="adj" fmla="val 3025"/>
             </a:avLst>
           </a:prstGeom>
           <a:solidFill>
@@ -16295,8 +16295,8 @@
         </p:nvSpPr>
         <p:spPr>
           <a:xfrm>
-            <a:off x="1143000" y="1938528"/>
-            <a:ext cx="4663440" cy="3026664"/>
+            <a:off x="1143000" y="1965960"/>
+            <a:ext cx="4663440" cy="3169920"/>
           </a:xfrm>
           <a:prstGeom prst="rect">
             <a:avLst/>
@@ -16309,13 +16309,13 @@
           <a:lstStyle/>
           <a:p>
             <a:pPr indent="0" marL="0">
-              <a:spcAft>
-                <a:spcPts val="300"/>
-              </a:spcAft>
-              <a:buNone/>
-            </a:pPr>
-            <a:r>
-              <a:rPr lang="en-US" sz="2000" dirty="0">
+              <a:lnSpc>
+                <a:spcPct val="125000"/>
+              </a:lnSpc>
+              <a:buNone/>
+            </a:pPr>
+            <a:r>
+              <a:rPr lang="en-US" sz="2600" dirty="0">
                 <a:solidFill>
                   <a:schemeClr val="accent5"/>
                 </a:solidFill>
@@ -16325,17 +16325,17 @@
               </a:rPr>
               <a:t># ~/.zshrs/zshrs.toml</a:t>
             </a:r>
-            <a:endParaRPr lang="en-US" sz="2000" dirty="0"/>
-          </a:p>
-          <a:p>
-            <a:pPr indent="0" marL="0">
-              <a:spcAft>
-                <a:spcPts val="300"/>
-              </a:spcAft>
-              <a:buNone/>
-            </a:pPr>
-            <a:r>
-              <a:rPr lang="en-US" sz="2000" dirty="0">
+            <a:endParaRPr lang="en-US" sz="2600" dirty="0"/>
+          </a:p>
+          <a:p>
+            <a:pPr indent="0" marL="0">
+              <a:lnSpc>
+                <a:spcPct val="125000"/>
+              </a:lnSpc>
+              <a:buNone/>
+            </a:pPr>
+            <a:r>
+              <a:rPr lang="en-US" sz="2600" dirty="0">
                 <a:solidFill>
                   <a:schemeClr val="accent3"/>
                 </a:solidFill>
@@ -16345,17 +16345,17 @@
               </a:rPr>
               <a:t>[zle]</a:t>
             </a:r>
-            <a:endParaRPr lang="en-US" sz="2000" dirty="0"/>
-          </a:p>
-          <a:p>
-            <a:pPr indent="0" marL="0">
-              <a:spcAft>
-                <a:spcPts val="300"/>
-              </a:spcAft>
-              <a:buNone/>
-            </a:pPr>
-            <a:r>
-              <a:rPr lang="en-US" sz="2000" dirty="0">
+            <a:endParaRPr lang="en-US" sz="2600" dirty="0"/>
+          </a:p>
+          <a:p>
+            <a:pPr indent="0" marL="0">
+              <a:lnSpc>
+                <a:spcPct val="125000"/>
+              </a:lnSpc>
+              <a:buNone/>
+            </a:pPr>
+            <a:r>
+              <a:rPr lang="en-US" sz="2600" dirty="0">
                 <a:solidFill>
                   <a:schemeClr val="accent1"/>
                 </a:solidFill>
@@ -16365,17 +16365,17 @@
               </a:rPr>
               <a:t>autosuggest = true</a:t>
             </a:r>
-            <a:endParaRPr lang="en-US" sz="2000" dirty="0"/>
-          </a:p>
-          <a:p>
-            <a:pPr indent="0" marL="0">
-              <a:spcAft>
-                <a:spcPts val="300"/>
-              </a:spcAft>
-              <a:buNone/>
-            </a:pPr>
-            <a:r>
-              <a:rPr lang="en-US" sz="2000" dirty="0">
+            <a:endParaRPr lang="en-US" sz="2600" dirty="0"/>
+          </a:p>
+          <a:p>
+            <a:pPr indent="0" marL="0">
+              <a:lnSpc>
+                <a:spcPct val="125000"/>
+              </a:lnSpc>
+              <a:buNone/>
+            </a:pPr>
+            <a:r>
+              <a:rPr lang="en-US" sz="2600" dirty="0">
                 <a:solidFill>
                   <a:schemeClr val="accent1"/>
                 </a:solidFill>
@@ -16385,17 +16385,17 @@
               </a:rPr>
               <a:t>syntax_highlight = true</a:t>
             </a:r>
-            <a:endParaRPr lang="en-US" sz="2000" dirty="0"/>
-          </a:p>
-          <a:p>
-            <a:pPr indent="0" marL="0">
-              <a:spcAft>
-                <a:spcPts val="300"/>
-              </a:spcAft>
-              <a:buNone/>
-            </a:pPr>
-            <a:r>
-              <a:rPr lang="en-US" sz="2000" dirty="0">
+            <a:endParaRPr lang="en-US" sz="2600" dirty="0"/>
+          </a:p>
+          <a:p>
+            <a:pPr indent="0" marL="0">
+              <a:lnSpc>
+                <a:spcPct val="125000"/>
+              </a:lnSpc>
+              <a:buNone/>
+            </a:pPr>
+            <a:r>
+              <a:rPr lang="en-US" sz="2600" dirty="0">
                 <a:solidFill>
                   <a:schemeClr val="accent1"/>
                 </a:solidFill>
@@ -16405,17 +16405,17 @@
               </a:rPr>
               <a:t>history_search = true</a:t>
             </a:r>
-            <a:endParaRPr lang="en-US" sz="2000" dirty="0"/>
-          </a:p>
-          <a:p>
-            <a:pPr indent="0" marL="0">
-              <a:spcAft>
-                <a:spcPts val="300"/>
-              </a:spcAft>
-              <a:buNone/>
-            </a:pPr>
-            <a:r>
-              <a:rPr lang="en-US" sz="2000" dirty="0">
+            <a:endParaRPr lang="en-US" sz="2600" dirty="0"/>
+          </a:p>
+          <a:p>
+            <a:pPr indent="0" marL="0">
+              <a:lnSpc>
+                <a:spcPct val="125000"/>
+              </a:lnSpc>
+              <a:buNone/>
+            </a:pPr>
+            <a:r>
+              <a:rPr lang="en-US" sz="2600" dirty="0">
                 <a:solidFill>
                   <a:schemeClr val="accent1"/>
                 </a:solidFill>
@@ -16425,7 +16425,7 @@
               </a:rPr>
               <a:t>autopair = true</a:t>
             </a:r>
-            <a:endParaRPr lang="en-US" sz="2000" dirty="0"/>
+            <a:endParaRPr lang="en-US" sz="2600" dirty="0"/>
           </a:p>
         </p:txBody>
       </p:sp>
@@ -16481,7 +16481,7 @@
               <a:buNone/>
             </a:pPr>
             <a:r>
-              <a:rPr lang="en-US" sz="2200" b="1" dirty="0">
+              <a:rPr lang="en-US" sz="2600" b="1" dirty="0">
                 <a:solidFill>
                   <a:schemeClr val="accent1"/>
                 </a:solidFill>
@@ -16491,7 +16491,7 @@
               </a:rPr>
               <a:t>Switches</a:t>
             </a:r>
-            <a:endParaRPr lang="en-US" sz="2200" dirty="0"/>
+            <a:endParaRPr lang="en-US" sz="2600" dirty="0"/>
           </a:p>
         </p:txBody>
       </p:sp>
@@ -16504,7 +16504,7 @@
         <p:spPr>
           <a:xfrm>
             <a:off x="6675120" y="2560320"/>
-            <a:ext cx="4389120" cy="2926080"/>
+            <a:ext cx="4389120" cy="2880360"/>
           </a:xfrm>
           <a:prstGeom prst="rect">
             <a:avLst/>
@@ -16518,74 +16518,74 @@
           <a:p>
             <a:pPr marL="342900" indent="-342900">
               <a:spcAft>
-                <a:spcPts val="1000"/>
+                <a:spcPts val="800"/>
               </a:spcAft>
               <a:buSzPct val="100000"/>
               <a:buChar char="•"/>
             </a:pPr>
             <a:r>
-              <a:rPr lang="en-US" sz="2200" dirty="0">
+              <a:rPr lang="en-US" sz="1900" dirty="0">
                 <a:solidFill>
                   <a:schemeClr val="bg2"/>
                 </a:solidFill>
               </a:rPr>
               <a:t>Per feature: set false to opt out</a:t>
             </a:r>
-            <a:endParaRPr lang="en-US" sz="2200" dirty="0"/>
+            <a:endParaRPr lang="en-US" sz="1900" dirty="0"/>
           </a:p>
           <a:p>
             <a:pPr marL="342900" indent="-342900">
               <a:spcAft>
-                <a:spcPts val="1000"/>
+                <a:spcPts val="800"/>
               </a:spcAft>
               <a:buSzPct val="100000"/>
               <a:buChar char="•"/>
             </a:pPr>
             <a:r>
-              <a:rPr lang="en-US" sz="2200" dirty="0">
+              <a:rPr lang="en-US" sz="1900" dirty="0">
                 <a:solidFill>
                   <a:schemeClr val="bg2"/>
                 </a:solidFill>
               </a:rPr>
               <a:t>ZSHRS_NATIVE_ZLE_FX=0 disables all</a:t>
             </a:r>
-            <a:endParaRPr lang="en-US" sz="2200" dirty="0"/>
+            <a:endParaRPr lang="en-US" sz="1900" dirty="0"/>
           </a:p>
           <a:p>
             <a:pPr marL="342900" indent="-342900">
               <a:spcAft>
-                <a:spcPts val="1000"/>
+                <a:spcPts val="800"/>
               </a:spcAft>
               <a:buSzPct val="100000"/>
               <a:buChar char="•"/>
             </a:pPr>
             <a:r>
-              <a:rPr lang="en-US" sz="2200" dirty="0">
+              <a:rPr lang="en-US" sz="1900" dirty="0">
                 <a:solidFill>
                   <a:schemeClr val="bg2"/>
                 </a:solidFill>
               </a:rPr>
               <a:t>Bare zshrs -f stays identical to zsh -f</a:t>
             </a:r>
-            <a:endParaRPr lang="en-US" sz="2200" dirty="0"/>
+            <a:endParaRPr lang="en-US" sz="1900" dirty="0"/>
           </a:p>
           <a:p>
             <a:pPr marL="342900" indent="-342900">
               <a:spcAft>
-                <a:spcPts val="1000"/>
+                <a:spcPts val="800"/>
               </a:spcAft>
               <a:buSzPct val="100000"/>
               <a:buChar char="•"/>
             </a:pPr>
             <a:r>
-              <a:rPr lang="en-US" sz="2200" dirty="0">
+              <a:rPr lang="en-US" sz="1900" dirty="0">
                 <a:solidFill>
                   <a:schemeClr val="bg2"/>
                 </a:solidFill>
               </a:rPr>
               <a:t>193 ZLE widgets registered</a:t>
             </a:r>
-            <a:endParaRPr lang="en-US" sz="2200" dirty="0"/>
+            <a:endParaRPr lang="en-US" sz="1900" dirty="0"/>
           </a:p>
         </p:txBody>
       </p:sp>
@@ -16791,7 +16791,7 @@
               <a:buNone/>
             </a:pPr>
             <a:r>
-              <a:rPr lang="en-US" sz="2200" b="1" dirty="0">
+              <a:rPr lang="en-US" sz="2500" b="1" dirty="0">
                 <a:solidFill>
                   <a:schemeClr val="accent1"/>
                 </a:solidFill>
@@ -16801,7 +16801,7 @@
               </a:rPr>
               <a:t>highlight</a:t>
             </a:r>
-            <a:endParaRPr lang="en-US" sz="2200" dirty="0"/>
+            <a:endParaRPr lang="en-US" sz="2500" dirty="0"/>
           </a:p>
         </p:txBody>
       </p:sp>
@@ -16814,7 +16814,7 @@
         <p:spPr>
           <a:xfrm>
             <a:off x="1097280" y="2560320"/>
-            <a:ext cx="1965960" cy="2834640"/>
+            <a:ext cx="1965960" cy="2788920"/>
           </a:xfrm>
           <a:prstGeom prst="rect">
             <a:avLst/>
@@ -16830,14 +16830,14 @@
               <a:buNone/>
             </a:pPr>
             <a:r>
-              <a:rPr lang="en-US" sz="1700" dirty="0">
-                <a:solidFill>
-                  <a:schemeClr val="accent5"/>
+              <a:rPr lang="en-US" sz="2400" dirty="0">
+                <a:solidFill>
+                  <a:schemeClr val="bg2"/>
                 </a:solidFill>
               </a:rPr>
               <a:t>Lexer-driven command, keyword, quote, redirection and path colouring</a:t>
             </a:r>
-            <a:endParaRPr lang="en-US" sz="1700" dirty="0"/>
+            <a:endParaRPr lang="en-US" sz="2400" dirty="0"/>
           </a:p>
         </p:txBody>
       </p:sp>
@@ -16893,7 +16893,7 @@
               <a:buNone/>
             </a:pPr>
             <a:r>
-              <a:rPr lang="en-US" sz="2200" b="1" dirty="0">
+              <a:rPr lang="en-US" sz="2000" b="1" dirty="0">
                 <a:solidFill>
                   <a:schemeClr val="accent1"/>
                 </a:solidFill>
@@ -16903,7 +16903,7 @@
               </a:rPr>
               <a:t>autosuggest</a:t>
             </a:r>
-            <a:endParaRPr lang="en-US" sz="2200" dirty="0"/>
+            <a:endParaRPr lang="en-US" sz="2000" dirty="0"/>
           </a:p>
         </p:txBody>
       </p:sp>
@@ -16916,7 +16916,7 @@
         <p:spPr>
           <a:xfrm>
             <a:off x="3794760" y="2560320"/>
-            <a:ext cx="1965960" cy="2834640"/>
+            <a:ext cx="1965960" cy="2788920"/>
           </a:xfrm>
           <a:prstGeom prst="rect">
             <a:avLst/>
@@ -16932,14 +16932,14 @@
               <a:buNone/>
             </a:pPr>
             <a:r>
-              <a:rPr lang="en-US" sz="1700" dirty="0">
-                <a:solidFill>
-                  <a:schemeClr val="accent5"/>
+              <a:rPr lang="en-US" sz="2100" dirty="0">
+                <a:solidFill>
+                  <a:schemeClr val="bg2"/>
                 </a:solidFill>
               </a:rPr>
               <a:t>Ghost text from history; right arrow or End accepts, forward-word takes one word</a:t>
             </a:r>
-            <a:endParaRPr lang="en-US" sz="1700" dirty="0"/>
+            <a:endParaRPr lang="en-US" sz="2100" dirty="0"/>
           </a:p>
         </p:txBody>
       </p:sp>
@@ -16995,7 +16995,7 @@
               <a:buNone/>
             </a:pPr>
             <a:r>
-              <a:rPr lang="en-US" sz="2200" b="1" dirty="0">
+              <a:rPr lang="en-US" sz="1600" b="1" dirty="0">
                 <a:solidFill>
                   <a:schemeClr val="accent1"/>
                 </a:solidFill>
@@ -17005,7 +17005,7 @@
               </a:rPr>
               <a:t>history_search</a:t>
             </a:r>
-            <a:endParaRPr lang="en-US" sz="2200" dirty="0"/>
+            <a:endParaRPr lang="en-US" sz="1600" dirty="0"/>
           </a:p>
         </p:txBody>
       </p:sp>
@@ -17018,7 +17018,7 @@
         <p:spPr>
           <a:xfrm>
             <a:off x="6492240" y="2560320"/>
-            <a:ext cx="1965960" cy="2834640"/>
+            <a:ext cx="1965960" cy="2788920"/>
           </a:xfrm>
           <a:prstGeom prst="rect">
             <a:avLst/>
@@ -17034,14 +17034,14 @@
               <a:buNone/>
             </a:pPr>
             <a:r>
-              <a:rPr lang="en-US" sz="1700" dirty="0">
-                <a:solidFill>
-                  <a:schemeClr val="accent5"/>
+              <a:rPr lang="en-US" sz="2800" dirty="0">
+                <a:solidFill>
+                  <a:schemeClr val="bg2"/>
                 </a:solidFill>
               </a:rPr>
               <a:t>Prefix and substring up-arrow search</a:t>
             </a:r>
-            <a:endParaRPr lang="en-US" sz="1700" dirty="0"/>
+            <a:endParaRPr lang="en-US" sz="2800" dirty="0"/>
           </a:p>
         </p:txBody>
       </p:sp>
@@ -17097,7 +17097,7 @@
               <a:buNone/>
             </a:pPr>
             <a:r>
-              <a:rPr lang="en-US" sz="2200" b="1" dirty="0">
+              <a:rPr lang="en-US" sz="2600" b="1" dirty="0">
                 <a:solidFill>
                   <a:schemeClr val="accent1"/>
                 </a:solidFill>
@@ -17107,7 +17107,7 @@
               </a:rPr>
               <a:t>autopair</a:t>
             </a:r>
-            <a:endParaRPr lang="en-US" sz="2200" dirty="0"/>
+            <a:endParaRPr lang="en-US" sz="2600" dirty="0"/>
           </a:p>
         </p:txBody>
       </p:sp>
@@ -17120,7 +17120,7 @@
         <p:spPr>
           <a:xfrm>
             <a:off x="9189720" y="2560320"/>
-            <a:ext cx="1965960" cy="2834640"/>
+            <a:ext cx="1965960" cy="2788920"/>
           </a:xfrm>
           <a:prstGeom prst="rect">
             <a:avLst/>
@@ -17136,14 +17136,14 @@
               <a:buNone/>
             </a:pPr>
             <a:r>
-              <a:rPr lang="en-US" sz="1700" dirty="0">
-                <a:solidFill>
-                  <a:schemeClr val="accent5"/>
+              <a:rPr lang="en-US" sz="2800" dirty="0">
+                <a:solidFill>
+                  <a:schemeClr val="bg2"/>
                 </a:solidFill>
               </a:rPr>
               <a:t>Bracket and quote auto-pairing</a:t>
             </a:r>
-            <a:endParaRPr lang="en-US" sz="1700" dirty="0"/>
+            <a:endParaRPr lang="en-US" sz="2800" dirty="0"/>
           </a:p>
         </p:txBody>
       </p:sp>
@@ -17349,7 +17349,7 @@
               <a:buNone/>
             </a:pPr>
             <a:r>
-              <a:rPr lang="en-US" sz="2200" b="1" dirty="0">
+              <a:rPr lang="en-US" sz="2300" b="1" dirty="0">
                 <a:solidFill>
                   <a:schemeClr val="accent1"/>
                 </a:solidFill>
@@ -17359,7 +17359,7 @@
               </a:rPr>
               <a:t>What it checks</a:t>
             </a:r>
-            <a:endParaRPr lang="en-US" sz="2200" dirty="0"/>
+            <a:endParaRPr lang="en-US" sz="2300" dirty="0"/>
           </a:p>
         </p:txBody>
       </p:sp>
@@ -17372,7 +17372,7 @@
         <p:spPr>
           <a:xfrm>
             <a:off x="1097280" y="2560320"/>
-            <a:ext cx="2834640" cy="2834640"/>
+            <a:ext cx="2834640" cy="2788920"/>
           </a:xfrm>
           <a:prstGeom prst="rect">
             <a:avLst/>
@@ -17386,56 +17386,56 @@
           <a:p>
             <a:pPr marL="342900" indent="-342900">
               <a:spcAft>
-                <a:spcPts val="1000"/>
+                <a:spcPts val="800"/>
               </a:spcAft>
               <a:buSzPct val="100000"/>
               <a:buChar char="•"/>
             </a:pPr>
             <a:r>
-              <a:rPr lang="en-US" sz="2000" dirty="0">
+              <a:rPr lang="en-US" sz="2100" dirty="0">
                 <a:solidFill>
                   <a:schemeClr val="bg2"/>
                 </a:solidFill>
               </a:rPr>
               <a:t>Command validity</a:t>
             </a:r>
-            <a:endParaRPr lang="en-US" sz="2000" dirty="0"/>
+            <a:endParaRPr lang="en-US" sz="2100" dirty="0"/>
           </a:p>
           <a:p>
             <a:pPr marL="342900" indent="-342900">
               <a:spcAft>
-                <a:spcPts val="1000"/>
+                <a:spcPts val="800"/>
               </a:spcAft>
               <a:buSzPct val="100000"/>
               <a:buChar char="•"/>
             </a:pPr>
             <a:r>
-              <a:rPr lang="en-US" sz="2000" dirty="0">
+              <a:rPr lang="en-US" sz="2100" dirty="0">
                 <a:solidFill>
                   <a:schemeClr val="bg2"/>
                 </a:solidFill>
               </a:rPr>
               <a:t>File existence for paths</a:t>
             </a:r>
-            <a:endParaRPr lang="en-US" sz="2000" dirty="0"/>
+            <a:endParaRPr lang="en-US" sz="2100" dirty="0"/>
           </a:p>
           <a:p>
             <a:pPr marL="342900" indent="-342900">
               <a:spcAft>
-                <a:spcPts val="1000"/>
+                <a:spcPts val="800"/>
               </a:spcAft>
               <a:buSzPct val="100000"/>
               <a:buChar char="•"/>
             </a:pPr>
             <a:r>
-              <a:rPr lang="en-US" sz="2000" dirty="0">
+              <a:rPr lang="en-US" sz="2100" dirty="0">
                 <a:solidFill>
                   <a:schemeClr val="bg2"/>
                 </a:solidFill>
               </a:rPr>
               <a:t>Quotes, redirections, keywords</a:t>
             </a:r>
-            <a:endParaRPr lang="en-US" sz="2000" dirty="0"/>
+            <a:endParaRPr lang="en-US" sz="2100" dirty="0"/>
           </a:p>
         </p:txBody>
       </p:sp>
@@ -17491,7 +17491,7 @@
               <a:buNone/>
             </a:pPr>
             <a:r>
-              <a:rPr lang="en-US" sz="2200" b="1" dirty="0">
+              <a:rPr lang="en-US" sz="2300" b="1" dirty="0">
                 <a:solidFill>
                   <a:schemeClr val="accent1"/>
                 </a:solidFill>
@@ -17501,7 +17501,7 @@
               </a:rPr>
               <a:t>How it colours</a:t>
             </a:r>
-            <a:endParaRPr lang="en-US" sz="2200" dirty="0"/>
+            <a:endParaRPr lang="en-US" sz="2300" dirty="0"/>
           </a:p>
         </p:txBody>
       </p:sp>
@@ -17514,7 +17514,7 @@
         <p:spPr>
           <a:xfrm>
             <a:off x="4663440" y="2560320"/>
-            <a:ext cx="2834640" cy="2834640"/>
+            <a:ext cx="2834640" cy="2788920"/>
           </a:xfrm>
           <a:prstGeom prst="rect">
             <a:avLst/>
@@ -17528,74 +17528,74 @@
           <a:p>
             <a:pPr marL="342900" indent="-342900">
               <a:spcAft>
-                <a:spcPts val="1000"/>
+                <a:spcPts val="800"/>
               </a:spcAft>
               <a:buSzPct val="100000"/>
               <a:buChar char="•"/>
             </a:pPr>
             <a:r>
-              <a:rPr lang="en-US" sz="2000" dirty="0">
+              <a:rPr lang="en-US" sz="1800" dirty="0">
                 <a:solidFill>
                   <a:schemeClr val="bg2"/>
                 </a:solidFill>
               </a:rPr>
               <a:t>Command-type ladder</a:t>
             </a:r>
-            <a:endParaRPr lang="en-US" sz="2000" dirty="0"/>
+            <a:endParaRPr lang="en-US" sz="1800" dirty="0"/>
           </a:p>
           <a:p>
             <a:pPr marL="342900" indent="-342900">
               <a:spcAft>
-                <a:spcPts val="1000"/>
+                <a:spcPts val="800"/>
               </a:spcAft>
               <a:buSzPct val="100000"/>
               <a:buChar char="•"/>
             </a:pPr>
             <a:r>
-              <a:rPr lang="en-US" sz="2000" dirty="0">
+              <a:rPr lang="en-US" sz="1800" dirty="0">
                 <a:solidFill>
                   <a:schemeClr val="bg2"/>
                 </a:solidFill>
               </a:rPr>
               <a:t>Brackets by nesting level</a:t>
             </a:r>
-            <a:endParaRPr lang="en-US" sz="2000" dirty="0"/>
+            <a:endParaRPr lang="en-US" sz="1800" dirty="0"/>
           </a:p>
           <a:p>
             <a:pPr marL="342900" indent="-342900">
               <a:spcAft>
-                <a:spcPts val="1000"/>
+                <a:spcPts val="800"/>
               </a:spcAft>
               <a:buSzPct val="100000"/>
               <a:buChar char="•"/>
             </a:pPr>
             <a:r>
-              <a:rPr lang="en-US" sz="2000" dirty="0">
+              <a:rPr lang="en-US" sz="1800" dirty="0">
                 <a:solidFill>
                   <a:schemeClr val="bg2"/>
                 </a:solidFill>
               </a:rPr>
               <a:t>Glob, variable, option, math</a:t>
             </a:r>
-            <a:endParaRPr lang="en-US" sz="2000" dirty="0"/>
+            <a:endParaRPr lang="en-US" sz="1800" dirty="0"/>
           </a:p>
           <a:p>
             <a:pPr marL="342900" indent="-342900">
               <a:spcAft>
-                <a:spcPts val="1000"/>
+                <a:spcPts val="800"/>
               </a:spcAft>
               <a:buSzPct val="100000"/>
               <a:buChar char="•"/>
             </a:pPr>
             <a:r>
-              <a:rPr lang="en-US" sz="2000" dirty="0">
+              <a:rPr lang="en-US" sz="1800" dirty="0">
                 <a:solidFill>
                   <a:schemeClr val="bg2"/>
                 </a:solidFill>
               </a:rPr>
               <a:t>Secondary theme inside $(...)</a:t>
             </a:r>
-            <a:endParaRPr lang="en-US" sz="2000" dirty="0"/>
+            <a:endParaRPr lang="en-US" sz="1800" dirty="0"/>
           </a:p>
         </p:txBody>
       </p:sp>
@@ -17651,7 +17651,7 @@
               <a:buNone/>
             </a:pPr>
             <a:r>
-              <a:rPr lang="en-US" sz="2200" b="1" dirty="0">
+              <a:rPr lang="en-US" sz="1800" b="1" dirty="0">
                 <a:solidFill>
                   <a:schemeClr val="accent1"/>
                 </a:solidFill>
@@ -17661,7 +17661,7 @@
               </a:rPr>
               <a:t>Same as the plugin</a:t>
             </a:r>
-            <a:endParaRPr lang="en-US" sz="2200" dirty="0"/>
+            <a:endParaRPr lang="en-US" sz="1800" dirty="0"/>
           </a:p>
         </p:txBody>
       </p:sp>
@@ -17674,7 +17674,7 @@
         <p:spPr>
           <a:xfrm>
             <a:off x="8229600" y="2560320"/>
-            <a:ext cx="2834640" cy="2834640"/>
+            <a:ext cx="2834640" cy="2788920"/>
           </a:xfrm>
           <a:prstGeom prst="rect">
             <a:avLst/>
@@ -17688,7 +17688,7 @@
           <a:p>
             <a:pPr marL="342900" indent="-342900">
               <a:spcAft>
-                <a:spcPts val="1000"/>
+                <a:spcPts val="800"/>
               </a:spcAft>
               <a:buSzPct val="100000"/>
               <a:buChar char="•"/>
@@ -17706,7 +17706,7 @@
           <a:p>
             <a:pPr marL="342900" indent="-342900">
               <a:spcAft>
-                <a:spcPts val="1000"/>
+                <a:spcPts val="800"/>
               </a:spcAft>
               <a:buSzPct val="100000"/>
               <a:buChar char="•"/>
@@ -17724,7 +17724,7 @@
           <a:p>
             <a:pPr marL="342900" indent="-342900">
               <a:spcAft>
-                <a:spcPts val="1000"/>
+                <a:spcPts val="800"/>
               </a:spcAft>
               <a:buSzPct val="100000"/>
               <a:buChar char="•"/>
@@ -17917,7 +17917,7 @@
                 <a:gridCol w="4114800"/>
                 <a:gridCol w="6400800"/>
               </a:tblGrid>
-              <a:tr h="566928">
+              <a:tr h="731520">
                 <a:tc>
                   <a:txBody>
                     <a:bodyPr/>
@@ -17927,14 +17927,14 @@
                         <a:buNone/>
                       </a:pPr>
                       <a:r>
-                        <a:rPr lang="en-US" sz="2200" b="1" dirty="0">
+                        <a:rPr lang="en-US" sz="2800" b="1" dirty="0">
                           <a:solidFill>
                             <a:schemeClr val="accent1"/>
                           </a:solidFill>
                         </a:rPr>
                         <a:t>Native engine</a:t>
                       </a:r>
-                      <a:endParaRPr lang="en-US" sz="2200" dirty="0"/>
+                      <a:endParaRPr lang="en-US" sz="2800" dirty="0"/>
                     </a:p>
                   </a:txBody>
                   <a:tcPr marL="91440" marR="91440" marT="45720" marB="45720" anchor="ctr">
@@ -17985,14 +17985,14 @@
                         <a:buNone/>
                       </a:pPr>
                       <a:r>
-                        <a:rPr lang="en-US" sz="2200" b="1" dirty="0">
+                        <a:rPr lang="en-US" sz="2800" b="1" dirty="0">
                           <a:solidFill>
                             <a:schemeClr val="accent1"/>
                           </a:solidFill>
                         </a:rPr>
                         <a:t>Config it honours</a:t>
                       </a:r>
-                      <a:endParaRPr lang="en-US" sz="2200" dirty="0"/>
+                      <a:endParaRPr lang="en-US" sz="2800" dirty="0"/>
                     </a:p>
                   </a:txBody>
                   <a:tcPr marL="91440" marR="91440" marT="45720" marB="45720" anchor="ctr">
@@ -18035,7 +18035,7 @@
                   </a:tcPr>
                 </a:tc>
               </a:tr>
-              <a:tr h="566928">
+              <a:tr h="731520">
                 <a:tc>
                   <a:txBody>
                     <a:bodyPr/>
@@ -18045,14 +18045,14 @@
                         <a:buNone/>
                       </a:pPr>
                       <a:r>
-                        <a:rPr lang="en-US" sz="2200" dirty="0">
+                        <a:rPr lang="en-US" sz="2800" dirty="0">
                           <a:solidFill>
                             <a:schemeClr val="bg2"/>
                           </a:solidFill>
                         </a:rPr>
                         <a:t>syntax highlighting</a:t>
                       </a:r>
-                      <a:endParaRPr lang="en-US" sz="2200" dirty="0"/>
+                      <a:endParaRPr lang="en-US" sz="2800" dirty="0"/>
                     </a:p>
                   </a:txBody>
                   <a:tcPr marL="91440" marR="91440" marT="45720" marB="45720" anchor="ctr">
@@ -18103,14 +18103,14 @@
                         <a:buNone/>
                       </a:pPr>
                       <a:r>
-                        <a:rPr lang="en-US" sz="2200" dirty="0">
+                        <a:rPr lang="en-US" sz="2800" dirty="0">
                           <a:solidFill>
                             <a:schemeClr val="bg2"/>
                           </a:solidFill>
                         </a:rPr>
                         <a:t>ZSH_HIGHLIGHT_STYLES</a:t>
                       </a:r>
-                      <a:endParaRPr lang="en-US" sz="2200" dirty="0"/>
+                      <a:endParaRPr lang="en-US" sz="2800" dirty="0"/>
                     </a:p>
                   </a:txBody>
                   <a:tcPr marL="91440" marR="91440" marT="45720" marB="45720" anchor="ctr">
@@ -18153,7 +18153,7 @@
                   </a:tcPr>
                 </a:tc>
               </a:tr>
-              <a:tr h="566928">
+              <a:tr h="731520">
                 <a:tc>
                   <a:txBody>
                     <a:bodyPr/>
@@ -18163,14 +18163,14 @@
                         <a:buNone/>
                       </a:pPr>
                       <a:r>
-                        <a:rPr lang="en-US" sz="2200" dirty="0">
+                        <a:rPr lang="en-US" sz="2800" dirty="0">
                           <a:solidFill>
                             <a:schemeClr val="bg2"/>
                           </a:solidFill>
                         </a:rPr>
                         <a:t>autosuggest</a:t>
                       </a:r>
-                      <a:endParaRPr lang="en-US" sz="2200" dirty="0"/>
+                      <a:endParaRPr lang="en-US" sz="2800" dirty="0"/>
                     </a:p>
                   </a:txBody>
                   <a:tcPr marL="91440" marR="91440" marT="45720" marB="45720" anchor="ctr">
@@ -18221,14 +18221,14 @@
                         <a:buNone/>
                       </a:pPr>
                       <a:r>
-                        <a:rPr lang="en-US" sz="2200" dirty="0">
+                        <a:rPr lang="en-US" sz="2800" dirty="0">
                           <a:solidFill>
                             <a:schemeClr val="bg2"/>
                           </a:solidFill>
                         </a:rPr>
                         <a:t>ZSH_AUTOSUGGEST_*</a:t>
                       </a:r>
-                      <a:endParaRPr lang="en-US" sz="2200" dirty="0"/>
+                      <a:endParaRPr lang="en-US" sz="2800" dirty="0"/>
                     </a:p>
                   </a:txBody>
                   <a:tcPr marL="91440" marR="91440" marT="45720" marB="45720" anchor="ctr">
@@ -18271,7 +18271,7 @@
                   </a:tcPr>
                 </a:tc>
               </a:tr>
-              <a:tr h="566928">
+              <a:tr h="731520">
                 <a:tc>
                   <a:txBody>
                     <a:bodyPr/>
@@ -18281,14 +18281,14 @@
                         <a:buNone/>
                       </a:pPr>
                       <a:r>
-                        <a:rPr lang="en-US" sz="2200" dirty="0">
+                        <a:rPr lang="en-US" sz="2800" dirty="0">
                           <a:solidFill>
                             <a:schemeClr val="bg2"/>
                           </a:solidFill>
                         </a:rPr>
                         <a:t>history search</a:t>
                       </a:r>
-                      <a:endParaRPr lang="en-US" sz="2200" dirty="0"/>
+                      <a:endParaRPr lang="en-US" sz="2800" dirty="0"/>
                     </a:p>
                   </a:txBody>
                   <a:tcPr marL="91440" marR="91440" marT="45720" marB="45720" anchor="ctr">
@@ -18339,14 +18339,14 @@
                         <a:buNone/>
                       </a:pPr>
                       <a:r>
-                        <a:rPr lang="en-US" sz="2200" dirty="0">
+                        <a:rPr lang="en-US" sz="2800" dirty="0">
                           <a:solidFill>
                             <a:schemeClr val="bg2"/>
                           </a:solidFill>
                         </a:rPr>
                         <a:t>HISTORY_SUBSTRING_SEARCH_*</a:t>
                       </a:r>
-                      <a:endParaRPr lang="en-US" sz="2200" dirty="0"/>
+                      <a:endParaRPr lang="en-US" sz="2800" dirty="0"/>
                     </a:p>
                   </a:txBody>
                   <a:tcPr marL="91440" marR="91440" marT="45720" marB="45720" anchor="ctr">
@@ -18389,7 +18389,7 @@
                   </a:tcPr>
                 </a:tc>
               </a:tr>
-              <a:tr h="566928">
+              <a:tr h="731520">
                 <a:tc>
                   <a:txBody>
                     <a:bodyPr/>
@@ -18399,14 +18399,14 @@
                         <a:buNone/>
                       </a:pPr>
                       <a:r>
-                        <a:rPr lang="en-US" sz="2200" dirty="0">
+                        <a:rPr lang="en-US" sz="2800" dirty="0">
                           <a:solidFill>
                             <a:schemeClr val="bg2"/>
                           </a:solidFill>
                         </a:rPr>
                         <a:t>autopair</a:t>
                       </a:r>
-                      <a:endParaRPr lang="en-US" sz="2200" dirty="0"/>
+                      <a:endParaRPr lang="en-US" sz="2800" dirty="0"/>
                     </a:p>
                   </a:txBody>
                   <a:tcPr marL="91440" marR="91440" marT="45720" marB="45720" anchor="ctr">
@@ -18457,14 +18457,14 @@
                         <a:buNone/>
                       </a:pPr>
                       <a:r>
-                        <a:rPr lang="en-US" sz="2200" dirty="0">
+                        <a:rPr lang="en-US" sz="2800" dirty="0">
                           <a:solidFill>
                             <a:schemeClr val="bg2"/>
                           </a:solidFill>
                         </a:rPr>
                         <a:t>AUTOPAIR_*</a:t>
                       </a:r>
-                      <a:endParaRPr lang="en-US" sz="2200" dirty="0"/>
+                      <a:endParaRPr lang="en-US" sz="2800" dirty="0"/>
                     </a:p>
                   </a:txBody>
                   <a:tcPr marL="91440" marR="91440" marT="45720" marB="45720" anchor="ctr">
@@ -18507,7 +18507,7 @@
                   </a:tcPr>
                 </a:tc>
               </a:tr>
-              <a:tr h="566928">
+              <a:tr h="731520">
                 <a:tc>
                   <a:txBody>
                     <a:bodyPr/>
@@ -18517,14 +18517,14 @@
                         <a:buNone/>
                       </a:pPr>
                       <a:r>
-                        <a:rPr lang="en-US" sz="2200" dirty="0">
+                        <a:rPr lang="en-US" sz="2800" dirty="0">
                           <a:solidFill>
                             <a:schemeClr val="bg2"/>
                           </a:solidFill>
                         </a:rPr>
                         <a:t>prompt</a:t>
                       </a:r>
-                      <a:endParaRPr lang="en-US" sz="2200" dirty="0"/>
+                      <a:endParaRPr lang="en-US" sz="2800" dirty="0"/>
                     </a:p>
                   </a:txBody>
                   <a:tcPr marL="91440" marR="91440" marT="45720" marB="45720" anchor="ctr">
@@ -18575,14 +18575,14 @@
                         <a:buNone/>
                       </a:pPr>
                       <a:r>
-                        <a:rPr lang="en-US" sz="2200" dirty="0">
+                        <a:rPr lang="en-US" sz="2800" dirty="0">
                           <a:solidFill>
                             <a:schemeClr val="bg2"/>
                           </a:solidFill>
                         </a:rPr>
                         <a:t>.p10k.zsh, sourced unchanged</a:t>
                       </a:r>
-                      <a:endParaRPr lang="en-US" sz="2200" dirty="0"/>
+                      <a:endParaRPr lang="en-US" sz="2800" dirty="0"/>
                     </a:p>
                   </a:txBody>
                   <a:tcPr marL="91440" marR="91440" marT="45720" marB="45720" anchor="ctr">
@@ -18933,7 +18933,7 @@
               <a:buNone/>
             </a:pPr>
             <a:r>
-              <a:rPr lang="en-US" sz="2200" b="1" dirty="0">
+              <a:rPr lang="en-US" sz="2600" b="1" dirty="0">
                 <a:solidFill>
                   <a:schemeClr val="accent1"/>
                 </a:solidFill>
@@ -18943,7 +18943,7 @@
               </a:rPr>
               <a:t>Overrides</a:t>
             </a:r>
-            <a:endParaRPr lang="en-US" sz="2200" dirty="0"/>
+            <a:endParaRPr lang="en-US" sz="2600" dirty="0"/>
           </a:p>
         </p:txBody>
       </p:sp>
@@ -18956,7 +18956,7 @@
         <p:spPr>
           <a:xfrm>
             <a:off x="4709160" y="2560320"/>
-            <a:ext cx="6355080" cy="1371600"/>
+            <a:ext cx="6355080" cy="1325880"/>
           </a:xfrm>
           <a:prstGeom prst="rect">
             <a:avLst/>
@@ -18970,38 +18970,38 @@
           <a:p>
             <a:pPr marL="342900" indent="-342900">
               <a:spcAft>
-                <a:spcPts val="1000"/>
+                <a:spcPts val="800"/>
               </a:spcAft>
               <a:buSzPct val="100000"/>
               <a:buChar char="•"/>
             </a:pPr>
             <a:r>
-              <a:rPr lang="en-US" sz="2200" dirty="0">
+              <a:rPr lang="en-US" sz="2400" dirty="0">
                 <a:solidFill>
                   <a:schemeClr val="bg2"/>
                 </a:solidFill>
               </a:rPr>
               <a:t>ZSHRS_ZLE_HIGHLIGHT_BUDGET_MS</a:t>
             </a:r>
-            <a:endParaRPr lang="en-US" sz="2200" dirty="0"/>
+            <a:endParaRPr lang="en-US" sz="2400" dirty="0"/>
           </a:p>
           <a:p>
             <a:pPr marL="342900" indent="-342900">
               <a:spcAft>
-                <a:spcPts val="1000"/>
+                <a:spcPts val="800"/>
               </a:spcAft>
               <a:buSzPct val="100000"/>
               <a:buChar char="•"/>
             </a:pPr>
             <a:r>
-              <a:rPr lang="en-US" sz="2200" dirty="0">
+              <a:rPr lang="en-US" sz="2400" dirty="0">
                 <a:solidFill>
                   <a:schemeClr val="bg2"/>
                 </a:solidFill>
               </a:rPr>
               <a:t>ZSHRS_ZLE_AUTOSUGGEST_BUDGET_MS</a:t>
             </a:r>
-            <a:endParaRPr lang="en-US" sz="2200" dirty="0"/>
+            <a:endParaRPr lang="en-US" sz="2400" dirty="0"/>
           </a:p>
         </p:txBody>
       </p:sp>
@@ -19200,11 +19200,11 @@
         <p:spPr>
           <a:xfrm>
             <a:off x="822960" y="1828800"/>
-            <a:ext cx="10515600" cy="2057400"/>
+            <a:ext cx="10515600" cy="2042160"/>
           </a:xfrm>
           <a:prstGeom prst="roundRect">
             <a:avLst>
-              <a:gd name="adj" fmla="val 5333"/>
+              <a:gd name="adj" fmla="val 5373"/>
             </a:avLst>
           </a:prstGeom>
           <a:solidFill>
@@ -19226,8 +19226,8 @@
         </p:nvSpPr>
         <p:spPr>
           <a:xfrm>
-            <a:off x="1143000" y="2029968"/>
-            <a:ext cx="9875520" cy="1655064"/>
+            <a:off x="1143000" y="2057400"/>
+            <a:ext cx="9875520" cy="1584960"/>
           </a:xfrm>
           <a:prstGeom prst="rect">
             <a:avLst/>
@@ -19240,13 +19240,13 @@
           <a:lstStyle/>
           <a:p>
             <a:pPr indent="0" marL="0">
-              <a:spcAft>
-                <a:spcPts val="300"/>
-              </a:spcAft>
-              <a:buNone/>
-            </a:pPr>
-            <a:r>
-              <a:rPr lang="en-US" sz="2200" dirty="0">
+              <a:lnSpc>
+                <a:spcPct val="125000"/>
+              </a:lnSpc>
+              <a:buNone/>
+            </a:pPr>
+            <a:r>
+              <a:rPr lang="en-US" sz="2600" dirty="0">
                 <a:solidFill>
                   <a:schemeClr val="accent1"/>
                 </a:solidFill>
@@ -19256,17 +19256,17 @@
               </a:rPr>
               <a:t>brew tap MenkeTechnologies/menketech</a:t>
             </a:r>
-            <a:endParaRPr lang="en-US" sz="2200" dirty="0"/>
-          </a:p>
-          <a:p>
-            <a:pPr indent="0" marL="0">
-              <a:spcAft>
-                <a:spcPts val="300"/>
-              </a:spcAft>
-              <a:buNone/>
-            </a:pPr>
-            <a:r>
-              <a:rPr lang="en-US" sz="2200" dirty="0">
+            <a:endParaRPr lang="en-US" sz="2600" dirty="0"/>
+          </a:p>
+          <a:p>
+            <a:pPr indent="0" marL="0">
+              <a:lnSpc>
+                <a:spcPct val="125000"/>
+              </a:lnSpc>
+              <a:buNone/>
+            </a:pPr>
+            <a:r>
+              <a:rPr lang="en-US" sz="2600" dirty="0">
                 <a:solidFill>
                   <a:schemeClr val="accent1"/>
                 </a:solidFill>
@@ -19276,17 +19276,17 @@
               </a:rPr>
               <a:t>brew install zshrs</a:t>
             </a:r>
-            <a:endParaRPr lang="en-US" sz="2200" dirty="0"/>
-          </a:p>
-          <a:p>
-            <a:pPr indent="0" marL="0">
-              <a:spcAft>
-                <a:spcPts val="300"/>
-              </a:spcAft>
-              <a:buNone/>
-            </a:pPr>
-            <a:r>
-              <a:rPr lang="en-US" sz="2200" dirty="0">
+            <a:endParaRPr lang="en-US" sz="2600" dirty="0"/>
+          </a:p>
+          <a:p>
+            <a:pPr indent="0" marL="0">
+              <a:lnSpc>
+                <a:spcPct val="125000"/>
+              </a:lnSpc>
+              <a:buNone/>
+            </a:pPr>
+            <a:r>
+              <a:rPr lang="en-US" sz="2600" dirty="0">
                 <a:solidFill>
                   <a:schemeClr val="accent5"/>
                 </a:solidFill>
@@ -19296,7 +19296,7 @@
               </a:rPr>
               <a:t>brew install zshrs-all   # adds recorder + daemon</a:t>
             </a:r>
-            <a:endParaRPr lang="en-US" sz="2200" dirty="0"/>
+            <a:endParaRPr lang="en-US" sz="2600" dirty="0"/>
           </a:p>
         </p:txBody>
       </p:sp>
@@ -19690,7 +19690,7 @@
               <a:buNone/>
             </a:pPr>
             <a:r>
-              <a:rPr lang="en-US" sz="2200" b="1" dirty="0">
+              <a:rPr lang="en-US" sz="2600" b="1" dirty="0">
                 <a:solidFill>
                   <a:schemeClr val="accent1"/>
                 </a:solidFill>
@@ -19700,7 +19700,7 @@
               </a:rPr>
               <a:t>What it does</a:t>
             </a:r>
-            <a:endParaRPr lang="en-US" sz="2200" dirty="0"/>
+            <a:endParaRPr lang="en-US" sz="2600" dirty="0"/>
           </a:p>
         </p:txBody>
       </p:sp>
@@ -19713,7 +19713,7 @@
         <p:spPr>
           <a:xfrm>
             <a:off x="4709160" y="2560320"/>
-            <a:ext cx="6355080" cy="1371600"/>
+            <a:ext cx="6355080" cy="1325880"/>
           </a:xfrm>
           <a:prstGeom prst="rect">
             <a:avLst/>
@@ -19727,56 +19727,56 @@
           <a:p>
             <a:pPr marL="342900" indent="-342900">
               <a:spcAft>
-                <a:spcPts val="1000"/>
+                <a:spcPts val="800"/>
               </a:spcAft>
               <a:buSzPct val="100000"/>
               <a:buChar char="•"/>
             </a:pPr>
             <a:r>
-              <a:rPr lang="en-US" sz="2200" dirty="0">
+              <a:rPr lang="en-US" sz="1800" dirty="0">
                 <a:solidFill>
                   <a:schemeClr val="bg2"/>
                 </a:solidFill>
               </a:rPr>
               <a:t>Renders your existing .p10k.zsh unchanged</a:t>
             </a:r>
-            <a:endParaRPr lang="en-US" sz="2200" dirty="0"/>
+            <a:endParaRPr lang="en-US" sz="1800" dirty="0"/>
           </a:p>
           <a:p>
             <a:pPr marL="342900" indent="-342900">
               <a:spcAft>
-                <a:spcPts val="1000"/>
+                <a:spcPts val="800"/>
               </a:spcAft>
               <a:buSzPct val="100000"/>
               <a:buChar char="•"/>
             </a:pPr>
             <a:r>
-              <a:rPr lang="en-US" sz="2200" dirty="0">
+              <a:rPr lang="en-US" sz="1800" dirty="0">
                 <a:solidFill>
                   <a:schemeClr val="bg2"/>
                 </a:solidFill>
               </a:rPr>
               <a:t>Native .git reader instead of gitstatusd</a:t>
             </a:r>
-            <a:endParaRPr lang="en-US" sz="2200" dirty="0"/>
+            <a:endParaRPr lang="en-US" sz="1800" dirty="0"/>
           </a:p>
           <a:p>
             <a:pPr marL="342900" indent="-342900">
               <a:spcAft>
-                <a:spcPts val="1000"/>
+                <a:spcPts val="800"/>
               </a:spcAft>
               <a:buSzPct val="100000"/>
               <a:buChar char="•"/>
             </a:pPr>
             <a:r>
-              <a:rPr lang="en-US" sz="2200" dirty="0">
+              <a:rPr lang="en-US" sz="1800" dirty="0">
                 <a:solidFill>
                   <a:schemeClr val="bg2"/>
                 </a:solidFill>
               </a:rPr>
               <a:t>In process: no instant-prompt workaround</a:t>
             </a:r>
-            <a:endParaRPr lang="en-US" sz="2200" dirty="0"/>
+            <a:endParaRPr lang="en-US" sz="1800" dirty="0"/>
           </a:p>
         </p:txBody>
       </p:sp>
@@ -21894,11 +21894,11 @@
         <p:spPr>
           <a:xfrm>
             <a:off x="822960" y="4434840"/>
-            <a:ext cx="10515600" cy="1179576"/>
+            <a:ext cx="10515600" cy="1148080"/>
           </a:xfrm>
           <a:prstGeom prst="roundRect">
             <a:avLst>
-              <a:gd name="adj" fmla="val 9302"/>
+              <a:gd name="adj" fmla="val 9558"/>
             </a:avLst>
           </a:prstGeom>
           <a:solidFill>
@@ -21920,8 +21920,8 @@
         </p:nvSpPr>
         <p:spPr>
           <a:xfrm>
-            <a:off x="1143000" y="4636008"/>
-            <a:ext cx="9875520" cy="777240"/>
+            <a:off x="1143000" y="4663440"/>
+            <a:ext cx="9875520" cy="690880"/>
           </a:xfrm>
           <a:prstGeom prst="rect">
             <a:avLst/>
@@ -21934,9 +21934,9 @@
           <a:lstStyle/>
           <a:p>
             <a:pPr indent="0" marL="0">
-              <a:spcAft>
-                <a:spcPts val="300"/>
-              </a:spcAft>
+              <a:lnSpc>
+                <a:spcPct val="125000"/>
+              </a:lnSpc>
               <a:buNone/>
             </a:pPr>
             <a:r>
@@ -21954,9 +21954,9 @@
           </a:p>
           <a:p>
             <a:pPr indent="0" marL="0">
-              <a:spcAft>
-                <a:spcPts val="300"/>
-              </a:spcAft>
+              <a:lnSpc>
+                <a:spcPct val="125000"/>
+              </a:lnSpc>
               <a:buNone/>
             </a:pPr>
             <a:r>
@@ -22189,14 +22189,14 @@
               <a:buChar char="•"/>
             </a:pPr>
             <a:r>
-              <a:rPr lang="en-US" sz="2000" dirty="0">
+              <a:rPr lang="en-US" sz="3000" dirty="0">
                 <a:solidFill>
                   <a:schemeClr val="accent4"/>
                 </a:solidFill>
               </a:rPr>
               <a:t>javap, dis and B::Deparse, for a shell</a:t>
             </a:r>
-            <a:endParaRPr lang="en-US" sz="2000" dirty="0"/>
+            <a:endParaRPr lang="en-US" sz="3000" dirty="0"/>
           </a:p>
         </p:txBody>
       </p:sp>
@@ -22308,11 +22308,11 @@
         <p:spPr>
           <a:xfrm>
             <a:off x="822960" y="4434840"/>
-            <a:ext cx="10515600" cy="1179576"/>
+            <a:ext cx="10515600" cy="1310640"/>
           </a:xfrm>
           <a:prstGeom prst="roundRect">
             <a:avLst>
-              <a:gd name="adj" fmla="val 9302"/>
+              <a:gd name="adj" fmla="val 8372"/>
             </a:avLst>
           </a:prstGeom>
           <a:solidFill>
@@ -22334,8 +22334,8 @@
         </p:nvSpPr>
         <p:spPr>
           <a:xfrm>
-            <a:off x="1143000" y="4636008"/>
-            <a:ext cx="9875520" cy="777240"/>
+            <a:off x="1143000" y="4663440"/>
+            <a:ext cx="9875520" cy="853440"/>
           </a:xfrm>
           <a:prstGeom prst="rect">
             <a:avLst/>
@@ -22348,13 +22348,13 @@
           <a:lstStyle/>
           <a:p>
             <a:pPr indent="0" marL="0">
-              <a:spcAft>
-                <a:spcPts val="300"/>
-              </a:spcAft>
-              <a:buNone/>
-            </a:pPr>
-            <a:r>
-              <a:rPr lang="en-US" sz="1700" dirty="0">
+              <a:lnSpc>
+                <a:spcPct val="125000"/>
+              </a:lnSpc>
+              <a:buNone/>
+            </a:pPr>
+            <a:r>
+              <a:rPr lang="en-US" sz="2100" dirty="0">
                 <a:solidFill>
                   <a:schemeClr val="accent1"/>
                 </a:solidFill>
@@ -22364,17 +22364,17 @@
               </a:rPr>
               <a:t>zshrs --dump-tokens | --dump-wordcode | --dump-ast | --disasm</a:t>
             </a:r>
-            <a:endParaRPr lang="en-US" sz="1700" dirty="0"/>
-          </a:p>
-          <a:p>
-            <a:pPr indent="0" marL="0">
-              <a:spcAft>
-                <a:spcPts val="300"/>
-              </a:spcAft>
-              <a:buNone/>
-            </a:pPr>
-            <a:r>
-              <a:rPr lang="en-US" sz="1700" dirty="0">
+            <a:endParaRPr lang="en-US" sz="2100" dirty="0"/>
+          </a:p>
+          <a:p>
+            <a:pPr indent="0" marL="0">
+              <a:lnSpc>
+                <a:spcPct val="125000"/>
+              </a:lnSpc>
+              <a:buNone/>
+            </a:pPr>
+            <a:r>
+              <a:rPr lang="en-US" sz="2100" dirty="0">
                 <a:solidFill>
                   <a:schemeClr val="accent1"/>
                 </a:solidFill>
@@ -22384,7 +22384,7 @@
               </a:rPr>
               <a:t>zshrs --dump-reflection</a:t>
             </a:r>
-            <a:endParaRPr lang="en-US" sz="1700" dirty="0"/>
+            <a:endParaRPr lang="en-US" sz="2100" dirty="0"/>
           </a:p>
         </p:txBody>
       </p:sp>
@@ -23968,14 +23968,14 @@
               <a:buChar char="•"/>
             </a:pPr>
             <a:r>
-              <a:rPr lang="en-US" sz="2400" dirty="0">
+              <a:rPr lang="en-US" sz="3000" dirty="0">
                 <a:solidFill>
                   <a:schemeClr val="bg2"/>
                 </a:solidFill>
               </a:rPr>
               <a:t>One VM, two languages</a:t>
             </a:r>
-            <a:endParaRPr lang="en-US" sz="2400" dirty="0"/>
+            <a:endParaRPr lang="en-US" sz="3000" dirty="0"/>
           </a:p>
           <a:p>
             <a:pPr marL="342900" indent="-342900">
@@ -23986,14 +23986,14 @@
               <a:buChar char="•"/>
             </a:pPr>
             <a:r>
-              <a:rPr lang="en-US" sz="2400" dirty="0">
+              <a:rPr lang="en-US" sz="3000" dirty="0">
                 <a:solidFill>
                   <a:schemeClr val="bg2"/>
                 </a:solidFill>
               </a:rPr>
               <a:t>No process boundary between them</a:t>
             </a:r>
-            <a:endParaRPr lang="en-US" sz="2400" dirty="0"/>
+            <a:endParaRPr lang="en-US" sz="3000" dirty="0"/>
           </a:p>
         </p:txBody>
       </p:sp>
@@ -24311,14 +24311,14 @@
               <a:buChar char="•"/>
             </a:pPr>
             <a:r>
-              <a:rPr lang="en-US" sz="2400" dirty="0">
+              <a:rPr lang="en-US" sz="2900" dirty="0">
                 <a:solidFill>
                   <a:schemeClr val="bg2"/>
                 </a:solidFill>
               </a:rPr>
               <a:t>Under --zsh the extension is off</a:t>
             </a:r>
-            <a:endParaRPr lang="en-US" sz="2400" dirty="0"/>
+            <a:endParaRPr lang="en-US" sz="2900" dirty="0"/>
           </a:p>
           <a:p>
             <a:pPr marL="342900" indent="-342900">
@@ -24329,14 +24329,14 @@
               <a:buChar char="•"/>
             </a:pPr>
             <a:r>
-              <a:rPr lang="en-US" sz="2400" dirty="0">
+              <a:rPr lang="en-US" sz="2900" dirty="0">
                 <a:solidFill>
                   <a:schemeClr val="bg2"/>
                 </a:solidFill>
               </a:rPr>
               <a:t>The form is rejected exactly as /bin/zsh rejects it</a:t>
             </a:r>
-            <a:endParaRPr lang="en-US" sz="2400" dirty="0"/>
+            <a:endParaRPr lang="en-US" sz="2900" dirty="0"/>
           </a:p>
         </p:txBody>
       </p:sp>
@@ -26156,11 +26156,11 @@
         <p:spPr>
           <a:xfrm>
             <a:off x="822960" y="4434840"/>
-            <a:ext cx="10515600" cy="1563624"/>
+            <a:ext cx="10515600" cy="2042160"/>
           </a:xfrm>
           <a:prstGeom prst="roundRect">
             <a:avLst>
-              <a:gd name="adj" fmla="val 7018"/>
+              <a:gd name="adj" fmla="val 5373"/>
             </a:avLst>
           </a:prstGeom>
           <a:solidFill>
@@ -26182,8 +26182,8 @@
         </p:nvSpPr>
         <p:spPr>
           <a:xfrm>
-            <a:off x="1143000" y="4636008"/>
-            <a:ext cx="9875520" cy="1161288"/>
+            <a:off x="1143000" y="4663440"/>
+            <a:ext cx="9875520" cy="1584960"/>
           </a:xfrm>
           <a:prstGeom prst="rect">
             <a:avLst/>
@@ -26196,13 +26196,13 @@
           <a:lstStyle/>
           <a:p>
             <a:pPr indent="0" marL="0">
-              <a:spcAft>
-                <a:spcPts val="300"/>
-              </a:spcAft>
-              <a:buNone/>
-            </a:pPr>
-            <a:r>
-              <a:rPr lang="en-US" sz="1700" dirty="0">
+              <a:lnSpc>
+                <a:spcPct val="125000"/>
+              </a:lnSpc>
+              <a:buNone/>
+            </a:pPr>
+            <a:r>
+              <a:rPr lang="en-US" sz="2600" dirty="0">
                 <a:solidFill>
                   <a:schemeClr val="accent1"/>
                 </a:solidFill>
@@ -26212,17 +26212,17 @@
               </a:rPr>
               <a:t>zmodload -R ./libfoo.dylib</a:t>
             </a:r>
-            <a:endParaRPr lang="en-US" sz="1700" dirty="0"/>
-          </a:p>
-          <a:p>
-            <a:pPr indent="0" marL="0">
-              <a:spcAft>
-                <a:spcPts val="300"/>
-              </a:spcAft>
-              <a:buNone/>
-            </a:pPr>
-            <a:r>
-              <a:rPr lang="en-US" sz="1700" dirty="0">
+            <a:endParaRPr lang="en-US" sz="2600" dirty="0"/>
+          </a:p>
+          <a:p>
+            <a:pPr indent="0" marL="0">
+              <a:lnSpc>
+                <a:spcPct val="125000"/>
+              </a:lnSpc>
+              <a:buNone/>
+            </a:pPr>
+            <a:r>
+              <a:rPr lang="en-US" sz="2600" dirty="0">
                 <a:solidFill>
                   <a:schemeClr val="accent1"/>
                 </a:solidFill>
@@ -26232,17 +26232,17 @@
               </a:rPr>
               <a:t>znative load MenkeTechnologies/zshrs-forgit</a:t>
             </a:r>
-            <a:endParaRPr lang="en-US" sz="1700" dirty="0"/>
-          </a:p>
-          <a:p>
-            <a:pPr indent="0" marL="0">
-              <a:spcAft>
-                <a:spcPts val="300"/>
-              </a:spcAft>
-              <a:buNone/>
-            </a:pPr>
-            <a:r>
-              <a:rPr lang="en-US" sz="1700" dirty="0">
+            <a:endParaRPr lang="en-US" sz="2600" dirty="0"/>
+          </a:p>
+          <a:p>
+            <a:pPr indent="0" marL="0">
+              <a:lnSpc>
+                <a:spcPct val="125000"/>
+              </a:lnSpc>
+              <a:buNone/>
+            </a:pPr>
+            <a:r>
+              <a:rPr lang="en-US" sz="2600" dirty="0">
                 <a:solidFill>
                   <a:schemeClr val="accent1"/>
                 </a:solidFill>
@@ -26252,7 +26252,7 @@
               </a:rPr>
               <a:t>znative load zsh-users/zsh-autosuggestions</a:t>
             </a:r>
-            <a:endParaRPr lang="en-US" sz="1700" dirty="0"/>
+            <a:endParaRPr lang="en-US" sz="2600" dirty="0"/>
           </a:p>
         </p:txBody>
       </p:sp>
@@ -26963,14 +26963,14 @@
               <a:buChar char="•"/>
             </a:pPr>
             <a:r>
-              <a:rPr lang="en-US" sz="2400" dirty="0">
+              <a:rPr lang="en-US" sz="2500" dirty="0">
                 <a:solidFill>
                   <a:schemeClr val="accent4"/>
                 </a:solidFill>
               </a:rPr>
               <a:t>git: zshrs-native build</a:t>
             </a:r>
-            <a:endParaRPr lang="en-US" sz="2400" dirty="0"/>
+            <a:endParaRPr lang="en-US" sz="2500" dirty="0"/>
           </a:p>
           <a:p>
             <a:pPr marL="342900" indent="-342900">
@@ -26981,14 +26981,14 @@
               <a:buChar char="•"/>
             </a:pPr>
             <a:r>
-              <a:rPr lang="en-US" sz="2400" dirty="0">
+              <a:rPr lang="en-US" sz="2500" dirty="0">
                 <a:solidFill>
                   <a:schemeClr val="accent4"/>
                 </a:solidFill>
               </a:rPr>
               <a:t>arb --fzf honours FZF_DEFAULT_OPTS and FZF_DEFAULT_OPTS_FILE</a:t>
             </a:r>
-            <a:endParaRPr lang="en-US" sz="2400" dirty="0"/>
+            <a:endParaRPr lang="en-US" sz="2500" dirty="0"/>
           </a:p>
           <a:p>
             <a:pPr marL="342900" indent="-342900">
@@ -26999,14 +26999,14 @@
               <a:buChar char="•"/>
             </a:pPr>
             <a:r>
-              <a:rPr lang="en-US" sz="2400" dirty="0">
+              <a:rPr lang="en-US" sz="2500" dirty="0">
                 <a:solidFill>
                   <a:schemeClr val="accent4"/>
                 </a:solidFill>
               </a:rPr>
               <a:t>48 coreutils in the main binary</a:t>
             </a:r>
-            <a:endParaRPr lang="en-US" sz="2400" dirty="0"/>
+            <a:endParaRPr lang="en-US" sz="2500" dirty="0"/>
           </a:p>
         </p:txBody>
       </p:sp>
@@ -29050,14 +29050,14 @@
               <a:buChar char="•"/>
             </a:pPr>
             <a:r>
-              <a:rPr lang="en-US" sz="2400" dirty="0">
+              <a:rPr lang="en-US" sz="2600" dirty="0">
                 <a:solidFill>
                   <a:schemeClr val="bg2"/>
                 </a:solidFill>
               </a:rPr>
               <a:t>src/compsys/ported/ mirrors zsh's Completion/ layout</a:t>
             </a:r>
-            <a:endParaRPr lang="en-US" sz="2400" dirty="0"/>
+            <a:endParaRPr lang="en-US" sz="2600" dirty="0"/>
           </a:p>
           <a:p>
             <a:pPr marL="342900" indent="-342900">
@@ -29068,14 +29068,14 @@
               <a:buChar char="•"/>
             </a:pPr>
             <a:r>
-              <a:rPr lang="en-US" sz="2400" dirty="0">
+              <a:rPr lang="en-US" sz="2600" dirty="0">
                 <a:solidFill>
                   <a:schemeClr val="bg2"/>
                 </a:solidFill>
               </a:rPr>
               <a:t>991 upstream files verbatim, 250 engine ports in Rust</a:t>
             </a:r>
-            <a:endParaRPr lang="en-US" sz="2400" dirty="0"/>
+            <a:endParaRPr lang="en-US" sz="2600" dirty="0"/>
           </a:p>
           <a:p>
             <a:pPr marL="342900" indent="-342900">
@@ -29086,14 +29086,14 @@
               <a:buChar char="•"/>
             </a:pPr>
             <a:r>
-              <a:rPr lang="en-US" sz="2400" dirty="0">
+              <a:rPr lang="en-US" sz="2600" dirty="0">
                 <a:solidFill>
                   <a:schemeClr val="bg2"/>
                 </a:solidFill>
               </a:rPr>
               <a:t>1,241 files in one tree</a:t>
             </a:r>
-            <a:endParaRPr lang="en-US" sz="2400" dirty="0"/>
+            <a:endParaRPr lang="en-US" sz="2600" dirty="0"/>
           </a:p>
         </p:txBody>
       </p:sp>
@@ -30776,14 +30776,14 @@
               <a:buChar char="•"/>
             </a:pPr>
             <a:r>
-              <a:rPr lang="en-US" sz="2400" dirty="0">
+              <a:rPr lang="en-US" sz="2800" dirty="0">
                 <a:solidFill>
                   <a:schemeClr val="accent4"/>
                 </a:solidFill>
               </a:rPr>
               <a:t>tests/tree_walker_absent.rs asserts the old interpreter is gone</a:t>
             </a:r>
-            <a:endParaRPr lang="en-US" sz="2400" dirty="0"/>
+            <a:endParaRPr lang="en-US" sz="2800" dirty="0"/>
           </a:p>
           <a:p>
             <a:pPr marL="342900" indent="-342900">
@@ -30794,14 +30794,14 @@
               <a:buChar char="•"/>
             </a:pPr>
             <a:r>
-              <a:rPr lang="en-US" sz="2400" dirty="0">
+              <a:rPr lang="en-US" sz="2800" dirty="0">
                 <a:solidFill>
                   <a:schemeClr val="accent4"/>
                 </a:solidFill>
               </a:rPr>
               <a:t>174 behavioural pins in no_tree_walker_dispatch.rs</a:t>
             </a:r>
-            <a:endParaRPr lang="en-US" sz="2400" dirty="0"/>
+            <a:endParaRPr lang="en-US" sz="2800" dirty="0"/>
           </a:p>
         </p:txBody>
       </p:sp>
@@ -31119,14 +31119,14 @@
               <a:buChar char="•"/>
             </a:pPr>
             <a:r>
-              <a:rPr lang="en-US" sz="2400" dirty="0">
+              <a:rPr lang="en-US" sz="3000" dirty="0">
                 <a:solidFill>
                   <a:schemeClr val="accent4"/>
                 </a:solidFill>
               </a:rPr>
               <a:t>22,200 cases across 74 modes</a:t>
             </a:r>
-            <a:endParaRPr lang="en-US" sz="2400" dirty="0"/>
+            <a:endParaRPr lang="en-US" sz="3000" dirty="0"/>
           </a:p>
           <a:p>
             <a:pPr marL="342900" indent="-342900">
@@ -31137,14 +31137,14 @@
               <a:buChar char="•"/>
             </a:pPr>
             <a:r>
-              <a:rPr lang="en-US" sz="2400" dirty="0">
+              <a:rPr lang="en-US" sz="3000" dirty="0">
                 <a:solidFill>
                   <a:schemeClr val="accent4"/>
                 </a:solidFill>
               </a:rPr>
               <a:t>27 divergences (0.12%)</a:t>
             </a:r>
-            <a:endParaRPr lang="en-US" sz="2400" dirty="0"/>
+            <a:endParaRPr lang="en-US" sz="3000" dirty="0"/>
           </a:p>
           <a:p>
             <a:pPr marL="342900" indent="-342900">
@@ -31155,14 +31155,14 @@
               <a:buChar char="•"/>
             </a:pPr>
             <a:r>
-              <a:rPr lang="en-US" sz="2400" dirty="0">
+              <a:rPr lang="en-US" sz="3000" dirty="0">
                 <a:solidFill>
                   <a:schemeClr val="accent4"/>
                 </a:solidFill>
               </a:rPr>
               <a:t>71 of 74 modes at zero</a:t>
             </a:r>
-            <a:endParaRPr lang="en-US" sz="2400" dirty="0"/>
+            <a:endParaRPr lang="en-US" sz="3000" dirty="0"/>
           </a:p>
         </p:txBody>
       </p:sp>
@@ -32861,14 +32861,14 @@
               <a:buChar char="•"/>
             </a:pPr>
             <a:r>
-              <a:rPr lang="en-US" sz="2000" dirty="0">
+              <a:rPr lang="en-US" sz="3000" dirty="0">
                 <a:solidFill>
                   <a:schemeClr val="bg2"/>
                 </a:solidFill>
               </a:rPr>
               <a:t>stdin to stdout, or in place with -w</a:t>
             </a:r>
-            <a:endParaRPr lang="en-US" sz="2000" dirty="0"/>
+            <a:endParaRPr lang="en-US" sz="3000" dirty="0"/>
           </a:p>
         </p:txBody>
       </p:sp>
@@ -32980,11 +32980,11 @@
         <p:spPr>
           <a:xfrm>
             <a:off x="822960" y="4434840"/>
-            <a:ext cx="10515600" cy="795528"/>
+            <a:ext cx="10515600" cy="985520"/>
           </a:xfrm>
           <a:prstGeom prst="roundRect">
             <a:avLst>
-              <a:gd name="adj" fmla="val 13793"/>
+              <a:gd name="adj" fmla="val 11134"/>
             </a:avLst>
           </a:prstGeom>
           <a:solidFill>
@@ -33006,8 +33006,8 @@
         </p:nvSpPr>
         <p:spPr>
           <a:xfrm>
-            <a:off x="1143000" y="4636008"/>
-            <a:ext cx="9875520" cy="393192"/>
+            <a:off x="1143000" y="4663440"/>
+            <a:ext cx="9875520" cy="528320"/>
           </a:xfrm>
           <a:prstGeom prst="rect">
             <a:avLst/>
@@ -33020,13 +33020,13 @@
           <a:lstStyle/>
           <a:p>
             <a:pPr indent="0" marL="0">
-              <a:spcAft>
-                <a:spcPts val="300"/>
-              </a:spcAft>
-              <a:buNone/>
-            </a:pPr>
-            <a:r>
-              <a:rPr lang="en-US" sz="1700" dirty="0">
+              <a:lnSpc>
+                <a:spcPct val="125000"/>
+              </a:lnSpc>
+              <a:buNone/>
+            </a:pPr>
+            <a:r>
+              <a:rPr lang="en-US" sz="2600" dirty="0">
                 <a:solidFill>
                   <a:schemeClr val="accent1"/>
                 </a:solidFill>
@@ -33036,7 +33036,7 @@
               </a:rPr>
               <a:t>zshrs --fmt [-w] [-t] [-i N] [FILE...]</a:t>
             </a:r>
-            <a:endParaRPr lang="en-US" sz="1700" dirty="0"/>
+            <a:endParaRPr lang="en-US" sz="2600" dirty="0"/>
           </a:p>
         </p:txBody>
       </p:sp>
@@ -33255,14 +33255,14 @@
               <a:buChar char="•"/>
             </a:pPr>
             <a:r>
-              <a:rPr lang="en-US" sz="2400" dirty="0">
+              <a:rPr lang="en-US" sz="2700" dirty="0">
                 <a:solidFill>
                   <a:schemeClr val="bg2"/>
                 </a:solidFill>
               </a:rPr>
               <a:t>Reads the recorded environment from the canonical shard</a:t>
             </a:r>
-            <a:endParaRPr lang="en-US" sz="2400" dirty="0"/>
+            <a:endParaRPr lang="en-US" sz="2700" dirty="0"/>
           </a:p>
           <a:p>
             <a:pPr marL="342900" indent="-342900">
@@ -33273,14 +33273,14 @@
               <a:buChar char="•"/>
             </a:pPr>
             <a:r>
-              <a:rPr lang="en-US" sz="2400" dirty="0">
+              <a:rPr lang="en-US" sz="2700" dirty="0">
                 <a:solidFill>
                   <a:schemeClr val="bg2"/>
                 </a:solidFill>
               </a:rPr>
               <a:t>Shell-out completers are killed at the request deadline</a:t>
             </a:r>
-            <a:endParaRPr lang="en-US" sz="2400" dirty="0"/>
+            <a:endParaRPr lang="en-US" sz="2700" dirty="0"/>
           </a:p>
         </p:txBody>
       </p:sp>
@@ -33585,7 +33585,7 @@
               <a:buNone/>
             </a:pPr>
             <a:r>
-              <a:rPr lang="en-US" sz="2200" b="1" dirty="0">
+              <a:rPr lang="en-US" sz="2400" b="1" dirty="0">
                 <a:solidFill>
                   <a:schemeClr val="accent1"/>
                 </a:solidFill>
@@ -33595,7 +33595,7 @@
               </a:rPr>
               <a:t>zshrs</a:t>
             </a:r>
-            <a:endParaRPr lang="en-US" sz="2200" dirty="0"/>
+            <a:endParaRPr lang="en-US" sz="2400" dirty="0"/>
           </a:p>
         </p:txBody>
       </p:sp>
@@ -33607,8 +33607,8 @@
         </p:nvSpPr>
         <p:spPr>
           <a:xfrm>
-            <a:off x="1051560" y="2468880"/>
-            <a:ext cx="2712720" cy="731520"/>
+            <a:off x="1051560" y="2514600"/>
+            <a:ext cx="2712720" cy="685800"/>
           </a:xfrm>
           <a:prstGeom prst="rect">
             <a:avLst/>
@@ -33624,14 +33624,14 @@
               <a:buNone/>
             </a:pPr>
             <a:r>
-              <a:rPr lang="en-US" sz="1800" dirty="0">
+              <a:rPr lang="en-US" sz="1500" dirty="0">
                 <a:solidFill>
                   <a:schemeClr val="bg2"/>
                 </a:solidFill>
               </a:rPr>
               <a:t>runtime and shell binary; ported + extensions</a:t>
             </a:r>
-            <a:endParaRPr lang="en-US" sz="1800" dirty="0"/>
+            <a:endParaRPr lang="en-US" sz="1500" dirty="0"/>
           </a:p>
         </p:txBody>
       </p:sp>
@@ -33712,7 +33712,7 @@
               <a:buNone/>
             </a:pPr>
             <a:r>
-              <a:rPr lang="en-US" sz="2200" b="1" dirty="0">
+              <a:rPr lang="en-US" sz="2400" b="1" dirty="0">
                 <a:solidFill>
                   <a:schemeClr val="accent1"/>
                 </a:solidFill>
@@ -33722,7 +33722,7 @@
               </a:rPr>
               <a:t>zshrs-daemon</a:t>
             </a:r>
-            <a:endParaRPr lang="en-US" sz="2200" dirty="0"/>
+            <a:endParaRPr lang="en-US" sz="2400" dirty="0"/>
           </a:p>
         </p:txBody>
       </p:sp>
@@ -33734,8 +33734,8 @@
         </p:nvSpPr>
         <p:spPr>
           <a:xfrm>
-            <a:off x="4724400" y="2468880"/>
-            <a:ext cx="2712720" cy="731520"/>
+            <a:off x="4724400" y="2514600"/>
+            <a:ext cx="2712720" cy="685800"/>
           </a:xfrm>
           <a:prstGeom prst="rect">
             <a:avLst/>
@@ -33751,14 +33751,14 @@
               <a:buNone/>
             </a:pPr>
             <a:r>
-              <a:rPr lang="en-US" sz="1800" dirty="0">
+              <a:rPr lang="en-US" sz="1400" dirty="0">
                 <a:solidFill>
                   <a:schemeClr val="bg2"/>
                 </a:solidFill>
               </a:rPr>
               <a:t>singleton owning shared state; clients are stateless</a:t>
             </a:r>
-            <a:endParaRPr lang="en-US" sz="1800" dirty="0"/>
+            <a:endParaRPr lang="en-US" sz="1400" dirty="0"/>
           </a:p>
         </p:txBody>
       </p:sp>
@@ -33839,7 +33839,7 @@
               <a:buNone/>
             </a:pPr>
             <a:r>
-              <a:rPr lang="en-US" sz="2200" b="1" dirty="0">
+              <a:rPr lang="en-US" sz="2400" b="1" dirty="0">
                 <a:solidFill>
                   <a:schemeClr val="accent1"/>
                 </a:solidFill>
@@ -33849,7 +33849,7 @@
               </a:rPr>
               <a:t>znative</a:t>
             </a:r>
-            <a:endParaRPr lang="en-US" sz="2200" dirty="0"/>
+            <a:endParaRPr lang="en-US" sz="2400" dirty="0"/>
           </a:p>
         </p:txBody>
       </p:sp>
@@ -33861,8 +33861,8 @@
         </p:nvSpPr>
         <p:spPr>
           <a:xfrm>
-            <a:off x="8397240" y="2468880"/>
-            <a:ext cx="2712720" cy="731520"/>
+            <a:off x="8397240" y="2514600"/>
+            <a:ext cx="2712720" cy="685800"/>
           </a:xfrm>
           <a:prstGeom prst="rect">
             <a:avLst/>
@@ -33878,14 +33878,14 @@
               <a:buNone/>
             </a:pPr>
             <a:r>
-              <a:rPr lang="en-US" sz="1800" dirty="0">
+              <a:rPr lang="en-US" sz="2000" dirty="0">
                 <a:solidFill>
                   <a:schemeClr val="bg2"/>
                 </a:solidFill>
               </a:rPr>
               <a:t>plugin ABI SDK; cdylib plugins</a:t>
             </a:r>
-            <a:endParaRPr lang="en-US" sz="1800" dirty="0"/>
+            <a:endParaRPr lang="en-US" sz="2000" dirty="0"/>
           </a:p>
         </p:txBody>
       </p:sp>
@@ -33941,7 +33941,7 @@
               <a:buNone/>
             </a:pPr>
             <a:r>
-              <a:rPr lang="en-US" sz="2200" b="1" dirty="0">
+              <a:rPr lang="en-US" sz="2400" b="1" dirty="0">
                 <a:solidFill>
                   <a:schemeClr val="accent1"/>
                 </a:solidFill>
@@ -33951,7 +33951,7 @@
               </a:rPr>
               <a:t>src/ported</a:t>
             </a:r>
-            <a:endParaRPr lang="en-US" sz="2200" dirty="0"/>
+            <a:endParaRPr lang="en-US" sz="2400" dirty="0"/>
           </a:p>
         </p:txBody>
       </p:sp>
@@ -33963,8 +33963,8 @@
         </p:nvSpPr>
         <p:spPr>
           <a:xfrm>
-            <a:off x="1051560" y="4572000"/>
-            <a:ext cx="2712720" cy="731520"/>
+            <a:off x="1051560" y="4617720"/>
+            <a:ext cx="2712720" cy="685800"/>
           </a:xfrm>
           <a:prstGeom prst="rect">
             <a:avLst/>
@@ -33980,14 +33980,14 @@
               <a:buNone/>
             </a:pPr>
             <a:r>
-              <a:rPr lang="en-US" sz="1800" dirty="0">
+              <a:rPr lang="en-US" sz="2000" dirty="0">
                 <a:solidFill>
                   <a:schemeClr val="bg2"/>
                 </a:solidFill>
               </a:rPr>
               <a:t>106 files, strict 1:1 with zsh C</a:t>
             </a:r>
-            <a:endParaRPr lang="en-US" sz="1800" dirty="0"/>
+            <a:endParaRPr lang="en-US" sz="2000" dirty="0"/>
           </a:p>
         </p:txBody>
       </p:sp>
@@ -34068,7 +34068,7 @@
               <a:buNone/>
             </a:pPr>
             <a:r>
-              <a:rPr lang="en-US" sz="2200" b="1" dirty="0">
+              <a:rPr lang="en-US" sz="2400" b="1" dirty="0">
                 <a:solidFill>
                   <a:schemeClr val="accent1"/>
                 </a:solidFill>
@@ -34078,7 +34078,7 @@
               </a:rPr>
               <a:t>src/extensions</a:t>
             </a:r>
-            <a:endParaRPr lang="en-US" sz="2200" dirty="0"/>
+            <a:endParaRPr lang="en-US" sz="2400" dirty="0"/>
           </a:p>
         </p:txBody>
       </p:sp>
@@ -34090,8 +34090,8 @@
         </p:nvSpPr>
         <p:spPr>
           <a:xfrm>
-            <a:off x="4724400" y="4572000"/>
-            <a:ext cx="2712720" cy="731520"/>
+            <a:off x="4724400" y="4617720"/>
+            <a:ext cx="2712720" cy="685800"/>
           </a:xfrm>
           <a:prstGeom prst="rect">
             <a:avLst/>
@@ -34107,14 +34107,14 @@
               <a:buNone/>
             </a:pPr>
             <a:r>
-              <a:rPr lang="en-US" sz="1800" dirty="0">
+              <a:rPr lang="en-US" sz="2000" dirty="0">
                 <a:solidFill>
                   <a:schemeClr val="bg2"/>
                 </a:solidFill>
               </a:rPr>
               <a:t>116 files, features zsh C lacks</a:t>
             </a:r>
-            <a:endParaRPr lang="en-US" sz="1800" dirty="0"/>
+            <a:endParaRPr lang="en-US" sz="2000" dirty="0"/>
           </a:p>
         </p:txBody>
       </p:sp>
@@ -34195,7 +34195,7 @@
               <a:buNone/>
             </a:pPr>
             <a:r>
-              <a:rPr lang="en-US" sz="2200" b="1" dirty="0">
+              <a:rPr lang="en-US" sz="2400" b="1" dirty="0">
                 <a:solidFill>
                   <a:schemeClr val="accent1"/>
                 </a:solidFill>
@@ -34205,7 +34205,7 @@
               </a:rPr>
               <a:t>src/recorder</a:t>
             </a:r>
-            <a:endParaRPr lang="en-US" sz="2200" dirty="0"/>
+            <a:endParaRPr lang="en-US" sz="2400" dirty="0"/>
           </a:p>
         </p:txBody>
       </p:sp>
@@ -34217,8 +34217,8 @@
         </p:nvSpPr>
         <p:spPr>
           <a:xfrm>
-            <a:off x="8397240" y="4572000"/>
-            <a:ext cx="2712720" cy="731520"/>
+            <a:off x="8397240" y="4617720"/>
+            <a:ext cx="2712720" cy="685800"/>
           </a:xfrm>
           <a:prstGeom prst="rect">
             <a:avLst/>
@@ -34234,14 +34234,14 @@
               <a:buNone/>
             </a:pPr>
             <a:r>
-              <a:rPr lang="en-US" sz="1800" dirty="0">
+              <a:rPr lang="en-US" sz="2000" dirty="0">
                 <a:solidFill>
                   <a:schemeClr val="bg2"/>
                 </a:solidFill>
               </a:rPr>
               <a:t>feature-gated config recorder</a:t>
             </a:r>
-            <a:endParaRPr lang="en-US" sz="1800" dirty="0"/>
+            <a:endParaRPr lang="en-US" sz="2000" dirty="0"/>
           </a:p>
         </p:txBody>
       </p:sp>
@@ -34597,11 +34597,11 @@
         <p:spPr>
           <a:xfrm>
             <a:off x="822960" y="4434840"/>
-            <a:ext cx="10515600" cy="1563624"/>
+            <a:ext cx="10515600" cy="2042160"/>
           </a:xfrm>
           <a:prstGeom prst="roundRect">
             <a:avLst>
-              <a:gd name="adj" fmla="val 7018"/>
+              <a:gd name="adj" fmla="val 5373"/>
             </a:avLst>
           </a:prstGeom>
           <a:solidFill>
@@ -34623,8 +34623,8 @@
         </p:nvSpPr>
         <p:spPr>
           <a:xfrm>
-            <a:off x="1143000" y="4636008"/>
-            <a:ext cx="9875520" cy="1161288"/>
+            <a:off x="1143000" y="4663440"/>
+            <a:ext cx="9875520" cy="1584960"/>
           </a:xfrm>
           <a:prstGeom prst="rect">
             <a:avLst/>
@@ -34637,13 +34637,13 @@
           <a:lstStyle/>
           <a:p>
             <a:pPr indent="0" marL="0">
-              <a:spcAft>
-                <a:spcPts val="300"/>
-              </a:spcAft>
-              <a:buNone/>
-            </a:pPr>
-            <a:r>
-              <a:rPr lang="en-US" sz="1700" dirty="0">
+              <a:lnSpc>
+                <a:spcPct val="125000"/>
+              </a:lnSpc>
+              <a:buNone/>
+            </a:pPr>
+            <a:r>
+              <a:rPr lang="en-US" sz="2600" dirty="0">
                 <a:solidFill>
                   <a:schemeClr val="accent1"/>
                 </a:solidFill>
@@ -34653,17 +34653,17 @@
               </a:rPr>
               <a:t>zshrs --lsp</a:t>
             </a:r>
-            <a:endParaRPr lang="en-US" sz="1700" dirty="0"/>
-          </a:p>
-          <a:p>
-            <a:pPr indent="0" marL="0">
-              <a:spcAft>
-                <a:spcPts val="300"/>
-              </a:spcAft>
-              <a:buNone/>
-            </a:pPr>
-            <a:r>
-              <a:rPr lang="en-US" sz="1700" dirty="0">
+            <a:endParaRPr lang="en-US" sz="2600" dirty="0"/>
+          </a:p>
+          <a:p>
+            <a:pPr indent="0" marL="0">
+              <a:lnSpc>
+                <a:spcPct val="125000"/>
+              </a:lnSpc>
+              <a:buNone/>
+            </a:pPr>
+            <a:r>
+              <a:rPr lang="en-US" sz="2600" dirty="0">
                 <a:solidFill>
                   <a:schemeClr val="accent1"/>
                 </a:solidFill>
@@ -34673,17 +34673,17 @@
               </a:rPr>
               <a:t>zshrs --dap HOST:PORT</a:t>
             </a:r>
-            <a:endParaRPr lang="en-US" sz="1700" dirty="0"/>
-          </a:p>
-          <a:p>
-            <a:pPr indent="0" marL="0">
-              <a:spcAft>
-                <a:spcPts val="300"/>
-              </a:spcAft>
-              <a:buNone/>
-            </a:pPr>
-            <a:r>
-              <a:rPr lang="en-US" sz="1700" dirty="0">
+            <a:endParaRPr lang="en-US" sz="2600" dirty="0"/>
+          </a:p>
+          <a:p>
+            <a:pPr indent="0" marL="0">
+              <a:lnSpc>
+                <a:spcPct val="125000"/>
+              </a:lnSpc>
+              <a:buNone/>
+            </a:pPr>
+            <a:r>
+              <a:rPr lang="en-US" sz="2600" dirty="0">
                 <a:solidFill>
                   <a:schemeClr val="accent1"/>
                 </a:solidFill>
@@ -34693,7 +34693,7 @@
               </a:rPr>
               <a:t>zshrs --dump-plugins</a:t>
             </a:r>
-            <a:endParaRPr lang="en-US" sz="1700" dirty="0"/>
+            <a:endParaRPr lang="en-US" sz="2600" dirty="0"/>
           </a:p>
         </p:txBody>
       </p:sp>
@@ -34912,14 +34912,14 @@
               <a:buChar char="•"/>
             </a:pPr>
             <a:r>
-              <a:rPr lang="en-US" sz="2400" dirty="0">
+              <a:rPr lang="en-US" sz="3000" dirty="0">
                 <a:solidFill>
                   <a:schemeClr val="bg2"/>
                 </a:solidFill>
               </a:rPr>
               <a:t>JSON over pipes</a:t>
             </a:r>
-            <a:endParaRPr lang="en-US" sz="2400" dirty="0"/>
+            <a:endParaRPr lang="en-US" sz="3000" dirty="0"/>
           </a:p>
           <a:p>
             <a:pPr marL="342900" indent="-342900">
@@ -34930,14 +34930,14 @@
               <a:buChar char="•"/>
             </a:pPr>
             <a:r>
-              <a:rPr lang="en-US" sz="2400" dirty="0">
+              <a:rPr lang="en-US" sz="3000" dirty="0">
                 <a:solidFill>
                   <a:schemeClr val="bg2"/>
                 </a:solidFill>
               </a:rPr>
               <a:t>Per-test fd 2 capture, so workers cannot tear each other's output</a:t>
             </a:r>
-            <a:endParaRPr lang="en-US" sz="2400" dirty="0"/>
+            <a:endParaRPr lang="en-US" sz="3000" dirty="0"/>
           </a:p>
         </p:txBody>
       </p:sp>
@@ -35199,11 +35199,11 @@
         <p:spPr>
           <a:xfrm>
             <a:off x="822960" y="1737360"/>
-            <a:ext cx="10515600" cy="2606040"/>
+            <a:ext cx="10515600" cy="2570480"/>
           </a:xfrm>
           <a:prstGeom prst="roundRect">
             <a:avLst>
-              <a:gd name="adj" fmla="val 4211"/>
+              <a:gd name="adj" fmla="val 4269"/>
             </a:avLst>
           </a:prstGeom>
           <a:solidFill>
@@ -35225,8 +35225,8 @@
         </p:nvSpPr>
         <p:spPr>
           <a:xfrm>
-            <a:off x="1143000" y="1938528"/>
-            <a:ext cx="9875520" cy="2203704"/>
+            <a:off x="1143000" y="1965960"/>
+            <a:ext cx="9875520" cy="2113280"/>
           </a:xfrm>
           <a:prstGeom prst="rect">
             <a:avLst/>
@@ -35239,13 +35239,13 @@
           <a:lstStyle/>
           <a:p>
             <a:pPr indent="0" marL="0">
-              <a:spcAft>
-                <a:spcPts val="300"/>
-              </a:spcAft>
-              <a:buNone/>
-            </a:pPr>
-            <a:r>
-              <a:rPr lang="en-US" sz="2200" dirty="0">
+              <a:lnSpc>
+                <a:spcPct val="125000"/>
+              </a:lnSpc>
+              <a:buNone/>
+            </a:pPr>
+            <a:r>
+              <a:rPr lang="en-US" sz="2600" dirty="0">
                 <a:solidFill>
                   <a:schemeClr val="accent1"/>
                 </a:solidFill>
@@ -35255,17 +35255,17 @@
               </a:rPr>
               <a:t>brew tap MenkeTechnologies/menketech</a:t>
             </a:r>
-            <a:endParaRPr lang="en-US" sz="2200" dirty="0"/>
-          </a:p>
-          <a:p>
-            <a:pPr indent="0" marL="0">
-              <a:spcAft>
-                <a:spcPts val="300"/>
-              </a:spcAft>
-              <a:buNone/>
-            </a:pPr>
-            <a:r>
-              <a:rPr lang="en-US" sz="2200" dirty="0">
+            <a:endParaRPr lang="en-US" sz="2600" dirty="0"/>
+          </a:p>
+          <a:p>
+            <a:pPr indent="0" marL="0">
+              <a:lnSpc>
+                <a:spcPct val="125000"/>
+              </a:lnSpc>
+              <a:buNone/>
+            </a:pPr>
+            <a:r>
+              <a:rPr lang="en-US" sz="2600" dirty="0">
                 <a:solidFill>
                   <a:schemeClr val="accent1"/>
                 </a:solidFill>
@@ -35275,17 +35275,17 @@
               </a:rPr>
               <a:t>brew install zshrs</a:t>
             </a:r>
-            <a:endParaRPr lang="en-US" sz="2200" dirty="0"/>
-          </a:p>
-          <a:p>
-            <a:pPr indent="0" marL="0">
-              <a:spcAft>
-                <a:spcPts val="300"/>
-              </a:spcAft>
-              <a:buNone/>
-            </a:pPr>
-            <a:r>
-              <a:rPr lang="en-US" sz="2200" dirty="0">
+            <a:endParaRPr lang="en-US" sz="2600" dirty="0"/>
+          </a:p>
+          <a:p>
+            <a:pPr indent="0" marL="0">
+              <a:lnSpc>
+                <a:spcPct val="125000"/>
+              </a:lnSpc>
+              <a:buNone/>
+            </a:pPr>
+            <a:r>
+              <a:rPr lang="en-US" sz="2600" dirty="0">
                 <a:solidFill>
                   <a:schemeClr val="accent5"/>
                 </a:solidFill>
@@ -35295,17 +35295,17 @@
               </a:rPr>
               <a:t># open a new terminal, then:</a:t>
             </a:r>
-            <a:endParaRPr lang="en-US" sz="2200" dirty="0"/>
-          </a:p>
-          <a:p>
-            <a:pPr indent="0" marL="0">
-              <a:spcAft>
-                <a:spcPts val="300"/>
-              </a:spcAft>
-              <a:buNone/>
-            </a:pPr>
-            <a:r>
-              <a:rPr lang="en-US" sz="2200" dirty="0">
+            <a:endParaRPr lang="en-US" sz="2600" dirty="0"/>
+          </a:p>
+          <a:p>
+            <a:pPr indent="0" marL="0">
+              <a:lnSpc>
+                <a:spcPct val="125000"/>
+              </a:lnSpc>
+              <a:buNone/>
+            </a:pPr>
+            <a:r>
+              <a:rPr lang="en-US" sz="2600" dirty="0">
                 <a:solidFill>
                   <a:schemeClr val="accent1"/>
                 </a:solidFill>
@@ -35315,7 +35315,7 @@
               </a:rPr>
               <a:t>zshrs --version</a:t>
             </a:r>
-            <a:endParaRPr lang="en-US" sz="2200" dirty="0"/>
+            <a:endParaRPr lang="en-US" sz="2600" dirty="0"/>
           </a:p>
         </p:txBody>
       </p:sp>
@@ -35348,14 +35348,14 @@
               <a:buChar char="•"/>
             </a:pPr>
             <a:r>
-              <a:rPr lang="en-US" sz="2200" dirty="0">
+              <a:rPr lang="en-US" sz="2500" dirty="0">
                 <a:solidFill>
                   <a:schemeClr val="bg2"/>
                 </a:solidFill>
               </a:rPr>
               <a:t>Optional: brew install zshrs-all for the recorder and daemon</a:t>
             </a:r>
-            <a:endParaRPr lang="en-US" sz="2200" dirty="0"/>
+            <a:endParaRPr lang="en-US" sz="2500" dirty="0"/>
           </a:p>
           <a:p>
             <a:pPr marL="342900" indent="-342900">
@@ -35366,14 +35366,14 @@
               <a:buChar char="•"/>
             </a:pPr>
             <a:r>
-              <a:rPr lang="en-US" sz="2200" dirty="0">
+              <a:rPr lang="en-US" sz="2500" dirty="0">
                 <a:solidFill>
                   <a:schemeClr val="bg2"/>
                 </a:solidFill>
               </a:rPr>
               <a:t>Optional: cargo install zshrs</a:t>
             </a:r>
-            <a:endParaRPr lang="en-US" sz="2200" dirty="0"/>
+            <a:endParaRPr lang="en-US" sz="2500" dirty="0"/>
           </a:p>
         </p:txBody>
       </p:sp>
@@ -35536,11 +35536,11 @@
         <p:spPr>
           <a:xfrm>
             <a:off x="822960" y="1737360"/>
-            <a:ext cx="10515600" cy="2423160"/>
+            <a:ext cx="10515600" cy="2570480"/>
           </a:xfrm>
           <a:prstGeom prst="roundRect">
             <a:avLst>
-              <a:gd name="adj" fmla="val 4528"/>
+              <a:gd name="adj" fmla="val 4269"/>
             </a:avLst>
           </a:prstGeom>
           <a:solidFill>
@@ -35562,8 +35562,8 @@
         </p:nvSpPr>
         <p:spPr>
           <a:xfrm>
-            <a:off x="1143000" y="1938528"/>
-            <a:ext cx="9875520" cy="2020824"/>
+            <a:off x="1143000" y="1965960"/>
+            <a:ext cx="9875520" cy="2113280"/>
           </a:xfrm>
           <a:prstGeom prst="rect">
             <a:avLst/>
@@ -35576,13 +35576,13 @@
           <a:lstStyle/>
           <a:p>
             <a:pPr indent="0" marL="0">
-              <a:spcAft>
-                <a:spcPts val="300"/>
-              </a:spcAft>
-              <a:buNone/>
-            </a:pPr>
-            <a:r>
-              <a:rPr lang="en-US" sz="2000" dirty="0">
+              <a:lnSpc>
+                <a:spcPct val="125000"/>
+              </a:lnSpc>
+              <a:buNone/>
+            </a:pPr>
+            <a:r>
+              <a:rPr lang="en-US" sz="2600" dirty="0">
                 <a:solidFill>
                   <a:schemeClr val="accent1"/>
                 </a:solidFill>
@@ -35592,17 +35592,17 @@
               </a:rPr>
               <a:t>zsh-bench</a:t>
             </a:r>
-            <a:endParaRPr lang="en-US" sz="2000" dirty="0"/>
-          </a:p>
-          <a:p>
-            <a:pPr indent="0" marL="0">
-              <a:spcAft>
-                <a:spcPts val="300"/>
-              </a:spcAft>
-              <a:buNone/>
-            </a:pPr>
-            <a:r>
-              <a:rPr lang="en-US" sz="2000" dirty="0">
+            <a:endParaRPr lang="en-US" sz="2600" dirty="0"/>
+          </a:p>
+          <a:p>
+            <a:pPr indent="0" marL="0">
+              <a:lnSpc>
+                <a:spcPct val="125000"/>
+              </a:lnSpc>
+              <a:buNone/>
+            </a:pPr>
+            <a:r>
+              <a:rPr lang="en-US" sz="2600" dirty="0">
                 <a:solidFill>
                   <a:schemeClr val="accent1"/>
                 </a:solidFill>
@@ -35612,17 +35612,17 @@
               </a:rPr>
               <a:t>ps -o rss= -p $$</a:t>
             </a:r>
-            <a:endParaRPr lang="en-US" sz="2000" dirty="0"/>
-          </a:p>
-          <a:p>
-            <a:pPr indent="0" marL="0">
-              <a:spcAft>
-                <a:spcPts val="300"/>
-              </a:spcAft>
-              <a:buNone/>
-            </a:pPr>
-            <a:r>
-              <a:rPr lang="en-US" sz="2000" dirty="0">
+            <a:endParaRPr lang="en-US" sz="2600" dirty="0"/>
+          </a:p>
+          <a:p>
+            <a:pPr indent="0" marL="0">
+              <a:lnSpc>
+                <a:spcPct val="125000"/>
+              </a:lnSpc>
+              <a:buNone/>
+            </a:pPr>
+            <a:r>
+              <a:rPr lang="en-US" sz="2600" dirty="0">
                 <a:solidFill>
                   <a:schemeClr val="accent1"/>
                 </a:solidFill>
@@ -35632,17 +35632,17 @@
               </a:rPr>
               <a:t>cargo build -p zshrs-daemon</a:t>
             </a:r>
-            <a:endParaRPr lang="en-US" sz="2000" dirty="0"/>
-          </a:p>
-          <a:p>
-            <a:pPr indent="0" marL="0">
-              <a:spcAft>
-                <a:spcPts val="300"/>
-              </a:spcAft>
-              <a:buNone/>
-            </a:pPr>
-            <a:r>
-              <a:rPr lang="en-US" sz="2000" dirty="0">
+            <a:endParaRPr lang="en-US" sz="2600" dirty="0"/>
+          </a:p>
+          <a:p>
+            <a:pPr indent="0" marL="0">
+              <a:lnSpc>
+                <a:spcPct val="125000"/>
+              </a:lnSpc>
+              <a:buNone/>
+            </a:pPr>
+            <a:r>
+              <a:rPr lang="en-US" sz="2600" dirty="0">
                 <a:solidFill>
                   <a:schemeClr val="accent1"/>
                 </a:solidFill>
@@ -35652,7 +35652,7 @@
               </a:rPr>
               <a:t>cargo test --test '*parity*' -- --test-threads=1</a:t>
             </a:r>
-            <a:endParaRPr lang="en-US" sz="2000" dirty="0"/>
+            <a:endParaRPr lang="en-US" sz="2600" dirty="0"/>
           </a:p>
         </p:txBody>
       </p:sp>
@@ -35685,14 +35685,14 @@
               <a:buChar char="•"/>
             </a:pPr>
             <a:r>
-              <a:rPr lang="en-US" sz="2200" dirty="0">
+              <a:rPr lang="en-US" sz="2500" dirty="0">
                 <a:solidFill>
                   <a:schemeClr val="accent4"/>
                 </a:solidFill>
               </a:rPr>
               <a:t>Serial runs only: parallel runs report false failures</a:t>
             </a:r>
-            <a:endParaRPr lang="en-US" sz="2200" dirty="0"/>
+            <a:endParaRPr lang="en-US" sz="2500" dirty="0"/>
           </a:p>
           <a:p>
             <a:pPr marL="342900" indent="-342900">
@@ -35703,14 +35703,14 @@
               <a:buChar char="•"/>
             </a:pPr>
             <a:r>
-              <a:rPr lang="en-US" sz="2200" dirty="0">
+              <a:rPr lang="en-US" sz="2500" dirty="0">
                 <a:solidFill>
                   <a:schemeClr val="accent4"/>
                 </a:solidFill>
               </a:rPr>
               <a:t>Post any divergence as an issue</a:t>
             </a:r>
-            <a:endParaRPr lang="en-US" sz="2200" dirty="0"/>
+            <a:endParaRPr lang="en-US" sz="2500" dirty="0"/>
           </a:p>
         </p:txBody>
       </p:sp>
@@ -35873,11 +35873,11 @@
         <p:spPr>
           <a:xfrm>
             <a:off x="822960" y="1737360"/>
-            <a:ext cx="10515600" cy="3611880"/>
+            <a:ext cx="10515600" cy="4155440"/>
           </a:xfrm>
           <a:prstGeom prst="roundRect">
             <a:avLst>
-              <a:gd name="adj" fmla="val 3038"/>
+              <a:gd name="adj" fmla="val 2641"/>
             </a:avLst>
           </a:prstGeom>
           <a:solidFill>
@@ -35899,8 +35899,8 @@
         </p:nvSpPr>
         <p:spPr>
           <a:xfrm>
-            <a:off x="1143000" y="1938528"/>
-            <a:ext cx="9875520" cy="3209544"/>
+            <a:off x="1143000" y="1965960"/>
+            <a:ext cx="9875520" cy="3698240"/>
           </a:xfrm>
           <a:prstGeom prst="rect">
             <a:avLst/>
@@ -35913,13 +35913,13 @@
           <a:lstStyle/>
           <a:p>
             <a:pPr indent="0" marL="0">
-              <a:spcAft>
-                <a:spcPts val="300"/>
-              </a:spcAft>
-              <a:buNone/>
-            </a:pPr>
-            <a:r>
-              <a:rPr lang="en-US" sz="2000" dirty="0">
+              <a:lnSpc>
+                <a:spcPct val="125000"/>
+              </a:lnSpc>
+              <a:buNone/>
+            </a:pPr>
+            <a:r>
+              <a:rPr lang="en-US" sz="2600" dirty="0">
                 <a:solidFill>
                   <a:schemeClr val="accent5"/>
                 </a:solidFill>
@@ -35929,17 +35929,17 @@
               </a:rPr>
               <a:t># ~/.zshrs/zshrs.toml</a:t>
             </a:r>
-            <a:endParaRPr lang="en-US" sz="2000" dirty="0"/>
-          </a:p>
-          <a:p>
-            <a:pPr indent="0" marL="0">
-              <a:spcAft>
-                <a:spcPts val="300"/>
-              </a:spcAft>
-              <a:buNone/>
-            </a:pPr>
-            <a:r>
-              <a:rPr lang="en-US" sz="2000" dirty="0">
+            <a:endParaRPr lang="en-US" sz="2600" dirty="0"/>
+          </a:p>
+          <a:p>
+            <a:pPr indent="0" marL="0">
+              <a:lnSpc>
+                <a:spcPct val="125000"/>
+              </a:lnSpc>
+              <a:buNone/>
+            </a:pPr>
+            <a:r>
+              <a:rPr lang="en-US" sz="2600" dirty="0">
                 <a:solidFill>
                   <a:schemeClr val="accent3"/>
                 </a:solidFill>
@@ -35949,17 +35949,17 @@
               </a:rPr>
               <a:t>[zle]</a:t>
             </a:r>
-            <a:endParaRPr lang="en-US" sz="2000" dirty="0"/>
-          </a:p>
-          <a:p>
-            <a:pPr indent="0" marL="0">
-              <a:spcAft>
-                <a:spcPts val="300"/>
-              </a:spcAft>
-              <a:buNone/>
-            </a:pPr>
-            <a:r>
-              <a:rPr lang="en-US" sz="2000" dirty="0">
+            <a:endParaRPr lang="en-US" sz="2600" dirty="0"/>
+          </a:p>
+          <a:p>
+            <a:pPr indent="0" marL="0">
+              <a:lnSpc>
+                <a:spcPct val="125000"/>
+              </a:lnSpc>
+              <a:buNone/>
+            </a:pPr>
+            <a:r>
+              <a:rPr lang="en-US" sz="2600" dirty="0">
                 <a:solidFill>
                   <a:schemeClr val="accent1"/>
                 </a:solidFill>
@@ -35969,17 +35969,17 @@
               </a:rPr>
               <a:t>syntax_highlight = true</a:t>
             </a:r>
-            <a:endParaRPr lang="en-US" sz="2000" dirty="0"/>
-          </a:p>
-          <a:p>
-            <a:pPr indent="0" marL="0">
-              <a:spcAft>
-                <a:spcPts val="300"/>
-              </a:spcAft>
-              <a:buNone/>
-            </a:pPr>
-            <a:r>
-              <a:rPr lang="en-US" sz="2000" dirty="0">
+            <a:endParaRPr lang="en-US" sz="2600" dirty="0"/>
+          </a:p>
+          <a:p>
+            <a:pPr indent="0" marL="0">
+              <a:lnSpc>
+                <a:spcPct val="125000"/>
+              </a:lnSpc>
+              <a:buNone/>
+            </a:pPr>
+            <a:r>
+              <a:rPr lang="en-US" sz="2600" dirty="0">
                 <a:solidFill>
                   <a:schemeClr val="accent5"/>
                 </a:solidFill>
@@ -35989,17 +35989,17 @@
               </a:rPr>
               <a:t># shell:</a:t>
             </a:r>
-            <a:endParaRPr lang="en-US" sz="2000" dirty="0"/>
-          </a:p>
-          <a:p>
-            <a:pPr indent="0" marL="0">
-              <a:spcAft>
-                <a:spcPts val="300"/>
-              </a:spcAft>
-              <a:buNone/>
-            </a:pPr>
-            <a:r>
-              <a:rPr lang="en-US" sz="2000" dirty="0">
+            <a:endParaRPr lang="en-US" sz="2600" dirty="0"/>
+          </a:p>
+          <a:p>
+            <a:pPr indent="0" marL="0">
+              <a:lnSpc>
+                <a:spcPct val="125000"/>
+              </a:lnSpc>
+              <a:buNone/>
+            </a:pPr>
+            <a:r>
+              <a:rPr lang="en-US" sz="2600" dirty="0">
                 <a:solidFill>
                   <a:schemeClr val="accent1"/>
                 </a:solidFill>
@@ -36009,17 +36009,17 @@
               </a:rPr>
               <a:t>zd daemon start</a:t>
             </a:r>
-            <a:endParaRPr lang="en-US" sz="2000" dirty="0"/>
-          </a:p>
-          <a:p>
-            <a:pPr indent="0" marL="0">
-              <a:spcAft>
-                <a:spcPts val="300"/>
-              </a:spcAft>
-              <a:buNone/>
-            </a:pPr>
-            <a:r>
-              <a:rPr lang="en-US" sz="2000" dirty="0">
+            <a:endParaRPr lang="en-US" sz="2600" dirty="0"/>
+          </a:p>
+          <a:p>
+            <a:pPr indent="0" marL="0">
+              <a:lnSpc>
+                <a:spcPct val="125000"/>
+              </a:lnSpc>
+              <a:buNone/>
+            </a:pPr>
+            <a:r>
+              <a:rPr lang="en-US" sz="2600" dirty="0">
                 <a:solidFill>
                   <a:schemeClr val="accent1"/>
                 </a:solidFill>
@@ -36029,17 +36029,17 @@
               </a:rPr>
               <a:t>zshrs --prewarm-autoloads</a:t>
             </a:r>
-            <a:endParaRPr lang="en-US" sz="2000" dirty="0"/>
-          </a:p>
-          <a:p>
-            <a:pPr indent="0" marL="0">
-              <a:spcAft>
-                <a:spcPts val="300"/>
-              </a:spcAft>
-              <a:buNone/>
-            </a:pPr>
-            <a:r>
-              <a:rPr lang="en-US" sz="2000" dirty="0">
+            <a:endParaRPr lang="en-US" sz="2600" dirty="0"/>
+          </a:p>
+          <a:p>
+            <a:pPr indent="0" marL="0">
+              <a:lnSpc>
+                <a:spcPct val="125000"/>
+              </a:lnSpc>
+              <a:buNone/>
+            </a:pPr>
+            <a:r>
+              <a:rPr lang="en-US" sz="2600" dirty="0">
                 <a:solidFill>
                   <a:schemeClr val="accent1"/>
                 </a:solidFill>
@@ -36049,7 +36049,7 @@
               </a:rPr>
               <a:t>znative load owner/repo</a:t>
             </a:r>
-            <a:endParaRPr lang="en-US" sz="2000" dirty="0"/>
+            <a:endParaRPr lang="en-US" sz="2600" dirty="0"/>
           </a:p>
         </p:txBody>
       </p:sp>
@@ -36255,14 +36255,14 @@
               <a:buNone/>
             </a:pPr>
             <a:r>
-              <a:rPr lang="en-US" sz="2400" b="1" dirty="0">
+              <a:rPr lang="en-US" sz="2600" b="1" dirty="0">
                 <a:solidFill>
                   <a:schemeClr val="accent3"/>
                 </a:solidFill>
               </a:rPr>
               <a:t>1</a:t>
             </a:r>
-            <a:endParaRPr lang="en-US" sz="2400" dirty="0"/>
+            <a:endParaRPr lang="en-US" sz="2600" dirty="0"/>
           </a:p>
         </p:txBody>
       </p:sp>
@@ -36291,14 +36291,14 @@
               <a:buNone/>
             </a:pPr>
             <a:r>
-              <a:rPr lang="en-US" sz="2200" dirty="0">
+              <a:rPr lang="en-US" sz="2800" dirty="0">
                 <a:solidFill>
                   <a:schemeClr val="accent4"/>
                 </a:solidFill>
               </a:rPr>
               <a:t>Use it.</a:t>
             </a:r>
-            <a:endParaRPr lang="en-US" sz="2200" dirty="0"/>
+            <a:endParaRPr lang="en-US" sz="2800" dirty="0"/>
           </a:p>
         </p:txBody>
       </p:sp>
@@ -36354,14 +36354,14 @@
               <a:buNone/>
             </a:pPr>
             <a:r>
-              <a:rPr lang="en-US" sz="2400" b="1" dirty="0">
+              <a:rPr lang="en-US" sz="2600" b="1" dirty="0">
                 <a:solidFill>
                   <a:schemeClr val="accent3"/>
                 </a:solidFill>
               </a:rPr>
               <a:t>2</a:t>
             </a:r>
-            <a:endParaRPr lang="en-US" sz="2400" dirty="0"/>
+            <a:endParaRPr lang="en-US" sz="2600" dirty="0"/>
           </a:p>
         </p:txBody>
       </p:sp>
@@ -36390,14 +36390,14 @@
               <a:buNone/>
             </a:pPr>
             <a:r>
-              <a:rPr lang="en-US" sz="2200" dirty="0">
+              <a:rPr lang="en-US" sz="2800" dirty="0">
                 <a:solidFill>
                   <a:schemeClr val="accent4"/>
                 </a:solidFill>
               </a:rPr>
               <a:t>Check the parity.</a:t>
             </a:r>
-            <a:endParaRPr lang="en-US" sz="2200" dirty="0"/>
+            <a:endParaRPr lang="en-US" sz="2800" dirty="0"/>
           </a:p>
         </p:txBody>
       </p:sp>
@@ -36453,14 +36453,14 @@
               <a:buNone/>
             </a:pPr>
             <a:r>
-              <a:rPr lang="en-US" sz="2400" b="1" dirty="0">
+              <a:rPr lang="en-US" sz="2600" b="1" dirty="0">
                 <a:solidFill>
                   <a:schemeClr val="accent3"/>
                 </a:solidFill>
               </a:rPr>
               <a:t>3</a:t>
             </a:r>
-            <a:endParaRPr lang="en-US" sz="2400" dirty="0"/>
+            <a:endParaRPr lang="en-US" sz="2600" dirty="0"/>
           </a:p>
         </p:txBody>
       </p:sp>
@@ -36489,14 +36489,14 @@
               <a:buNone/>
             </a:pPr>
             <a:r>
-              <a:rPr lang="en-US" sz="2200" dirty="0">
+              <a:rPr lang="en-US" sz="2400" dirty="0">
                 <a:solidFill>
                   <a:schemeClr val="accent4"/>
                 </a:solidFill>
               </a:rPr>
               <a:t>Review security, performance, energy and hardware.</a:t>
             </a:r>
-            <a:endParaRPr lang="en-US" sz="2200" dirty="0"/>
+            <a:endParaRPr lang="en-US" sz="2400" dirty="0"/>
           </a:p>
         </p:txBody>
       </p:sp>
@@ -36552,14 +36552,14 @@
               <a:buNone/>
             </a:pPr>
             <a:r>
-              <a:rPr lang="en-US" sz="2400" b="1" dirty="0">
+              <a:rPr lang="en-US" sz="2600" b="1" dirty="0">
                 <a:solidFill>
                   <a:schemeClr val="accent3"/>
                 </a:solidFill>
               </a:rPr>
               <a:t>4</a:t>
             </a:r>
-            <a:endParaRPr lang="en-US" sz="2400" dirty="0"/>
+            <a:endParaRPr lang="en-US" sz="2600" dirty="0"/>
           </a:p>
         </p:txBody>
       </p:sp>
@@ -36588,14 +36588,14 @@
               <a:buNone/>
             </a:pPr>
             <a:r>
-              <a:rPr lang="en-US" sz="2200" dirty="0">
+              <a:rPr lang="en-US" sz="2800" dirty="0">
                 <a:solidFill>
                   <a:schemeClr val="accent4"/>
                 </a:solidFill>
               </a:rPr>
               <a:t>Open issues.</a:t>
             </a:r>
-            <a:endParaRPr lang="en-US" sz="2200" dirty="0"/>
+            <a:endParaRPr lang="en-US" sz="2800" dirty="0"/>
           </a:p>
         </p:txBody>
       </p:sp>
@@ -36651,14 +36651,14 @@
               <a:buNone/>
             </a:pPr>
             <a:r>
-              <a:rPr lang="en-US" sz="2400" b="1" dirty="0">
+              <a:rPr lang="en-US" sz="2600" b="1" dirty="0">
                 <a:solidFill>
                   <a:schemeClr val="accent3"/>
                 </a:solidFill>
               </a:rPr>
               <a:t>5</a:t>
             </a:r>
-            <a:endParaRPr lang="en-US" sz="2400" dirty="0"/>
+            <a:endParaRPr lang="en-US" sz="2600" dirty="0"/>
           </a:p>
         </p:txBody>
       </p:sp>
@@ -36687,14 +36687,14 @@
               <a:buNone/>
             </a:pPr>
             <a:r>
-              <a:rPr lang="en-US" sz="2200" dirty="0">
+              <a:rPr lang="en-US" sz="2800" dirty="0">
                 <a:solidFill>
                   <a:schemeClr val="accent4"/>
                 </a:solidFill>
               </a:rPr>
               <a:t>Ask questions.</a:t>
             </a:r>
-            <a:endParaRPr lang="en-US" sz="2200" dirty="0"/>
+            <a:endParaRPr lang="en-US" sz="2800" dirty="0"/>
           </a:p>
         </p:txBody>
       </p:sp>
@@ -36857,11 +36857,11 @@
         <p:spPr>
           <a:xfrm>
             <a:off x="822960" y="1737360"/>
-            <a:ext cx="10515600" cy="2057400"/>
+            <a:ext cx="10515600" cy="2042160"/>
           </a:xfrm>
           <a:prstGeom prst="roundRect">
             <a:avLst>
-              <a:gd name="adj" fmla="val 5333"/>
+              <a:gd name="adj" fmla="val 5373"/>
             </a:avLst>
           </a:prstGeom>
           <a:solidFill>
@@ -36883,8 +36883,8 @@
         </p:nvSpPr>
         <p:spPr>
           <a:xfrm>
-            <a:off x="1143000" y="1938528"/>
-            <a:ext cx="9875520" cy="1655064"/>
+            <a:off x="1143000" y="1965960"/>
+            <a:ext cx="9875520" cy="1584960"/>
           </a:xfrm>
           <a:prstGeom prst="rect">
             <a:avLst/>
@@ -36897,13 +36897,13 @@
           <a:lstStyle/>
           <a:p>
             <a:pPr indent="0" marL="0">
-              <a:spcAft>
-                <a:spcPts val="300"/>
-              </a:spcAft>
-              <a:buNone/>
-            </a:pPr>
-            <a:r>
-              <a:rPr lang="en-US" sz="2200" dirty="0">
+              <a:lnSpc>
+                <a:spcPct val="125000"/>
+              </a:lnSpc>
+              <a:buNone/>
+            </a:pPr>
+            <a:r>
+              <a:rPr lang="en-US" sz="2600" dirty="0">
                 <a:solidFill>
                   <a:schemeClr val="accent1"/>
                 </a:solidFill>
@@ -36913,17 +36913,17 @@
               </a:rPr>
               <a:t>brew tap MenkeTechnologies/menketech</a:t>
             </a:r>
-            <a:endParaRPr lang="en-US" sz="2200" dirty="0"/>
-          </a:p>
-          <a:p>
-            <a:pPr indent="0" marL="0">
-              <a:spcAft>
-                <a:spcPts val="300"/>
-              </a:spcAft>
-              <a:buNone/>
-            </a:pPr>
-            <a:r>
-              <a:rPr lang="en-US" sz="2200" dirty="0">
+            <a:endParaRPr lang="en-US" sz="2600" dirty="0"/>
+          </a:p>
+          <a:p>
+            <a:pPr indent="0" marL="0">
+              <a:lnSpc>
+                <a:spcPct val="125000"/>
+              </a:lnSpc>
+              <a:buNone/>
+            </a:pPr>
+            <a:r>
+              <a:rPr lang="en-US" sz="2600" dirty="0">
                 <a:solidFill>
                   <a:schemeClr val="accent1"/>
                 </a:solidFill>
@@ -36933,17 +36933,17 @@
               </a:rPr>
               <a:t>brew install zshrs</a:t>
             </a:r>
-            <a:endParaRPr lang="en-US" sz="2200" dirty="0"/>
-          </a:p>
-          <a:p>
-            <a:pPr indent="0" marL="0">
-              <a:spcAft>
-                <a:spcPts val="300"/>
-              </a:spcAft>
-              <a:buNone/>
-            </a:pPr>
-            <a:r>
-              <a:rPr lang="en-US" sz="2200" dirty="0">
+            <a:endParaRPr lang="en-US" sz="2600" dirty="0"/>
+          </a:p>
+          <a:p>
+            <a:pPr indent="0" marL="0">
+              <a:lnSpc>
+                <a:spcPct val="125000"/>
+              </a:lnSpc>
+              <a:buNone/>
+            </a:pPr>
+            <a:r>
+              <a:rPr lang="en-US" sz="2600" dirty="0">
                 <a:solidFill>
                   <a:schemeClr val="accent5"/>
                 </a:solidFill>
@@ -36953,7 +36953,7 @@
               </a:rPr>
               <a:t>brew install zshrs-all   # adds recorder + daemon</a:t>
             </a:r>
-            <a:endParaRPr lang="en-US" sz="2200" dirty="0"/>
+            <a:endParaRPr lang="en-US" sz="2600" dirty="0"/>
           </a:p>
         </p:txBody>
       </p:sp>
@@ -37350,7 +37350,7 @@
                 <a:gridCol w="4206240"/>
                 <a:gridCol w="6309360"/>
               </a:tblGrid>
-              <a:tr h="566928">
+              <a:tr h="822960">
                 <a:tc>
                   <a:txBody>
                     <a:bodyPr/>
@@ -37360,14 +37360,14 @@
                         <a:buNone/>
                       </a:pPr>
                       <a:r>
-                        <a:rPr lang="en-US" sz="2000" b="1" dirty="0">
+                        <a:rPr lang="en-US" sz="2100" b="1" dirty="0">
                           <a:solidFill>
                             <a:schemeClr val="accent2"/>
                           </a:solidFill>
                         </a:rPr>
                         <a:t>Test</a:t>
                       </a:r>
-                      <a:endParaRPr lang="en-US" sz="2000" dirty="0"/>
+                      <a:endParaRPr lang="en-US" sz="2100" dirty="0"/>
                     </a:p>
                   </a:txBody>
                   <a:tcPr marL="91440" marR="91440" marT="45720" marB="45720" anchor="ctr">
@@ -37418,14 +37418,14 @@
                         <a:buNone/>
                       </a:pPr>
                       <a:r>
-                        <a:rPr lang="en-US" sz="2000" b="1" dirty="0">
+                        <a:rPr lang="en-US" sz="2100" b="1" dirty="0">
                           <a:solidFill>
                             <a:schemeClr val="accent2"/>
                           </a:solidFill>
                         </a:rPr>
                         <a:t>Why it is open</a:t>
                       </a:r>
-                      <a:endParaRPr lang="en-US" sz="2000" dirty="0"/>
+                      <a:endParaRPr lang="en-US" sz="2100" dirty="0"/>
                     </a:p>
                   </a:txBody>
                   <a:tcPr marL="91440" marR="91440" marT="45720" marB="45720" anchor="ctr">
@@ -37468,7 +37468,7 @@
                   </a:tcPr>
                 </a:tc>
               </a:tr>
-              <a:tr h="566928">
+              <a:tr h="822960">
                 <a:tc>
                   <a:txBody>
                     <a:bodyPr/>
@@ -37478,14 +37478,14 @@
                         <a:buNone/>
                       </a:pPr>
                       <a:r>
-                        <a:rPr lang="en-US" sz="2000" dirty="0">
+                        <a:rPr lang="en-US" sz="2100" dirty="0">
                           <a:solidFill>
                             <a:schemeClr val="accent4"/>
                           </a:solidFill>
                         </a:rPr>
                         <a:t>nul_quoting_format</a:t>
                       </a:r>
-                      <a:endParaRPr lang="en-US" sz="2000" dirty="0"/>
+                      <a:endParaRPr lang="en-US" sz="2100" dirty="0"/>
                     </a:p>
                   </a:txBody>
                   <a:tcPr marL="91440" marR="91440" marT="45720" marB="45720" anchor="ctr">
@@ -37536,14 +37536,14 @@
                         <a:buNone/>
                       </a:pPr>
                       <a:r>
-                        <a:rPr lang="en-US" sz="2000" dirty="0">
+                        <a:rPr lang="en-US" sz="2100" dirty="0">
                           <a:solidFill>
                             <a:schemeClr val="accent4"/>
                           </a:solidFill>
                         </a:rPr>
                         <a:t>Structural: C metafies NUL, Rust String holds a real NUL</a:t>
                       </a:r>
-                      <a:endParaRPr lang="en-US" sz="2000" dirty="0"/>
+                      <a:endParaRPr lang="en-US" sz="2100" dirty="0"/>
                     </a:p>
                   </a:txBody>
                   <a:tcPr marL="91440" marR="91440" marT="45720" marB="45720" anchor="ctr">
@@ -37586,7 +37586,7 @@
                   </a:tcPr>
                 </a:tc>
               </a:tr>
-              <a:tr h="566928">
+              <a:tr h="822960">
                 <a:tc>
                   <a:txBody>
                     <a:bodyPr/>
@@ -37596,14 +37596,14 @@
                         <a:buNone/>
                       </a:pPr>
                       <a:r>
-                        <a:rPr lang="en-US" sz="2000" dirty="0">
+                        <a:rPr lang="en-US" sz="2100" dirty="0">
                           <a:solidFill>
                             <a:schemeClr val="accent4"/>
                           </a:solidFill>
                         </a:rPr>
                         <a:t>zmodload -R complete</a:t>
                       </a:r>
-                      <a:endParaRPr lang="en-US" sz="2000" dirty="0"/>
+                      <a:endParaRPr lang="en-US" sz="2100" dirty="0"/>
                     </a:p>
                   </a:txBody>
                   <a:tcPr marL="91440" marR="91440" marT="45720" marB="45720" anchor="ctr">
@@ -37654,14 +37654,14 @@
                         <a:buNone/>
                       </a:pPr>
                       <a:r>
-                        <a:rPr lang="en-US" sz="2000" dirty="0">
+                        <a:rPr lang="en-US" sz="2100" dirty="0">
                           <a:solidFill>
                             <a:schemeClr val="accent4"/>
                           </a:solidFill>
                         </a:rPr>
                         <a:t>Not a gap: -R loads native Rust plugins by design</a:t>
                       </a:r>
-                      <a:endParaRPr lang="en-US" sz="2000" dirty="0"/>
+                      <a:endParaRPr lang="en-US" sz="2100" dirty="0"/>
                     </a:p>
                   </a:txBody>
                   <a:tcPr marL="91440" marR="91440" marT="45720" marB="45720" anchor="ctr">
@@ -37704,7 +37704,7 @@
                   </a:tcPr>
                 </a:tc>
               </a:tr>
-              <a:tr h="566928">
+              <a:tr h="822960">
                 <a:tc>
                   <a:txBody>
                     <a:bodyPr/>
@@ -37714,14 +37714,14 @@
                         <a:buNone/>
                       </a:pPr>
                       <a:r>
-                        <a:rPr lang="en-US" sz="2000" dirty="0">
+                        <a:rPr lang="en-US" sz="2100" dirty="0">
                           <a:solidFill>
                             <a:schemeClr val="accent4"/>
                           </a:solidFill>
                         </a:rPr>
                         <a:t>config_state_parity (aliases)</a:t>
                       </a:r>
-                      <a:endParaRPr lang="en-US" sz="2000" dirty="0"/>
+                      <a:endParaRPr lang="en-US" sz="2100" dirty="0"/>
                     </a:p>
                   </a:txBody>
                   <a:tcPr marL="91440" marR="91440" marT="45720" marB="45720" anchor="ctr">
@@ -37772,14 +37772,14 @@
                         <a:buNone/>
                       </a:pPr>
                       <a:r>
-                        <a:rPr lang="en-US" sz="2000" dirty="0">
+                        <a:rPr lang="en-US" sz="2100" dirty="0">
                           <a:solidFill>
                             <a:schemeClr val="accent4"/>
                           </a:solidFill>
                         </a:rPr>
                         <a:t>RC_QUOTES '' in alias bodies; target behaviour undecided</a:t>
                       </a:r>
-                      <a:endParaRPr lang="en-US" sz="2000" dirty="0"/>
+                      <a:endParaRPr lang="en-US" sz="2100" dirty="0"/>
                     </a:p>
                   </a:txBody>
                   <a:tcPr marL="91440" marR="91440" marT="45720" marB="45720" anchor="ctr">
@@ -37822,7 +37822,7 @@
                   </a:tcPr>
                 </a:tc>
               </a:tr>
-              <a:tr h="566928">
+              <a:tr h="822960">
                 <a:tc>
                   <a:txBody>
                     <a:bodyPr/>
@@ -37832,14 +37832,14 @@
                         <a:buNone/>
                       </a:pPr>
                       <a:r>
-                        <a:rPr lang="en-US" sz="2000" dirty="0">
+                        <a:rPr lang="en-US" sz="2100" dirty="0">
                           <a:solidFill>
                             <a:schemeClr val="accent4"/>
                           </a:solidFill>
                         </a:rPr>
                         <a:t>bulk_vw_fc_row_015, times_builtin_summary</a:t>
                       </a:r>
-                      <a:endParaRPr lang="en-US" sz="2000" dirty="0"/>
+                      <a:endParaRPr lang="en-US" sz="2100" dirty="0"/>
                     </a:p>
                   </a:txBody>
                   <a:tcPr marL="91440" marR="91440" marT="45720" marB="45720" anchor="ctr">
@@ -37890,14 +37890,14 @@
                         <a:buNone/>
                       </a:pPr>
                       <a:r>
-                        <a:rPr lang="en-US" sz="2000" dirty="0">
+                        <a:rPr lang="en-US" sz="2100" dirty="0">
                           <a:solidFill>
                             <a:schemeClr val="accent4"/>
                           </a:solidFill>
                         </a:rPr>
                         <a:t>Load artifacts; pass serially</a:t>
                       </a:r>
-                      <a:endParaRPr lang="en-US" sz="2000" dirty="0"/>
+                      <a:endParaRPr lang="en-US" sz="2100" dirty="0"/>
                     </a:p>
                   </a:txBody>
                   <a:tcPr marL="91440" marR="91440" marT="45720" marB="45720" anchor="ctr">
@@ -38146,7 +38146,7 @@
               <a:buNone/>
             </a:pPr>
             <a:r>
-              <a:rPr lang="en-US" sz="2200" b="1" dirty="0">
+              <a:rPr lang="en-US" sz="2600" b="1" dirty="0">
                 <a:solidFill>
                   <a:schemeClr val="accent1"/>
                 </a:solidFill>
@@ -38156,7 +38156,7 @@
               </a:rPr>
               <a:t>The claim</a:t>
             </a:r>
-            <a:endParaRPr lang="en-US" sz="2200" dirty="0"/>
+            <a:endParaRPr lang="en-US" sz="2600" dirty="0"/>
           </a:p>
         </p:txBody>
       </p:sp>
@@ -38169,7 +38169,7 @@
         <p:spPr>
           <a:xfrm>
             <a:off x="1097280" y="2560320"/>
-            <a:ext cx="4572000" cy="2834640"/>
+            <a:ext cx="4572000" cy="2788920"/>
           </a:xfrm>
           <a:prstGeom prst="rect">
             <a:avLst/>
@@ -38183,56 +38183,56 @@
           <a:p>
             <a:pPr marL="342900" indent="-342900">
               <a:spcAft>
-                <a:spcPts val="1000"/>
+                <a:spcPts val="800"/>
               </a:spcAft>
               <a:buSzPct val="100000"/>
               <a:buChar char="•"/>
             </a:pPr>
             <a:r>
-              <a:rPr lang="en-US" sz="2200" dirty="0">
+              <a:rPr lang="en-US" sz="2500" dirty="0">
                 <a:solidFill>
                   <a:schemeClr val="bg2"/>
                 </a:solidFill>
               </a:rPr>
               <a:t>Startup layers hide interpretation cost</a:t>
             </a:r>
-            <a:endParaRPr lang="en-US" sz="2200" dirty="0"/>
+            <a:endParaRPr lang="en-US" sz="2500" dirty="0"/>
           </a:p>
           <a:p>
             <a:pPr marL="342900" indent="-342900">
               <a:spcAft>
-                <a:spcPts val="1000"/>
+                <a:spcPts val="800"/>
               </a:spcAft>
               <a:buSzPct val="100000"/>
               <a:buChar char="•"/>
             </a:pPr>
             <a:r>
-              <a:rPr lang="en-US" sz="2200" dirty="0">
+              <a:rPr lang="en-US" sz="2500" dirty="0">
                 <a:solidFill>
                   <a:schemeClr val="bg2"/>
                 </a:solidFill>
               </a:rPr>
               <a:t>zshrs removes the cost instead</a:t>
             </a:r>
-            <a:endParaRPr lang="en-US" sz="2200" dirty="0"/>
+            <a:endParaRPr lang="en-US" sz="2500" dirty="0"/>
           </a:p>
           <a:p>
             <a:pPr marL="342900" indent="-342900">
               <a:spcAft>
-                <a:spcPts val="1000"/>
+                <a:spcPts val="800"/>
               </a:spcAft>
               <a:buSzPct val="100000"/>
               <a:buChar char="•"/>
             </a:pPr>
             <a:r>
-              <a:rPr lang="en-US" sz="2200" dirty="0">
+              <a:rPr lang="en-US" sz="2500" dirty="0">
                 <a:solidFill>
                   <a:schemeClr val="bg2"/>
                 </a:solidFill>
               </a:rPr>
               <a:t>No instant-prompt equivalent needed</a:t>
             </a:r>
-            <a:endParaRPr lang="en-US" sz="2200" dirty="0"/>
+            <a:endParaRPr lang="en-US" sz="2500" dirty="0"/>
           </a:p>
         </p:txBody>
       </p:sp>
@@ -38288,7 +38288,7 @@
               <a:buNone/>
             </a:pPr>
             <a:r>
-              <a:rPr lang="en-US" sz="2200" b="1" dirty="0">
+              <a:rPr lang="en-US" sz="2600" b="1" dirty="0">
                 <a:solidFill>
                   <a:schemeClr val="accent1"/>
                 </a:solidFill>
@@ -38298,7 +38298,7 @@
               </a:rPr>
               <a:t>The test</a:t>
             </a:r>
-            <a:endParaRPr lang="en-US" sz="2200" dirty="0"/>
+            <a:endParaRPr lang="en-US" sz="2600" dirty="0"/>
           </a:p>
         </p:txBody>
       </p:sp>
@@ -38311,7 +38311,7 @@
         <p:spPr>
           <a:xfrm>
             <a:off x="6492240" y="2560320"/>
-            <a:ext cx="4572000" cy="2834640"/>
+            <a:ext cx="4572000" cy="2788920"/>
           </a:xfrm>
           <a:prstGeom prst="rect">
             <a:avLst/>
@@ -38325,56 +38325,56 @@
           <a:p>
             <a:pPr marL="342900" indent="-342900">
               <a:spcAft>
-                <a:spcPts val="1000"/>
+                <a:spcPts val="800"/>
               </a:spcAft>
               <a:buSzPct val="100000"/>
               <a:buChar char="•"/>
             </a:pPr>
             <a:r>
-              <a:rPr lang="en-US" sz="2200" dirty="0">
+              <a:rPr lang="en-US" sz="2500" dirty="0">
                 <a:solidFill>
                   <a:schemeClr val="bg2"/>
                 </a:solidFill>
               </a:rPr>
               <a:t>First paint is the full feature set</a:t>
             </a:r>
-            <a:endParaRPr lang="en-US" sz="2200" dirty="0"/>
+            <a:endParaRPr lang="en-US" sz="2500" dirty="0"/>
           </a:p>
           <a:p>
             <a:pPr marL="342900" indent="-342900">
               <a:spcAft>
-                <a:spcPts val="1000"/>
+                <a:spcPts val="800"/>
               </a:spcAft>
               <a:buSzPct val="100000"/>
               <a:buChar char="•"/>
             </a:pPr>
             <a:r>
-              <a:rPr lang="en-US" sz="2200" dirty="0">
+              <a:rPr lang="en-US" sz="2500" dirty="0">
                 <a:solidFill>
                   <a:schemeClr val="bg2"/>
                 </a:solidFill>
               </a:rPr>
               <a:t>Measure with zsh-bench</a:t>
             </a:r>
-            <a:endParaRPr lang="en-US" sz="2200" dirty="0"/>
+            <a:endParaRPr lang="en-US" sz="2500" dirty="0"/>
           </a:p>
           <a:p>
             <a:pPr marL="342900" indent="-342900">
               <a:spcAft>
-                <a:spcPts val="1000"/>
+                <a:spcPts val="800"/>
               </a:spcAft>
               <a:buSzPct val="100000"/>
               <a:buChar char="•"/>
             </a:pPr>
             <a:r>
-              <a:rPr lang="en-US" sz="2200" dirty="0">
+              <a:rPr lang="en-US" sz="2500" dirty="0">
                 <a:solidFill>
                   <a:schemeClr val="bg2"/>
                 </a:solidFill>
               </a:rPr>
               <a:t>Compare your own setup both ways</a:t>
             </a:r>
-            <a:endParaRPr lang="en-US" sz="2200" dirty="0"/>
+            <a:endParaRPr lang="en-US" sz="2500" dirty="0"/>
           </a:p>
         </p:txBody>
       </p:sp>
@@ -38580,14 +38580,14 @@
               <a:buNone/>
             </a:pPr>
             <a:r>
-              <a:rPr lang="en-US" sz="2400" b="1" dirty="0">
+              <a:rPr lang="en-US" sz="2600" b="1" dirty="0">
                 <a:solidFill>
                   <a:schemeClr val="accent3"/>
                 </a:solidFill>
               </a:rPr>
               <a:t>1</a:t>
             </a:r>
-            <a:endParaRPr lang="en-US" sz="2400" dirty="0"/>
+            <a:endParaRPr lang="en-US" sz="2600" dirty="0"/>
           </a:p>
         </p:txBody>
       </p:sp>
@@ -38616,14 +38616,14 @@
               <a:buNone/>
             </a:pPr>
             <a:r>
-              <a:rPr lang="en-US" sz="2200" dirty="0">
+              <a:rPr lang="en-US" sz="2800" dirty="0">
                 <a:solidFill>
                   <a:schemeClr val="accent4"/>
                 </a:solidFill>
               </a:rPr>
               <a:t>Start using it.</a:t>
             </a:r>
-            <a:endParaRPr lang="en-US" sz="2200" dirty="0"/>
+            <a:endParaRPr lang="en-US" sz="2800" dirty="0"/>
           </a:p>
         </p:txBody>
       </p:sp>
@@ -38679,14 +38679,14 @@
               <a:buNone/>
             </a:pPr>
             <a:r>
-              <a:rPr lang="en-US" sz="2400" b="1" dirty="0">
+              <a:rPr lang="en-US" sz="2600" b="1" dirty="0">
                 <a:solidFill>
                   <a:schemeClr val="accent3"/>
                 </a:solidFill>
               </a:rPr>
               <a:t>2</a:t>
             </a:r>
-            <a:endParaRPr lang="en-US" sz="2400" dirty="0"/>
+            <a:endParaRPr lang="en-US" sz="2600" dirty="0"/>
           </a:p>
         </p:txBody>
       </p:sp>
@@ -38715,14 +38715,14 @@
               <a:buNone/>
             </a:pPr>
             <a:r>
-              <a:rPr lang="en-US" sz="2200" dirty="0">
+              <a:rPr lang="en-US" sz="2800" dirty="0">
                 <a:solidFill>
                   <a:schemeClr val="accent4"/>
                 </a:solidFill>
               </a:rPr>
               <a:t>Sanity check the code parity.</a:t>
             </a:r>
-            <a:endParaRPr lang="en-US" sz="2200" dirty="0"/>
+            <a:endParaRPr lang="en-US" sz="2800" dirty="0"/>
           </a:p>
         </p:txBody>
       </p:sp>
@@ -38778,14 +38778,14 @@
               <a:buNone/>
             </a:pPr>
             <a:r>
-              <a:rPr lang="en-US" sz="2400" b="1" dirty="0">
+              <a:rPr lang="en-US" sz="2600" b="1" dirty="0">
                 <a:solidFill>
                   <a:schemeClr val="accent3"/>
                 </a:solidFill>
               </a:rPr>
               <a:t>3</a:t>
             </a:r>
-            <a:endParaRPr lang="en-US" sz="2400" dirty="0"/>
+            <a:endParaRPr lang="en-US" sz="2600" dirty="0"/>
           </a:p>
         </p:txBody>
       </p:sp>
@@ -38814,14 +38814,14 @@
               <a:buNone/>
             </a:pPr>
             <a:r>
-              <a:rPr lang="en-US" sz="2200" dirty="0">
+              <a:rPr lang="en-US" sz="2000" dirty="0">
                 <a:solidFill>
                   <a:schemeClr val="accent4"/>
                 </a:solidFill>
               </a:rPr>
               <a:t>Review security, performance, energy use and hardware needs.</a:t>
             </a:r>
-            <a:endParaRPr lang="en-US" sz="2200" dirty="0"/>
+            <a:endParaRPr lang="en-US" sz="2000" dirty="0"/>
           </a:p>
         </p:txBody>
       </p:sp>
@@ -38877,14 +38877,14 @@
               <a:buNone/>
             </a:pPr>
             <a:r>
-              <a:rPr lang="en-US" sz="2400" b="1" dirty="0">
+              <a:rPr lang="en-US" sz="2600" b="1" dirty="0">
                 <a:solidFill>
                   <a:schemeClr val="accent3"/>
                 </a:solidFill>
               </a:rPr>
               <a:t>4</a:t>
             </a:r>
-            <a:endParaRPr lang="en-US" sz="2400" dirty="0"/>
+            <a:endParaRPr lang="en-US" sz="2600" dirty="0"/>
           </a:p>
         </p:txBody>
       </p:sp>
@@ -38913,14 +38913,14 @@
               <a:buNone/>
             </a:pPr>
             <a:r>
-              <a:rPr lang="en-US" sz="2200" dirty="0">
+              <a:rPr lang="en-US" sz="2800" dirty="0">
                 <a:solidFill>
                   <a:schemeClr val="accent4"/>
                 </a:solidFill>
               </a:rPr>
               <a:t>Open issues.</a:t>
             </a:r>
-            <a:endParaRPr lang="en-US" sz="2200" dirty="0"/>
+            <a:endParaRPr lang="en-US" sz="2800" dirty="0"/>
           </a:p>
         </p:txBody>
       </p:sp>
@@ -38976,14 +38976,14 @@
               <a:buNone/>
             </a:pPr>
             <a:r>
-              <a:rPr lang="en-US" sz="2400" b="1" dirty="0">
+              <a:rPr lang="en-US" sz="2600" b="1" dirty="0">
                 <a:solidFill>
                   <a:schemeClr val="accent3"/>
                 </a:solidFill>
               </a:rPr>
               <a:t>5</a:t>
             </a:r>
-            <a:endParaRPr lang="en-US" sz="2400" dirty="0"/>
+            <a:endParaRPr lang="en-US" sz="2600" dirty="0"/>
           </a:p>
         </p:txBody>
       </p:sp>
@@ -39012,14 +39012,14 @@
               <a:buNone/>
             </a:pPr>
             <a:r>
-              <a:rPr lang="en-US" sz="2200" dirty="0">
+              <a:rPr lang="en-US" sz="2800" dirty="0">
                 <a:solidFill>
                   <a:schemeClr val="accent4"/>
                 </a:solidFill>
               </a:rPr>
               <a:t>Get involved and ask questions.</a:t>
             </a:r>
-            <a:endParaRPr lang="en-US" sz="2200" dirty="0"/>
+            <a:endParaRPr lang="en-US" sz="2800" dirty="0"/>
           </a:p>
         </p:txBody>
       </p:sp>
@@ -39200,7 +39200,7 @@
                 <a:gridCol w="3931920"/>
                 <a:gridCol w="4206240"/>
               </a:tblGrid>
-              <a:tr h="566928">
+              <a:tr h="731520">
                 <a:tc>
                   <a:txBody>
                     <a:bodyPr/>
@@ -39376,7 +39376,7 @@
                   </a:tcPr>
                 </a:tc>
               </a:tr>
-              <a:tr h="566928">
+              <a:tr h="731520">
                 <a:tc>
                   <a:txBody>
                     <a:bodyPr/>
@@ -39552,7 +39552,7 @@
                   </a:tcPr>
                 </a:tc>
               </a:tr>
-              <a:tr h="566928">
+              <a:tr h="731520">
                 <a:tc>
                   <a:txBody>
                     <a:bodyPr/>
@@ -39728,7 +39728,7 @@
                   </a:tcPr>
                 </a:tc>
               </a:tr>
-              <a:tr h="566928">
+              <a:tr h="731520">
                 <a:tc>
                   <a:txBody>
                     <a:bodyPr/>
@@ -39904,7 +39904,7 @@
                   </a:tcPr>
                 </a:tc>
               </a:tr>
-              <a:tr h="566928">
+              <a:tr h="731520">
                 <a:tc>
                   <a:txBody>
                     <a:bodyPr/>
@@ -40080,7 +40080,7 @@
                   </a:tcPr>
                 </a:tc>
               </a:tr>
-              <a:tr h="566928">
+              <a:tr h="731520">
                 <a:tc>
                   <a:txBody>
                     <a:bodyPr/>
@@ -40462,7 +40462,7 @@
               <a:buNone/>
             </a:pPr>
             <a:r>
-              <a:rPr lang="en-US" sz="2200" b="1" dirty="0">
+              <a:rPr lang="en-US" sz="2400" b="1" dirty="0">
                 <a:solidFill>
                   <a:schemeClr val="accent1"/>
                 </a:solidFill>
@@ -40472,7 +40472,7 @@
               </a:rPr>
               <a:t>Parse</a:t>
             </a:r>
-            <a:endParaRPr lang="en-US" sz="2200" dirty="0"/>
+            <a:endParaRPr lang="en-US" sz="2400" dirty="0"/>
           </a:p>
         </p:txBody>
       </p:sp>
@@ -40484,8 +40484,8 @@
         </p:nvSpPr>
         <p:spPr>
           <a:xfrm>
-            <a:off x="1051560" y="2468880"/>
-            <a:ext cx="2712720" cy="822960"/>
+            <a:off x="1051560" y="2514600"/>
+            <a:ext cx="2712720" cy="777240"/>
           </a:xfrm>
           <a:prstGeom prst="rect">
             <a:avLst/>
@@ -40501,14 +40501,14 @@
               <a:buNone/>
             </a:pPr>
             <a:r>
-              <a:rPr lang="en-US" sz="1800" dirty="0">
+              <a:rPr lang="en-US" sz="2300" dirty="0">
                 <a:solidFill>
                   <a:schemeClr val="bg2"/>
                 </a:solidFill>
               </a:rPr>
               <a:t>zsh source to AST</a:t>
             </a:r>
-            <a:endParaRPr lang="en-US" sz="1800" dirty="0"/>
+            <a:endParaRPr lang="en-US" sz="2300" dirty="0"/>
           </a:p>
         </p:txBody>
       </p:sp>
@@ -40589,7 +40589,7 @@
               <a:buNone/>
             </a:pPr>
             <a:r>
-              <a:rPr lang="en-US" sz="2200" b="1" dirty="0">
+              <a:rPr lang="en-US" sz="2400" b="1" dirty="0">
                 <a:solidFill>
                   <a:schemeClr val="accent1"/>
                 </a:solidFill>
@@ -40599,7 +40599,7 @@
               </a:rPr>
               <a:t>Bytecode</a:t>
             </a:r>
-            <a:endParaRPr lang="en-US" sz="2200" dirty="0"/>
+            <a:endParaRPr lang="en-US" sz="2400" dirty="0"/>
           </a:p>
         </p:txBody>
       </p:sp>
@@ -40611,8 +40611,8 @@
         </p:nvSpPr>
         <p:spPr>
           <a:xfrm>
-            <a:off x="4724400" y="2468880"/>
-            <a:ext cx="2712720" cy="822960"/>
+            <a:off x="4724400" y="2514600"/>
+            <a:ext cx="2712720" cy="777240"/>
           </a:xfrm>
           <a:prstGeom prst="rect">
             <a:avLst/>
@@ -40628,14 +40628,14 @@
               <a:buNone/>
             </a:pPr>
             <a:r>
-              <a:rPr lang="en-US" sz="1800" dirty="0">
+              <a:rPr lang="en-US" sz="2300" dirty="0">
                 <a:solidFill>
                   <a:schemeClr val="bg2"/>
                 </a:solidFill>
               </a:rPr>
               <a:t>fused superinstructions</a:t>
             </a:r>
-            <a:endParaRPr lang="en-US" sz="1800" dirty="0"/>
+            <a:endParaRPr lang="en-US" sz="2300" dirty="0"/>
           </a:p>
         </p:txBody>
       </p:sp>
@@ -40716,7 +40716,7 @@
               <a:buNone/>
             </a:pPr>
             <a:r>
-              <a:rPr lang="en-US" sz="2200" b="1" dirty="0">
+              <a:rPr lang="en-US" sz="2400" b="1" dirty="0">
                 <a:solidFill>
                   <a:schemeClr val="accent1"/>
                 </a:solidFill>
@@ -40726,7 +40726,7 @@
               </a:rPr>
               <a:t>JIT</a:t>
             </a:r>
-            <a:endParaRPr lang="en-US" sz="2200" dirty="0"/>
+            <a:endParaRPr lang="en-US" sz="2400" dirty="0"/>
           </a:p>
         </p:txBody>
       </p:sp>
@@ -40738,8 +40738,8 @@
         </p:nvSpPr>
         <p:spPr>
           <a:xfrm>
-            <a:off x="8397240" y="2468880"/>
-            <a:ext cx="2712720" cy="822960"/>
+            <a:off x="8397240" y="2514600"/>
+            <a:ext cx="2712720" cy="777240"/>
           </a:xfrm>
           <a:prstGeom prst="rect">
             <a:avLst/>
@@ -40755,14 +40755,14 @@
               <a:buNone/>
             </a:pPr>
             <a:r>
-              <a:rPr lang="en-US" sz="1800" dirty="0">
+              <a:rPr lang="en-US" sz="1600" dirty="0">
                 <a:solidFill>
                   <a:schemeClr val="bg2"/>
                 </a:solidFill>
               </a:rPr>
               <a:t>Cranelift, hot blocks to x86-64 / aarch64</a:t>
             </a:r>
-            <a:endParaRPr lang="en-US" sz="1800" dirty="0"/>
+            <a:endParaRPr lang="en-US" sz="1600" dirty="0"/>
           </a:p>
         </p:txBody>
       </p:sp>
@@ -41020,7 +41020,7 @@
                 <a:gridCol w="2011680"/>
                 <a:gridCol w="1920240"/>
               </a:tblGrid>
-              <a:tr h="566928">
+              <a:tr h="731520">
                 <a:tc>
                   <a:txBody>
                     <a:bodyPr/>
@@ -41030,14 +41030,14 @@
                         <a:buNone/>
                       </a:pPr>
                       <a:r>
-                        <a:rPr lang="en-US" sz="2000" b="1" dirty="0">
+                        <a:rPr lang="en-US" sz="1900" b="1" dirty="0">
                           <a:solidFill>
                             <a:schemeClr val="accent1"/>
                           </a:solidFill>
                         </a:rPr>
                         <a:t>Measure</a:t>
                       </a:r>
-                      <a:endParaRPr lang="en-US" sz="2000" dirty="0"/>
+                      <a:endParaRPr lang="en-US" sz="1900" dirty="0"/>
                     </a:p>
                   </a:txBody>
                   <a:tcPr marL="91440" marR="91440" marT="45720" marB="45720" anchor="ctr">
@@ -41088,14 +41088,14 @@
                         <a:buNone/>
                       </a:pPr>
                       <a:r>
-                        <a:rPr lang="en-US" sz="2000" b="1" dirty="0">
+                        <a:rPr lang="en-US" sz="1900" b="1" dirty="0">
                           <a:solidFill>
                             <a:schemeClr val="accent1"/>
                           </a:solidFill>
                         </a:rPr>
                         <a:t>What it is</a:t>
                       </a:r>
-                      <a:endParaRPr lang="en-US" sz="2000" dirty="0"/>
+                      <a:endParaRPr lang="en-US" sz="1900" dirty="0"/>
                     </a:p>
                   </a:txBody>
                   <a:tcPr marL="91440" marR="91440" marT="45720" marB="45720" anchor="ctr">
@@ -41146,14 +41146,14 @@
                         <a:buNone/>
                       </a:pPr>
                       <a:r>
-                        <a:rPr lang="en-US" sz="2000" b="1" dirty="0">
+                        <a:rPr lang="en-US" sz="1900" b="1" dirty="0">
                           <a:solidFill>
                             <a:schemeClr val="accent1"/>
                           </a:solidFill>
                         </a:rPr>
                         <a:t>Target</a:t>
                       </a:r>
-                      <a:endParaRPr lang="en-US" sz="2000" dirty="0"/>
+                      <a:endParaRPr lang="en-US" sz="1900" dirty="0"/>
                     </a:p>
                   </a:txBody>
                   <a:tcPr marL="91440" marR="91440" marT="45720" marB="45720" anchor="ctr">
@@ -41204,14 +41204,14 @@
                         <a:buNone/>
                       </a:pPr>
                       <a:r>
-                        <a:rPr lang="en-US" sz="2000" b="1" dirty="0">
+                        <a:rPr lang="en-US" sz="1900" b="1" dirty="0">
                           <a:solidFill>
                             <a:schemeClr val="accent1"/>
                           </a:solidFill>
                         </a:rPr>
                         <a:t>Measured</a:t>
                       </a:r>
-                      <a:endParaRPr lang="en-US" sz="2000" dirty="0"/>
+                      <a:endParaRPr lang="en-US" sz="1900" dirty="0"/>
                     </a:p>
                   </a:txBody>
                   <a:tcPr marL="91440" marR="91440" marT="45720" marB="45720" anchor="ctr">
@@ -41254,7 +41254,7 @@
                   </a:tcPr>
                 </a:tc>
               </a:tr>
-              <a:tr h="566928">
+              <a:tr h="731520">
                 <a:tc>
                   <a:txBody>
                     <a:bodyPr/>
@@ -41264,14 +41264,14 @@
                         <a:buNone/>
                       </a:pPr>
                       <a:r>
-                        <a:rPr lang="en-US" sz="2000" dirty="0">
+                        <a:rPr lang="en-US" sz="1900" dirty="0">
                           <a:solidFill>
                             <a:schemeClr val="bg2"/>
                           </a:solidFill>
                         </a:rPr>
                         <a:t>Prompt appears</a:t>
                       </a:r>
-                      <a:endParaRPr lang="en-US" sz="2000" dirty="0"/>
+                      <a:endParaRPr lang="en-US" sz="1900" dirty="0"/>
                     </a:p>
                   </a:txBody>
                   <a:tcPr marL="91440" marR="91440" marT="45720" marB="45720" anchor="ctr">
@@ -41322,14 +41322,14 @@
                         <a:buNone/>
                       </a:pPr>
                       <a:r>
-                        <a:rPr lang="en-US" sz="2000" dirty="0">
+                        <a:rPr lang="en-US" sz="1900" dirty="0">
                           <a:solidFill>
                             <a:schemeClr val="bg2"/>
                           </a:solidFill>
                         </a:rPr>
                         <a:t>Open terminal to prompt</a:t>
                       </a:r>
-                      <a:endParaRPr lang="en-US" sz="2000" dirty="0"/>
+                      <a:endParaRPr lang="en-US" sz="1900" dirty="0"/>
                     </a:p>
                   </a:txBody>
                   <a:tcPr marL="91440" marR="91440" marT="45720" marB="45720" anchor="ctr">
@@ -41380,14 +41380,14 @@
                         <a:buNone/>
                       </a:pPr>
                       <a:r>
-                        <a:rPr lang="en-US" sz="2000" dirty="0">
+                        <a:rPr lang="en-US" sz="1900" dirty="0">
                           <a:solidFill>
                             <a:schemeClr val="bg2"/>
                           </a:solidFill>
                         </a:rPr>
                         <a:t>50 ms or less</a:t>
                       </a:r>
-                      <a:endParaRPr lang="en-US" sz="2000" dirty="0"/>
+                      <a:endParaRPr lang="en-US" sz="1900" dirty="0"/>
                     </a:p>
                   </a:txBody>
                   <a:tcPr marL="91440" marR="91440" marT="45720" marB="45720" anchor="ctr">
@@ -41438,14 +41438,14 @@
                         <a:buNone/>
                       </a:pPr>
                       <a:r>
-                        <a:rPr lang="en-US" sz="2000" dirty="0">
+                        <a:rPr lang="en-US" sz="1900" dirty="0">
                           <a:solidFill>
                             <a:schemeClr val="bg2"/>
                           </a:solidFill>
                         </a:rPr>
                         <a:t>[measure]</a:t>
                       </a:r>
-                      <a:endParaRPr lang="en-US" sz="2000" dirty="0"/>
+                      <a:endParaRPr lang="en-US" sz="1900" dirty="0"/>
                     </a:p>
                   </a:txBody>
                   <a:tcPr marL="91440" marR="91440" marT="45720" marB="45720" anchor="ctr">
@@ -41488,7 +41488,7 @@
                   </a:tcPr>
                 </a:tc>
               </a:tr>
-              <a:tr h="566928">
+              <a:tr h="731520">
                 <a:tc>
                   <a:txBody>
                     <a:bodyPr/>
@@ -41498,14 +41498,14 @@
                         <a:buNone/>
                       </a:pPr>
                       <a:r>
-                        <a:rPr lang="en-US" sz="2000" dirty="0">
+                        <a:rPr lang="en-US" sz="1900" dirty="0">
                           <a:solidFill>
                             <a:schemeClr val="bg2"/>
                           </a:solidFill>
                         </a:rPr>
                         <a:t>Ready to run</a:t>
                       </a:r>
-                      <a:endParaRPr lang="en-US" sz="2000" dirty="0"/>
+                      <a:endParaRPr lang="en-US" sz="1900" dirty="0"/>
                     </a:p>
                   </a:txBody>
                   <a:tcPr marL="91440" marR="91440" marT="45720" marB="45720" anchor="ctr">
@@ -41556,14 +41556,14 @@
                         <a:buNone/>
                       </a:pPr>
                       <a:r>
-                        <a:rPr lang="en-US" sz="2000" dirty="0">
+                        <a:rPr lang="en-US" sz="1900" dirty="0">
                           <a:solidFill>
                             <a:schemeClr val="bg2"/>
                           </a:solidFill>
                         </a:rPr>
                         <a:t>Until first command runs</a:t>
                       </a:r>
-                      <a:endParaRPr lang="en-US" sz="2000" dirty="0"/>
+                      <a:endParaRPr lang="en-US" sz="1900" dirty="0"/>
                     </a:p>
                   </a:txBody>
                   <a:tcPr marL="91440" marR="91440" marT="45720" marB="45720" anchor="ctr">
@@ -41614,14 +41614,14 @@
                         <a:buNone/>
                       </a:pPr>
                       <a:r>
-                        <a:rPr lang="en-US" sz="2000" dirty="0">
+                        <a:rPr lang="en-US" sz="1900" dirty="0">
                           <a:solidFill>
                             <a:schemeClr val="bg2"/>
                           </a:solidFill>
                         </a:rPr>
                         <a:t>150 ms or less</a:t>
                       </a:r>
-                      <a:endParaRPr lang="en-US" sz="2000" dirty="0"/>
+                      <a:endParaRPr lang="en-US" sz="1900" dirty="0"/>
                     </a:p>
                   </a:txBody>
                   <a:tcPr marL="91440" marR="91440" marT="45720" marB="45720" anchor="ctr">
@@ -41672,14 +41672,14 @@
                         <a:buNone/>
                       </a:pPr>
                       <a:r>
-                        <a:rPr lang="en-US" sz="2000" dirty="0">
+                        <a:rPr lang="en-US" sz="1900" dirty="0">
                           <a:solidFill>
                             <a:schemeClr val="bg2"/>
                           </a:solidFill>
                         </a:rPr>
                         <a:t>[measure]</a:t>
                       </a:r>
-                      <a:endParaRPr lang="en-US" sz="2000" dirty="0"/>
+                      <a:endParaRPr lang="en-US" sz="1900" dirty="0"/>
                     </a:p>
                   </a:txBody>
                   <a:tcPr marL="91440" marR="91440" marT="45720" marB="45720" anchor="ctr">
@@ -41722,7 +41722,7 @@
                   </a:tcPr>
                 </a:tc>
               </a:tr>
-              <a:tr h="566928">
+              <a:tr h="731520">
                 <a:tc>
                   <a:txBody>
                     <a:bodyPr/>
@@ -41732,14 +41732,14 @@
                         <a:buNone/>
                       </a:pPr>
                       <a:r>
-                        <a:rPr lang="en-US" sz="2000" dirty="0">
+                        <a:rPr lang="en-US" sz="1900" dirty="0">
                           <a:solidFill>
                             <a:schemeClr val="bg2"/>
                           </a:solidFill>
                         </a:rPr>
                         <a:t>Enter to next prompt</a:t>
                       </a:r>
-                      <a:endParaRPr lang="en-US" sz="2000" dirty="0"/>
+                      <a:endParaRPr lang="en-US" sz="1900" dirty="0"/>
                     </a:p>
                   </a:txBody>
                   <a:tcPr marL="91440" marR="91440" marT="45720" marB="45720" anchor="ctr">
@@ -41790,14 +41790,14 @@
                         <a:buNone/>
                       </a:pPr>
                       <a:r>
-                        <a:rPr lang="en-US" sz="2000" dirty="0">
+                        <a:rPr lang="en-US" sz="1900" dirty="0">
                           <a:solidFill>
                             <a:schemeClr val="bg2"/>
                           </a:solidFill>
                         </a:rPr>
                         <a:t>Delay after Enter</a:t>
                       </a:r>
-                      <a:endParaRPr lang="en-US" sz="2000" dirty="0"/>
+                      <a:endParaRPr lang="en-US" sz="1900" dirty="0"/>
                     </a:p>
                   </a:txBody>
                   <a:tcPr marL="91440" marR="91440" marT="45720" marB="45720" anchor="ctr">
@@ -41848,14 +41848,14 @@
                         <a:buNone/>
                       </a:pPr>
                       <a:r>
-                        <a:rPr lang="en-US" sz="2000" dirty="0">
+                        <a:rPr lang="en-US" sz="1900" dirty="0">
                           <a:solidFill>
                             <a:schemeClr val="bg2"/>
                           </a:solidFill>
                         </a:rPr>
                         <a:t>10 ms or less</a:t>
                       </a:r>
-                      <a:endParaRPr lang="en-US" sz="2000" dirty="0"/>
+                      <a:endParaRPr lang="en-US" sz="1900" dirty="0"/>
                     </a:p>
                   </a:txBody>
                   <a:tcPr marL="91440" marR="91440" marT="45720" marB="45720" anchor="ctr">
@@ -41906,14 +41906,14 @@
                         <a:buNone/>
                       </a:pPr>
                       <a:r>
-                        <a:rPr lang="en-US" sz="2000" dirty="0">
+                        <a:rPr lang="en-US" sz="1900" dirty="0">
                           <a:solidFill>
                             <a:schemeClr val="bg2"/>
                           </a:solidFill>
                         </a:rPr>
                         <a:t>[measure]</a:t>
                       </a:r>
-                      <a:endParaRPr lang="en-US" sz="2000" dirty="0"/>
+                      <a:endParaRPr lang="en-US" sz="1900" dirty="0"/>
                     </a:p>
                   </a:txBody>
                   <a:tcPr marL="91440" marR="91440" marT="45720" marB="45720" anchor="ctr">
@@ -41956,7 +41956,7 @@
                   </a:tcPr>
                 </a:tc>
               </a:tr>
-              <a:tr h="566928">
+              <a:tr h="731520">
                 <a:tc>
                   <a:txBody>
                     <a:bodyPr/>
@@ -41966,14 +41966,14 @@
                         <a:buNone/>
                       </a:pPr>
                       <a:r>
-                        <a:rPr lang="en-US" sz="2000" dirty="0">
+                        <a:rPr lang="en-US" sz="1900" dirty="0">
                           <a:solidFill>
                             <a:schemeClr val="bg2"/>
                           </a:solidFill>
                         </a:rPr>
                         <a:t>Typing delay</a:t>
                       </a:r>
-                      <a:endParaRPr lang="en-US" sz="2000" dirty="0"/>
+                      <a:endParaRPr lang="en-US" sz="1900" dirty="0"/>
                     </a:p>
                   </a:txBody>
                   <a:tcPr marL="91440" marR="91440" marT="45720" marB="45720" anchor="ctr">
@@ -42024,14 +42024,14 @@
                         <a:buNone/>
                       </a:pPr>
                       <a:r>
-                        <a:rPr lang="en-US" sz="2000" dirty="0">
+                        <a:rPr lang="en-US" sz="1900" dirty="0">
                           <a:solidFill>
                             <a:schemeClr val="bg2"/>
                           </a:solidFill>
                         </a:rPr>
                         <a:t>Key press to screen</a:t>
                       </a:r>
-                      <a:endParaRPr lang="en-US" sz="2000" dirty="0"/>
+                      <a:endParaRPr lang="en-US" sz="1900" dirty="0"/>
                     </a:p>
                   </a:txBody>
                   <a:tcPr marL="91440" marR="91440" marT="45720" marB="45720" anchor="ctr">
@@ -42082,14 +42082,14 @@
                         <a:buNone/>
                       </a:pPr>
                       <a:r>
-                        <a:rPr lang="en-US" sz="2000" dirty="0">
+                        <a:rPr lang="en-US" sz="1900" dirty="0">
                           <a:solidFill>
                             <a:schemeClr val="bg2"/>
                           </a:solidFill>
                         </a:rPr>
                         <a:t>20 ms or less</a:t>
                       </a:r>
-                      <a:endParaRPr lang="en-US" sz="2000" dirty="0"/>
+                      <a:endParaRPr lang="en-US" sz="1900" dirty="0"/>
                     </a:p>
                   </a:txBody>
                   <a:tcPr marL="91440" marR="91440" marT="45720" marB="45720" anchor="ctr">
@@ -42140,14 +42140,14 @@
                         <a:buNone/>
                       </a:pPr>
                       <a:r>
-                        <a:rPr lang="en-US" sz="2000" dirty="0">
+                        <a:rPr lang="en-US" sz="1900" dirty="0">
                           <a:solidFill>
                             <a:schemeClr val="bg2"/>
                           </a:solidFill>
                         </a:rPr>
                         <a:t>[measure]</a:t>
                       </a:r>
-                      <a:endParaRPr lang="en-US" sz="2000" dirty="0"/>
+                      <a:endParaRPr lang="en-US" sz="1900" dirty="0"/>
                     </a:p>
                   </a:txBody>
                   <a:tcPr marL="91440" marR="91440" marT="45720" marB="45720" anchor="ctr">
@@ -42190,7 +42190,7 @@
                   </a:tcPr>
                 </a:tc>
               </a:tr>
-              <a:tr h="566928">
+              <a:tr h="731520">
                 <a:tc>
                   <a:txBody>
                     <a:bodyPr/>
@@ -42200,14 +42200,14 @@
                         <a:buNone/>
                       </a:pPr>
                       <a:r>
-                        <a:rPr lang="en-US" sz="2000" dirty="0">
+                        <a:rPr lang="en-US" sz="1900" dirty="0">
                           <a:solidFill>
                             <a:schemeClr val="bg2"/>
                           </a:solidFill>
                         </a:rPr>
                         <a:t>Memory per shell</a:t>
                       </a:r>
-                      <a:endParaRPr lang="en-US" sz="2000" dirty="0"/>
+                      <a:endParaRPr lang="en-US" sz="1900" dirty="0"/>
                     </a:p>
                   </a:txBody>
                   <a:tcPr marL="91440" marR="91440" marT="45720" marB="45720" anchor="ctr">
@@ -42258,7 +42258,7 @@
                         <a:buNone/>
                       </a:pPr>
                       <a:r>
-                        <a:rPr lang="en-US" sz="2000" dirty="0">
+                        <a:rPr lang="en-US" sz="1900" dirty="0">
                           <a:solidFill>
                             <a:schemeClr val="bg2"/>
                           </a:solidFill>
@@ -42268,7 +42268,7 @@
                         </a:rPr>
                         <a:t>ps -o rss= -p $$</a:t>
                       </a:r>
-                      <a:endParaRPr lang="en-US" sz="2000" dirty="0">
+                      <a:endParaRPr lang="en-US" sz="1900" dirty="0">
                         <a:latin typeface="Courier New" charset="0"/>
                         <a:ea typeface="Courier New" charset="0"/>
                         <a:cs typeface="Courier New" charset="0"/>
@@ -42323,14 +42323,14 @@
                         <a:buNone/>
                       </a:pPr>
                       <a:r>
-                        <a:rPr lang="en-US" sz="2000" dirty="0">
+                        <a:rPr lang="en-US" sz="1900" dirty="0">
                           <a:solidFill>
                             <a:schemeClr val="bg2"/>
                           </a:solidFill>
                         </a:rPr>
                         <a:t>[target]</a:t>
                       </a:r>
-                      <a:endParaRPr lang="en-US" sz="2000" dirty="0"/>
+                      <a:endParaRPr lang="en-US" sz="1900" dirty="0"/>
                     </a:p>
                   </a:txBody>
                   <a:tcPr marL="91440" marR="91440" marT="45720" marB="45720" anchor="ctr">
@@ -42381,14 +42381,14 @@
                         <a:buNone/>
                       </a:pPr>
                       <a:r>
-                        <a:rPr lang="en-US" sz="2000" dirty="0">
+                        <a:rPr lang="en-US" sz="1900" dirty="0">
                           <a:solidFill>
                             <a:schemeClr val="bg2"/>
                           </a:solidFill>
                         </a:rPr>
                         <a:t>[measure]</a:t>
                       </a:r>
-                      <a:endParaRPr lang="en-US" sz="2000" dirty="0"/>
+                      <a:endParaRPr lang="en-US" sz="1900" dirty="0"/>
                     </a:p>
                   </a:txBody>
                   <a:tcPr marL="91440" marR="91440" marT="45720" marB="45720" anchor="ctr">

--- a/docs/talk.pptx
+++ b/docs/talk.pptx
@@ -165,14 +165,14 @@
   <p:extLst>
     <p:ext uri="{521415D9-36F7-43E2-AB2F-B90AF26B5E84}">
       <p14:sectionLst xmlns:p14="http://schemas.microsoft.com/office/powerpoint/2010/main">
-        <p14:section name="Intro" id="{3d38e541-11bf-3cd7-437d-3df4e6bf4933}">
+        <p14:section name="Intro" id="{28799c49-bb2f-a5c4-7b0c-1864986a410d}">
           <p14:sldIdLst>
             <p14:sldId id="256"/>
             <p14:sldId id="257"/>
             <p14:sldId id="258"/>
           </p14:sldIdLst>
         </p14:section>
-        <p14:section name="Parity" id="{57c14051-640f-74e2-12e0-bef4c9a4ef9f}">
+        <p14:section name="Parity" id="{db5c1213-9e13-1d62-5db3-b625dffbdb2a}">
           <p14:sldIdLst>
             <p14:sldId id="259"/>
             <p14:sldId id="260"/>
@@ -180,14 +180,14 @@
             <p14:sldId id="262"/>
           </p14:sldIdLst>
         </p14:section>
-        <p14:section name="Engine" id="{18db2ecb-5436-7c55-42c0-ea1d8295e195}">
+        <p14:section name="Engine" id="{96b3ac8d-0e3e-b0a6-0840-dbe90457d032}">
           <p14:sldIdLst>
             <p14:sldId id="263"/>
             <p14:sldId id="264"/>
             <p14:sldId id="265"/>
           </p14:sldIdLst>
         </p14:section>
-        <p14:section name="Outline" id="{229b1d16-3406-7594-08ba-5400a9c39cda}">
+        <p14:section name="Outline" id="{fcfb8ec9-c738-50c1-7a89-d0cae22ec5a7}">
           <p14:sldIdLst>
             <p14:sldId id="266"/>
             <p14:sldId id="273"/>
@@ -200,7 +200,7 @@
             <p14:sldId id="302"/>
           </p14:sldIdLst>
         </p14:section>
-        <p14:section name="Execution" id="{f0358d8b-8d05-af9e-f42d-00ac35eb8536}">
+        <p14:section name="Execution" id="{2ba61748-d3fd-edd5-a382-18887a887e7f}">
           <p14:sldIdLst>
             <p14:sldId id="267"/>
             <p14:sldId id="268"/>
@@ -210,7 +210,7 @@
             <p14:sldId id="272"/>
           </p14:sldIdLst>
         </p14:section>
-        <p14:section name="State" id="{9b21320d-5a16-65ba-90c5-99c22cffe732}">
+        <p14:section name="State" id="{3db6c7d7-3f6b-0925-6daf-892ed60c8b77}">
           <p14:sldIdLst>
             <p14:sldId id="274"/>
             <p14:sldId id="275"/>
@@ -219,7 +219,7 @@
             <p14:sldId id="278"/>
           </p14:sldIdLst>
         </p14:section>
-        <p14:section name="Line editor and prompt" id="{81b14080-1bc6-e125-fa20-ff86f9d50e2b}">
+        <p14:section name="Line editor and prompt" id="{57bd409e-64d9-ebb7-510e-5129a00a9a9b}">
           <p14:sldIdLst>
             <p14:sldId id="280"/>
             <p14:sldId id="281"/>
@@ -229,38 +229,38 @@
             <p14:sldId id="285"/>
           </p14:sldIdLst>
         </p14:section>
-        <p14:section name="Observability" id="{f97126fd-7907-4639-022d-40fb1158e1eb}">
+        <p14:section name="Observability" id="{a0685126-9128-1385-53f9-9ba2c643c320}">
           <p14:sldIdLst>
             <p14:sldId id="287"/>
             <p14:sldId id="288"/>
             <p14:sldId id="289"/>
           </p14:sldIdLst>
         </p14:section>
-        <p14:section name="Language" id="{636dcf44-ff9b-1480-a8a4-410b048808dd}">
+        <p14:section name="Language" id="{fc2c849c-8876-14c3-db7f-e19ea664b682}">
           <p14:sldIdLst>
             <p14:sldId id="291"/>
             <p14:sldId id="292"/>
           </p14:sldIdLst>
         </p14:section>
-        <p14:section name="Extensibility" id="{35eaddab-3ec6-cce2-d3ea-b404f82558d4}">
+        <p14:section name="Extensibility" id="{8b313272-3ad1-36cf-4319-1a5e329a7b16}">
           <p14:sldIdLst>
             <p14:sldId id="294"/>
             <p14:sldId id="295"/>
           </p14:sldIdLst>
         </p14:section>
-        <p14:section name="Compatibility" id="{2df06806-249e-cad2-e28f-0ac30a7daa67}">
+        <p14:section name="Compatibility" id="{e8809fd9-c627-14d9-835f-7a8855a7a0e8}">
           <p14:sldIdLst>
             <p14:sldId id="297"/>
             <p14:sldId id="298"/>
           </p14:sldIdLst>
         </p14:section>
-        <p14:section name="Verification" id="{281f6e5a-f882-570e-8785-1d963261ae6e}">
+        <p14:section name="Verification" id="{d5f464d2-218e-fc2a-041a-ee1e5918d0cc}">
           <p14:sldIdLst>
             <p14:sldId id="300"/>
             <p14:sldId id="301"/>
           </p14:sldIdLst>
         </p14:section>
-        <p14:section name="Tooling" id="{6c570d02-dc5b-c4d9-79c4-098887506595}">
+        <p14:section name="Tooling" id="{b8fbd39d-270f-7299-4ae9-28112aadce8c}">
           <p14:sldIdLst>
             <p14:sldId id="303"/>
             <p14:sldId id="304"/>
@@ -268,7 +268,7 @@
             <p14:sldId id="306"/>
           </p14:sldIdLst>
         </p14:section>
-        <p14:section name="Take-away" id="{86bf1587-a5dc-21ed-2e52-da0774335231}">
+        <p14:section name="Take-away" id="{c1fbd42b-54e0-27c7-72ea-ef4cf14a682e}">
           <p14:sldIdLst>
             <p14:sldId id="307"/>
             <p14:sldId id="308"/>
@@ -278,7 +278,7 @@
             <p14:sldId id="312"/>
           </p14:sldIdLst>
         </p14:section>
-        <p14:section name="Backup" id="{17405b73-6240-aba9-5914-8426c841942d}">
+        <p14:section name="Backup" id="{b6b742c2-662e-e182-0fa8-ae30c5a7d7f7}">
           <p14:sldIdLst>
             <p14:sldId id="313"/>
             <p14:sldId id="314"/>
@@ -6097,7 +6097,7 @@
       </p:grpSpPr>
       <p:pic>
         <p:nvPicPr>
-          <p:cNvPr id="2" name="Image 0" descr="/private/tmp/claude-501/-Users-wizard-RustroverProjects-zshrs/2555d359-9a79-4736-9207-869cc21577b1/scratchpad/logo/logo-mark.png">    </p:cNvPr>
+          <p:cNvPr id="2" name="Image 0" descr="/Users/wizard/RustroverProjects/zshrs/docs/logo-mark.png">    </p:cNvPr>
           <p:cNvPicPr>
             <a:picLocks noChangeAspect="1"/>
           </p:cNvPicPr>
@@ -6240,7 +6240,7 @@
       </p:grpSpPr>
       <p:pic>
         <p:nvPicPr>
-          <p:cNvPr id="2" name="Image 0" descr="/private/tmp/claude-501/-Users-wizard-RustroverProjects-zshrs/2555d359-9a79-4736-9207-869cc21577b1/scratchpad/logo/logo-mark.png">    </p:cNvPr>
+          <p:cNvPr id="2" name="Image 0" descr="/Users/wizard/RustroverProjects/zshrs/docs/logo-mark.png">    </p:cNvPr>
           <p:cNvPicPr>
             <a:picLocks noChangeAspect="1"/>
           </p:cNvPicPr>
@@ -6817,7 +6817,7 @@
       </p:sp>
       <p:pic>
         <p:nvPicPr>
-          <p:cNvPr id="6" name="Image 0" descr="/private/tmp/claude-501/-Users-wizard-RustroverProjects-zshrs/2555d359-9a79-4736-9207-869cc21577b1/scratchpad/logo/logo.png">    </p:cNvPr>
+          <p:cNvPr id="6" name="Image 0" descr="/Users/wizard/RustroverProjects/zshrs/docs/logo.png">    </p:cNvPr>
           <p:cNvPicPr>
             <a:picLocks noChangeAspect="1"/>
           </p:cNvPicPr>

--- a/docs/talk.pptx
+++ b/docs/talk.pptx
@@ -165,14 +165,14 @@
   <p:extLst>
     <p:ext uri="{521415D9-36F7-43E2-AB2F-B90AF26B5E84}">
       <p14:sectionLst xmlns:p14="http://schemas.microsoft.com/office/powerpoint/2010/main">
-        <p14:section name="Intro" id="{28799c49-bb2f-a5c4-7b0c-1864986a410d}">
+        <p14:section name="Intro" id="{30d6668b-cd87-6361-01e9-d00935c66df5}">
           <p14:sldIdLst>
             <p14:sldId id="256"/>
             <p14:sldId id="257"/>
             <p14:sldId id="258"/>
           </p14:sldIdLst>
         </p14:section>
-        <p14:section name="Parity" id="{db5c1213-9e13-1d62-5db3-b625dffbdb2a}">
+        <p14:section name="Parity" id="{6847b5ad-04d4-ae32-bc6d-ae1b93464b10}">
           <p14:sldIdLst>
             <p14:sldId id="259"/>
             <p14:sldId id="260"/>
@@ -180,14 +180,14 @@
             <p14:sldId id="262"/>
           </p14:sldIdLst>
         </p14:section>
-        <p14:section name="Engine" id="{96b3ac8d-0e3e-b0a6-0840-dbe90457d032}">
+        <p14:section name="Engine" id="{f306e0d0-2dbc-7f1f-db60-a30af8d5c9e7}">
           <p14:sldIdLst>
             <p14:sldId id="263"/>
             <p14:sldId id="264"/>
             <p14:sldId id="265"/>
           </p14:sldIdLst>
         </p14:section>
-        <p14:section name="Outline" id="{fcfb8ec9-c738-50c1-7a89-d0cae22ec5a7}">
+        <p14:section name="Outline" id="{e4f912f2-5e14-6782-0c6a-0745aa5ceaee}">
           <p14:sldIdLst>
             <p14:sldId id="266"/>
             <p14:sldId id="273"/>
@@ -200,7 +200,7 @@
             <p14:sldId id="302"/>
           </p14:sldIdLst>
         </p14:section>
-        <p14:section name="Execution" id="{2ba61748-d3fd-edd5-a382-18887a887e7f}">
+        <p14:section name="Execution" id="{cd9b5bbf-8a29-c5f7-c42b-64f026df538e}">
           <p14:sldIdLst>
             <p14:sldId id="267"/>
             <p14:sldId id="268"/>
@@ -210,7 +210,7 @@
             <p14:sldId id="272"/>
           </p14:sldIdLst>
         </p14:section>
-        <p14:section name="State" id="{3db6c7d7-3f6b-0925-6daf-892ed60c8b77}">
+        <p14:section name="State" id="{8ce29b04-5ff0-5ded-7784-c300febd9bb4}">
           <p14:sldIdLst>
             <p14:sldId id="274"/>
             <p14:sldId id="275"/>
@@ -219,7 +219,7 @@
             <p14:sldId id="278"/>
           </p14:sldIdLst>
         </p14:section>
-        <p14:section name="Line editor and prompt" id="{57bd409e-64d9-ebb7-510e-5129a00a9a9b}">
+        <p14:section name="Line editor and prompt" id="{18b255d0-39b1-3c8b-68ff-fc262547bb89}">
           <p14:sldIdLst>
             <p14:sldId id="280"/>
             <p14:sldId id="281"/>
@@ -229,38 +229,38 @@
             <p14:sldId id="285"/>
           </p14:sldIdLst>
         </p14:section>
-        <p14:section name="Observability" id="{a0685126-9128-1385-53f9-9ba2c643c320}">
+        <p14:section name="Observability" id="{a0acaca4-4bef-0010-144d-34e8137d12bb}">
           <p14:sldIdLst>
             <p14:sldId id="287"/>
             <p14:sldId id="288"/>
             <p14:sldId id="289"/>
           </p14:sldIdLst>
         </p14:section>
-        <p14:section name="Language" id="{fc2c849c-8876-14c3-db7f-e19ea664b682}">
+        <p14:section name="Language" id="{18ca0188-c277-1b9f-6445-aa8b7a30ee9c}">
           <p14:sldIdLst>
             <p14:sldId id="291"/>
             <p14:sldId id="292"/>
           </p14:sldIdLst>
         </p14:section>
-        <p14:section name="Extensibility" id="{8b313272-3ad1-36cf-4319-1a5e329a7b16}">
+        <p14:section name="Extensibility" id="{ad8e0192-22c3-6c48-272c-e1a6cafa3097}">
           <p14:sldIdLst>
             <p14:sldId id="294"/>
             <p14:sldId id="295"/>
           </p14:sldIdLst>
         </p14:section>
-        <p14:section name="Compatibility" id="{e8809fd9-c627-14d9-835f-7a8855a7a0e8}">
+        <p14:section name="Compatibility" id="{5502f8f3-5d08-ad83-4dfa-2714c5225b02}">
           <p14:sldIdLst>
             <p14:sldId id="297"/>
             <p14:sldId id="298"/>
           </p14:sldIdLst>
         </p14:section>
-        <p14:section name="Verification" id="{d5f464d2-218e-fc2a-041a-ee1e5918d0cc}">
+        <p14:section name="Verification" id="{06693c87-eb6e-a535-5382-4fb199f6d7a5}">
           <p14:sldIdLst>
             <p14:sldId id="300"/>
             <p14:sldId id="301"/>
           </p14:sldIdLst>
         </p14:section>
-        <p14:section name="Tooling" id="{b8fbd39d-270f-7299-4ae9-28112aadce8c}">
+        <p14:section name="Tooling" id="{ef0cd3a7-f61f-033b-df97-5b92115a3c8b}">
           <p14:sldIdLst>
             <p14:sldId id="303"/>
             <p14:sldId id="304"/>
@@ -268,7 +268,7 @@
             <p14:sldId id="306"/>
           </p14:sldIdLst>
         </p14:section>
-        <p14:section name="Take-away" id="{c1fbd42b-54e0-27c7-72ea-ef4cf14a682e}">
+        <p14:section name="Take-away" id="{9951e80e-2821-1a1e-6792-752f4b54dfa4}">
           <p14:sldIdLst>
             <p14:sldId id="307"/>
             <p14:sldId id="308"/>
@@ -278,7 +278,7 @@
             <p14:sldId id="312"/>
           </p14:sldIdLst>
         </p14:section>
-        <p14:section name="Backup" id="{b6b742c2-662e-e182-0fa8-ae30c5a7d7f7}">
+        <p14:section name="Backup" id="{87060e3f-9669-305f-c8c0-94b888758674}">
           <p14:sldIdLst>
             <p14:sldId id="313"/>
             <p14:sldId id="314"/>
@@ -335,7 +335,7 @@
             <c:bubble3D val="0"/>
             <c:spPr>
               <a:solidFill>
-                <a:srgbClr val="5CC8D7"/>
+                <a:srgbClr val="05D9E8"/>
               </a:solidFill>
               <a:effectLst/>
             </c:spPr>
@@ -345,7 +345,7 @@
             <c:bubble3D val="0"/>
             <c:spPr>
               <a:solidFill>
-                <a:srgbClr val="F2994A"/>
+                <a:srgbClr val="FF2A6D"/>
               </a:solidFill>
               <a:effectLst/>
             </c:spPr>
@@ -362,7 +362,7 @@
                   <a:pPr>
                     <a:defRPr sz="1600" b="0" i="0" u="none" strike="noStrike">
                       <a:solidFill>
-                        <a:srgbClr val="0F1419"/>
+                        <a:srgbClr val="05050A"/>
                       </a:solidFill>
                       <a:latin typeface="+mn-lt"/>
                     </a:defRPr>
@@ -387,7 +387,7 @@
                   <a:pPr>
                     <a:defRPr sz="1600" b="0" i="0" u="none" strike="noStrike">
                       <a:solidFill>
-                        <a:srgbClr val="0F1419"/>
+                        <a:srgbClr val="05050A"/>
                       </a:solidFill>
                       <a:latin typeface="+mn-lt"/>
                     </a:defRPr>
@@ -474,7 +474,7 @@
           <a:pPr>
             <a:defRPr sz="1400">
               <a:solidFill>
-                <a:srgbClr val="14181D"/>
+                <a:srgbClr val="E6F4FF"/>
               </a:solidFill>
               <a:latin typeface="+mn-lt"/>
               <a:cs typeface="+mn-lt"/>
@@ -6288,7 +6288,7 @@
               <a:buNone/>
               <a:defRPr lang="en-US" sz="3600" b="1" dirty="0">
                 <a:solidFill>
-                  <a:schemeClr val="accent4"/>
+                  <a:schemeClr val="bg2"/>
                 </a:solidFill>
               </a:defRPr>
             </a:lvl1pPr>
@@ -6331,7 +6331,7 @@
             <a:lvl1pPr>
               <a:defRPr sz="1200">
                 <a:solidFill>
-                  <a:schemeClr val="accent6"/>
+                  <a:schemeClr val="accent5"/>
                 </a:solidFill>
                 <a:latin typeface="Courier New"/>
                 <a:ea typeface="Courier New"/>
@@ -6971,7 +6971,7 @@
             <a:r>
               <a:rPr lang="en-US" sz="3600" b="1" dirty="0">
                 <a:solidFill>
-                  <a:schemeClr val="accent4"/>
+                  <a:schemeClr val="bg2"/>
                 </a:solidFill>
               </a:rPr>
               <a:t>Measure it yourself</a:t>
@@ -7007,7 +7007,7 @@
             <a:r>
               <a:rPr lang="en-US" sz="1200" dirty="0">
                 <a:solidFill>
-                  <a:schemeClr val="accent6"/>
+                  <a:schemeClr val="accent5"/>
                 </a:solidFill>
                 <a:latin typeface="Courier New" pitchFamily="34" charset="0"/>
                 <a:ea typeface="Courier New" pitchFamily="34" charset="-122"/>
@@ -7036,11 +7036,11 @@
             </a:avLst>
           </a:prstGeom>
           <a:solidFill>
-            <a:schemeClr val="accent4"/>
+            <a:schemeClr val="tx2"/>
           </a:solidFill>
           <a:ln w="12700">
             <a:solidFill>
-              <a:srgbClr val="2C3844"/>
+              <a:srgbClr val="4A1A5E"/>
             </a:solidFill>
             <a:prstDash val="solid"/>
           </a:ln>
@@ -7139,7 +7139,7 @@
             <a:r>
               <a:rPr lang="en-US" sz="2600" dirty="0">
                 <a:solidFill>
-                  <a:schemeClr val="accent4"/>
+                  <a:schemeClr val="bg2"/>
                 </a:solidFill>
               </a:rPr>
               <a:t>zsh-bench reports prompt, first command, Enter-to-prompt and typing delay together</a:t>
@@ -7157,7 +7157,7 @@
             <a:r>
               <a:rPr lang="en-US" sz="2600" dirty="0">
                 <a:solidFill>
-                  <a:schemeClr val="accent4"/>
+                  <a:schemeClr val="bg2"/>
                 </a:solidFill>
               </a:rPr>
               <a:t>RSS in KB for the current shell</a:t>
@@ -7175,7 +7175,7 @@
             <a:r>
               <a:rPr lang="en-US" sz="2600" dirty="0">
                 <a:solidFill>
-                  <a:schemeClr val="accent4"/>
+                  <a:schemeClr val="bg2"/>
                 </a:solidFill>
               </a:rPr>
               <a:t>Post your numbers as an issue</a:t>
@@ -7214,7 +7214,7 @@
             <a:lvl1pPr>
               <a:defRPr sz="1200">
                 <a:solidFill>
-                  <a:schemeClr val="accent6"/>
+                  <a:schemeClr val="accent5"/>
                 </a:solidFill>
                 <a:latin typeface="Courier New"/>
                 <a:ea typeface="Courier New"/>
@@ -7286,7 +7286,7 @@
             <a:r>
               <a:rPr lang="en-US" sz="3600" b="1" dirty="0">
                 <a:solidFill>
-                  <a:schemeClr val="accent4"/>
+                  <a:schemeClr val="bg2"/>
                 </a:solidFill>
               </a:rPr>
               <a:t>The goodies</a:t>
@@ -7322,7 +7322,7 @@
             <a:r>
               <a:rPr lang="en-US" sz="1200" dirty="0">
                 <a:solidFill>
-                  <a:schemeClr val="accent6"/>
+                  <a:schemeClr val="accent5"/>
                 </a:solidFill>
                 <a:latin typeface="Courier New" pitchFamily="34" charset="0"/>
                 <a:ea typeface="Courier New" pitchFamily="34" charset="-122"/>
@@ -7351,11 +7351,11 @@
             </a:avLst>
           </a:prstGeom>
           <a:solidFill>
-            <a:srgbClr val="FFFFFF"/>
+            <a:schemeClr val="tx2"/>
           </a:solidFill>
           <a:ln w="12700">
             <a:solidFill>
-              <a:srgbClr val="D9D5C8"/>
+              <a:srgbClr val="4A1A5E"/>
             </a:solidFill>
             <a:prstDash val="solid"/>
           </a:ln>
@@ -7424,7 +7424,7 @@
             <a:r>
               <a:rPr lang="en-US" sz="2000" b="1" dirty="0">
                 <a:solidFill>
-                  <a:schemeClr val="accent2"/>
+                  <a:schemeClr val="accent1"/>
                 </a:solidFill>
               </a:rPr>
               <a:t>Execution</a:t>
@@ -7460,7 +7460,7 @@
             <a:r>
               <a:rPr lang="en-US" sz="1600" dirty="0">
                 <a:solidFill>
-                  <a:schemeClr val="accent6"/>
+                  <a:schemeClr val="accent5"/>
                 </a:solidFill>
               </a:rPr>
               <a:t>6 goodies</a:t>
@@ -7486,11 +7486,11 @@
             </a:avLst>
           </a:prstGeom>
           <a:solidFill>
-            <a:srgbClr val="FFFFFF"/>
+            <a:schemeClr val="tx2"/>
           </a:solidFill>
           <a:ln w="12700">
             <a:solidFill>
-              <a:srgbClr val="D9D5C8"/>
+              <a:srgbClr val="4A1A5E"/>
             </a:solidFill>
             <a:prstDash val="solid"/>
           </a:ln>
@@ -7523,7 +7523,7 @@
             <a:r>
               <a:rPr lang="en-US" sz="2800" b="1" dirty="0">
                 <a:solidFill>
-                  <a:schemeClr val="accent6"/>
+                  <a:schemeClr val="accent5"/>
                 </a:solidFill>
               </a:rPr>
               <a:t>2</a:t>
@@ -7559,7 +7559,7 @@
             <a:r>
               <a:rPr lang="en-US" sz="2000" b="1" dirty="0">
                 <a:solidFill>
-                  <a:schemeClr val="accent4"/>
+                  <a:schemeClr val="bg2"/>
                 </a:solidFill>
               </a:rPr>
               <a:t>State</a:t>
@@ -7595,7 +7595,7 @@
             <a:r>
               <a:rPr lang="en-US" sz="1600" dirty="0">
                 <a:solidFill>
-                  <a:schemeClr val="accent6"/>
+                  <a:schemeClr val="accent5"/>
                 </a:solidFill>
               </a:rPr>
               <a:t>5 goodies</a:t>
@@ -7621,11 +7621,11 @@
             </a:avLst>
           </a:prstGeom>
           <a:solidFill>
-            <a:srgbClr val="FFFFFF"/>
+            <a:schemeClr val="tx2"/>
           </a:solidFill>
           <a:ln w="12700">
             <a:solidFill>
-              <a:srgbClr val="D9D5C8"/>
+              <a:srgbClr val="4A1A5E"/>
             </a:solidFill>
             <a:prstDash val="solid"/>
           </a:ln>
@@ -7658,7 +7658,7 @@
             <a:r>
               <a:rPr lang="en-US" sz="2800" b="1" dirty="0">
                 <a:solidFill>
-                  <a:schemeClr val="accent6"/>
+                  <a:schemeClr val="accent5"/>
                 </a:solidFill>
               </a:rPr>
               <a:t>3</a:t>
@@ -7694,7 +7694,7 @@
             <a:r>
               <a:rPr lang="en-US" sz="2000" b="1" dirty="0">
                 <a:solidFill>
-                  <a:schemeClr val="accent4"/>
+                  <a:schemeClr val="bg2"/>
                 </a:solidFill>
               </a:rPr>
               <a:t>Line editor and prompt</a:t>
@@ -7730,7 +7730,7 @@
             <a:r>
               <a:rPr lang="en-US" sz="1600" dirty="0">
                 <a:solidFill>
-                  <a:schemeClr val="accent6"/>
+                  <a:schemeClr val="accent5"/>
                 </a:solidFill>
               </a:rPr>
               <a:t>ZLE, highlighting, prompt</a:t>
@@ -7756,11 +7756,11 @@
             </a:avLst>
           </a:prstGeom>
           <a:solidFill>
-            <a:srgbClr val="FFFFFF"/>
+            <a:schemeClr val="tx2"/>
           </a:solidFill>
           <a:ln w="12700">
             <a:solidFill>
-              <a:srgbClr val="D9D5C8"/>
+              <a:srgbClr val="4A1A5E"/>
             </a:solidFill>
             <a:prstDash val="solid"/>
           </a:ln>
@@ -7793,7 +7793,7 @@
             <a:r>
               <a:rPr lang="en-US" sz="2800" b="1" dirty="0">
                 <a:solidFill>
-                  <a:schemeClr val="accent6"/>
+                  <a:schemeClr val="accent5"/>
                 </a:solidFill>
               </a:rPr>
               <a:t>4</a:t>
@@ -7829,7 +7829,7 @@
             <a:r>
               <a:rPr lang="en-US" sz="2000" b="1" dirty="0">
                 <a:solidFill>
-                  <a:schemeClr val="accent4"/>
+                  <a:schemeClr val="bg2"/>
                 </a:solidFill>
               </a:rPr>
               <a:t>Observability</a:t>
@@ -7865,7 +7865,7 @@
             <a:r>
               <a:rPr lang="en-US" sz="1600" dirty="0">
                 <a:solidFill>
-                  <a:schemeClr val="accent6"/>
+                  <a:schemeClr val="accent5"/>
                 </a:solidFill>
               </a:rPr>
               <a:t>3 goodies</a:t>
@@ -7891,11 +7891,11 @@
             </a:avLst>
           </a:prstGeom>
           <a:solidFill>
-            <a:srgbClr val="FFFFFF"/>
+            <a:schemeClr val="tx2"/>
           </a:solidFill>
           <a:ln w="12700">
             <a:solidFill>
-              <a:srgbClr val="D9D5C8"/>
+              <a:srgbClr val="4A1A5E"/>
             </a:solidFill>
             <a:prstDash val="solid"/>
           </a:ln>
@@ -7928,7 +7928,7 @@
             <a:r>
               <a:rPr lang="en-US" sz="2800" b="1" dirty="0">
                 <a:solidFill>
-                  <a:schemeClr val="accent6"/>
+                  <a:schemeClr val="accent5"/>
                 </a:solidFill>
               </a:rPr>
               <a:t>5</a:t>
@@ -7964,7 +7964,7 @@
             <a:r>
               <a:rPr lang="en-US" sz="2000" b="1" dirty="0">
                 <a:solidFill>
-                  <a:schemeClr val="accent4"/>
+                  <a:schemeClr val="bg2"/>
                 </a:solidFill>
               </a:rPr>
               <a:t>Language</a:t>
@@ -8000,7 +8000,7 @@
             <a:r>
               <a:rPr lang="en-US" sz="1600" dirty="0">
                 <a:solidFill>
-                  <a:schemeClr val="accent6"/>
+                  <a:schemeClr val="accent5"/>
                 </a:solidFill>
               </a:rPr>
               <a:t>2 goodies</a:t>
@@ -8026,11 +8026,11 @@
             </a:avLst>
           </a:prstGeom>
           <a:solidFill>
-            <a:srgbClr val="FFFFFF"/>
+            <a:schemeClr val="tx2"/>
           </a:solidFill>
           <a:ln w="12700">
             <a:solidFill>
-              <a:srgbClr val="D9D5C8"/>
+              <a:srgbClr val="4A1A5E"/>
             </a:solidFill>
             <a:prstDash val="solid"/>
           </a:ln>
@@ -8063,7 +8063,7 @@
             <a:r>
               <a:rPr lang="en-US" sz="2800" b="1" dirty="0">
                 <a:solidFill>
-                  <a:schemeClr val="accent6"/>
+                  <a:schemeClr val="accent5"/>
                 </a:solidFill>
               </a:rPr>
               <a:t>6</a:t>
@@ -8099,7 +8099,7 @@
             <a:r>
               <a:rPr lang="en-US" sz="2000" b="1" dirty="0">
                 <a:solidFill>
-                  <a:schemeClr val="accent4"/>
+                  <a:schemeClr val="bg2"/>
                 </a:solidFill>
               </a:rPr>
               <a:t>Extensibility</a:t>
@@ -8135,7 +8135,7 @@
             <a:r>
               <a:rPr lang="en-US" sz="1600" dirty="0">
                 <a:solidFill>
-                  <a:schemeClr val="accent6"/>
+                  <a:schemeClr val="accent5"/>
                 </a:solidFill>
               </a:rPr>
               <a:t>2 goodies</a:t>
@@ -8161,11 +8161,11 @@
             </a:avLst>
           </a:prstGeom>
           <a:solidFill>
-            <a:srgbClr val="FFFFFF"/>
+            <a:schemeClr val="tx2"/>
           </a:solidFill>
           <a:ln w="12700">
             <a:solidFill>
-              <a:srgbClr val="D9D5C8"/>
+              <a:srgbClr val="4A1A5E"/>
             </a:solidFill>
             <a:prstDash val="solid"/>
           </a:ln>
@@ -8198,7 +8198,7 @@
             <a:r>
               <a:rPr lang="en-US" sz="2800" b="1" dirty="0">
                 <a:solidFill>
-                  <a:schemeClr val="accent6"/>
+                  <a:schemeClr val="accent5"/>
                 </a:solidFill>
               </a:rPr>
               <a:t>7</a:t>
@@ -8234,7 +8234,7 @@
             <a:r>
               <a:rPr lang="en-US" sz="2000" b="1" dirty="0">
                 <a:solidFill>
-                  <a:schemeClr val="accent4"/>
+                  <a:schemeClr val="bg2"/>
                 </a:solidFill>
               </a:rPr>
               <a:t>Compatibility</a:t>
@@ -8270,7 +8270,7 @@
             <a:r>
               <a:rPr lang="en-US" sz="1600" dirty="0">
                 <a:solidFill>
-                  <a:schemeClr val="accent6"/>
+                  <a:schemeClr val="accent5"/>
                 </a:solidFill>
               </a:rPr>
               <a:t>2 goodies</a:t>
@@ -8296,11 +8296,11 @@
             </a:avLst>
           </a:prstGeom>
           <a:solidFill>
-            <a:srgbClr val="FFFFFF"/>
+            <a:schemeClr val="tx2"/>
           </a:solidFill>
           <a:ln w="12700">
             <a:solidFill>
-              <a:srgbClr val="D9D5C8"/>
+              <a:srgbClr val="4A1A5E"/>
             </a:solidFill>
             <a:prstDash val="solid"/>
           </a:ln>
@@ -8333,7 +8333,7 @@
             <a:r>
               <a:rPr lang="en-US" sz="2800" b="1" dirty="0">
                 <a:solidFill>
-                  <a:schemeClr val="accent6"/>
+                  <a:schemeClr val="accent5"/>
                 </a:solidFill>
               </a:rPr>
               <a:t>8</a:t>
@@ -8369,7 +8369,7 @@
             <a:r>
               <a:rPr lang="en-US" sz="2000" b="1" dirty="0">
                 <a:solidFill>
-                  <a:schemeClr val="accent4"/>
+                  <a:schemeClr val="bg2"/>
                 </a:solidFill>
               </a:rPr>
               <a:t>Verification</a:t>
@@ -8405,7 +8405,7 @@
             <a:r>
               <a:rPr lang="en-US" sz="1600" dirty="0">
                 <a:solidFill>
-                  <a:schemeClr val="accent6"/>
+                  <a:schemeClr val="accent5"/>
                 </a:solidFill>
               </a:rPr>
               <a:t>2 goodies</a:t>
@@ -8431,11 +8431,11 @@
             </a:avLst>
           </a:prstGeom>
           <a:solidFill>
-            <a:srgbClr val="FFFFFF"/>
+            <a:schemeClr val="tx2"/>
           </a:solidFill>
           <a:ln w="12700">
             <a:solidFill>
-              <a:srgbClr val="D9D5C8"/>
+              <a:srgbClr val="4A1A5E"/>
             </a:solidFill>
             <a:prstDash val="solid"/>
           </a:ln>
@@ -8468,7 +8468,7 @@
             <a:r>
               <a:rPr lang="en-US" sz="2800" b="1" dirty="0">
                 <a:solidFill>
-                  <a:schemeClr val="accent6"/>
+                  <a:schemeClr val="accent5"/>
                 </a:solidFill>
               </a:rPr>
               <a:t>9</a:t>
@@ -8504,7 +8504,7 @@
             <a:r>
               <a:rPr lang="en-US" sz="2000" b="1" dirty="0">
                 <a:solidFill>
-                  <a:schemeClr val="accent4"/>
+                  <a:schemeClr val="bg2"/>
                 </a:solidFill>
               </a:rPr>
               <a:t>Tooling</a:t>
@@ -8540,7 +8540,7 @@
             <a:r>
               <a:rPr lang="en-US" sz="1600" dirty="0">
                 <a:solidFill>
-                  <a:schemeClr val="accent6"/>
+                  <a:schemeClr val="accent5"/>
                 </a:solidFill>
               </a:rPr>
               <a:t>4 goodies</a:t>
@@ -8579,7 +8579,7 @@
             <a:lvl1pPr>
               <a:defRPr sz="1200">
                 <a:solidFill>
-                  <a:schemeClr val="accent6"/>
+                  <a:schemeClr val="accent5"/>
                 </a:solidFill>
                 <a:latin typeface="Courier New"/>
                 <a:ea typeface="Courier New"/>
@@ -8832,7 +8832,7 @@
           </a:solidFill>
           <a:ln w="12700">
             <a:solidFill>
-              <a:srgbClr val="2C3844"/>
+              <a:srgbClr val="4A1A5E"/>
             </a:solidFill>
             <a:prstDash val="solid"/>
           </a:ln>
@@ -9193,7 +9193,7 @@
           </a:solidFill>
           <a:ln w="12700">
             <a:solidFill>
-              <a:srgbClr val="2C3844"/>
+              <a:srgbClr val="4A1A5E"/>
             </a:solidFill>
             <a:prstDash val="solid"/>
           </a:ln>
@@ -9536,7 +9536,7 @@
           </a:solidFill>
           <a:ln w="12700">
             <a:solidFill>
-              <a:srgbClr val="2C3844"/>
+              <a:srgbClr val="4A1A5E"/>
             </a:solidFill>
             <a:prstDash val="solid"/>
           </a:ln>
@@ -9635,7 +9635,7 @@
           </a:solidFill>
           <a:ln w="12700">
             <a:solidFill>
-              <a:srgbClr val="2C3844"/>
+              <a:srgbClr val="4A1A5E"/>
             </a:solidFill>
             <a:prstDash val="solid"/>
           </a:ln>
@@ -9968,7 +9968,7 @@
           </a:solidFill>
           <a:ln w="12700">
             <a:solidFill>
-              <a:srgbClr val="2C3844"/>
+              <a:srgbClr val="4A1A5E"/>
             </a:solidFill>
             <a:prstDash val="solid"/>
           </a:ln>
@@ -10067,7 +10067,7 @@
           </a:solidFill>
           <a:ln w="12700">
             <a:solidFill>
-              <a:srgbClr val="2C3844"/>
+              <a:srgbClr val="4A1A5E"/>
             </a:solidFill>
             <a:prstDash val="solid"/>
           </a:ln>
@@ -10380,7 +10380,7 @@
           </a:solidFill>
           <a:ln w="12700">
             <a:solidFill>
-              <a:srgbClr val="2C3844"/>
+              <a:srgbClr val="4A1A5E"/>
             </a:solidFill>
             <a:prstDash val="solid"/>
           </a:ln>
@@ -10705,7 +10705,7 @@
           </a:solidFill>
           <a:ln w="12700">
             <a:solidFill>
-              <a:srgbClr val="2C3844"/>
+              <a:srgbClr val="4A1A5E"/>
             </a:solidFill>
             <a:prstDash val="solid"/>
           </a:ln>
@@ -10804,7 +10804,7 @@
           </a:solidFill>
           <a:ln w="12700">
             <a:solidFill>
-              <a:srgbClr val="2C3844"/>
+              <a:srgbClr val="4A1A5E"/>
             </a:solidFill>
             <a:prstDash val="solid"/>
           </a:ln>
@@ -11063,7 +11063,7 @@
           </a:solidFill>
           <a:ln w="12700">
             <a:solidFill>
-              <a:srgbClr val="2C3844"/>
+              <a:srgbClr val="4A1A5E"/>
             </a:solidFill>
             <a:prstDash val="solid"/>
           </a:ln>
@@ -11198,7 +11198,7 @@
           </a:solidFill>
           <a:ln w="12700">
             <a:solidFill>
-              <a:srgbClr val="2C3844"/>
+              <a:srgbClr val="4A1A5E"/>
             </a:solidFill>
             <a:prstDash val="solid"/>
           </a:ln>
@@ -11333,7 +11333,7 @@
           </a:solidFill>
           <a:ln w="12700">
             <a:solidFill>
-              <a:srgbClr val="2C3844"/>
+              <a:srgbClr val="4A1A5E"/>
             </a:solidFill>
             <a:prstDash val="solid"/>
           </a:ln>
@@ -11468,7 +11468,7 @@
           </a:solidFill>
           <a:ln w="12700">
             <a:solidFill>
-              <a:srgbClr val="2C3844"/>
+              <a:srgbClr val="4A1A5E"/>
             </a:solidFill>
             <a:prstDash val="solid"/>
           </a:ln>
@@ -11603,7 +11603,7 @@
           </a:solidFill>
           <a:ln w="12700">
             <a:solidFill>
-              <a:srgbClr val="2C3844"/>
+              <a:srgbClr val="4A1A5E"/>
             </a:solidFill>
             <a:prstDash val="solid"/>
           </a:ln>
@@ -11738,7 +11738,7 @@
           </a:solidFill>
           <a:ln w="12700">
             <a:solidFill>
-              <a:srgbClr val="2C3844"/>
+              <a:srgbClr val="4A1A5E"/>
             </a:solidFill>
             <a:prstDash val="solid"/>
           </a:ln>
@@ -11873,7 +11873,7 @@
           </a:solidFill>
           <a:ln w="12700">
             <a:solidFill>
-              <a:srgbClr val="2C3844"/>
+              <a:srgbClr val="4A1A5E"/>
             </a:solidFill>
             <a:prstDash val="solid"/>
           </a:ln>
@@ -12008,7 +12008,7 @@
           </a:solidFill>
           <a:ln w="12700">
             <a:solidFill>
-              <a:srgbClr val="2C3844"/>
+              <a:srgbClr val="4A1A5E"/>
             </a:solidFill>
             <a:prstDash val="solid"/>
           </a:ln>
@@ -12143,7 +12143,7 @@
           </a:solidFill>
           <a:ln w="12700">
             <a:solidFill>
-              <a:srgbClr val="2C3844"/>
+              <a:srgbClr val="4A1A5E"/>
             </a:solidFill>
             <a:prstDash val="solid"/>
           </a:ln>
@@ -12359,7 +12359,7 @@
             <a:r>
               <a:rPr lang="en-US" sz="3600" b="1" dirty="0">
                 <a:solidFill>
-                  <a:schemeClr val="accent4"/>
+                  <a:schemeClr val="bg2"/>
                 </a:solidFill>
               </a:rPr>
               <a:t>07 · Recorder owns the rebuild</a:t>
@@ -12395,7 +12395,7 @@
             <a:r>
               <a:rPr lang="en-US" sz="1200" dirty="0">
                 <a:solidFill>
-                  <a:schemeClr val="accent6"/>
+                  <a:schemeClr val="accent5"/>
                 </a:solidFill>
                 <a:latin typeface="Courier New" pitchFamily="34" charset="0"/>
                 <a:ea typeface="Courier New" pitchFamily="34" charset="-122"/>
@@ -12434,7 +12434,7 @@
             <a:r>
               <a:rPr lang="en-US" sz="2800" dirty="0">
                 <a:solidFill>
-                  <a:schemeClr val="accent4"/>
+                  <a:schemeClr val="bg2"/>
                 </a:solidFill>
               </a:rPr>
               <a:t>A separate binary sources your real login chain while AOP interception records every state-mutating command.</a:t>
@@ -12474,7 +12474,7 @@
             <a:r>
               <a:rPr lang="en-US" sz="2400" dirty="0">
                 <a:solidFill>
-                  <a:schemeClr val="accent4"/>
+                  <a:schemeClr val="bg2"/>
                 </a:solidFill>
               </a:rPr>
               <a:t>alias, function, export, fpath, hash -d, zstyle, bindkey, compdef, zmodload, setopt, trap, sched, source</a:t>
@@ -12492,7 +12492,7 @@
             <a:r>
               <a:rPr lang="en-US" sz="2400" dirty="0">
                 <a:solidFill>
-                  <a:schemeClr val="accent4"/>
+                  <a:schemeClr val="bg2"/>
                 </a:solidFill>
               </a:rPr>
               <a:t>Records kind, name, value, file, line and call chain</a:t>
@@ -12518,11 +12518,11 @@
             </a:avLst>
           </a:prstGeom>
           <a:solidFill>
-            <a:srgbClr val="FFFFFF"/>
+            <a:schemeClr val="tx2"/>
           </a:solidFill>
           <a:ln w="12700">
             <a:solidFill>
-              <a:srgbClr val="D9D5C8"/>
+              <a:srgbClr val="4A1A5E"/>
             </a:solidFill>
             <a:prstDash val="solid"/>
           </a:ln>
@@ -12591,7 +12591,7 @@
             <a:r>
               <a:rPr lang="en-US" sz="2000" dirty="0">
                 <a:solidFill>
-                  <a:schemeClr val="accent6"/>
+                  <a:schemeClr val="accent5"/>
                 </a:solidFill>
               </a:rPr>
               <a:t>Other shells discover your config by static walking and hoping the parse matches. This is the DTrace insight applied to configuration.</a:t>
@@ -12630,7 +12630,7 @@
             <a:lvl1pPr>
               <a:defRPr sz="1200">
                 <a:solidFill>
-                  <a:schemeClr val="accent6"/>
+                  <a:schemeClr val="accent5"/>
                 </a:solidFill>
                 <a:latin typeface="Courier New"/>
                 <a:ea typeface="Courier New"/>
@@ -12702,7 +12702,7 @@
             <a:r>
               <a:rPr lang="en-US" sz="3600" b="1" dirty="0">
                 <a:solidFill>
-                  <a:schemeClr val="accent4"/>
+                  <a:schemeClr val="bg2"/>
                 </a:solidFill>
               </a:rPr>
               <a:t>What this talk covers</a:t>
@@ -12738,7 +12738,7 @@
             <a:r>
               <a:rPr lang="en-US" sz="1200" dirty="0">
                 <a:solidFill>
-                  <a:schemeClr val="accent6"/>
+                  <a:schemeClr val="accent5"/>
                 </a:solidFill>
                 <a:latin typeface="Courier New" pitchFamily="34" charset="0"/>
                 <a:ea typeface="Courier New" pitchFamily="34" charset="-122"/>
@@ -12767,11 +12767,11 @@
             </a:avLst>
           </a:prstGeom>
           <a:solidFill>
-            <a:srgbClr val="FFFFFF"/>
+            <a:schemeClr val="tx2"/>
           </a:solidFill>
           <a:ln w="12700">
             <a:solidFill>
-              <a:srgbClr val="D9D5C8"/>
+              <a:srgbClr val="4A1A5E"/>
             </a:solidFill>
             <a:prstDash val="solid"/>
           </a:ln>
@@ -12804,7 +12804,7 @@
             <a:r>
               <a:rPr lang="en-US" sz="2500" b="1" dirty="0">
                 <a:solidFill>
-                  <a:schemeClr val="accent2"/>
+                  <a:schemeClr val="accent1"/>
                 </a:solidFill>
                 <a:latin typeface="Cambria" pitchFamily="34" charset="0"/>
                 <a:ea typeface="Cambria" pitchFamily="34" charset="-122"/>
@@ -12847,7 +12847,7 @@
             <a:r>
               <a:rPr lang="en-US" sz="2100" dirty="0">
                 <a:solidFill>
-                  <a:schemeClr val="accent4"/>
+                  <a:schemeClr val="bg2"/>
                 </a:solidFill>
               </a:rPr>
               <a:t>Install in two commands</a:t>
@@ -12865,7 +12865,7 @@
             <a:r>
               <a:rPr lang="en-US" sz="2100" dirty="0">
                 <a:solidFill>
-                  <a:schemeClr val="accent4"/>
+                  <a:schemeClr val="bg2"/>
                 </a:solidFill>
               </a:rPr>
               <a:t>Follow along live</a:t>
@@ -12891,11 +12891,11 @@
             </a:avLst>
           </a:prstGeom>
           <a:solidFill>
-            <a:srgbClr val="FFFFFF"/>
+            <a:schemeClr val="tx2"/>
           </a:solidFill>
           <a:ln w="12700">
             <a:solidFill>
-              <a:srgbClr val="D9D5C8"/>
+              <a:srgbClr val="4A1A5E"/>
             </a:solidFill>
             <a:prstDash val="solid"/>
           </a:ln>
@@ -12928,7 +12928,7 @@
             <a:r>
               <a:rPr lang="en-US" sz="2500" b="1" dirty="0">
                 <a:solidFill>
-                  <a:schemeClr val="accent2"/>
+                  <a:schemeClr val="accent1"/>
                 </a:solidFill>
                 <a:latin typeface="Cambria" pitchFamily="34" charset="0"/>
                 <a:ea typeface="Cambria" pitchFamily="34" charset="-122"/>
@@ -12971,7 +12971,7 @@
             <a:r>
               <a:rPr lang="en-US" sz="2100" dirty="0">
                 <a:solidFill>
-                  <a:schemeClr val="accent4"/>
+                  <a:schemeClr val="bg2"/>
                 </a:solidFill>
               </a:rPr>
               <a:t>Where the port stands</a:t>
@@ -12989,7 +12989,7 @@
             <a:r>
               <a:rPr lang="en-US" sz="2100" dirty="0">
                 <a:solidFill>
-                  <a:schemeClr val="accent4"/>
+                  <a:schemeClr val="bg2"/>
                 </a:solidFill>
               </a:rPr>
               <a:t>How it is measured</a:t>
@@ -13015,11 +13015,11 @@
             </a:avLst>
           </a:prstGeom>
           <a:solidFill>
-            <a:srgbClr val="FFFFFF"/>
+            <a:schemeClr val="tx2"/>
           </a:solidFill>
           <a:ln w="12700">
             <a:solidFill>
-              <a:srgbClr val="D9D5C8"/>
+              <a:srgbClr val="4A1A5E"/>
             </a:solidFill>
             <a:prstDash val="solid"/>
           </a:ln>
@@ -13052,7 +13052,7 @@
             <a:r>
               <a:rPr lang="en-US" sz="1500" b="1" dirty="0">
                 <a:solidFill>
-                  <a:schemeClr val="accent2"/>
+                  <a:schemeClr val="accent1"/>
                 </a:solidFill>
                 <a:latin typeface="Cambria" pitchFamily="34" charset="0"/>
                 <a:ea typeface="Cambria" pitchFamily="34" charset="-122"/>
@@ -13095,7 +13095,7 @@
             <a:r>
               <a:rPr lang="en-US" sz="2300" dirty="0">
                 <a:solidFill>
-                  <a:schemeClr val="accent4"/>
+                  <a:schemeClr val="bg2"/>
                 </a:solidFill>
               </a:rPr>
               <a:t>Five ways to help</a:t>
@@ -13113,7 +13113,7 @@
             <a:r>
               <a:rPr lang="en-US" sz="2300" dirty="0">
                 <a:solidFill>
-                  <a:schemeClr val="accent4"/>
+                  <a:schemeClr val="bg2"/>
                 </a:solidFill>
               </a:rPr>
               <a:t>Where to look</a:t>
@@ -13139,11 +13139,11 @@
             </a:avLst>
           </a:prstGeom>
           <a:solidFill>
-            <a:srgbClr val="FFFFFF"/>
+            <a:schemeClr val="tx2"/>
           </a:solidFill>
           <a:ln w="12700">
             <a:solidFill>
-              <a:srgbClr val="D9D5C8"/>
+              <a:srgbClr val="4A1A5E"/>
             </a:solidFill>
             <a:prstDash val="solid"/>
           </a:ln>
@@ -13176,7 +13176,7 @@
             <a:r>
               <a:rPr lang="en-US" sz="1600" b="1" dirty="0">
                 <a:solidFill>
-                  <a:schemeClr val="accent2"/>
+                  <a:schemeClr val="accent1"/>
                 </a:solidFill>
                 <a:latin typeface="Cambria" pitchFamily="34" charset="0"/>
                 <a:ea typeface="Cambria" pitchFamily="34" charset="-122"/>
@@ -13219,7 +13219,7 @@
             <a:r>
               <a:rPr lang="en-US" sz="2300" dirty="0">
                 <a:solidFill>
-                  <a:schemeClr val="accent4"/>
+                  <a:schemeClr val="bg2"/>
                 </a:solidFill>
               </a:rPr>
               <a:t>Nine areas</a:t>
@@ -13237,7 +13237,7 @@
             <a:r>
               <a:rPr lang="en-US" sz="2300" dirty="0">
                 <a:solidFill>
-                  <a:schemeClr val="accent4"/>
+                  <a:schemeClr val="bg2"/>
                 </a:solidFill>
               </a:rPr>
               <a:t>One slide per goodie</a:t>
@@ -13276,7 +13276,7 @@
             <a:lvl1pPr>
               <a:defRPr sz="1200">
                 <a:solidFill>
-                  <a:schemeClr val="accent6"/>
+                  <a:schemeClr val="accent5"/>
                 </a:solidFill>
                 <a:latin typeface="Courier New"/>
                 <a:ea typeface="Courier New"/>
@@ -13348,7 +13348,7 @@
             <a:r>
               <a:rPr lang="en-US" sz="3600" b="1" dirty="0">
                 <a:solidFill>
-                  <a:schemeClr val="accent4"/>
+                  <a:schemeClr val="bg2"/>
                 </a:solidFill>
               </a:rPr>
               <a:t>08 · Cacheable config versus replayed config</a:t>
@@ -13384,7 +13384,7 @@
             <a:r>
               <a:rPr lang="en-US" sz="1200" dirty="0">
                 <a:solidFill>
-                  <a:schemeClr val="accent6"/>
+                  <a:schemeClr val="accent5"/>
                 </a:solidFill>
                 <a:latin typeface="Courier New" pitchFamily="34" charset="0"/>
                 <a:ea typeface="Courier New" pitchFamily="34" charset="-122"/>
@@ -13423,7 +13423,7 @@
             <a:r>
               <a:rPr lang="en-US" sz="2800" dirty="0">
                 <a:solidFill>
-                  <a:schemeClr val="accent4"/>
+                  <a:schemeClr val="bg2"/>
                 </a:solidFill>
               </a:rPr>
               <a:t>Everything the recorder can prove is a pure function of your dotfiles folds into the canonical shard and is skipped at startup.</a:t>
@@ -13463,7 +13463,7 @@
             <a:r>
               <a:rPr lang="en-US" sz="3000" dirty="0">
                 <a:solidFill>
-                  <a:schemeClr val="accent4"/>
+                  <a:schemeClr val="bg2"/>
                 </a:solidFill>
               </a:rPr>
               <a:t>replay/ holds the non-deterministic .zshrc fragments</a:t>
@@ -13481,7 +13481,7 @@
             <a:r>
               <a:rPr lang="en-US" sz="3000" dirty="0">
                 <a:solidFill>
-                  <a:schemeClr val="accent4"/>
+                  <a:schemeClr val="bg2"/>
                 </a:solidFill>
               </a:rPr>
               <a:t>The rest is replayed</a:t>
@@ -13507,11 +13507,11 @@
             </a:avLst>
           </a:prstGeom>
           <a:solidFill>
-            <a:srgbClr val="FFFFFF"/>
+            <a:schemeClr val="tx2"/>
           </a:solidFill>
           <a:ln w="12700">
             <a:solidFill>
-              <a:srgbClr val="D9D5C8"/>
+              <a:srgbClr val="4A1A5E"/>
             </a:solidFill>
             <a:prstDash val="solid"/>
           </a:ln>
@@ -13580,7 +13580,7 @@
             <a:r>
               <a:rPr lang="en-US" sz="2000" dirty="0">
                 <a:solidFill>
-                  <a:schemeClr val="accent6"/>
+                  <a:schemeClr val="accent5"/>
                 </a:solidFill>
               </a:rPr>
               <a:t>Purity analysis on shell configuration is the idea under the cold-start number.</a:t>
@@ -13619,7 +13619,7 @@
             <a:lvl1pPr>
               <a:defRPr sz="1200">
                 <a:solidFill>
-                  <a:schemeClr val="accent6"/>
+                  <a:schemeClr val="accent5"/>
                 </a:solidFill>
                 <a:latin typeface="Courier New"/>
                 <a:ea typeface="Courier New"/>
@@ -13691,7 +13691,7 @@
             <a:r>
               <a:rPr lang="en-US" sz="3600" b="1" dirty="0">
                 <a:solidFill>
-                  <a:schemeClr val="accent4"/>
+                  <a:schemeClr val="bg2"/>
                 </a:solidFill>
               </a:rPr>
               <a:t>09 · Singleton daemon, stateless clients</a:t>
@@ -13727,7 +13727,7 @@
             <a:r>
               <a:rPr lang="en-US" sz="1200" dirty="0">
                 <a:solidFill>
-                  <a:schemeClr val="accent6"/>
+                  <a:schemeClr val="accent5"/>
                 </a:solidFill>
                 <a:latin typeface="Courier New" pitchFamily="34" charset="0"/>
                 <a:ea typeface="Courier New" pitchFamily="34" charset="-122"/>
@@ -13766,7 +13766,7 @@
             <a:r>
               <a:rPr lang="en-US" sz="2400" dirty="0">
                 <a:solidFill>
-                  <a:schemeClr val="accent4"/>
+                  <a:schemeClr val="bg2"/>
                 </a:solidFill>
               </a:rPr>
               <a:t>One daemon owns canonical state, fsnotify, scheduling, jobs, locks, cache and history. Shells are stateless, forkable clients.</a:t>
@@ -13806,7 +13806,7 @@
             <a:r>
               <a:rPr lang="en-US" sz="2500" dirty="0">
                 <a:solidFill>
-                  <a:schemeClr val="accent4"/>
+                  <a:schemeClr val="bg2"/>
                 </a:solidFill>
               </a:rPr>
               <a:t>No shared writer, no auto-spawn</a:t>
@@ -13824,7 +13824,7 @@
             <a:r>
               <a:rPr lang="en-US" sz="2500" dirty="0">
                 <a:solidFill>
-                  <a:schemeClr val="accent4"/>
+                  <a:schemeClr val="bg2"/>
                 </a:solidFill>
               </a:rPr>
               <a:t>Shells read caches by mmap</a:t>
@@ -13850,11 +13850,11 @@
             </a:avLst>
           </a:prstGeom>
           <a:solidFill>
-            <a:srgbClr val="FFFFFF"/>
+            <a:schemeClr val="tx2"/>
           </a:solidFill>
           <a:ln w="12700">
             <a:solidFill>
-              <a:srgbClr val="D9D5C8"/>
+              <a:srgbClr val="4A1A5E"/>
             </a:solidFill>
             <a:prstDash val="solid"/>
           </a:ln>
@@ -13923,7 +13923,7 @@
             <a:r>
               <a:rPr lang="en-US" sz="1700" dirty="0">
                 <a:solidFill>
-                  <a:schemeClr val="accent6"/>
+                  <a:schemeClr val="accent5"/>
                 </a:solidFill>
               </a:rPr>
               <a:t>The emacsclient, Nailgun and LSP pattern. Applying it to a shell's own state is new.</a:t>
@@ -13949,11 +13949,11 @@
             </a:avLst>
           </a:prstGeom>
           <a:solidFill>
-            <a:schemeClr val="accent4"/>
+            <a:schemeClr val="tx2"/>
           </a:solidFill>
           <a:ln w="12700">
             <a:solidFill>
-              <a:srgbClr val="2C3844"/>
+              <a:srgbClr val="4A1A5E"/>
             </a:solidFill>
             <a:prstDash val="solid"/>
           </a:ln>
@@ -14071,7 +14071,7 @@
             <a:lvl1pPr>
               <a:defRPr sz="1200">
                 <a:solidFill>
-                  <a:schemeClr val="accent6"/>
+                  <a:schemeClr val="accent5"/>
                 </a:solidFill>
                 <a:latin typeface="Courier New"/>
                 <a:ea typeface="Courier New"/>
@@ -14143,7 +14143,7 @@
             <a:r>
               <a:rPr lang="en-US" sz="3600" b="1" dirty="0">
                 <a:solidFill>
-                  <a:schemeClr val="accent4"/>
+                  <a:schemeClr val="bg2"/>
                 </a:solidFill>
               </a:rPr>
               <a:t>10 · Supervised jobs with pty attach</a:t>
@@ -14179,7 +14179,7 @@
             <a:r>
               <a:rPr lang="en-US" sz="1200" dirty="0">
                 <a:solidFill>
-                  <a:schemeClr val="accent6"/>
+                  <a:schemeClr val="accent5"/>
                 </a:solidFill>
                 <a:latin typeface="Courier New" pitchFamily="34" charset="0"/>
                 <a:ea typeface="Courier New" pitchFamily="34" charset="-122"/>
@@ -14218,7 +14218,7 @@
             <a:r>
               <a:rPr lang="en-US" sz="2800" dirty="0">
                 <a:solidFill>
-                  <a:schemeClr val="accent4"/>
+                  <a:schemeClr val="bg2"/>
                 </a:solidFill>
               </a:rPr>
               <a:t>zjob submit --pty runs the child on a pseudo-terminal under the daemon. Attach later from any terminal.</a:t>
@@ -14258,7 +14258,7 @@
             <a:r>
               <a:rPr lang="en-US" sz="2500" dirty="0">
                 <a:solidFill>
-                  <a:schemeClr val="accent4"/>
+                  <a:schemeClr val="bg2"/>
                 </a:solidFill>
               </a:rPr>
               <a:t>Attach puts your terminal in raw mode and forwards SIGWINCH</a:t>
@@ -14276,7 +14276,7 @@
             <a:r>
               <a:rPr lang="en-US" sz="2500" dirty="0">
                 <a:solidFill>
-                  <a:schemeClr val="accent4"/>
+                  <a:schemeClr val="bg2"/>
                 </a:solidFill>
               </a:rPr>
               <a:t>Detach with Ctrl-]</a:t>
@@ -14294,7 +14294,7 @@
             <a:r>
               <a:rPr lang="en-US" sz="2500" dirty="0">
                 <a:solidFill>
-                  <a:schemeClr val="accent4"/>
+                  <a:schemeClr val="bg2"/>
                 </a:solidFill>
               </a:rPr>
               <a:t>Solves a background job blocked on a prompt you cannot see</a:t>
@@ -14320,11 +14320,11 @@
             </a:avLst>
           </a:prstGeom>
           <a:solidFill>
-            <a:srgbClr val="FFFFFF"/>
+            <a:schemeClr val="tx2"/>
           </a:solidFill>
           <a:ln w="12700">
             <a:solidFill>
-              <a:srgbClr val="D9D5C8"/>
+              <a:srgbClr val="4A1A5E"/>
             </a:solidFill>
             <a:prstDash val="solid"/>
           </a:ln>
@@ -14393,7 +14393,7 @@
             <a:r>
               <a:rPr lang="en-US" sz="2000" dirty="0">
                 <a:solidFill>
-                  <a:schemeClr val="accent6"/>
+                  <a:schemeClr val="accent5"/>
                 </a:solidFill>
               </a:rPr>
               <a:t>Collapses nohup, screen, pueue and disown into one primitive.</a:t>
@@ -14432,7 +14432,7 @@
             <a:lvl1pPr>
               <a:defRPr sz="1200">
                 <a:solidFill>
-                  <a:schemeClr val="accent6"/>
+                  <a:schemeClr val="accent5"/>
                 </a:solidFill>
                 <a:latin typeface="Courier New"/>
                 <a:ea typeface="Courier New"/>
@@ -14504,7 +14504,7 @@
             <a:r>
               <a:rPr lang="en-US" sz="3600" b="1" dirty="0">
                 <a:solidFill>
-                  <a:schemeClr val="accent4"/>
+                  <a:schemeClr val="bg2"/>
                 </a:solidFill>
               </a:rPr>
               <a:t>11 · Pub/sub and named locks as builtins</a:t>
@@ -14540,7 +14540,7 @@
             <a:r>
               <a:rPr lang="en-US" sz="1200" dirty="0">
                 <a:solidFill>
-                  <a:schemeClr val="accent6"/>
+                  <a:schemeClr val="accent5"/>
                 </a:solidFill>
                 <a:latin typeface="Courier New" pitchFamily="34" charset="0"/>
                 <a:ea typeface="Courier New" pitchFamily="34" charset="-122"/>
@@ -14579,7 +14579,7 @@
             <a:r>
               <a:rPr lang="en-US" sz="2800" dirty="0">
                 <a:solidFill>
-                  <a:schemeClr val="accent4"/>
+                  <a:schemeClr val="bg2"/>
                 </a:solidFill>
               </a:rPr>
               <a:t>zsubscribe, zpublish and zlock route through the daemon between shells.</a:t>
@@ -14619,7 +14619,7 @@
             <a:r>
               <a:rPr lang="en-US" sz="3000" dirty="0">
                 <a:solidFill>
-                  <a:schemeClr val="accent4"/>
+                  <a:schemeClr val="bg2"/>
                 </a:solidFill>
               </a:rPr>
               <a:t>Release requires the original token</a:t>
@@ -14637,7 +14637,7 @@
             <a:r>
               <a:rPr lang="en-US" sz="3000" dirty="0">
                 <a:solidFill>
-                  <a:schemeClr val="accent4"/>
+                  <a:schemeClr val="bg2"/>
                 </a:solidFill>
               </a:rPr>
               <a:t>A dead shell cannot free someone else's lock</a:t>
@@ -14663,11 +14663,11 @@
             </a:avLst>
           </a:prstGeom>
           <a:solidFill>
-            <a:srgbClr val="FFFFFF"/>
+            <a:schemeClr val="tx2"/>
           </a:solidFill>
           <a:ln w="12700">
             <a:solidFill>
-              <a:srgbClr val="D9D5C8"/>
+              <a:srgbClr val="4A1A5E"/>
             </a:solidFill>
             <a:prstDash val="solid"/>
           </a:ln>
@@ -14736,7 +14736,7 @@
             <a:r>
               <a:rPr lang="en-US" sz="2000" dirty="0">
                 <a:solidFill>
-                  <a:schemeClr val="accent6"/>
+                  <a:schemeClr val="accent5"/>
                 </a:solidFill>
               </a:rPr>
               <a:t>Replaces hand-glued flock, socat and FIFOs.</a:t>
@@ -14775,7 +14775,7 @@
             <a:lvl1pPr>
               <a:defRPr sz="1200">
                 <a:solidFill>
-                  <a:schemeClr val="accent6"/>
+                  <a:schemeClr val="accent5"/>
                 </a:solidFill>
                 <a:latin typeface="Courier New"/>
                 <a:ea typeface="Courier New"/>
@@ -14847,7 +14847,7 @@
             <a:r>
               <a:rPr lang="en-US" sz="3600" b="1" dirty="0">
                 <a:solidFill>
-                  <a:schemeClr val="accent4"/>
+                  <a:schemeClr val="bg2"/>
                 </a:solidFill>
               </a:rPr>
               <a:t>The goodies</a:t>
@@ -14883,7 +14883,7 @@
             <a:r>
               <a:rPr lang="en-US" sz="1200" dirty="0">
                 <a:solidFill>
-                  <a:schemeClr val="accent6"/>
+                  <a:schemeClr val="accent5"/>
                 </a:solidFill>
                 <a:latin typeface="Courier New" pitchFamily="34" charset="0"/>
                 <a:ea typeface="Courier New" pitchFamily="34" charset="-122"/>
@@ -14912,11 +14912,11 @@
             </a:avLst>
           </a:prstGeom>
           <a:solidFill>
-            <a:srgbClr val="FFFFFF"/>
+            <a:schemeClr val="tx2"/>
           </a:solidFill>
           <a:ln w="12700">
             <a:solidFill>
-              <a:srgbClr val="D9D5C8"/>
+              <a:srgbClr val="4A1A5E"/>
             </a:solidFill>
             <a:prstDash val="solid"/>
           </a:ln>
@@ -14949,7 +14949,7 @@
             <a:r>
               <a:rPr lang="en-US" sz="2800" b="1" dirty="0">
                 <a:solidFill>
-                  <a:schemeClr val="accent6"/>
+                  <a:schemeClr val="accent5"/>
                 </a:solidFill>
               </a:rPr>
               <a:t>1</a:t>
@@ -14985,7 +14985,7 @@
             <a:r>
               <a:rPr lang="en-US" sz="2000" b="1" dirty="0">
                 <a:solidFill>
-                  <a:schemeClr val="accent4"/>
+                  <a:schemeClr val="bg2"/>
                 </a:solidFill>
               </a:rPr>
               <a:t>Execution</a:t>
@@ -15021,7 +15021,7 @@
             <a:r>
               <a:rPr lang="en-US" sz="1600" dirty="0">
                 <a:solidFill>
-                  <a:schemeClr val="accent6"/>
+                  <a:schemeClr val="accent5"/>
                 </a:solidFill>
               </a:rPr>
               <a:t>6 goodies</a:t>
@@ -15047,11 +15047,11 @@
             </a:avLst>
           </a:prstGeom>
           <a:solidFill>
-            <a:srgbClr val="FFFFFF"/>
+            <a:schemeClr val="tx2"/>
           </a:solidFill>
           <a:ln w="12700">
             <a:solidFill>
-              <a:srgbClr val="D9D5C8"/>
+              <a:srgbClr val="4A1A5E"/>
             </a:solidFill>
             <a:prstDash val="solid"/>
           </a:ln>
@@ -15084,7 +15084,7 @@
             <a:r>
               <a:rPr lang="en-US" sz="2800" b="1" dirty="0">
                 <a:solidFill>
-                  <a:schemeClr val="accent6"/>
+                  <a:schemeClr val="accent5"/>
                 </a:solidFill>
               </a:rPr>
               <a:t>2</a:t>
@@ -15120,7 +15120,7 @@
             <a:r>
               <a:rPr lang="en-US" sz="2000" b="1" dirty="0">
                 <a:solidFill>
-                  <a:schemeClr val="accent4"/>
+                  <a:schemeClr val="bg2"/>
                 </a:solidFill>
               </a:rPr>
               <a:t>State</a:t>
@@ -15156,7 +15156,7 @@
             <a:r>
               <a:rPr lang="en-US" sz="1600" dirty="0">
                 <a:solidFill>
-                  <a:schemeClr val="accent6"/>
+                  <a:schemeClr val="accent5"/>
                 </a:solidFill>
               </a:rPr>
               <a:t>5 goodies</a:t>
@@ -15182,11 +15182,11 @@
             </a:avLst>
           </a:prstGeom>
           <a:solidFill>
-            <a:srgbClr val="FFFFFF"/>
+            <a:schemeClr val="tx2"/>
           </a:solidFill>
           <a:ln w="12700">
             <a:solidFill>
-              <a:srgbClr val="D9D5C8"/>
+              <a:srgbClr val="4A1A5E"/>
             </a:solidFill>
             <a:prstDash val="solid"/>
           </a:ln>
@@ -15255,7 +15255,7 @@
             <a:r>
               <a:rPr lang="en-US" sz="2000" b="1" dirty="0">
                 <a:solidFill>
-                  <a:schemeClr val="accent2"/>
+                  <a:schemeClr val="accent1"/>
                 </a:solidFill>
               </a:rPr>
               <a:t>Line editor and prompt</a:t>
@@ -15291,7 +15291,7 @@
             <a:r>
               <a:rPr lang="en-US" sz="1600" dirty="0">
                 <a:solidFill>
-                  <a:schemeClr val="accent6"/>
+                  <a:schemeClr val="accent5"/>
                 </a:solidFill>
               </a:rPr>
               <a:t>ZLE, highlighting, prompt</a:t>
@@ -15317,11 +15317,11 @@
             </a:avLst>
           </a:prstGeom>
           <a:solidFill>
-            <a:srgbClr val="FFFFFF"/>
+            <a:schemeClr val="tx2"/>
           </a:solidFill>
           <a:ln w="12700">
             <a:solidFill>
-              <a:srgbClr val="D9D5C8"/>
+              <a:srgbClr val="4A1A5E"/>
             </a:solidFill>
             <a:prstDash val="solid"/>
           </a:ln>
@@ -15354,7 +15354,7 @@
             <a:r>
               <a:rPr lang="en-US" sz="2800" b="1" dirty="0">
                 <a:solidFill>
-                  <a:schemeClr val="accent6"/>
+                  <a:schemeClr val="accent5"/>
                 </a:solidFill>
               </a:rPr>
               <a:t>4</a:t>
@@ -15390,7 +15390,7 @@
             <a:r>
               <a:rPr lang="en-US" sz="2000" b="1" dirty="0">
                 <a:solidFill>
-                  <a:schemeClr val="accent4"/>
+                  <a:schemeClr val="bg2"/>
                 </a:solidFill>
               </a:rPr>
               <a:t>Observability</a:t>
@@ -15426,7 +15426,7 @@
             <a:r>
               <a:rPr lang="en-US" sz="1600" dirty="0">
                 <a:solidFill>
-                  <a:schemeClr val="accent6"/>
+                  <a:schemeClr val="accent5"/>
                 </a:solidFill>
               </a:rPr>
               <a:t>3 goodies</a:t>
@@ -15452,11 +15452,11 @@
             </a:avLst>
           </a:prstGeom>
           <a:solidFill>
-            <a:srgbClr val="FFFFFF"/>
+            <a:schemeClr val="tx2"/>
           </a:solidFill>
           <a:ln w="12700">
             <a:solidFill>
-              <a:srgbClr val="D9D5C8"/>
+              <a:srgbClr val="4A1A5E"/>
             </a:solidFill>
             <a:prstDash val="solid"/>
           </a:ln>
@@ -15489,7 +15489,7 @@
             <a:r>
               <a:rPr lang="en-US" sz="2800" b="1" dirty="0">
                 <a:solidFill>
-                  <a:schemeClr val="accent6"/>
+                  <a:schemeClr val="accent5"/>
                 </a:solidFill>
               </a:rPr>
               <a:t>5</a:t>
@@ -15525,7 +15525,7 @@
             <a:r>
               <a:rPr lang="en-US" sz="2000" b="1" dirty="0">
                 <a:solidFill>
-                  <a:schemeClr val="accent4"/>
+                  <a:schemeClr val="bg2"/>
                 </a:solidFill>
               </a:rPr>
               <a:t>Language</a:t>
@@ -15561,7 +15561,7 @@
             <a:r>
               <a:rPr lang="en-US" sz="1600" dirty="0">
                 <a:solidFill>
-                  <a:schemeClr val="accent6"/>
+                  <a:schemeClr val="accent5"/>
                 </a:solidFill>
               </a:rPr>
               <a:t>2 goodies</a:t>
@@ -15587,11 +15587,11 @@
             </a:avLst>
           </a:prstGeom>
           <a:solidFill>
-            <a:srgbClr val="FFFFFF"/>
+            <a:schemeClr val="tx2"/>
           </a:solidFill>
           <a:ln w="12700">
             <a:solidFill>
-              <a:srgbClr val="D9D5C8"/>
+              <a:srgbClr val="4A1A5E"/>
             </a:solidFill>
             <a:prstDash val="solid"/>
           </a:ln>
@@ -15624,7 +15624,7 @@
             <a:r>
               <a:rPr lang="en-US" sz="2800" b="1" dirty="0">
                 <a:solidFill>
-                  <a:schemeClr val="accent6"/>
+                  <a:schemeClr val="accent5"/>
                 </a:solidFill>
               </a:rPr>
               <a:t>6</a:t>
@@ -15660,7 +15660,7 @@
             <a:r>
               <a:rPr lang="en-US" sz="2000" b="1" dirty="0">
                 <a:solidFill>
-                  <a:schemeClr val="accent4"/>
+                  <a:schemeClr val="bg2"/>
                 </a:solidFill>
               </a:rPr>
               <a:t>Extensibility</a:t>
@@ -15696,7 +15696,7 @@
             <a:r>
               <a:rPr lang="en-US" sz="1600" dirty="0">
                 <a:solidFill>
-                  <a:schemeClr val="accent6"/>
+                  <a:schemeClr val="accent5"/>
                 </a:solidFill>
               </a:rPr>
               <a:t>2 goodies</a:t>
@@ -15722,11 +15722,11 @@
             </a:avLst>
           </a:prstGeom>
           <a:solidFill>
-            <a:srgbClr val="FFFFFF"/>
+            <a:schemeClr val="tx2"/>
           </a:solidFill>
           <a:ln w="12700">
             <a:solidFill>
-              <a:srgbClr val="D9D5C8"/>
+              <a:srgbClr val="4A1A5E"/>
             </a:solidFill>
             <a:prstDash val="solid"/>
           </a:ln>
@@ -15759,7 +15759,7 @@
             <a:r>
               <a:rPr lang="en-US" sz="2800" b="1" dirty="0">
                 <a:solidFill>
-                  <a:schemeClr val="accent6"/>
+                  <a:schemeClr val="accent5"/>
                 </a:solidFill>
               </a:rPr>
               <a:t>7</a:t>
@@ -15795,7 +15795,7 @@
             <a:r>
               <a:rPr lang="en-US" sz="2000" b="1" dirty="0">
                 <a:solidFill>
-                  <a:schemeClr val="accent4"/>
+                  <a:schemeClr val="bg2"/>
                 </a:solidFill>
               </a:rPr>
               <a:t>Compatibility</a:t>
@@ -15831,7 +15831,7 @@
             <a:r>
               <a:rPr lang="en-US" sz="1600" dirty="0">
                 <a:solidFill>
-                  <a:schemeClr val="accent6"/>
+                  <a:schemeClr val="accent5"/>
                 </a:solidFill>
               </a:rPr>
               <a:t>2 goodies</a:t>
@@ -15857,11 +15857,11 @@
             </a:avLst>
           </a:prstGeom>
           <a:solidFill>
-            <a:srgbClr val="FFFFFF"/>
+            <a:schemeClr val="tx2"/>
           </a:solidFill>
           <a:ln w="12700">
             <a:solidFill>
-              <a:srgbClr val="D9D5C8"/>
+              <a:srgbClr val="4A1A5E"/>
             </a:solidFill>
             <a:prstDash val="solid"/>
           </a:ln>
@@ -15894,7 +15894,7 @@
             <a:r>
               <a:rPr lang="en-US" sz="2800" b="1" dirty="0">
                 <a:solidFill>
-                  <a:schemeClr val="accent6"/>
+                  <a:schemeClr val="accent5"/>
                 </a:solidFill>
               </a:rPr>
               <a:t>8</a:t>
@@ -15930,7 +15930,7 @@
             <a:r>
               <a:rPr lang="en-US" sz="2000" b="1" dirty="0">
                 <a:solidFill>
-                  <a:schemeClr val="accent4"/>
+                  <a:schemeClr val="bg2"/>
                 </a:solidFill>
               </a:rPr>
               <a:t>Verification</a:t>
@@ -15966,7 +15966,7 @@
             <a:r>
               <a:rPr lang="en-US" sz="1600" dirty="0">
                 <a:solidFill>
-                  <a:schemeClr val="accent6"/>
+                  <a:schemeClr val="accent5"/>
                 </a:solidFill>
               </a:rPr>
               <a:t>2 goodies</a:t>
@@ -15992,11 +15992,11 @@
             </a:avLst>
           </a:prstGeom>
           <a:solidFill>
-            <a:srgbClr val="FFFFFF"/>
+            <a:schemeClr val="tx2"/>
           </a:solidFill>
           <a:ln w="12700">
             <a:solidFill>
-              <a:srgbClr val="D9D5C8"/>
+              <a:srgbClr val="4A1A5E"/>
             </a:solidFill>
             <a:prstDash val="solid"/>
           </a:ln>
@@ -16029,7 +16029,7 @@
             <a:r>
               <a:rPr lang="en-US" sz="2800" b="1" dirty="0">
                 <a:solidFill>
-                  <a:schemeClr val="accent6"/>
+                  <a:schemeClr val="accent5"/>
                 </a:solidFill>
               </a:rPr>
               <a:t>9</a:t>
@@ -16065,7 +16065,7 @@
             <a:r>
               <a:rPr lang="en-US" sz="2000" b="1" dirty="0">
                 <a:solidFill>
-                  <a:schemeClr val="accent4"/>
+                  <a:schemeClr val="bg2"/>
                 </a:solidFill>
               </a:rPr>
               <a:t>Tooling</a:t>
@@ -16101,7 +16101,7 @@
             <a:r>
               <a:rPr lang="en-US" sz="1600" dirty="0">
                 <a:solidFill>
-                  <a:schemeClr val="accent6"/>
+                  <a:schemeClr val="accent5"/>
                 </a:solidFill>
               </a:rPr>
               <a:t>4 goodies</a:t>
@@ -16140,7 +16140,7 @@
             <a:lvl1pPr>
               <a:defRPr sz="1200">
                 <a:solidFill>
-                  <a:schemeClr val="accent6"/>
+                  <a:schemeClr val="accent5"/>
                 </a:solidFill>
                 <a:latin typeface="Courier New"/>
                 <a:ea typeface="Courier New"/>
@@ -16281,7 +16281,7 @@
           </a:solidFill>
           <a:ln w="12700">
             <a:solidFill>
-              <a:srgbClr val="2C3844"/>
+              <a:srgbClr val="4A1A5E"/>
             </a:solidFill>
             <a:prstDash val="solid"/>
           </a:ln>
@@ -16450,7 +16450,7 @@
           </a:solidFill>
           <a:ln w="12700">
             <a:solidFill>
-              <a:srgbClr val="2C3844"/>
+              <a:srgbClr val="4A1A5E"/>
             </a:solidFill>
             <a:prstDash val="solid"/>
           </a:ln>
@@ -16760,7 +16760,7 @@
           </a:solidFill>
           <a:ln w="12700">
             <a:solidFill>
-              <a:srgbClr val="2C3844"/>
+              <a:srgbClr val="4A1A5E"/>
             </a:solidFill>
             <a:prstDash val="solid"/>
           </a:ln>
@@ -16862,7 +16862,7 @@
           </a:solidFill>
           <a:ln w="12700">
             <a:solidFill>
-              <a:srgbClr val="2C3844"/>
+              <a:srgbClr val="4A1A5E"/>
             </a:solidFill>
             <a:prstDash val="solid"/>
           </a:ln>
@@ -16964,7 +16964,7 @@
           </a:solidFill>
           <a:ln w="12700">
             <a:solidFill>
-              <a:srgbClr val="2C3844"/>
+              <a:srgbClr val="4A1A5E"/>
             </a:solidFill>
             <a:prstDash val="solid"/>
           </a:ln>
@@ -17066,7 +17066,7 @@
           </a:solidFill>
           <a:ln w="12700">
             <a:solidFill>
-              <a:srgbClr val="2C3844"/>
+              <a:srgbClr val="4A1A5E"/>
             </a:solidFill>
             <a:prstDash val="solid"/>
           </a:ln>
@@ -17318,7 +17318,7 @@
           </a:solidFill>
           <a:ln w="12700">
             <a:solidFill>
-              <a:srgbClr val="2C3844"/>
+              <a:srgbClr val="4A1A5E"/>
             </a:solidFill>
             <a:prstDash val="solid"/>
           </a:ln>
@@ -17460,7 +17460,7 @@
           </a:solidFill>
           <a:ln w="12700">
             <a:solidFill>
-              <a:srgbClr val="2C3844"/>
+              <a:srgbClr val="4A1A5E"/>
             </a:solidFill>
             <a:prstDash val="solid"/>
           </a:ln>
@@ -17620,7 +17620,7 @@
           </a:solidFill>
           <a:ln w="12700">
             <a:solidFill>
-              <a:srgbClr val="2C3844"/>
+              <a:srgbClr val="4A1A5E"/>
             </a:solidFill>
             <a:prstDash val="solid"/>
           </a:ln>
@@ -17940,7 +17940,7 @@
                   <a:tcPr marL="91440" marR="91440" marT="45720" marB="45720" anchor="ctr">
                     <a:lnL w="12700" cap="flat" cmpd="sng" algn="ctr">
                       <a:solidFill>
-                        <a:srgbClr val="2C3844"/>
+                        <a:srgbClr val="4A1A5E"/>
                       </a:solidFill>
                       <a:prstDash val="solid"/>
                       <a:round/>
@@ -17949,7 +17949,7 @@
                     </a:lnL>
                     <a:lnR w="12700" cap="flat" cmpd="sng" algn="ctr">
                       <a:solidFill>
-                        <a:srgbClr val="2C3844"/>
+                        <a:srgbClr val="4A1A5E"/>
                       </a:solidFill>
                       <a:prstDash val="solid"/>
                       <a:round/>
@@ -17958,7 +17958,7 @@
                     </a:lnR>
                     <a:lnT w="12700" cap="flat" cmpd="sng" algn="ctr">
                       <a:solidFill>
-                        <a:srgbClr val="2C3844"/>
+                        <a:srgbClr val="4A1A5E"/>
                       </a:solidFill>
                       <a:prstDash val="solid"/>
                       <a:round/>
@@ -17967,7 +17967,7 @@
                     </a:lnT>
                     <a:lnB w="12700" cap="flat" cmpd="sng" algn="ctr">
                       <a:solidFill>
-                        <a:srgbClr val="2C3844"/>
+                        <a:srgbClr val="4A1A5E"/>
                       </a:solidFill>
                       <a:prstDash val="solid"/>
                       <a:round/>
@@ -17998,7 +17998,7 @@
                   <a:tcPr marL="91440" marR="91440" marT="45720" marB="45720" anchor="ctr">
                     <a:lnL w="12700" cap="flat" cmpd="sng" algn="ctr">
                       <a:solidFill>
-                        <a:srgbClr val="2C3844"/>
+                        <a:srgbClr val="4A1A5E"/>
                       </a:solidFill>
                       <a:prstDash val="solid"/>
                       <a:round/>
@@ -18007,7 +18007,7 @@
                     </a:lnL>
                     <a:lnR w="12700" cap="flat" cmpd="sng" algn="ctr">
                       <a:solidFill>
-                        <a:srgbClr val="2C3844"/>
+                        <a:srgbClr val="4A1A5E"/>
                       </a:solidFill>
                       <a:prstDash val="solid"/>
                       <a:round/>
@@ -18016,7 +18016,7 @@
                     </a:lnR>
                     <a:lnT w="12700" cap="flat" cmpd="sng" algn="ctr">
                       <a:solidFill>
-                        <a:srgbClr val="2C3844"/>
+                        <a:srgbClr val="4A1A5E"/>
                       </a:solidFill>
                       <a:prstDash val="solid"/>
                       <a:round/>
@@ -18025,7 +18025,7 @@
                     </a:lnT>
                     <a:lnB w="12700" cap="flat" cmpd="sng" algn="ctr">
                       <a:solidFill>
-                        <a:srgbClr val="2C3844"/>
+                        <a:srgbClr val="4A1A5E"/>
                       </a:solidFill>
                       <a:prstDash val="solid"/>
                       <a:round/>
@@ -18058,7 +18058,7 @@
                   <a:tcPr marL="91440" marR="91440" marT="45720" marB="45720" anchor="ctr">
                     <a:lnL w="12700" cap="flat" cmpd="sng" algn="ctr">
                       <a:solidFill>
-                        <a:srgbClr val="2C3844"/>
+                        <a:srgbClr val="4A1A5E"/>
                       </a:solidFill>
                       <a:prstDash val="solid"/>
                       <a:round/>
@@ -18067,7 +18067,7 @@
                     </a:lnL>
                     <a:lnR w="12700" cap="flat" cmpd="sng" algn="ctr">
                       <a:solidFill>
-                        <a:srgbClr val="2C3844"/>
+                        <a:srgbClr val="4A1A5E"/>
                       </a:solidFill>
                       <a:prstDash val="solid"/>
                       <a:round/>
@@ -18076,7 +18076,7 @@
                     </a:lnR>
                     <a:lnT w="12700" cap="flat" cmpd="sng" algn="ctr">
                       <a:solidFill>
-                        <a:srgbClr val="2C3844"/>
+                        <a:srgbClr val="4A1A5E"/>
                       </a:solidFill>
                       <a:prstDash val="solid"/>
                       <a:round/>
@@ -18085,7 +18085,7 @@
                     </a:lnT>
                     <a:lnB w="12700" cap="flat" cmpd="sng" algn="ctr">
                       <a:solidFill>
-                        <a:srgbClr val="2C3844"/>
+                        <a:srgbClr val="4A1A5E"/>
                       </a:solidFill>
                       <a:prstDash val="solid"/>
                       <a:round/>
@@ -18116,7 +18116,7 @@
                   <a:tcPr marL="91440" marR="91440" marT="45720" marB="45720" anchor="ctr">
                     <a:lnL w="12700" cap="flat" cmpd="sng" algn="ctr">
                       <a:solidFill>
-                        <a:srgbClr val="2C3844"/>
+                        <a:srgbClr val="4A1A5E"/>
                       </a:solidFill>
                       <a:prstDash val="solid"/>
                       <a:round/>
@@ -18125,7 +18125,7 @@
                     </a:lnL>
                     <a:lnR w="12700" cap="flat" cmpd="sng" algn="ctr">
                       <a:solidFill>
-                        <a:srgbClr val="2C3844"/>
+                        <a:srgbClr val="4A1A5E"/>
                       </a:solidFill>
                       <a:prstDash val="solid"/>
                       <a:round/>
@@ -18134,7 +18134,7 @@
                     </a:lnR>
                     <a:lnT w="12700" cap="flat" cmpd="sng" algn="ctr">
                       <a:solidFill>
-                        <a:srgbClr val="2C3844"/>
+                        <a:srgbClr val="4A1A5E"/>
                       </a:solidFill>
                       <a:prstDash val="solid"/>
                       <a:round/>
@@ -18143,7 +18143,7 @@
                     </a:lnT>
                     <a:lnB w="12700" cap="flat" cmpd="sng" algn="ctr">
                       <a:solidFill>
-                        <a:srgbClr val="2C3844"/>
+                        <a:srgbClr val="4A1A5E"/>
                       </a:solidFill>
                       <a:prstDash val="solid"/>
                       <a:round/>
@@ -18176,7 +18176,7 @@
                   <a:tcPr marL="91440" marR="91440" marT="45720" marB="45720" anchor="ctr">
                     <a:lnL w="12700" cap="flat" cmpd="sng" algn="ctr">
                       <a:solidFill>
-                        <a:srgbClr val="2C3844"/>
+                        <a:srgbClr val="4A1A5E"/>
                       </a:solidFill>
                       <a:prstDash val="solid"/>
                       <a:round/>
@@ -18185,7 +18185,7 @@
                     </a:lnL>
                     <a:lnR w="12700" cap="flat" cmpd="sng" algn="ctr">
                       <a:solidFill>
-                        <a:srgbClr val="2C3844"/>
+                        <a:srgbClr val="4A1A5E"/>
                       </a:solidFill>
                       <a:prstDash val="solid"/>
                       <a:round/>
@@ -18194,7 +18194,7 @@
                     </a:lnR>
                     <a:lnT w="12700" cap="flat" cmpd="sng" algn="ctr">
                       <a:solidFill>
-                        <a:srgbClr val="2C3844"/>
+                        <a:srgbClr val="4A1A5E"/>
                       </a:solidFill>
                       <a:prstDash val="solid"/>
                       <a:round/>
@@ -18203,7 +18203,7 @@
                     </a:lnT>
                     <a:lnB w="12700" cap="flat" cmpd="sng" algn="ctr">
                       <a:solidFill>
-                        <a:srgbClr val="2C3844"/>
+                        <a:srgbClr val="4A1A5E"/>
                       </a:solidFill>
                       <a:prstDash val="solid"/>
                       <a:round/>
@@ -18234,7 +18234,7 @@
                   <a:tcPr marL="91440" marR="91440" marT="45720" marB="45720" anchor="ctr">
                     <a:lnL w="12700" cap="flat" cmpd="sng" algn="ctr">
                       <a:solidFill>
-                        <a:srgbClr val="2C3844"/>
+                        <a:srgbClr val="4A1A5E"/>
                       </a:solidFill>
                       <a:prstDash val="solid"/>
                       <a:round/>
@@ -18243,7 +18243,7 @@
                     </a:lnL>
                     <a:lnR w="12700" cap="flat" cmpd="sng" algn="ctr">
                       <a:solidFill>
-                        <a:srgbClr val="2C3844"/>
+                        <a:srgbClr val="4A1A5E"/>
                       </a:solidFill>
                       <a:prstDash val="solid"/>
                       <a:round/>
@@ -18252,7 +18252,7 @@
                     </a:lnR>
                     <a:lnT w="12700" cap="flat" cmpd="sng" algn="ctr">
                       <a:solidFill>
-                        <a:srgbClr val="2C3844"/>
+                        <a:srgbClr val="4A1A5E"/>
                       </a:solidFill>
                       <a:prstDash val="solid"/>
                       <a:round/>
@@ -18261,7 +18261,7 @@
                     </a:lnT>
                     <a:lnB w="12700" cap="flat" cmpd="sng" algn="ctr">
                       <a:solidFill>
-                        <a:srgbClr val="2C3844"/>
+                        <a:srgbClr val="4A1A5E"/>
                       </a:solidFill>
                       <a:prstDash val="solid"/>
                       <a:round/>
@@ -18294,7 +18294,7 @@
                   <a:tcPr marL="91440" marR="91440" marT="45720" marB="45720" anchor="ctr">
                     <a:lnL w="12700" cap="flat" cmpd="sng" algn="ctr">
                       <a:solidFill>
-                        <a:srgbClr val="2C3844"/>
+                        <a:srgbClr val="4A1A5E"/>
                       </a:solidFill>
                       <a:prstDash val="solid"/>
                       <a:round/>
@@ -18303,7 +18303,7 @@
                     </a:lnL>
                     <a:lnR w="12700" cap="flat" cmpd="sng" algn="ctr">
                       <a:solidFill>
-                        <a:srgbClr val="2C3844"/>
+                        <a:srgbClr val="4A1A5E"/>
                       </a:solidFill>
                       <a:prstDash val="solid"/>
                       <a:round/>
@@ -18312,7 +18312,7 @@
                     </a:lnR>
                     <a:lnT w="12700" cap="flat" cmpd="sng" algn="ctr">
                       <a:solidFill>
-                        <a:srgbClr val="2C3844"/>
+                        <a:srgbClr val="4A1A5E"/>
                       </a:solidFill>
                       <a:prstDash val="solid"/>
                       <a:round/>
@@ -18321,7 +18321,7 @@
                     </a:lnT>
                     <a:lnB w="12700" cap="flat" cmpd="sng" algn="ctr">
                       <a:solidFill>
-                        <a:srgbClr val="2C3844"/>
+                        <a:srgbClr val="4A1A5E"/>
                       </a:solidFill>
                       <a:prstDash val="solid"/>
                       <a:round/>
@@ -18352,7 +18352,7 @@
                   <a:tcPr marL="91440" marR="91440" marT="45720" marB="45720" anchor="ctr">
                     <a:lnL w="12700" cap="flat" cmpd="sng" algn="ctr">
                       <a:solidFill>
-                        <a:srgbClr val="2C3844"/>
+                        <a:srgbClr val="4A1A5E"/>
                       </a:solidFill>
                       <a:prstDash val="solid"/>
                       <a:round/>
@@ -18361,7 +18361,7 @@
                     </a:lnL>
                     <a:lnR w="12700" cap="flat" cmpd="sng" algn="ctr">
                       <a:solidFill>
-                        <a:srgbClr val="2C3844"/>
+                        <a:srgbClr val="4A1A5E"/>
                       </a:solidFill>
                       <a:prstDash val="solid"/>
                       <a:round/>
@@ -18370,7 +18370,7 @@
                     </a:lnR>
                     <a:lnT w="12700" cap="flat" cmpd="sng" algn="ctr">
                       <a:solidFill>
-                        <a:srgbClr val="2C3844"/>
+                        <a:srgbClr val="4A1A5E"/>
                       </a:solidFill>
                       <a:prstDash val="solid"/>
                       <a:round/>
@@ -18379,7 +18379,7 @@
                     </a:lnT>
                     <a:lnB w="12700" cap="flat" cmpd="sng" algn="ctr">
                       <a:solidFill>
-                        <a:srgbClr val="2C3844"/>
+                        <a:srgbClr val="4A1A5E"/>
                       </a:solidFill>
                       <a:prstDash val="solid"/>
                       <a:round/>
@@ -18412,7 +18412,7 @@
                   <a:tcPr marL="91440" marR="91440" marT="45720" marB="45720" anchor="ctr">
                     <a:lnL w="12700" cap="flat" cmpd="sng" algn="ctr">
                       <a:solidFill>
-                        <a:srgbClr val="2C3844"/>
+                        <a:srgbClr val="4A1A5E"/>
                       </a:solidFill>
                       <a:prstDash val="solid"/>
                       <a:round/>
@@ -18421,7 +18421,7 @@
                     </a:lnL>
                     <a:lnR w="12700" cap="flat" cmpd="sng" algn="ctr">
                       <a:solidFill>
-                        <a:srgbClr val="2C3844"/>
+                        <a:srgbClr val="4A1A5E"/>
                       </a:solidFill>
                       <a:prstDash val="solid"/>
                       <a:round/>
@@ -18430,7 +18430,7 @@
                     </a:lnR>
                     <a:lnT w="12700" cap="flat" cmpd="sng" algn="ctr">
                       <a:solidFill>
-                        <a:srgbClr val="2C3844"/>
+                        <a:srgbClr val="4A1A5E"/>
                       </a:solidFill>
                       <a:prstDash val="solid"/>
                       <a:round/>
@@ -18439,7 +18439,7 @@
                     </a:lnT>
                     <a:lnB w="12700" cap="flat" cmpd="sng" algn="ctr">
                       <a:solidFill>
-                        <a:srgbClr val="2C3844"/>
+                        <a:srgbClr val="4A1A5E"/>
                       </a:solidFill>
                       <a:prstDash val="solid"/>
                       <a:round/>
@@ -18470,7 +18470,7 @@
                   <a:tcPr marL="91440" marR="91440" marT="45720" marB="45720" anchor="ctr">
                     <a:lnL w="12700" cap="flat" cmpd="sng" algn="ctr">
                       <a:solidFill>
-                        <a:srgbClr val="2C3844"/>
+                        <a:srgbClr val="4A1A5E"/>
                       </a:solidFill>
                       <a:prstDash val="solid"/>
                       <a:round/>
@@ -18479,7 +18479,7 @@
                     </a:lnL>
                     <a:lnR w="12700" cap="flat" cmpd="sng" algn="ctr">
                       <a:solidFill>
-                        <a:srgbClr val="2C3844"/>
+                        <a:srgbClr val="4A1A5E"/>
                       </a:solidFill>
                       <a:prstDash val="solid"/>
                       <a:round/>
@@ -18488,7 +18488,7 @@
                     </a:lnR>
                     <a:lnT w="12700" cap="flat" cmpd="sng" algn="ctr">
                       <a:solidFill>
-                        <a:srgbClr val="2C3844"/>
+                        <a:srgbClr val="4A1A5E"/>
                       </a:solidFill>
                       <a:prstDash val="solid"/>
                       <a:round/>
@@ -18497,7 +18497,7 @@
                     </a:lnT>
                     <a:lnB w="12700" cap="flat" cmpd="sng" algn="ctr">
                       <a:solidFill>
-                        <a:srgbClr val="2C3844"/>
+                        <a:srgbClr val="4A1A5E"/>
                       </a:solidFill>
                       <a:prstDash val="solid"/>
                       <a:round/>
@@ -18530,7 +18530,7 @@
                   <a:tcPr marL="91440" marR="91440" marT="45720" marB="45720" anchor="ctr">
                     <a:lnL w="12700" cap="flat" cmpd="sng" algn="ctr">
                       <a:solidFill>
-                        <a:srgbClr val="2C3844"/>
+                        <a:srgbClr val="4A1A5E"/>
                       </a:solidFill>
                       <a:prstDash val="solid"/>
                       <a:round/>
@@ -18539,7 +18539,7 @@
                     </a:lnL>
                     <a:lnR w="12700" cap="flat" cmpd="sng" algn="ctr">
                       <a:solidFill>
-                        <a:srgbClr val="2C3844"/>
+                        <a:srgbClr val="4A1A5E"/>
                       </a:solidFill>
                       <a:prstDash val="solid"/>
                       <a:round/>
@@ -18548,7 +18548,7 @@
                     </a:lnR>
                     <a:lnT w="12700" cap="flat" cmpd="sng" algn="ctr">
                       <a:solidFill>
-                        <a:srgbClr val="2C3844"/>
+                        <a:srgbClr val="4A1A5E"/>
                       </a:solidFill>
                       <a:prstDash val="solid"/>
                       <a:round/>
@@ -18557,7 +18557,7 @@
                     </a:lnT>
                     <a:lnB w="12700" cap="flat" cmpd="sng" algn="ctr">
                       <a:solidFill>
-                        <a:srgbClr val="2C3844"/>
+                        <a:srgbClr val="4A1A5E"/>
                       </a:solidFill>
                       <a:prstDash val="solid"/>
                       <a:round/>
@@ -18588,7 +18588,7 @@
                   <a:tcPr marL="91440" marR="91440" marT="45720" marB="45720" anchor="ctr">
                     <a:lnL w="12700" cap="flat" cmpd="sng" algn="ctr">
                       <a:solidFill>
-                        <a:srgbClr val="2C3844"/>
+                        <a:srgbClr val="4A1A5E"/>
                       </a:solidFill>
                       <a:prstDash val="solid"/>
                       <a:round/>
@@ -18597,7 +18597,7 @@
                     </a:lnL>
                     <a:lnR w="12700" cap="flat" cmpd="sng" algn="ctr">
                       <a:solidFill>
-                        <a:srgbClr val="2C3844"/>
+                        <a:srgbClr val="4A1A5E"/>
                       </a:solidFill>
                       <a:prstDash val="solid"/>
                       <a:round/>
@@ -18606,7 +18606,7 @@
                     </a:lnR>
                     <a:lnT w="12700" cap="flat" cmpd="sng" algn="ctr">
                       <a:solidFill>
-                        <a:srgbClr val="2C3844"/>
+                        <a:srgbClr val="4A1A5E"/>
                       </a:solidFill>
                       <a:prstDash val="solid"/>
                       <a:round/>
@@ -18615,7 +18615,7 @@
                     </a:lnT>
                     <a:lnB w="12700" cap="flat" cmpd="sng" algn="ctr">
                       <a:solidFill>
-                        <a:srgbClr val="2C3844"/>
+                        <a:srgbClr val="4A1A5E"/>
                       </a:solidFill>
                       <a:prstDash val="solid"/>
                       <a:round/>
@@ -18800,7 +18800,7 @@
           </a:solidFill>
           <a:ln w="12700">
             <a:solidFill>
-              <a:srgbClr val="2C3844"/>
+              <a:srgbClr val="4A1A5E"/>
             </a:solidFill>
             <a:prstDash val="solid"/>
           </a:ln>
@@ -18902,7 +18902,7 @@
           </a:solidFill>
           <a:ln w="12700">
             <a:solidFill>
-              <a:srgbClr val="2C3844"/>
+              <a:srgbClr val="4A1A5E"/>
             </a:solidFill>
             <a:prstDash val="solid"/>
           </a:ln>
@@ -19212,7 +19212,7 @@
           </a:solidFill>
           <a:ln w="12700">
             <a:solidFill>
-              <a:srgbClr val="2C3844"/>
+              <a:srgbClr val="4A1A5E"/>
             </a:solidFill>
             <a:prstDash val="solid"/>
           </a:ln>
@@ -19557,7 +19557,7 @@
           </a:solidFill>
           <a:ln w="12700">
             <a:solidFill>
-              <a:srgbClr val="2C3844"/>
+              <a:srgbClr val="4A1A5E"/>
             </a:solidFill>
             <a:prstDash val="solid"/>
           </a:ln>
@@ -19659,7 +19659,7 @@
           </a:solidFill>
           <a:ln w="12700">
             <a:solidFill>
-              <a:srgbClr val="2C3844"/>
+              <a:srgbClr val="4A1A5E"/>
             </a:solidFill>
             <a:prstDash val="solid"/>
           </a:ln>
@@ -19987,7 +19987,7 @@
           </a:solidFill>
           <a:ln w="12700">
             <a:solidFill>
-              <a:srgbClr val="2C3844"/>
+              <a:srgbClr val="4A1A5E"/>
             </a:solidFill>
             <a:prstDash val="solid"/>
           </a:ln>
@@ -20122,7 +20122,7 @@
           </a:solidFill>
           <a:ln w="12700">
             <a:solidFill>
-              <a:srgbClr val="2C3844"/>
+              <a:srgbClr val="4A1A5E"/>
             </a:solidFill>
             <a:prstDash val="solid"/>
           </a:ln>
@@ -20257,7 +20257,7 @@
           </a:solidFill>
           <a:ln w="12700">
             <a:solidFill>
-              <a:srgbClr val="2C3844"/>
+              <a:srgbClr val="4A1A5E"/>
             </a:solidFill>
             <a:prstDash val="solid"/>
           </a:ln>
@@ -20392,7 +20392,7 @@
           </a:solidFill>
           <a:ln w="12700">
             <a:solidFill>
-              <a:srgbClr val="2C3844"/>
+              <a:srgbClr val="4A1A5E"/>
             </a:solidFill>
             <a:prstDash val="solid"/>
           </a:ln>
@@ -20527,7 +20527,7 @@
           </a:solidFill>
           <a:ln w="12700">
             <a:solidFill>
-              <a:srgbClr val="2C3844"/>
+              <a:srgbClr val="4A1A5E"/>
             </a:solidFill>
             <a:prstDash val="solid"/>
           </a:ln>
@@ -20662,7 +20662,7 @@
           </a:solidFill>
           <a:ln w="12700">
             <a:solidFill>
-              <a:srgbClr val="2C3844"/>
+              <a:srgbClr val="4A1A5E"/>
             </a:solidFill>
             <a:prstDash val="solid"/>
           </a:ln>
@@ -20797,7 +20797,7 @@
           </a:solidFill>
           <a:ln w="12700">
             <a:solidFill>
-              <a:srgbClr val="2C3844"/>
+              <a:srgbClr val="4A1A5E"/>
             </a:solidFill>
             <a:prstDash val="solid"/>
           </a:ln>
@@ -20932,7 +20932,7 @@
           </a:solidFill>
           <a:ln w="12700">
             <a:solidFill>
-              <a:srgbClr val="2C3844"/>
+              <a:srgbClr val="4A1A5E"/>
             </a:solidFill>
             <a:prstDash val="solid"/>
           </a:ln>
@@ -21067,7 +21067,7 @@
           </a:solidFill>
           <a:ln w="12700">
             <a:solidFill>
-              <a:srgbClr val="2C3844"/>
+              <a:srgbClr val="4A1A5E"/>
             </a:solidFill>
             <a:prstDash val="solid"/>
           </a:ln>
@@ -21283,7 +21283,7 @@
             <a:r>
               <a:rPr lang="en-US" sz="3600" b="1" dirty="0">
                 <a:solidFill>
-                  <a:schemeClr val="accent4"/>
+                  <a:schemeClr val="bg2"/>
                 </a:solidFill>
               </a:rPr>
               <a:t>12 · Value lineage at the bytecode level</a:t>
@@ -21319,7 +21319,7 @@
             <a:r>
               <a:rPr lang="en-US" sz="1200" dirty="0">
                 <a:solidFill>
-                  <a:schemeClr val="accent6"/>
+                  <a:schemeClr val="accent5"/>
                 </a:solidFill>
                 <a:latin typeface="Courier New" pitchFamily="34" charset="0"/>
                 <a:ea typeface="Courier New" pitchFamily="34" charset="-122"/>
@@ -21358,7 +21358,7 @@
             <a:r>
               <a:rPr lang="en-US" sz="2800" dirty="0">
                 <a:solidFill>
-                  <a:schemeClr val="accent4"/>
+                  <a:schemeClr val="bg2"/>
                 </a:solidFill>
               </a:rPr>
               <a:t>provenance records where a value came from and every op that touched it, each stamped with file, line, function and wall clock.</a:t>
@@ -21398,7 +21398,7 @@
             <a:r>
               <a:rPr lang="en-US" sz="2400" dirty="0">
                 <a:solidFill>
-                  <a:schemeClr val="accent4"/>
+                  <a:schemeClr val="bg2"/>
                 </a:solidFill>
               </a:rPr>
               <a:t>Origins: command substitution, glob, heredoc, process substitution</a:t>
@@ -21416,7 +21416,7 @@
             <a:r>
               <a:rPr lang="en-US" sz="2400" dirty="0">
                 <a:solidFill>
-                  <a:schemeClr val="accent4"/>
+                  <a:schemeClr val="bg2"/>
                 </a:solidFill>
               </a:rPr>
               <a:t>Ops: expand, concat, assign, exec, call</a:t>
@@ -21434,7 +21434,7 @@
             <a:r>
               <a:rPr lang="en-US" sz="2400" dirty="0">
                 <a:solidFill>
-                  <a:schemeClr val="accent4"/>
+                  <a:schemeClr val="bg2"/>
                 </a:solidFill>
               </a:rPr>
               <a:t>One relaxed atomic load when disarmed</a:t>
@@ -21460,11 +21460,11 @@
             </a:avLst>
           </a:prstGeom>
           <a:solidFill>
-            <a:srgbClr val="FFFFFF"/>
+            <a:schemeClr val="tx2"/>
           </a:solidFill>
           <a:ln w="12700">
             <a:solidFill>
-              <a:srgbClr val="D9D5C8"/>
+              <a:srgbClr val="4A1A5E"/>
             </a:solidFill>
             <a:prstDash val="solid"/>
           </a:ln>
@@ -21533,7 +21533,7 @@
             <a:r>
               <a:rPr lang="en-US" sz="2000" dirty="0">
                 <a:solidFill>
-                  <a:schemeClr val="accent6"/>
+                  <a:schemeClr val="accent5"/>
                 </a:solidFill>
               </a:rPr>
               <a:t>typeset -p says what a value is. set -x says what ran. Nothing said where the bytes came from. See docs/PROVENANCE.md.</a:t>
@@ -21572,7 +21572,7 @@
             <a:lvl1pPr>
               <a:defRPr sz="1200">
                 <a:solidFill>
-                  <a:schemeClr val="accent6"/>
+                  <a:schemeClr val="accent5"/>
                 </a:solidFill>
                 <a:latin typeface="Courier New"/>
                 <a:ea typeface="Courier New"/>
@@ -21644,7 +21644,7 @@
             <a:r>
               <a:rPr lang="en-US" sz="3600" b="1" dirty="0">
                 <a:solidFill>
-                  <a:schemeClr val="accent4"/>
+                  <a:schemeClr val="bg2"/>
                 </a:solidFill>
               </a:rPr>
               <a:t>13 · Aspect-oriented advice</a:t>
@@ -21680,7 +21680,7 @@
             <a:r>
               <a:rPr lang="en-US" sz="1200" dirty="0">
                 <a:solidFill>
-                  <a:schemeClr val="accent6"/>
+                  <a:schemeClr val="accent5"/>
                 </a:solidFill>
                 <a:latin typeface="Courier New" pitchFamily="34" charset="0"/>
                 <a:ea typeface="Courier New" pitchFamily="34" charset="-122"/>
@@ -21719,7 +21719,7 @@
             <a:r>
               <a:rPr lang="en-US" sz="2400" dirty="0">
                 <a:solidFill>
-                  <a:schemeClr val="accent4"/>
+                  <a:schemeClr val="bg2"/>
                 </a:solidFill>
               </a:rPr>
               <a:t>intercept before, after and around, on any command or function, with glob patterns and nanosecond timing.</a:t>
@@ -21759,7 +21759,7 @@
             <a:r>
               <a:rPr lang="en-US" sz="2000" dirty="0">
                 <a:solidFill>
-                  <a:schemeClr val="accent4"/>
+                  <a:schemeClr val="bg2"/>
                 </a:solidFill>
               </a:rPr>
               <a:t>intercept_proceed continues the original call</a:t>
@@ -21777,7 +21777,7 @@
             <a:r>
               <a:rPr lang="en-US" sz="2000" dirty="0">
                 <a:solidFill>
-                  <a:schemeClr val="accent4"/>
+                  <a:schemeClr val="bg2"/>
                 </a:solidFill>
               </a:rPr>
               <a:t>Subsumes defer, profiling, memoisation, retry, timeout</a:t>
@@ -21803,11 +21803,11 @@
             </a:avLst>
           </a:prstGeom>
           <a:solidFill>
-            <a:srgbClr val="FFFFFF"/>
+            <a:schemeClr val="tx2"/>
           </a:solidFill>
           <a:ln w="12700">
             <a:solidFill>
-              <a:srgbClr val="D9D5C8"/>
+              <a:srgbClr val="4A1A5E"/>
             </a:solidFill>
             <a:prstDash val="solid"/>
           </a:ln>
@@ -21876,7 +21876,7 @@
             <a:r>
               <a:rPr lang="en-US" sz="1700" dirty="0">
                 <a:solidFill>
-                  <a:schemeClr val="accent6"/>
+                  <a:schemeClr val="accent5"/>
                 </a:solidFill>
               </a:rPr>
               <a:t>Flavors, CLOS :around and AspectJ made this vocabulary standard. No shell offered it beyond hand-rolled wrappers.</a:t>
@@ -21902,11 +21902,11 @@
             </a:avLst>
           </a:prstGeom>
           <a:solidFill>
-            <a:schemeClr val="accent4"/>
+            <a:schemeClr val="tx2"/>
           </a:solidFill>
           <a:ln w="12700">
             <a:solidFill>
-              <a:srgbClr val="2C3844"/>
+              <a:srgbClr val="4A1A5E"/>
             </a:solidFill>
             <a:prstDash val="solid"/>
           </a:ln>
@@ -22004,7 +22004,7 @@
             <a:lvl1pPr>
               <a:defRPr sz="1200">
                 <a:solidFill>
-                  <a:schemeClr val="accent6"/>
+                  <a:schemeClr val="accent5"/>
                 </a:solidFill>
                 <a:latin typeface="Courier New"/>
                 <a:ea typeface="Courier New"/>
@@ -22076,7 +22076,7 @@
             <a:r>
               <a:rPr lang="en-US" sz="3600" b="1" dirty="0">
                 <a:solidFill>
-                  <a:schemeClr val="accent4"/>
+                  <a:schemeClr val="bg2"/>
                 </a:solidFill>
               </a:rPr>
               <a:t>14 · The shell describes itself</a:t>
@@ -22112,7 +22112,7 @@
             <a:r>
               <a:rPr lang="en-US" sz="1200" dirty="0">
                 <a:solidFill>
-                  <a:schemeClr val="accent6"/>
+                  <a:schemeClr val="accent5"/>
                 </a:solidFill>
                 <a:latin typeface="Courier New" pitchFamily="34" charset="0"/>
                 <a:ea typeface="Courier New" pitchFamily="34" charset="-122"/>
@@ -22151,7 +22151,7 @@
             <a:r>
               <a:rPr lang="en-US" sz="2400" dirty="0">
                 <a:solidFill>
-                  <a:schemeClr val="accent4"/>
+                  <a:schemeClr val="bg2"/>
                 </a:solidFill>
               </a:rPr>
               <a:t>Lexer, wordcode, AST and bytecode dumps on stdout, plus a JSON self-description of builtins, keywords and options.</a:t>
@@ -22191,7 +22191,7 @@
             <a:r>
               <a:rPr lang="en-US" sz="3000" dirty="0">
                 <a:solidFill>
-                  <a:schemeClr val="accent4"/>
+                  <a:schemeClr val="bg2"/>
                 </a:solidFill>
               </a:rPr>
               <a:t>javap, dis and B::Deparse, for a shell</a:t>
@@ -22217,11 +22217,11 @@
             </a:avLst>
           </a:prstGeom>
           <a:solidFill>
-            <a:srgbClr val="FFFFFF"/>
+            <a:schemeClr val="tx2"/>
           </a:solidFill>
           <a:ln w="12700">
             <a:solidFill>
-              <a:srgbClr val="D9D5C8"/>
+              <a:srgbClr val="4A1A5E"/>
             </a:solidFill>
             <a:prstDash val="solid"/>
           </a:ln>
@@ -22290,7 +22290,7 @@
             <a:r>
               <a:rPr lang="en-US" sz="1700" dirty="0">
                 <a:solidFill>
-                  <a:schemeClr val="accent6"/>
+                  <a:schemeClr val="accent5"/>
                 </a:solidFill>
               </a:rPr>
               <a:t>No Bourne-family shell can describe itself to a program.</a:t>
@@ -22316,11 +22316,11 @@
             </a:avLst>
           </a:prstGeom>
           <a:solidFill>
-            <a:schemeClr val="accent4"/>
+            <a:schemeClr val="tx2"/>
           </a:solidFill>
           <a:ln w="12700">
             <a:solidFill>
-              <a:srgbClr val="2C3844"/>
+              <a:srgbClr val="4A1A5E"/>
             </a:solidFill>
             <a:prstDash val="solid"/>
           </a:ln>
@@ -22418,7 +22418,7 @@
             <a:lvl1pPr>
               <a:defRPr sz="1200">
                 <a:solidFill>
-                  <a:schemeClr val="accent6"/>
+                  <a:schemeClr val="accent5"/>
                 </a:solidFill>
                 <a:latin typeface="Courier New"/>
                 <a:ea typeface="Courier New"/>
@@ -22490,7 +22490,7 @@
             <a:r>
               <a:rPr lang="en-US" sz="3600" b="1" dirty="0">
                 <a:solidFill>
-                  <a:schemeClr val="accent4"/>
+                  <a:schemeClr val="bg2"/>
                 </a:solidFill>
               </a:rPr>
               <a:t>The goodies</a:t>
@@ -22526,7 +22526,7 @@
             <a:r>
               <a:rPr lang="en-US" sz="1200" dirty="0">
                 <a:solidFill>
-                  <a:schemeClr val="accent6"/>
+                  <a:schemeClr val="accent5"/>
                 </a:solidFill>
                 <a:latin typeface="Courier New" pitchFamily="34" charset="0"/>
                 <a:ea typeface="Courier New" pitchFamily="34" charset="-122"/>
@@ -22555,11 +22555,11 @@
             </a:avLst>
           </a:prstGeom>
           <a:solidFill>
-            <a:srgbClr val="FFFFFF"/>
+            <a:schemeClr val="tx2"/>
           </a:solidFill>
           <a:ln w="12700">
             <a:solidFill>
-              <a:srgbClr val="D9D5C8"/>
+              <a:srgbClr val="4A1A5E"/>
             </a:solidFill>
             <a:prstDash val="solid"/>
           </a:ln>
@@ -22592,7 +22592,7 @@
             <a:r>
               <a:rPr lang="en-US" sz="2800" b="1" dirty="0">
                 <a:solidFill>
-                  <a:schemeClr val="accent6"/>
+                  <a:schemeClr val="accent5"/>
                 </a:solidFill>
               </a:rPr>
               <a:t>1</a:t>
@@ -22628,7 +22628,7 @@
             <a:r>
               <a:rPr lang="en-US" sz="2000" b="1" dirty="0">
                 <a:solidFill>
-                  <a:schemeClr val="accent4"/>
+                  <a:schemeClr val="bg2"/>
                 </a:solidFill>
               </a:rPr>
               <a:t>Execution</a:t>
@@ -22664,7 +22664,7 @@
             <a:r>
               <a:rPr lang="en-US" sz="1600" dirty="0">
                 <a:solidFill>
-                  <a:schemeClr val="accent6"/>
+                  <a:schemeClr val="accent5"/>
                 </a:solidFill>
               </a:rPr>
               <a:t>6 goodies</a:t>
@@ -22690,11 +22690,11 @@
             </a:avLst>
           </a:prstGeom>
           <a:solidFill>
-            <a:srgbClr val="FFFFFF"/>
+            <a:schemeClr val="tx2"/>
           </a:solidFill>
           <a:ln w="12700">
             <a:solidFill>
-              <a:srgbClr val="D9D5C8"/>
+              <a:srgbClr val="4A1A5E"/>
             </a:solidFill>
             <a:prstDash val="solid"/>
           </a:ln>
@@ -22727,7 +22727,7 @@
             <a:r>
               <a:rPr lang="en-US" sz="2800" b="1" dirty="0">
                 <a:solidFill>
-                  <a:schemeClr val="accent6"/>
+                  <a:schemeClr val="accent5"/>
                 </a:solidFill>
               </a:rPr>
               <a:t>2</a:t>
@@ -22763,7 +22763,7 @@
             <a:r>
               <a:rPr lang="en-US" sz="2000" b="1" dirty="0">
                 <a:solidFill>
-                  <a:schemeClr val="accent4"/>
+                  <a:schemeClr val="bg2"/>
                 </a:solidFill>
               </a:rPr>
               <a:t>State</a:t>
@@ -22799,7 +22799,7 @@
             <a:r>
               <a:rPr lang="en-US" sz="1600" dirty="0">
                 <a:solidFill>
-                  <a:schemeClr val="accent6"/>
+                  <a:schemeClr val="accent5"/>
                 </a:solidFill>
               </a:rPr>
               <a:t>5 goodies</a:t>
@@ -22825,11 +22825,11 @@
             </a:avLst>
           </a:prstGeom>
           <a:solidFill>
-            <a:srgbClr val="FFFFFF"/>
+            <a:schemeClr val="tx2"/>
           </a:solidFill>
           <a:ln w="12700">
             <a:solidFill>
-              <a:srgbClr val="D9D5C8"/>
+              <a:srgbClr val="4A1A5E"/>
             </a:solidFill>
             <a:prstDash val="solid"/>
           </a:ln>
@@ -22862,7 +22862,7 @@
             <a:r>
               <a:rPr lang="en-US" sz="2800" b="1" dirty="0">
                 <a:solidFill>
-                  <a:schemeClr val="accent6"/>
+                  <a:schemeClr val="accent5"/>
                 </a:solidFill>
               </a:rPr>
               <a:t>3</a:t>
@@ -22898,7 +22898,7 @@
             <a:r>
               <a:rPr lang="en-US" sz="2000" b="1" dirty="0">
                 <a:solidFill>
-                  <a:schemeClr val="accent4"/>
+                  <a:schemeClr val="bg2"/>
                 </a:solidFill>
               </a:rPr>
               <a:t>Line editor and prompt</a:t>
@@ -22934,7 +22934,7 @@
             <a:r>
               <a:rPr lang="en-US" sz="1600" dirty="0">
                 <a:solidFill>
-                  <a:schemeClr val="accent6"/>
+                  <a:schemeClr val="accent5"/>
                 </a:solidFill>
               </a:rPr>
               <a:t>ZLE, highlighting, prompt</a:t>
@@ -22960,11 +22960,11 @@
             </a:avLst>
           </a:prstGeom>
           <a:solidFill>
-            <a:srgbClr val="FFFFFF"/>
+            <a:schemeClr val="tx2"/>
           </a:solidFill>
           <a:ln w="12700">
             <a:solidFill>
-              <a:srgbClr val="D9D5C8"/>
+              <a:srgbClr val="4A1A5E"/>
             </a:solidFill>
             <a:prstDash val="solid"/>
           </a:ln>
@@ -22997,7 +22997,7 @@
             <a:r>
               <a:rPr lang="en-US" sz="2800" b="1" dirty="0">
                 <a:solidFill>
-                  <a:schemeClr val="accent6"/>
+                  <a:schemeClr val="accent5"/>
                 </a:solidFill>
               </a:rPr>
               <a:t>4</a:t>
@@ -23033,7 +23033,7 @@
             <a:r>
               <a:rPr lang="en-US" sz="2000" b="1" dirty="0">
                 <a:solidFill>
-                  <a:schemeClr val="accent4"/>
+                  <a:schemeClr val="bg2"/>
                 </a:solidFill>
               </a:rPr>
               <a:t>Observability</a:t>
@@ -23069,7 +23069,7 @@
             <a:r>
               <a:rPr lang="en-US" sz="1600" dirty="0">
                 <a:solidFill>
-                  <a:schemeClr val="accent6"/>
+                  <a:schemeClr val="accent5"/>
                 </a:solidFill>
               </a:rPr>
               <a:t>3 goodies</a:t>
@@ -23095,11 +23095,11 @@
             </a:avLst>
           </a:prstGeom>
           <a:solidFill>
-            <a:srgbClr val="FFFFFF"/>
+            <a:schemeClr val="tx2"/>
           </a:solidFill>
           <a:ln w="12700">
             <a:solidFill>
-              <a:srgbClr val="D9D5C8"/>
+              <a:srgbClr val="4A1A5E"/>
             </a:solidFill>
             <a:prstDash val="solid"/>
           </a:ln>
@@ -23168,7 +23168,7 @@
             <a:r>
               <a:rPr lang="en-US" sz="2000" b="1" dirty="0">
                 <a:solidFill>
-                  <a:schemeClr val="accent2"/>
+                  <a:schemeClr val="accent1"/>
                 </a:solidFill>
               </a:rPr>
               <a:t>Language</a:t>
@@ -23204,7 +23204,7 @@
             <a:r>
               <a:rPr lang="en-US" sz="1600" dirty="0">
                 <a:solidFill>
-                  <a:schemeClr val="accent6"/>
+                  <a:schemeClr val="accent5"/>
                 </a:solidFill>
               </a:rPr>
               <a:t>2 goodies</a:t>
@@ -23230,11 +23230,11 @@
             </a:avLst>
           </a:prstGeom>
           <a:solidFill>
-            <a:srgbClr val="FFFFFF"/>
+            <a:schemeClr val="tx2"/>
           </a:solidFill>
           <a:ln w="12700">
             <a:solidFill>
-              <a:srgbClr val="D9D5C8"/>
+              <a:srgbClr val="4A1A5E"/>
             </a:solidFill>
             <a:prstDash val="solid"/>
           </a:ln>
@@ -23267,7 +23267,7 @@
             <a:r>
               <a:rPr lang="en-US" sz="2800" b="1" dirty="0">
                 <a:solidFill>
-                  <a:schemeClr val="accent6"/>
+                  <a:schemeClr val="accent5"/>
                 </a:solidFill>
               </a:rPr>
               <a:t>6</a:t>
@@ -23303,7 +23303,7 @@
             <a:r>
               <a:rPr lang="en-US" sz="2000" b="1" dirty="0">
                 <a:solidFill>
-                  <a:schemeClr val="accent4"/>
+                  <a:schemeClr val="bg2"/>
                 </a:solidFill>
               </a:rPr>
               <a:t>Extensibility</a:t>
@@ -23339,7 +23339,7 @@
             <a:r>
               <a:rPr lang="en-US" sz="1600" dirty="0">
                 <a:solidFill>
-                  <a:schemeClr val="accent6"/>
+                  <a:schemeClr val="accent5"/>
                 </a:solidFill>
               </a:rPr>
               <a:t>2 goodies</a:t>
@@ -23365,11 +23365,11 @@
             </a:avLst>
           </a:prstGeom>
           <a:solidFill>
-            <a:srgbClr val="FFFFFF"/>
+            <a:schemeClr val="tx2"/>
           </a:solidFill>
           <a:ln w="12700">
             <a:solidFill>
-              <a:srgbClr val="D9D5C8"/>
+              <a:srgbClr val="4A1A5E"/>
             </a:solidFill>
             <a:prstDash val="solid"/>
           </a:ln>
@@ -23402,7 +23402,7 @@
             <a:r>
               <a:rPr lang="en-US" sz="2800" b="1" dirty="0">
                 <a:solidFill>
-                  <a:schemeClr val="accent6"/>
+                  <a:schemeClr val="accent5"/>
                 </a:solidFill>
               </a:rPr>
               <a:t>7</a:t>
@@ -23438,7 +23438,7 @@
             <a:r>
               <a:rPr lang="en-US" sz="2000" b="1" dirty="0">
                 <a:solidFill>
-                  <a:schemeClr val="accent4"/>
+                  <a:schemeClr val="bg2"/>
                 </a:solidFill>
               </a:rPr>
               <a:t>Compatibility</a:t>
@@ -23474,7 +23474,7 @@
             <a:r>
               <a:rPr lang="en-US" sz="1600" dirty="0">
                 <a:solidFill>
-                  <a:schemeClr val="accent6"/>
+                  <a:schemeClr val="accent5"/>
                 </a:solidFill>
               </a:rPr>
               <a:t>2 goodies</a:t>
@@ -23500,11 +23500,11 @@
             </a:avLst>
           </a:prstGeom>
           <a:solidFill>
-            <a:srgbClr val="FFFFFF"/>
+            <a:schemeClr val="tx2"/>
           </a:solidFill>
           <a:ln w="12700">
             <a:solidFill>
-              <a:srgbClr val="D9D5C8"/>
+              <a:srgbClr val="4A1A5E"/>
             </a:solidFill>
             <a:prstDash val="solid"/>
           </a:ln>
@@ -23537,7 +23537,7 @@
             <a:r>
               <a:rPr lang="en-US" sz="2800" b="1" dirty="0">
                 <a:solidFill>
-                  <a:schemeClr val="accent6"/>
+                  <a:schemeClr val="accent5"/>
                 </a:solidFill>
               </a:rPr>
               <a:t>8</a:t>
@@ -23573,7 +23573,7 @@
             <a:r>
               <a:rPr lang="en-US" sz="2000" b="1" dirty="0">
                 <a:solidFill>
-                  <a:schemeClr val="accent4"/>
+                  <a:schemeClr val="bg2"/>
                 </a:solidFill>
               </a:rPr>
               <a:t>Verification</a:t>
@@ -23609,7 +23609,7 @@
             <a:r>
               <a:rPr lang="en-US" sz="1600" dirty="0">
                 <a:solidFill>
-                  <a:schemeClr val="accent6"/>
+                  <a:schemeClr val="accent5"/>
                 </a:solidFill>
               </a:rPr>
               <a:t>2 goodies</a:t>
@@ -23635,11 +23635,11 @@
             </a:avLst>
           </a:prstGeom>
           <a:solidFill>
-            <a:srgbClr val="FFFFFF"/>
+            <a:schemeClr val="tx2"/>
           </a:solidFill>
           <a:ln w="12700">
             <a:solidFill>
-              <a:srgbClr val="D9D5C8"/>
+              <a:srgbClr val="4A1A5E"/>
             </a:solidFill>
             <a:prstDash val="solid"/>
           </a:ln>
@@ -23672,7 +23672,7 @@
             <a:r>
               <a:rPr lang="en-US" sz="2800" b="1" dirty="0">
                 <a:solidFill>
-                  <a:schemeClr val="accent6"/>
+                  <a:schemeClr val="accent5"/>
                 </a:solidFill>
               </a:rPr>
               <a:t>9</a:t>
@@ -23708,7 +23708,7 @@
             <a:r>
               <a:rPr lang="en-US" sz="2000" b="1" dirty="0">
                 <a:solidFill>
-                  <a:schemeClr val="accent4"/>
+                  <a:schemeClr val="bg2"/>
                 </a:solidFill>
               </a:rPr>
               <a:t>Tooling</a:t>
@@ -23744,7 +23744,7 @@
             <a:r>
               <a:rPr lang="en-US" sz="1600" dirty="0">
                 <a:solidFill>
-                  <a:schemeClr val="accent6"/>
+                  <a:schemeClr val="accent5"/>
                 </a:solidFill>
               </a:rPr>
               <a:t>4 goodies</a:t>
@@ -23783,7 +23783,7 @@
             <a:lvl1pPr>
               <a:defRPr sz="1200">
                 <a:solidFill>
-                  <a:schemeClr val="accent6"/>
+                  <a:schemeClr val="accent5"/>
                 </a:solidFill>
                 <a:latin typeface="Courier New"/>
                 <a:ea typeface="Courier New"/>
@@ -24018,7 +24018,7 @@
           </a:solidFill>
           <a:ln w="12700">
             <a:solidFill>
-              <a:srgbClr val="2C3844"/>
+              <a:srgbClr val="4A1A5E"/>
             </a:solidFill>
             <a:prstDash val="solid"/>
           </a:ln>
@@ -24361,7 +24361,7 @@
           </a:solidFill>
           <a:ln w="12700">
             <a:solidFill>
-              <a:srgbClr val="2C3844"/>
+              <a:srgbClr val="4A1A5E"/>
             </a:solidFill>
             <a:prstDash val="solid"/>
           </a:ln>
@@ -24610,7 +24610,7 @@
           </a:solidFill>
           <a:ln w="12700">
             <a:solidFill>
-              <a:srgbClr val="2C3844"/>
+              <a:srgbClr val="4A1A5E"/>
             </a:solidFill>
             <a:prstDash val="solid"/>
           </a:ln>
@@ -24745,7 +24745,7 @@
           </a:solidFill>
           <a:ln w="12700">
             <a:solidFill>
-              <a:srgbClr val="2C3844"/>
+              <a:srgbClr val="4A1A5E"/>
             </a:solidFill>
             <a:prstDash val="solid"/>
           </a:ln>
@@ -24880,7 +24880,7 @@
           </a:solidFill>
           <a:ln w="12700">
             <a:solidFill>
-              <a:srgbClr val="2C3844"/>
+              <a:srgbClr val="4A1A5E"/>
             </a:solidFill>
             <a:prstDash val="solid"/>
           </a:ln>
@@ -25015,7 +25015,7 @@
           </a:solidFill>
           <a:ln w="12700">
             <a:solidFill>
-              <a:srgbClr val="2C3844"/>
+              <a:srgbClr val="4A1A5E"/>
             </a:solidFill>
             <a:prstDash val="solid"/>
           </a:ln>
@@ -25150,7 +25150,7 @@
           </a:solidFill>
           <a:ln w="12700">
             <a:solidFill>
-              <a:srgbClr val="2C3844"/>
+              <a:srgbClr val="4A1A5E"/>
             </a:solidFill>
             <a:prstDash val="solid"/>
           </a:ln>
@@ -25285,7 +25285,7 @@
           </a:solidFill>
           <a:ln w="12700">
             <a:solidFill>
-              <a:srgbClr val="2C3844"/>
+              <a:srgbClr val="4A1A5E"/>
             </a:solidFill>
             <a:prstDash val="solid"/>
           </a:ln>
@@ -25420,7 +25420,7 @@
           </a:solidFill>
           <a:ln w="12700">
             <a:solidFill>
-              <a:srgbClr val="2C3844"/>
+              <a:srgbClr val="4A1A5E"/>
             </a:solidFill>
             <a:prstDash val="solid"/>
           </a:ln>
@@ -25555,7 +25555,7 @@
           </a:solidFill>
           <a:ln w="12700">
             <a:solidFill>
-              <a:srgbClr val="2C3844"/>
+              <a:srgbClr val="4A1A5E"/>
             </a:solidFill>
             <a:prstDash val="solid"/>
           </a:ln>
@@ -25690,7 +25690,7 @@
           </a:solidFill>
           <a:ln w="12700">
             <a:solidFill>
-              <a:srgbClr val="2C3844"/>
+              <a:srgbClr val="4A1A5E"/>
             </a:solidFill>
             <a:prstDash val="solid"/>
           </a:ln>
@@ -25906,7 +25906,7 @@
             <a:r>
               <a:rPr lang="en-US" sz="3600" b="1" dirty="0">
                 <a:solidFill>
-                  <a:schemeClr val="accent4"/>
+                  <a:schemeClr val="bg2"/>
                 </a:solidFill>
               </a:rPr>
               <a:t>17 · A stable, versioned plugin ABI</a:t>
@@ -25942,7 +25942,7 @@
             <a:r>
               <a:rPr lang="en-US" sz="1200" dirty="0">
                 <a:solidFill>
-                  <a:schemeClr val="accent6"/>
+                  <a:schemeClr val="accent5"/>
                 </a:solidFill>
                 <a:latin typeface="Courier New" pitchFamily="34" charset="0"/>
                 <a:ea typeface="Courier New" pitchFamily="34" charset="-122"/>
@@ -25981,7 +25981,7 @@
             <a:r>
               <a:rPr lang="en-US" sz="2400" dirty="0">
                 <a:solidFill>
-                  <a:schemeClr val="accent4"/>
+                  <a:schemeClr val="bg2"/>
                 </a:solidFill>
               </a:rPr>
               <a:t>cargo add znative, ship a cdylib, load it with zmodload -R. Mismatched versions are refused and only #[repr(C)] crosses the boundary.</a:t>
@@ -26021,7 +26021,7 @@
             <a:r>
               <a:rPr lang="en-US" sz="2000" dirty="0">
                 <a:solidFill>
-                  <a:schemeClr val="accent4"/>
+                  <a:schemeClr val="bg2"/>
                 </a:solidFill>
               </a:rPr>
               <a:t>Plugins register builtins and native completion generators</a:t>
@@ -26039,7 +26039,7 @@
             <a:r>
               <a:rPr lang="en-US" sz="2000" dirty="0">
                 <a:solidFill>
-                  <a:schemeClr val="accent4"/>
+                  <a:schemeClr val="bg2"/>
                 </a:solidFill>
               </a:rPr>
               <a:t>znative load owner/repo builds on first start, then loads from a content-addressed store</a:t>
@@ -26065,11 +26065,11 @@
             </a:avLst>
           </a:prstGeom>
           <a:solidFill>
-            <a:srgbClr val="FFFFFF"/>
+            <a:schemeClr val="tx2"/>
           </a:solidFill>
           <a:ln w="12700">
             <a:solidFill>
-              <a:srgbClr val="D9D5C8"/>
+              <a:srgbClr val="4A1A5E"/>
             </a:solidFill>
             <a:prstDash val="solid"/>
           </a:ln>
@@ -26138,7 +26138,7 @@
             <a:r>
               <a:rPr lang="en-US" sz="1700" dirty="0">
                 <a:solidFill>
-                  <a:schemeClr val="accent6"/>
+                  <a:schemeClr val="accent5"/>
                 </a:solidFill>
               </a:rPr>
               <a:t>bash enable -f and zsh zmodload load native code against private headers with no stable ABI. See docs/PLUGINS.md.</a:t>
@@ -26164,11 +26164,11 @@
             </a:avLst>
           </a:prstGeom>
           <a:solidFill>
-            <a:schemeClr val="accent4"/>
+            <a:schemeClr val="tx2"/>
           </a:solidFill>
           <a:ln w="12700">
             <a:solidFill>
-              <a:srgbClr val="2C3844"/>
+              <a:srgbClr val="4A1A5E"/>
             </a:solidFill>
             <a:prstDash val="solid"/>
           </a:ln>
@@ -26286,7 +26286,7 @@
             <a:lvl1pPr>
               <a:defRPr sz="1200">
                 <a:solidFill>
-                  <a:schemeClr val="accent6"/>
+                  <a:schemeClr val="accent5"/>
                 </a:solidFill>
                 <a:latin typeface="Courier New"/>
                 <a:ea typeface="Courier New"/>
@@ -26358,7 +26358,7 @@
             <a:r>
               <a:rPr lang="en-US" sz="3600" b="1" dirty="0">
                 <a:solidFill>
-                  <a:schemeClr val="accent4"/>
+                  <a:schemeClr val="bg2"/>
                 </a:solidFill>
               </a:rPr>
               <a:t>Code parity today</a:t>
@@ -26394,7 +26394,7 @@
             <a:r>
               <a:rPr lang="en-US" sz="1200" dirty="0">
                 <a:solidFill>
-                  <a:schemeClr val="accent6"/>
+                  <a:schemeClr val="accent5"/>
                 </a:solidFill>
                 <a:latin typeface="Courier New" pitchFamily="34" charset="0"/>
                 <a:ea typeface="Courier New" pitchFamily="34" charset="-122"/>
@@ -26423,11 +26423,11 @@
             </a:avLst>
           </a:prstGeom>
           <a:solidFill>
-            <a:schemeClr val="accent4"/>
+            <a:schemeClr val="tx2"/>
           </a:solidFill>
           <a:ln w="12700">
             <a:solidFill>
-              <a:schemeClr val="accent4"/>
+              <a:srgbClr val="4A1A5E"/>
             </a:solidFill>
             <a:prstDash val="solid"/>
           </a:ln>
@@ -26525,11 +26525,11 @@
             </a:avLst>
           </a:prstGeom>
           <a:solidFill>
-            <a:schemeClr val="accent4"/>
+            <a:schemeClr val="tx2"/>
           </a:solidFill>
           <a:ln w="12700">
             <a:solidFill>
-              <a:schemeClr val="accent4"/>
+              <a:srgbClr val="4A1A5E"/>
             </a:solidFill>
             <a:prstDash val="solid"/>
           </a:ln>
@@ -26627,11 +26627,11 @@
             </a:avLst>
           </a:prstGeom>
           <a:solidFill>
-            <a:schemeClr val="accent4"/>
+            <a:schemeClr val="tx2"/>
           </a:solidFill>
           <a:ln w="12700">
             <a:solidFill>
-              <a:schemeClr val="accent4"/>
+              <a:srgbClr val="4A1A5E"/>
             </a:solidFill>
             <a:prstDash val="solid"/>
           </a:ln>
@@ -26739,7 +26739,7 @@
             <a:r>
               <a:rPr lang="en-US" sz="2000" dirty="0">
                 <a:solidFill>
-                  <a:schemeClr val="accent6"/>
+                  <a:schemeClr val="accent5"/>
                 </a:solidFill>
               </a:rPr>
               <a:t>34 ignored. Serial run, docs/PARITY.md, 2026-08-21. The five open items are in the backup section.</a:t>
@@ -26778,7 +26778,7 @@
             <a:lvl1pPr>
               <a:defRPr sz="1200">
                 <a:solidFill>
-                  <a:schemeClr val="accent6"/>
+                  <a:schemeClr val="accent5"/>
                 </a:solidFill>
                 <a:latin typeface="Courier New"/>
                 <a:ea typeface="Courier New"/>
@@ -26850,7 +26850,7 @@
             <a:r>
               <a:rPr lang="en-US" sz="3600" b="1" dirty="0">
                 <a:solidFill>
-                  <a:schemeClr val="accent4"/>
+                  <a:schemeClr val="bg2"/>
                 </a:solidFill>
               </a:rPr>
               <a:t>18 · Absorbing foreign binaries</a:t>
@@ -26886,7 +26886,7 @@
             <a:r>
               <a:rPr lang="en-US" sz="1200" dirty="0">
                 <a:solidFill>
-                  <a:schemeClr val="accent6"/>
+                  <a:schemeClr val="accent5"/>
                 </a:solidFill>
                 <a:latin typeface="Courier New" pitchFamily="34" charset="0"/>
                 <a:ea typeface="Courier New" pitchFamily="34" charset="-122"/>
@@ -26925,7 +26925,7 @@
             <a:r>
               <a:rPr lang="en-US" sz="2800" dirty="0">
                 <a:solidFill>
-                  <a:schemeClr val="accent4"/>
+                  <a:schemeClr val="bg2"/>
                 </a:solidFill>
               </a:rPr>
               <a:t>git runs as a builtin with no fork, exec or PATH lookup. An fzf-compatible finder runs in-process.</a:t>
@@ -26965,7 +26965,7 @@
             <a:r>
               <a:rPr lang="en-US" sz="2500" dirty="0">
                 <a:solidFill>
-                  <a:schemeClr val="accent4"/>
+                  <a:schemeClr val="bg2"/>
                 </a:solidFill>
               </a:rPr>
               <a:t>git: zshrs-native build</a:t>
@@ -26983,7 +26983,7 @@
             <a:r>
               <a:rPr lang="en-US" sz="2500" dirty="0">
                 <a:solidFill>
-                  <a:schemeClr val="accent4"/>
+                  <a:schemeClr val="bg2"/>
                 </a:solidFill>
               </a:rPr>
               <a:t>arb --fzf honours FZF_DEFAULT_OPTS and FZF_DEFAULT_OPTS_FILE</a:t>
@@ -27001,7 +27001,7 @@
             <a:r>
               <a:rPr lang="en-US" sz="2500" dirty="0">
                 <a:solidFill>
-                  <a:schemeClr val="accent4"/>
+                  <a:schemeClr val="bg2"/>
                 </a:solidFill>
               </a:rPr>
               <a:t>48 coreutils in the main binary</a:t>
@@ -27027,11 +27027,11 @@
             </a:avLst>
           </a:prstGeom>
           <a:solidFill>
-            <a:srgbClr val="FFFFFF"/>
+            <a:schemeClr val="tx2"/>
           </a:solidFill>
           <a:ln w="12700">
             <a:solidFill>
-              <a:srgbClr val="D9D5C8"/>
+              <a:srgbClr val="4A1A5E"/>
             </a:solidFill>
             <a:prstDash val="solid"/>
           </a:ln>
@@ -27100,7 +27100,7 @@
             <a:r>
               <a:rPr lang="en-US" sz="2000" dirty="0">
                 <a:solidFill>
-                  <a:schemeClr val="accent6"/>
+                  <a:schemeClr val="accent5"/>
                 </a:solidFill>
               </a:rPr>
               <a:t>BusyBox has no git applet. Nushell's gstat is status-only in a child process. git-shell execs real git.</a:t>
@@ -27139,7 +27139,7 @@
             <a:lvl1pPr>
               <a:defRPr sz="1200">
                 <a:solidFill>
-                  <a:schemeClr val="accent6"/>
+                  <a:schemeClr val="accent5"/>
                 </a:solidFill>
                 <a:latin typeface="Courier New"/>
                 <a:ea typeface="Courier New"/>
@@ -27211,7 +27211,7 @@
             <a:r>
               <a:rPr lang="en-US" sz="3600" b="1" dirty="0">
                 <a:solidFill>
-                  <a:schemeClr val="accent4"/>
+                  <a:schemeClr val="bg2"/>
                 </a:solidFill>
               </a:rPr>
               <a:t>The goodies</a:t>
@@ -27247,7 +27247,7 @@
             <a:r>
               <a:rPr lang="en-US" sz="1200" dirty="0">
                 <a:solidFill>
-                  <a:schemeClr val="accent6"/>
+                  <a:schemeClr val="accent5"/>
                 </a:solidFill>
                 <a:latin typeface="Courier New" pitchFamily="34" charset="0"/>
                 <a:ea typeface="Courier New" pitchFamily="34" charset="-122"/>
@@ -27276,11 +27276,11 @@
             </a:avLst>
           </a:prstGeom>
           <a:solidFill>
-            <a:srgbClr val="FFFFFF"/>
+            <a:schemeClr val="tx2"/>
           </a:solidFill>
           <a:ln w="12700">
             <a:solidFill>
-              <a:srgbClr val="D9D5C8"/>
+              <a:srgbClr val="4A1A5E"/>
             </a:solidFill>
             <a:prstDash val="solid"/>
           </a:ln>
@@ -27313,7 +27313,7 @@
             <a:r>
               <a:rPr lang="en-US" sz="2800" b="1" dirty="0">
                 <a:solidFill>
-                  <a:schemeClr val="accent6"/>
+                  <a:schemeClr val="accent5"/>
                 </a:solidFill>
               </a:rPr>
               <a:t>1</a:t>
@@ -27349,7 +27349,7 @@
             <a:r>
               <a:rPr lang="en-US" sz="2000" b="1" dirty="0">
                 <a:solidFill>
-                  <a:schemeClr val="accent4"/>
+                  <a:schemeClr val="bg2"/>
                 </a:solidFill>
               </a:rPr>
               <a:t>Execution</a:t>
@@ -27385,7 +27385,7 @@
             <a:r>
               <a:rPr lang="en-US" sz="1600" dirty="0">
                 <a:solidFill>
-                  <a:schemeClr val="accent6"/>
+                  <a:schemeClr val="accent5"/>
                 </a:solidFill>
               </a:rPr>
               <a:t>6 goodies</a:t>
@@ -27411,11 +27411,11 @@
             </a:avLst>
           </a:prstGeom>
           <a:solidFill>
-            <a:srgbClr val="FFFFFF"/>
+            <a:schemeClr val="tx2"/>
           </a:solidFill>
           <a:ln w="12700">
             <a:solidFill>
-              <a:srgbClr val="D9D5C8"/>
+              <a:srgbClr val="4A1A5E"/>
             </a:solidFill>
             <a:prstDash val="solid"/>
           </a:ln>
@@ -27448,7 +27448,7 @@
             <a:r>
               <a:rPr lang="en-US" sz="2800" b="1" dirty="0">
                 <a:solidFill>
-                  <a:schemeClr val="accent6"/>
+                  <a:schemeClr val="accent5"/>
                 </a:solidFill>
               </a:rPr>
               <a:t>2</a:t>
@@ -27484,7 +27484,7 @@
             <a:r>
               <a:rPr lang="en-US" sz="2000" b="1" dirty="0">
                 <a:solidFill>
-                  <a:schemeClr val="accent4"/>
+                  <a:schemeClr val="bg2"/>
                 </a:solidFill>
               </a:rPr>
               <a:t>State</a:t>
@@ -27520,7 +27520,7 @@
             <a:r>
               <a:rPr lang="en-US" sz="1600" dirty="0">
                 <a:solidFill>
-                  <a:schemeClr val="accent6"/>
+                  <a:schemeClr val="accent5"/>
                 </a:solidFill>
               </a:rPr>
               <a:t>5 goodies</a:t>
@@ -27546,11 +27546,11 @@
             </a:avLst>
           </a:prstGeom>
           <a:solidFill>
-            <a:srgbClr val="FFFFFF"/>
+            <a:schemeClr val="tx2"/>
           </a:solidFill>
           <a:ln w="12700">
             <a:solidFill>
-              <a:srgbClr val="D9D5C8"/>
+              <a:srgbClr val="4A1A5E"/>
             </a:solidFill>
             <a:prstDash val="solid"/>
           </a:ln>
@@ -27583,7 +27583,7 @@
             <a:r>
               <a:rPr lang="en-US" sz="2800" b="1" dirty="0">
                 <a:solidFill>
-                  <a:schemeClr val="accent6"/>
+                  <a:schemeClr val="accent5"/>
                 </a:solidFill>
               </a:rPr>
               <a:t>3</a:t>
@@ -27619,7 +27619,7 @@
             <a:r>
               <a:rPr lang="en-US" sz="2000" b="1" dirty="0">
                 <a:solidFill>
-                  <a:schemeClr val="accent4"/>
+                  <a:schemeClr val="bg2"/>
                 </a:solidFill>
               </a:rPr>
               <a:t>Line editor and prompt</a:t>
@@ -27655,7 +27655,7 @@
             <a:r>
               <a:rPr lang="en-US" sz="1600" dirty="0">
                 <a:solidFill>
-                  <a:schemeClr val="accent6"/>
+                  <a:schemeClr val="accent5"/>
                 </a:solidFill>
               </a:rPr>
               <a:t>ZLE, highlighting, prompt</a:t>
@@ -27681,11 +27681,11 @@
             </a:avLst>
           </a:prstGeom>
           <a:solidFill>
-            <a:srgbClr val="FFFFFF"/>
+            <a:schemeClr val="tx2"/>
           </a:solidFill>
           <a:ln w="12700">
             <a:solidFill>
-              <a:srgbClr val="D9D5C8"/>
+              <a:srgbClr val="4A1A5E"/>
             </a:solidFill>
             <a:prstDash val="solid"/>
           </a:ln>
@@ -27718,7 +27718,7 @@
             <a:r>
               <a:rPr lang="en-US" sz="2800" b="1" dirty="0">
                 <a:solidFill>
-                  <a:schemeClr val="accent6"/>
+                  <a:schemeClr val="accent5"/>
                 </a:solidFill>
               </a:rPr>
               <a:t>4</a:t>
@@ -27754,7 +27754,7 @@
             <a:r>
               <a:rPr lang="en-US" sz="2000" b="1" dirty="0">
                 <a:solidFill>
-                  <a:schemeClr val="accent4"/>
+                  <a:schemeClr val="bg2"/>
                 </a:solidFill>
               </a:rPr>
               <a:t>Observability</a:t>
@@ -27790,7 +27790,7 @@
             <a:r>
               <a:rPr lang="en-US" sz="1600" dirty="0">
                 <a:solidFill>
-                  <a:schemeClr val="accent6"/>
+                  <a:schemeClr val="accent5"/>
                 </a:solidFill>
               </a:rPr>
               <a:t>3 goodies</a:t>
@@ -27816,11 +27816,11 @@
             </a:avLst>
           </a:prstGeom>
           <a:solidFill>
-            <a:srgbClr val="FFFFFF"/>
+            <a:schemeClr val="tx2"/>
           </a:solidFill>
           <a:ln w="12700">
             <a:solidFill>
-              <a:srgbClr val="D9D5C8"/>
+              <a:srgbClr val="4A1A5E"/>
             </a:solidFill>
             <a:prstDash val="solid"/>
           </a:ln>
@@ -27853,7 +27853,7 @@
             <a:r>
               <a:rPr lang="en-US" sz="2800" b="1" dirty="0">
                 <a:solidFill>
-                  <a:schemeClr val="accent6"/>
+                  <a:schemeClr val="accent5"/>
                 </a:solidFill>
               </a:rPr>
               <a:t>5</a:t>
@@ -27889,7 +27889,7 @@
             <a:r>
               <a:rPr lang="en-US" sz="2000" b="1" dirty="0">
                 <a:solidFill>
-                  <a:schemeClr val="accent4"/>
+                  <a:schemeClr val="bg2"/>
                 </a:solidFill>
               </a:rPr>
               <a:t>Language</a:t>
@@ -27925,7 +27925,7 @@
             <a:r>
               <a:rPr lang="en-US" sz="1600" dirty="0">
                 <a:solidFill>
-                  <a:schemeClr val="accent6"/>
+                  <a:schemeClr val="accent5"/>
                 </a:solidFill>
               </a:rPr>
               <a:t>2 goodies</a:t>
@@ -27951,11 +27951,11 @@
             </a:avLst>
           </a:prstGeom>
           <a:solidFill>
-            <a:srgbClr val="FFFFFF"/>
+            <a:schemeClr val="tx2"/>
           </a:solidFill>
           <a:ln w="12700">
             <a:solidFill>
-              <a:srgbClr val="D9D5C8"/>
+              <a:srgbClr val="4A1A5E"/>
             </a:solidFill>
             <a:prstDash val="solid"/>
           </a:ln>
@@ -27988,7 +27988,7 @@
             <a:r>
               <a:rPr lang="en-US" sz="2800" b="1" dirty="0">
                 <a:solidFill>
-                  <a:schemeClr val="accent6"/>
+                  <a:schemeClr val="accent5"/>
                 </a:solidFill>
               </a:rPr>
               <a:t>6</a:t>
@@ -28024,7 +28024,7 @@
             <a:r>
               <a:rPr lang="en-US" sz="2000" b="1" dirty="0">
                 <a:solidFill>
-                  <a:schemeClr val="accent4"/>
+                  <a:schemeClr val="bg2"/>
                 </a:solidFill>
               </a:rPr>
               <a:t>Extensibility</a:t>
@@ -28060,7 +28060,7 @@
             <a:r>
               <a:rPr lang="en-US" sz="1600" dirty="0">
                 <a:solidFill>
-                  <a:schemeClr val="accent6"/>
+                  <a:schemeClr val="accent5"/>
                 </a:solidFill>
               </a:rPr>
               <a:t>2 goodies</a:t>
@@ -28086,11 +28086,11 @@
             </a:avLst>
           </a:prstGeom>
           <a:solidFill>
-            <a:srgbClr val="FFFFFF"/>
+            <a:schemeClr val="tx2"/>
           </a:solidFill>
           <a:ln w="12700">
             <a:solidFill>
-              <a:srgbClr val="D9D5C8"/>
+              <a:srgbClr val="4A1A5E"/>
             </a:solidFill>
             <a:prstDash val="solid"/>
           </a:ln>
@@ -28159,7 +28159,7 @@
             <a:r>
               <a:rPr lang="en-US" sz="2000" b="1" dirty="0">
                 <a:solidFill>
-                  <a:schemeClr val="accent2"/>
+                  <a:schemeClr val="accent1"/>
                 </a:solidFill>
               </a:rPr>
               <a:t>Compatibility</a:t>
@@ -28195,7 +28195,7 @@
             <a:r>
               <a:rPr lang="en-US" sz="1600" dirty="0">
                 <a:solidFill>
-                  <a:schemeClr val="accent6"/>
+                  <a:schemeClr val="accent5"/>
                 </a:solidFill>
               </a:rPr>
               <a:t>2 goodies</a:t>
@@ -28221,11 +28221,11 @@
             </a:avLst>
           </a:prstGeom>
           <a:solidFill>
-            <a:srgbClr val="FFFFFF"/>
+            <a:schemeClr val="tx2"/>
           </a:solidFill>
           <a:ln w="12700">
             <a:solidFill>
-              <a:srgbClr val="D9D5C8"/>
+              <a:srgbClr val="4A1A5E"/>
             </a:solidFill>
             <a:prstDash val="solid"/>
           </a:ln>
@@ -28258,7 +28258,7 @@
             <a:r>
               <a:rPr lang="en-US" sz="2800" b="1" dirty="0">
                 <a:solidFill>
-                  <a:schemeClr val="accent6"/>
+                  <a:schemeClr val="accent5"/>
                 </a:solidFill>
               </a:rPr>
               <a:t>8</a:t>
@@ -28294,7 +28294,7 @@
             <a:r>
               <a:rPr lang="en-US" sz="2000" b="1" dirty="0">
                 <a:solidFill>
-                  <a:schemeClr val="accent4"/>
+                  <a:schemeClr val="bg2"/>
                 </a:solidFill>
               </a:rPr>
               <a:t>Verification</a:t>
@@ -28330,7 +28330,7 @@
             <a:r>
               <a:rPr lang="en-US" sz="1600" dirty="0">
                 <a:solidFill>
-                  <a:schemeClr val="accent6"/>
+                  <a:schemeClr val="accent5"/>
                 </a:solidFill>
               </a:rPr>
               <a:t>2 goodies</a:t>
@@ -28356,11 +28356,11 @@
             </a:avLst>
           </a:prstGeom>
           <a:solidFill>
-            <a:srgbClr val="FFFFFF"/>
+            <a:schemeClr val="tx2"/>
           </a:solidFill>
           <a:ln w="12700">
             <a:solidFill>
-              <a:srgbClr val="D9D5C8"/>
+              <a:srgbClr val="4A1A5E"/>
             </a:solidFill>
             <a:prstDash val="solid"/>
           </a:ln>
@@ -28393,7 +28393,7 @@
             <a:r>
               <a:rPr lang="en-US" sz="2800" b="1" dirty="0">
                 <a:solidFill>
-                  <a:schemeClr val="accent6"/>
+                  <a:schemeClr val="accent5"/>
                 </a:solidFill>
               </a:rPr>
               <a:t>9</a:t>
@@ -28429,7 +28429,7 @@
             <a:r>
               <a:rPr lang="en-US" sz="2000" b="1" dirty="0">
                 <a:solidFill>
-                  <a:schemeClr val="accent4"/>
+                  <a:schemeClr val="bg2"/>
                 </a:solidFill>
               </a:rPr>
               <a:t>Tooling</a:t>
@@ -28465,7 +28465,7 @@
             <a:r>
               <a:rPr lang="en-US" sz="1600" dirty="0">
                 <a:solidFill>
-                  <a:schemeClr val="accent6"/>
+                  <a:schemeClr val="accent5"/>
                 </a:solidFill>
               </a:rPr>
               <a:t>4 goodies</a:t>
@@ -28504,7 +28504,7 @@
             <a:lvl1pPr>
               <a:defRPr sz="1200">
                 <a:solidFill>
-                  <a:schemeClr val="accent6"/>
+                  <a:schemeClr val="accent5"/>
                 </a:solidFill>
                 <a:latin typeface="Courier New"/>
                 <a:ea typeface="Courier New"/>
@@ -28757,7 +28757,7 @@
           </a:solidFill>
           <a:ln w="12700">
             <a:solidFill>
-              <a:srgbClr val="2C3844"/>
+              <a:srgbClr val="4A1A5E"/>
             </a:solidFill>
             <a:prstDash val="solid"/>
           </a:ln>
@@ -29118,7 +29118,7 @@
           </a:solidFill>
           <a:ln w="12700">
             <a:solidFill>
-              <a:srgbClr val="2C3844"/>
+              <a:srgbClr val="4A1A5E"/>
             </a:solidFill>
             <a:prstDash val="solid"/>
           </a:ln>
@@ -29367,7 +29367,7 @@
           </a:solidFill>
           <a:ln w="12700">
             <a:solidFill>
-              <a:srgbClr val="2C3844"/>
+              <a:srgbClr val="4A1A5E"/>
             </a:solidFill>
             <a:prstDash val="solid"/>
           </a:ln>
@@ -29502,7 +29502,7 @@
           </a:solidFill>
           <a:ln w="12700">
             <a:solidFill>
-              <a:srgbClr val="2C3844"/>
+              <a:srgbClr val="4A1A5E"/>
             </a:solidFill>
             <a:prstDash val="solid"/>
           </a:ln>
@@ -29637,7 +29637,7 @@
           </a:solidFill>
           <a:ln w="12700">
             <a:solidFill>
-              <a:srgbClr val="2C3844"/>
+              <a:srgbClr val="4A1A5E"/>
             </a:solidFill>
             <a:prstDash val="solid"/>
           </a:ln>
@@ -29772,7 +29772,7 @@
           </a:solidFill>
           <a:ln w="12700">
             <a:solidFill>
-              <a:srgbClr val="2C3844"/>
+              <a:srgbClr val="4A1A5E"/>
             </a:solidFill>
             <a:prstDash val="solid"/>
           </a:ln>
@@ -29907,7 +29907,7 @@
           </a:solidFill>
           <a:ln w="12700">
             <a:solidFill>
-              <a:srgbClr val="2C3844"/>
+              <a:srgbClr val="4A1A5E"/>
             </a:solidFill>
             <a:prstDash val="solid"/>
           </a:ln>
@@ -30042,7 +30042,7 @@
           </a:solidFill>
           <a:ln w="12700">
             <a:solidFill>
-              <a:srgbClr val="2C3844"/>
+              <a:srgbClr val="4A1A5E"/>
             </a:solidFill>
             <a:prstDash val="solid"/>
           </a:ln>
@@ -30177,7 +30177,7 @@
           </a:solidFill>
           <a:ln w="12700">
             <a:solidFill>
-              <a:srgbClr val="2C3844"/>
+              <a:srgbClr val="4A1A5E"/>
             </a:solidFill>
             <a:prstDash val="solid"/>
           </a:ln>
@@ -30312,7 +30312,7 @@
           </a:solidFill>
           <a:ln w="12700">
             <a:solidFill>
-              <a:srgbClr val="2C3844"/>
+              <a:srgbClr val="4A1A5E"/>
             </a:solidFill>
             <a:prstDash val="solid"/>
           </a:ln>
@@ -30447,7 +30447,7 @@
           </a:solidFill>
           <a:ln w="12700">
             <a:solidFill>
-              <a:srgbClr val="2C3844"/>
+              <a:srgbClr val="4A1A5E"/>
             </a:solidFill>
             <a:prstDash val="solid"/>
           </a:ln>
@@ -30663,7 +30663,7 @@
             <a:r>
               <a:rPr lang="en-US" sz="3600" b="1" dirty="0">
                 <a:solidFill>
-                  <a:schemeClr val="accent4"/>
+                  <a:schemeClr val="bg2"/>
                 </a:solidFill>
               </a:rPr>
               <a:t>24 · Invariants enforced in CI</a:t>
@@ -30699,7 +30699,7 @@
             <a:r>
               <a:rPr lang="en-US" sz="1200" dirty="0">
                 <a:solidFill>
-                  <a:schemeClr val="accent6"/>
+                  <a:schemeClr val="accent5"/>
                 </a:solidFill>
                 <a:latin typeface="Courier New" pitchFamily="34" charset="0"/>
                 <a:ea typeface="Courier New" pitchFamily="34" charset="-122"/>
@@ -30738,7 +30738,7 @@
             <a:r>
               <a:rPr lang="en-US" sz="2800" dirty="0">
                 <a:solidFill>
-                  <a:schemeClr val="accent4"/>
+                  <a:schemeClr val="bg2"/>
                 </a:solidFill>
               </a:rPr>
               <a:t>tests/port_purity.rs freezes the port directory: mirror a real Src/&lt;x&gt;.c, cite the C function, no new files, no invented helper names.</a:t>
@@ -30778,7 +30778,7 @@
             <a:r>
               <a:rPr lang="en-US" sz="2800" dirty="0">
                 <a:solidFill>
-                  <a:schemeClr val="accent4"/>
+                  <a:schemeClr val="bg2"/>
                 </a:solidFill>
               </a:rPr>
               <a:t>tests/tree_walker_absent.rs asserts the old interpreter is gone</a:t>
@@ -30796,7 +30796,7 @@
             <a:r>
               <a:rPr lang="en-US" sz="2800" dirty="0">
                 <a:solidFill>
-                  <a:schemeClr val="accent4"/>
+                  <a:schemeClr val="bg2"/>
                 </a:solidFill>
               </a:rPr>
               <a:t>174 behavioural pins in no_tree_walker_dispatch.rs</a:t>
@@ -30822,11 +30822,11 @@
             </a:avLst>
           </a:prstGeom>
           <a:solidFill>
-            <a:srgbClr val="FFFFFF"/>
+            <a:schemeClr val="tx2"/>
           </a:solidFill>
           <a:ln w="12700">
             <a:solidFill>
-              <a:srgbClr val="D9D5C8"/>
+              <a:srgbClr val="4A1A5E"/>
             </a:solidFill>
             <a:prstDash val="solid"/>
           </a:ln>
@@ -30895,7 +30895,7 @@
             <a:r>
               <a:rPr lang="en-US" sz="2000" dirty="0">
                 <a:solidFill>
-                  <a:schemeClr val="accent6"/>
+                  <a:schemeClr val="accent5"/>
                 </a:solidFill>
               </a:rPr>
               <a:t>Contributors and code-generation tools both invent helpers and files. A test closes both, not review.</a:t>
@@ -30934,7 +30934,7 @@
             <a:lvl1pPr>
               <a:defRPr sz="1200">
                 <a:solidFill>
-                  <a:schemeClr val="accent6"/>
+                  <a:schemeClr val="accent5"/>
                 </a:solidFill>
                 <a:latin typeface="Courier New"/>
                 <a:ea typeface="Courier New"/>
@@ -31006,7 +31006,7 @@
             <a:r>
               <a:rPr lang="en-US" sz="3600" b="1" dirty="0">
                 <a:solidFill>
-                  <a:schemeClr val="accent4"/>
+                  <a:schemeClr val="bg2"/>
                 </a:solidFill>
               </a:rPr>
               <a:t>25 · Differential fuzzing against zsh</a:t>
@@ -31042,7 +31042,7 @@
             <a:r>
               <a:rPr lang="en-US" sz="1200" dirty="0">
                 <a:solidFill>
-                  <a:schemeClr val="accent6"/>
+                  <a:schemeClr val="accent5"/>
                 </a:solidFill>
                 <a:latin typeface="Courier New" pitchFamily="34" charset="0"/>
                 <a:ea typeface="Courier New" pitchFamily="34" charset="-122"/>
@@ -31081,7 +31081,7 @@
             <a:r>
               <a:rPr lang="en-US" sz="2800" dirty="0">
                 <a:solidFill>
-                  <a:schemeClr val="accent4"/>
+                  <a:schemeClr val="bg2"/>
                 </a:solidFill>
               </a:rPr>
               <a:t>Grammar-driven, seed-replayable snippets run through zshrs and real zsh. Divergences are re-confirmed three times.</a:t>
@@ -31121,7 +31121,7 @@
             <a:r>
               <a:rPr lang="en-US" sz="3000" dirty="0">
                 <a:solidFill>
-                  <a:schemeClr val="accent4"/>
+                  <a:schemeClr val="bg2"/>
                 </a:solidFill>
               </a:rPr>
               <a:t>22,200 cases across 74 modes</a:t>
@@ -31139,7 +31139,7 @@
             <a:r>
               <a:rPr lang="en-US" sz="3000" dirty="0">
                 <a:solidFill>
-                  <a:schemeClr val="accent4"/>
+                  <a:schemeClr val="bg2"/>
                 </a:solidFill>
               </a:rPr>
               <a:t>27 divergences (0.12%)</a:t>
@@ -31157,7 +31157,7 @@
             <a:r>
               <a:rPr lang="en-US" sz="3000" dirty="0">
                 <a:solidFill>
-                  <a:schemeClr val="accent4"/>
+                  <a:schemeClr val="bg2"/>
                 </a:solidFill>
               </a:rPr>
               <a:t>71 of 74 modes at zero</a:t>
@@ -31183,11 +31183,11 @@
             </a:avLst>
           </a:prstGeom>
           <a:solidFill>
-            <a:srgbClr val="FFFFFF"/>
+            <a:schemeClr val="tx2"/>
           </a:solidFill>
           <a:ln w="12700">
             <a:solidFill>
-              <a:srgbClr val="D9D5C8"/>
+              <a:srgbClr val="4A1A5E"/>
             </a:solidFill>
             <a:prstDash val="solid"/>
           </a:ln>
@@ -31256,7 +31256,7 @@
             <a:r>
               <a:rPr lang="en-US" sz="1600" dirty="0">
                 <a:solidFill>
-                  <a:schemeClr val="accent6"/>
+                  <a:schemeClr val="accent5"/>
                 </a:solidFill>
               </a:rPr>
               <a:t>McKeeman named it in 1998, Csmith made it standard for compilers. Nobody had aimed it at a shell.</a:t>
@@ -31311,7 +31311,7 @@
             <a:lvl1pPr>
               <a:defRPr sz="1200">
                 <a:solidFill>
-                  <a:schemeClr val="accent6"/>
+                  <a:schemeClr val="accent5"/>
                 </a:solidFill>
                 <a:latin typeface="Courier New"/>
                 <a:ea typeface="Courier New"/>
@@ -31383,7 +31383,7 @@
             <a:r>
               <a:rPr lang="en-US" sz="3600" b="1" dirty="0">
                 <a:solidFill>
-                  <a:schemeClr val="accent4"/>
+                  <a:schemeClr val="bg2"/>
                 </a:solidFill>
               </a:rPr>
               <a:t>The goodies</a:t>
@@ -31419,7 +31419,7 @@
             <a:r>
               <a:rPr lang="en-US" sz="1200" dirty="0">
                 <a:solidFill>
-                  <a:schemeClr val="accent6"/>
+                  <a:schemeClr val="accent5"/>
                 </a:solidFill>
                 <a:latin typeface="Courier New" pitchFamily="34" charset="0"/>
                 <a:ea typeface="Courier New" pitchFamily="34" charset="-122"/>
@@ -31448,11 +31448,11 @@
             </a:avLst>
           </a:prstGeom>
           <a:solidFill>
-            <a:srgbClr val="FFFFFF"/>
+            <a:schemeClr val="tx2"/>
           </a:solidFill>
           <a:ln w="12700">
             <a:solidFill>
-              <a:srgbClr val="D9D5C8"/>
+              <a:srgbClr val="4A1A5E"/>
             </a:solidFill>
             <a:prstDash val="solid"/>
           </a:ln>
@@ -31485,7 +31485,7 @@
             <a:r>
               <a:rPr lang="en-US" sz="2800" b="1" dirty="0">
                 <a:solidFill>
-                  <a:schemeClr val="accent6"/>
+                  <a:schemeClr val="accent5"/>
                 </a:solidFill>
               </a:rPr>
               <a:t>1</a:t>
@@ -31521,7 +31521,7 @@
             <a:r>
               <a:rPr lang="en-US" sz="2000" b="1" dirty="0">
                 <a:solidFill>
-                  <a:schemeClr val="accent4"/>
+                  <a:schemeClr val="bg2"/>
                 </a:solidFill>
               </a:rPr>
               <a:t>Execution</a:t>
@@ -31557,7 +31557,7 @@
             <a:r>
               <a:rPr lang="en-US" sz="1600" dirty="0">
                 <a:solidFill>
-                  <a:schemeClr val="accent6"/>
+                  <a:schemeClr val="accent5"/>
                 </a:solidFill>
               </a:rPr>
               <a:t>6 goodies</a:t>
@@ -31583,11 +31583,11 @@
             </a:avLst>
           </a:prstGeom>
           <a:solidFill>
-            <a:srgbClr val="FFFFFF"/>
+            <a:schemeClr val="tx2"/>
           </a:solidFill>
           <a:ln w="12700">
             <a:solidFill>
-              <a:srgbClr val="D9D5C8"/>
+              <a:srgbClr val="4A1A5E"/>
             </a:solidFill>
             <a:prstDash val="solid"/>
           </a:ln>
@@ -31620,7 +31620,7 @@
             <a:r>
               <a:rPr lang="en-US" sz="2800" b="1" dirty="0">
                 <a:solidFill>
-                  <a:schemeClr val="accent6"/>
+                  <a:schemeClr val="accent5"/>
                 </a:solidFill>
               </a:rPr>
               <a:t>2</a:t>
@@ -31656,7 +31656,7 @@
             <a:r>
               <a:rPr lang="en-US" sz="2000" b="1" dirty="0">
                 <a:solidFill>
-                  <a:schemeClr val="accent4"/>
+                  <a:schemeClr val="bg2"/>
                 </a:solidFill>
               </a:rPr>
               <a:t>State</a:t>
@@ -31692,7 +31692,7 @@
             <a:r>
               <a:rPr lang="en-US" sz="1600" dirty="0">
                 <a:solidFill>
-                  <a:schemeClr val="accent6"/>
+                  <a:schemeClr val="accent5"/>
                 </a:solidFill>
               </a:rPr>
               <a:t>5 goodies</a:t>
@@ -31718,11 +31718,11 @@
             </a:avLst>
           </a:prstGeom>
           <a:solidFill>
-            <a:srgbClr val="FFFFFF"/>
+            <a:schemeClr val="tx2"/>
           </a:solidFill>
           <a:ln w="12700">
             <a:solidFill>
-              <a:srgbClr val="D9D5C8"/>
+              <a:srgbClr val="4A1A5E"/>
             </a:solidFill>
             <a:prstDash val="solid"/>
           </a:ln>
@@ -31755,7 +31755,7 @@
             <a:r>
               <a:rPr lang="en-US" sz="2800" b="1" dirty="0">
                 <a:solidFill>
-                  <a:schemeClr val="accent6"/>
+                  <a:schemeClr val="accent5"/>
                 </a:solidFill>
               </a:rPr>
               <a:t>3</a:t>
@@ -31791,7 +31791,7 @@
             <a:r>
               <a:rPr lang="en-US" sz="2000" b="1" dirty="0">
                 <a:solidFill>
-                  <a:schemeClr val="accent4"/>
+                  <a:schemeClr val="bg2"/>
                 </a:solidFill>
               </a:rPr>
               <a:t>Line editor and prompt</a:t>
@@ -31827,7 +31827,7 @@
             <a:r>
               <a:rPr lang="en-US" sz="1600" dirty="0">
                 <a:solidFill>
-                  <a:schemeClr val="accent6"/>
+                  <a:schemeClr val="accent5"/>
                 </a:solidFill>
               </a:rPr>
               <a:t>ZLE, highlighting, prompt</a:t>
@@ -31853,11 +31853,11 @@
             </a:avLst>
           </a:prstGeom>
           <a:solidFill>
-            <a:srgbClr val="FFFFFF"/>
+            <a:schemeClr val="tx2"/>
           </a:solidFill>
           <a:ln w="12700">
             <a:solidFill>
-              <a:srgbClr val="D9D5C8"/>
+              <a:srgbClr val="4A1A5E"/>
             </a:solidFill>
             <a:prstDash val="solid"/>
           </a:ln>
@@ -31890,7 +31890,7 @@
             <a:r>
               <a:rPr lang="en-US" sz="2800" b="1" dirty="0">
                 <a:solidFill>
-                  <a:schemeClr val="accent6"/>
+                  <a:schemeClr val="accent5"/>
                 </a:solidFill>
               </a:rPr>
               <a:t>4</a:t>
@@ -31926,7 +31926,7 @@
             <a:r>
               <a:rPr lang="en-US" sz="2000" b="1" dirty="0">
                 <a:solidFill>
-                  <a:schemeClr val="accent4"/>
+                  <a:schemeClr val="bg2"/>
                 </a:solidFill>
               </a:rPr>
               <a:t>Observability</a:t>
@@ -31962,7 +31962,7 @@
             <a:r>
               <a:rPr lang="en-US" sz="1600" dirty="0">
                 <a:solidFill>
-                  <a:schemeClr val="accent6"/>
+                  <a:schemeClr val="accent5"/>
                 </a:solidFill>
               </a:rPr>
               <a:t>3 goodies</a:t>
@@ -31988,11 +31988,11 @@
             </a:avLst>
           </a:prstGeom>
           <a:solidFill>
-            <a:srgbClr val="FFFFFF"/>
+            <a:schemeClr val="tx2"/>
           </a:solidFill>
           <a:ln w="12700">
             <a:solidFill>
-              <a:srgbClr val="D9D5C8"/>
+              <a:srgbClr val="4A1A5E"/>
             </a:solidFill>
             <a:prstDash val="solid"/>
           </a:ln>
@@ -32025,7 +32025,7 @@
             <a:r>
               <a:rPr lang="en-US" sz="2800" b="1" dirty="0">
                 <a:solidFill>
-                  <a:schemeClr val="accent6"/>
+                  <a:schemeClr val="accent5"/>
                 </a:solidFill>
               </a:rPr>
               <a:t>5</a:t>
@@ -32061,7 +32061,7 @@
             <a:r>
               <a:rPr lang="en-US" sz="2000" b="1" dirty="0">
                 <a:solidFill>
-                  <a:schemeClr val="accent4"/>
+                  <a:schemeClr val="bg2"/>
                 </a:solidFill>
               </a:rPr>
               <a:t>Language</a:t>
@@ -32097,7 +32097,7 @@
             <a:r>
               <a:rPr lang="en-US" sz="1600" dirty="0">
                 <a:solidFill>
-                  <a:schemeClr val="accent6"/>
+                  <a:schemeClr val="accent5"/>
                 </a:solidFill>
               </a:rPr>
               <a:t>2 goodies</a:t>
@@ -32123,11 +32123,11 @@
             </a:avLst>
           </a:prstGeom>
           <a:solidFill>
-            <a:srgbClr val="FFFFFF"/>
+            <a:schemeClr val="tx2"/>
           </a:solidFill>
           <a:ln w="12700">
             <a:solidFill>
-              <a:srgbClr val="D9D5C8"/>
+              <a:srgbClr val="4A1A5E"/>
             </a:solidFill>
             <a:prstDash val="solid"/>
           </a:ln>
@@ -32160,7 +32160,7 @@
             <a:r>
               <a:rPr lang="en-US" sz="2800" b="1" dirty="0">
                 <a:solidFill>
-                  <a:schemeClr val="accent6"/>
+                  <a:schemeClr val="accent5"/>
                 </a:solidFill>
               </a:rPr>
               <a:t>6</a:t>
@@ -32196,7 +32196,7 @@
             <a:r>
               <a:rPr lang="en-US" sz="2000" b="1" dirty="0">
                 <a:solidFill>
-                  <a:schemeClr val="accent4"/>
+                  <a:schemeClr val="bg2"/>
                 </a:solidFill>
               </a:rPr>
               <a:t>Extensibility</a:t>
@@ -32232,7 +32232,7 @@
             <a:r>
               <a:rPr lang="en-US" sz="1600" dirty="0">
                 <a:solidFill>
-                  <a:schemeClr val="accent6"/>
+                  <a:schemeClr val="accent5"/>
                 </a:solidFill>
               </a:rPr>
               <a:t>2 goodies</a:t>
@@ -32258,11 +32258,11 @@
             </a:avLst>
           </a:prstGeom>
           <a:solidFill>
-            <a:srgbClr val="FFFFFF"/>
+            <a:schemeClr val="tx2"/>
           </a:solidFill>
           <a:ln w="12700">
             <a:solidFill>
-              <a:srgbClr val="D9D5C8"/>
+              <a:srgbClr val="4A1A5E"/>
             </a:solidFill>
             <a:prstDash val="solid"/>
           </a:ln>
@@ -32295,7 +32295,7 @@
             <a:r>
               <a:rPr lang="en-US" sz="2800" b="1" dirty="0">
                 <a:solidFill>
-                  <a:schemeClr val="accent6"/>
+                  <a:schemeClr val="accent5"/>
                 </a:solidFill>
               </a:rPr>
               <a:t>7</a:t>
@@ -32331,7 +32331,7 @@
             <a:r>
               <a:rPr lang="en-US" sz="2000" b="1" dirty="0">
                 <a:solidFill>
-                  <a:schemeClr val="accent4"/>
+                  <a:schemeClr val="bg2"/>
                 </a:solidFill>
               </a:rPr>
               <a:t>Compatibility</a:t>
@@ -32367,7 +32367,7 @@
             <a:r>
               <a:rPr lang="en-US" sz="1600" dirty="0">
                 <a:solidFill>
-                  <a:schemeClr val="accent6"/>
+                  <a:schemeClr val="accent5"/>
                 </a:solidFill>
               </a:rPr>
               <a:t>2 goodies</a:t>
@@ -32393,11 +32393,11 @@
             </a:avLst>
           </a:prstGeom>
           <a:solidFill>
-            <a:srgbClr val="FFFFFF"/>
+            <a:schemeClr val="tx2"/>
           </a:solidFill>
           <a:ln w="12700">
             <a:solidFill>
-              <a:srgbClr val="D9D5C8"/>
+              <a:srgbClr val="4A1A5E"/>
             </a:solidFill>
             <a:prstDash val="solid"/>
           </a:ln>
@@ -32430,7 +32430,7 @@
             <a:r>
               <a:rPr lang="en-US" sz="2800" b="1" dirty="0">
                 <a:solidFill>
-                  <a:schemeClr val="accent6"/>
+                  <a:schemeClr val="accent5"/>
                 </a:solidFill>
               </a:rPr>
               <a:t>8</a:t>
@@ -32466,7 +32466,7 @@
             <a:r>
               <a:rPr lang="en-US" sz="2000" b="1" dirty="0">
                 <a:solidFill>
-                  <a:schemeClr val="accent4"/>
+                  <a:schemeClr val="bg2"/>
                 </a:solidFill>
               </a:rPr>
               <a:t>Verification</a:t>
@@ -32502,7 +32502,7 @@
             <a:r>
               <a:rPr lang="en-US" sz="1600" dirty="0">
                 <a:solidFill>
-                  <a:schemeClr val="accent6"/>
+                  <a:schemeClr val="accent5"/>
                 </a:solidFill>
               </a:rPr>
               <a:t>2 goodies</a:t>
@@ -32528,11 +32528,11 @@
             </a:avLst>
           </a:prstGeom>
           <a:solidFill>
-            <a:srgbClr val="FFFFFF"/>
+            <a:schemeClr val="tx2"/>
           </a:solidFill>
           <a:ln w="12700">
             <a:solidFill>
-              <a:srgbClr val="D9D5C8"/>
+              <a:srgbClr val="4A1A5E"/>
             </a:solidFill>
             <a:prstDash val="solid"/>
           </a:ln>
@@ -32601,7 +32601,7 @@
             <a:r>
               <a:rPr lang="en-US" sz="2000" b="1" dirty="0">
                 <a:solidFill>
-                  <a:schemeClr val="accent2"/>
+                  <a:schemeClr val="accent1"/>
                 </a:solidFill>
               </a:rPr>
               <a:t>Tooling</a:t>
@@ -32637,7 +32637,7 @@
             <a:r>
               <a:rPr lang="en-US" sz="1600" dirty="0">
                 <a:solidFill>
-                  <a:schemeClr val="accent6"/>
+                  <a:schemeClr val="accent5"/>
                 </a:solidFill>
               </a:rPr>
               <a:t>4 goodies</a:t>
@@ -32676,7 +32676,7 @@
             <a:lvl1pPr>
               <a:defRPr sz="1200">
                 <a:solidFill>
-                  <a:schemeClr val="accent6"/>
+                  <a:schemeClr val="accent5"/>
                 </a:solidFill>
                 <a:latin typeface="Courier New"/>
                 <a:ea typeface="Courier New"/>
@@ -32893,7 +32893,7 @@
           </a:solidFill>
           <a:ln w="12700">
             <a:solidFill>
-              <a:srgbClr val="2C3844"/>
+              <a:srgbClr val="4A1A5E"/>
             </a:solidFill>
             <a:prstDash val="solid"/>
           </a:ln>
@@ -32992,7 +32992,7 @@
           </a:solidFill>
           <a:ln w="12700">
             <a:solidFill>
-              <a:srgbClr val="2C3844"/>
+              <a:srgbClr val="4A1A5E"/>
             </a:solidFill>
             <a:prstDash val="solid"/>
           </a:ln>
@@ -33305,7 +33305,7 @@
           </a:solidFill>
           <a:ln w="12700">
             <a:solidFill>
-              <a:srgbClr val="2C3844"/>
+              <a:srgbClr val="4A1A5E"/>
             </a:solidFill>
             <a:prstDash val="solid"/>
           </a:ln>
@@ -33554,7 +33554,7 @@
           </a:solidFill>
           <a:ln w="12700">
             <a:solidFill>
-              <a:srgbClr val="2C3844"/>
+              <a:srgbClr val="4A1A5E"/>
             </a:solidFill>
             <a:prstDash val="solid"/>
           </a:ln>
@@ -33681,7 +33681,7 @@
           </a:solidFill>
           <a:ln w="12700">
             <a:solidFill>
-              <a:srgbClr val="2C3844"/>
+              <a:srgbClr val="4A1A5E"/>
             </a:solidFill>
             <a:prstDash val="solid"/>
           </a:ln>
@@ -33808,7 +33808,7 @@
           </a:solidFill>
           <a:ln w="12700">
             <a:solidFill>
-              <a:srgbClr val="2C3844"/>
+              <a:srgbClr val="4A1A5E"/>
             </a:solidFill>
             <a:prstDash val="solid"/>
           </a:ln>
@@ -33910,7 +33910,7 @@
           </a:solidFill>
           <a:ln w="12700">
             <a:solidFill>
-              <a:srgbClr val="2C3844"/>
+              <a:srgbClr val="4A1A5E"/>
             </a:solidFill>
             <a:prstDash val="solid"/>
           </a:ln>
@@ -34037,7 +34037,7 @@
           </a:solidFill>
           <a:ln w="12700">
             <a:solidFill>
-              <a:srgbClr val="2C3844"/>
+              <a:srgbClr val="4A1A5E"/>
             </a:solidFill>
             <a:prstDash val="solid"/>
           </a:ln>
@@ -34164,7 +34164,7 @@
           </a:solidFill>
           <a:ln w="12700">
             <a:solidFill>
-              <a:srgbClr val="2C3844"/>
+              <a:srgbClr val="4A1A5E"/>
             </a:solidFill>
             <a:prstDash val="solid"/>
           </a:ln>
@@ -34510,7 +34510,7 @@
           </a:solidFill>
           <a:ln w="12700">
             <a:solidFill>
-              <a:srgbClr val="2C3844"/>
+              <a:srgbClr val="4A1A5E"/>
             </a:solidFill>
             <a:prstDash val="solid"/>
           </a:ln>
@@ -34609,7 +34609,7 @@
           </a:solidFill>
           <a:ln w="12700">
             <a:solidFill>
-              <a:srgbClr val="2C3844"/>
+              <a:srgbClr val="4A1A5E"/>
             </a:solidFill>
             <a:prstDash val="solid"/>
           </a:ln>
@@ -34962,7 +34962,7 @@
           </a:solidFill>
           <a:ln w="12700">
             <a:solidFill>
-              <a:srgbClr val="2C3844"/>
+              <a:srgbClr val="4A1A5E"/>
             </a:solidFill>
             <a:prstDash val="solid"/>
           </a:ln>
@@ -35211,7 +35211,7 @@
           </a:solidFill>
           <a:ln w="12700">
             <a:solidFill>
-              <a:srgbClr val="2C3844"/>
+              <a:srgbClr val="4A1A5E"/>
             </a:solidFill>
             <a:prstDash val="solid"/>
           </a:ln>
@@ -35479,7 +35479,7 @@
             <a:r>
               <a:rPr lang="en-US" sz="3600" b="1" dirty="0">
                 <a:solidFill>
-                  <a:schemeClr val="accent4"/>
+                  <a:schemeClr val="bg2"/>
                 </a:solidFill>
               </a:rPr>
               <a:t>List 2 · Check it</a:t>
@@ -35515,7 +35515,7 @@
             <a:r>
               <a:rPr lang="en-US" sz="1200" dirty="0">
                 <a:solidFill>
-                  <a:schemeClr val="accent6"/>
+                  <a:schemeClr val="accent5"/>
                 </a:solidFill>
                 <a:latin typeface="Courier New" pitchFamily="34" charset="0"/>
                 <a:ea typeface="Courier New" pitchFamily="34" charset="-122"/>
@@ -35544,11 +35544,11 @@
             </a:avLst>
           </a:prstGeom>
           <a:solidFill>
-            <a:schemeClr val="accent4"/>
+            <a:schemeClr val="tx2"/>
           </a:solidFill>
           <a:ln w="12700">
             <a:solidFill>
-              <a:srgbClr val="2C3844"/>
+              <a:srgbClr val="4A1A5E"/>
             </a:solidFill>
             <a:prstDash val="solid"/>
           </a:ln>
@@ -35687,7 +35687,7 @@
             <a:r>
               <a:rPr lang="en-US" sz="2500" dirty="0">
                 <a:solidFill>
-                  <a:schemeClr val="accent4"/>
+                  <a:schemeClr val="bg2"/>
                 </a:solidFill>
               </a:rPr>
               <a:t>Serial runs only: parallel runs report false failures</a:t>
@@ -35705,7 +35705,7 @@
             <a:r>
               <a:rPr lang="en-US" sz="2500" dirty="0">
                 <a:solidFill>
-                  <a:schemeClr val="accent4"/>
+                  <a:schemeClr val="bg2"/>
                 </a:solidFill>
               </a:rPr>
               <a:t>Post any divergence as an issue</a:t>
@@ -35744,7 +35744,7 @@
             <a:lvl1pPr>
               <a:defRPr sz="1200">
                 <a:solidFill>
-                  <a:schemeClr val="accent6"/>
+                  <a:schemeClr val="accent5"/>
                 </a:solidFill>
                 <a:latin typeface="Courier New"/>
                 <a:ea typeface="Courier New"/>
@@ -35885,7 +35885,7 @@
           </a:solidFill>
           <a:ln w="12700">
             <a:solidFill>
-              <a:srgbClr val="2C3844"/>
+              <a:srgbClr val="4A1A5E"/>
             </a:solidFill>
             <a:prstDash val="solid"/>
           </a:ln>
@@ -36155,7 +36155,7 @@
             <a:r>
               <a:rPr lang="en-US" sz="3600" b="1" dirty="0">
                 <a:solidFill>
-                  <a:schemeClr val="accent4"/>
+                  <a:schemeClr val="bg2"/>
                 </a:solidFill>
               </a:rPr>
               <a:t>List 4 · Help</a:t>
@@ -36191,7 +36191,7 @@
             <a:r>
               <a:rPr lang="en-US" sz="1200" dirty="0">
                 <a:solidFill>
-                  <a:schemeClr val="accent6"/>
+                  <a:schemeClr val="accent5"/>
                 </a:solidFill>
                 <a:latin typeface="Courier New" pitchFamily="34" charset="0"/>
                 <a:ea typeface="Courier New" pitchFamily="34" charset="-122"/>
@@ -36220,11 +36220,11 @@
             </a:avLst>
           </a:prstGeom>
           <a:solidFill>
-            <a:srgbClr val="FFFFFF"/>
+            <a:schemeClr val="tx2"/>
           </a:solidFill>
           <a:ln w="12700">
             <a:solidFill>
-              <a:srgbClr val="D9D5C8"/>
+              <a:srgbClr val="4A1A5E"/>
             </a:solidFill>
             <a:prstDash val="solid"/>
           </a:ln>
@@ -36293,7 +36293,7 @@
             <a:r>
               <a:rPr lang="en-US" sz="2800" dirty="0">
                 <a:solidFill>
-                  <a:schemeClr val="accent4"/>
+                  <a:schemeClr val="bg2"/>
                 </a:solidFill>
               </a:rPr>
               <a:t>Use it.</a:t>
@@ -36319,11 +36319,11 @@
             </a:avLst>
           </a:prstGeom>
           <a:solidFill>
-            <a:srgbClr val="FFFFFF"/>
+            <a:schemeClr val="tx2"/>
           </a:solidFill>
           <a:ln w="12700">
             <a:solidFill>
-              <a:srgbClr val="D9D5C8"/>
+              <a:srgbClr val="4A1A5E"/>
             </a:solidFill>
             <a:prstDash val="solid"/>
           </a:ln>
@@ -36392,7 +36392,7 @@
             <a:r>
               <a:rPr lang="en-US" sz="2800" dirty="0">
                 <a:solidFill>
-                  <a:schemeClr val="accent4"/>
+                  <a:schemeClr val="bg2"/>
                 </a:solidFill>
               </a:rPr>
               <a:t>Check the parity.</a:t>
@@ -36418,11 +36418,11 @@
             </a:avLst>
           </a:prstGeom>
           <a:solidFill>
-            <a:srgbClr val="FFFFFF"/>
+            <a:schemeClr val="tx2"/>
           </a:solidFill>
           <a:ln w="12700">
             <a:solidFill>
-              <a:srgbClr val="D9D5C8"/>
+              <a:srgbClr val="4A1A5E"/>
             </a:solidFill>
             <a:prstDash val="solid"/>
           </a:ln>
@@ -36491,7 +36491,7 @@
             <a:r>
               <a:rPr lang="en-US" sz="2400" dirty="0">
                 <a:solidFill>
-                  <a:schemeClr val="accent4"/>
+                  <a:schemeClr val="bg2"/>
                 </a:solidFill>
               </a:rPr>
               <a:t>Review security, performance, energy and hardware.</a:t>
@@ -36517,11 +36517,11 @@
             </a:avLst>
           </a:prstGeom>
           <a:solidFill>
-            <a:srgbClr val="FFFFFF"/>
+            <a:schemeClr val="tx2"/>
           </a:solidFill>
           <a:ln w="12700">
             <a:solidFill>
-              <a:srgbClr val="D9D5C8"/>
+              <a:srgbClr val="4A1A5E"/>
             </a:solidFill>
             <a:prstDash val="solid"/>
           </a:ln>
@@ -36590,7 +36590,7 @@
             <a:r>
               <a:rPr lang="en-US" sz="2800" dirty="0">
                 <a:solidFill>
-                  <a:schemeClr val="accent4"/>
+                  <a:schemeClr val="bg2"/>
                 </a:solidFill>
               </a:rPr>
               <a:t>Open issues.</a:t>
@@ -36616,11 +36616,11 @@
             </a:avLst>
           </a:prstGeom>
           <a:solidFill>
-            <a:srgbClr val="FFFFFF"/>
+            <a:schemeClr val="tx2"/>
           </a:solidFill>
           <a:ln w="12700">
             <a:solidFill>
-              <a:srgbClr val="D9D5C8"/>
+              <a:srgbClr val="4A1A5E"/>
             </a:solidFill>
             <a:prstDash val="solid"/>
           </a:ln>
@@ -36689,7 +36689,7 @@
             <a:r>
               <a:rPr lang="en-US" sz="2800" dirty="0">
                 <a:solidFill>
-                  <a:schemeClr val="accent4"/>
+                  <a:schemeClr val="bg2"/>
                 </a:solidFill>
               </a:rPr>
               <a:t>Ask questions.</a:t>
@@ -36728,7 +36728,7 @@
             <a:lvl1pPr>
               <a:defRPr sz="1200">
                 <a:solidFill>
-                  <a:schemeClr val="accent6"/>
+                  <a:schemeClr val="accent5"/>
                 </a:solidFill>
                 <a:latin typeface="Courier New"/>
                 <a:ea typeface="Courier New"/>
@@ -36869,7 +36869,7 @@
           </a:solidFill>
           <a:ln w="12700">
             <a:solidFill>
-              <a:srgbClr val="2C3844"/>
+              <a:srgbClr val="4A1A5E"/>
             </a:solidFill>
             <a:prstDash val="solid"/>
           </a:ln>
@@ -37093,7 +37093,7 @@
             <a:r>
               <a:rPr lang="en-US" sz="6600" b="1" dirty="0">
                 <a:solidFill>
-                  <a:schemeClr val="accent4"/>
+                  <a:schemeClr val="bg2"/>
                 </a:solidFill>
                 <a:latin typeface="Cambria" pitchFamily="34" charset="0"/>
                 <a:ea typeface="Cambria" pitchFamily="34" charset="-122"/>
@@ -37204,7 +37204,7 @@
             <a:lvl1pPr>
               <a:defRPr sz="1200">
                 <a:solidFill>
-                  <a:schemeClr val="accent6"/>
+                  <a:schemeClr val="accent5"/>
                 </a:solidFill>
                 <a:latin typeface="Courier New"/>
                 <a:ea typeface="Courier New"/>
@@ -37276,7 +37276,7 @@
             <a:r>
               <a:rPr lang="en-US" sz="3600" b="1" dirty="0">
                 <a:solidFill>
-                  <a:schemeClr val="accent4"/>
+                  <a:schemeClr val="bg2"/>
                 </a:solidFill>
               </a:rPr>
               <a:t>Backup: open parity items</a:t>
@@ -37312,7 +37312,7 @@
             <a:r>
               <a:rPr lang="en-US" sz="1200" dirty="0">
                 <a:solidFill>
-                  <a:schemeClr val="accent6"/>
+                  <a:schemeClr val="accent5"/>
                 </a:solidFill>
                 <a:latin typeface="Courier New" pitchFamily="34" charset="0"/>
                 <a:ea typeface="Courier New" pitchFamily="34" charset="-122"/>
@@ -37362,7 +37362,7 @@
                       <a:r>
                         <a:rPr lang="en-US" sz="2100" b="1" dirty="0">
                           <a:solidFill>
-                            <a:schemeClr val="accent2"/>
+                            <a:schemeClr val="accent1"/>
                           </a:solidFill>
                         </a:rPr>
                         <a:t>Test</a:t>
@@ -37373,7 +37373,7 @@
                   <a:tcPr marL="91440" marR="91440" marT="45720" marB="45720" anchor="ctr">
                     <a:lnL w="12700" cap="flat" cmpd="sng" algn="ctr">
                       <a:solidFill>
-                        <a:srgbClr val="D9D5C8"/>
+                        <a:srgbClr val="4A1A5E"/>
                       </a:solidFill>
                       <a:prstDash val="solid"/>
                       <a:round/>
@@ -37382,7 +37382,7 @@
                     </a:lnL>
                     <a:lnR w="12700" cap="flat" cmpd="sng" algn="ctr">
                       <a:solidFill>
-                        <a:srgbClr val="D9D5C8"/>
+                        <a:srgbClr val="4A1A5E"/>
                       </a:solidFill>
                       <a:prstDash val="solid"/>
                       <a:round/>
@@ -37391,7 +37391,7 @@
                     </a:lnR>
                     <a:lnT w="12700" cap="flat" cmpd="sng" algn="ctr">
                       <a:solidFill>
-                        <a:srgbClr val="D9D5C8"/>
+                        <a:srgbClr val="4A1A5E"/>
                       </a:solidFill>
                       <a:prstDash val="solid"/>
                       <a:round/>
@@ -37400,7 +37400,7 @@
                     </a:lnT>
                     <a:lnB w="12700" cap="flat" cmpd="sng" algn="ctr">
                       <a:solidFill>
-                        <a:srgbClr val="D9D5C8"/>
+                        <a:srgbClr val="4A1A5E"/>
                       </a:solidFill>
                       <a:prstDash val="solid"/>
                       <a:round/>
@@ -37420,7 +37420,7 @@
                       <a:r>
                         <a:rPr lang="en-US" sz="2100" b="1" dirty="0">
                           <a:solidFill>
-                            <a:schemeClr val="accent2"/>
+                            <a:schemeClr val="accent1"/>
                           </a:solidFill>
                         </a:rPr>
                         <a:t>Why it is open</a:t>
@@ -37431,7 +37431,7 @@
                   <a:tcPr marL="91440" marR="91440" marT="45720" marB="45720" anchor="ctr">
                     <a:lnL w="12700" cap="flat" cmpd="sng" algn="ctr">
                       <a:solidFill>
-                        <a:srgbClr val="D9D5C8"/>
+                        <a:srgbClr val="4A1A5E"/>
                       </a:solidFill>
                       <a:prstDash val="solid"/>
                       <a:round/>
@@ -37440,7 +37440,7 @@
                     </a:lnL>
                     <a:lnR w="12700" cap="flat" cmpd="sng" algn="ctr">
                       <a:solidFill>
-                        <a:srgbClr val="D9D5C8"/>
+                        <a:srgbClr val="4A1A5E"/>
                       </a:solidFill>
                       <a:prstDash val="solid"/>
                       <a:round/>
@@ -37449,7 +37449,7 @@
                     </a:lnR>
                     <a:lnT w="12700" cap="flat" cmpd="sng" algn="ctr">
                       <a:solidFill>
-                        <a:srgbClr val="D9D5C8"/>
+                        <a:srgbClr val="4A1A5E"/>
                       </a:solidFill>
                       <a:prstDash val="solid"/>
                       <a:round/>
@@ -37458,7 +37458,7 @@
                     </a:lnT>
                     <a:lnB w="12700" cap="flat" cmpd="sng" algn="ctr">
                       <a:solidFill>
-                        <a:srgbClr val="D9D5C8"/>
+                        <a:srgbClr val="4A1A5E"/>
                       </a:solidFill>
                       <a:prstDash val="solid"/>
                       <a:round/>
@@ -37480,7 +37480,7 @@
                       <a:r>
                         <a:rPr lang="en-US" sz="2100" dirty="0">
                           <a:solidFill>
-                            <a:schemeClr val="accent4"/>
+                            <a:schemeClr val="bg2"/>
                           </a:solidFill>
                         </a:rPr>
                         <a:t>nul_quoting_format</a:t>
@@ -37491,7 +37491,7 @@
                   <a:tcPr marL="91440" marR="91440" marT="45720" marB="45720" anchor="ctr">
                     <a:lnL w="12700" cap="flat" cmpd="sng" algn="ctr">
                       <a:solidFill>
-                        <a:srgbClr val="D9D5C8"/>
+                        <a:srgbClr val="4A1A5E"/>
                       </a:solidFill>
                       <a:prstDash val="solid"/>
                       <a:round/>
@@ -37500,7 +37500,7 @@
                     </a:lnL>
                     <a:lnR w="12700" cap="flat" cmpd="sng" algn="ctr">
                       <a:solidFill>
-                        <a:srgbClr val="D9D5C8"/>
+                        <a:srgbClr val="4A1A5E"/>
                       </a:solidFill>
                       <a:prstDash val="solid"/>
                       <a:round/>
@@ -37509,7 +37509,7 @@
                     </a:lnR>
                     <a:lnT w="12700" cap="flat" cmpd="sng" algn="ctr">
                       <a:solidFill>
-                        <a:srgbClr val="D9D5C8"/>
+                        <a:srgbClr val="4A1A5E"/>
                       </a:solidFill>
                       <a:prstDash val="solid"/>
                       <a:round/>
@@ -37518,7 +37518,7 @@
                     </a:lnT>
                     <a:lnB w="12700" cap="flat" cmpd="sng" algn="ctr">
                       <a:solidFill>
-                        <a:srgbClr val="D9D5C8"/>
+                        <a:srgbClr val="4A1A5E"/>
                       </a:solidFill>
                       <a:prstDash val="solid"/>
                       <a:round/>
@@ -37538,7 +37538,7 @@
                       <a:r>
                         <a:rPr lang="en-US" sz="2100" dirty="0">
                           <a:solidFill>
-                            <a:schemeClr val="accent4"/>
+                            <a:schemeClr val="bg2"/>
                           </a:solidFill>
                         </a:rPr>
                         <a:t>Structural: C metafies NUL, Rust String holds a real NUL</a:t>
@@ -37549,7 +37549,7 @@
                   <a:tcPr marL="91440" marR="91440" marT="45720" marB="45720" anchor="ctr">
                     <a:lnL w="12700" cap="flat" cmpd="sng" algn="ctr">
                       <a:solidFill>
-                        <a:srgbClr val="D9D5C8"/>
+                        <a:srgbClr val="4A1A5E"/>
                       </a:solidFill>
                       <a:prstDash val="solid"/>
                       <a:round/>
@@ -37558,7 +37558,7 @@
                     </a:lnL>
                     <a:lnR w="12700" cap="flat" cmpd="sng" algn="ctr">
                       <a:solidFill>
-                        <a:srgbClr val="D9D5C8"/>
+                        <a:srgbClr val="4A1A5E"/>
                       </a:solidFill>
                       <a:prstDash val="solid"/>
                       <a:round/>
@@ -37567,7 +37567,7 @@
                     </a:lnR>
                     <a:lnT w="12700" cap="flat" cmpd="sng" algn="ctr">
                       <a:solidFill>
-                        <a:srgbClr val="D9D5C8"/>
+                        <a:srgbClr val="4A1A5E"/>
                       </a:solidFill>
                       <a:prstDash val="solid"/>
                       <a:round/>
@@ -37576,7 +37576,7 @@
                     </a:lnT>
                     <a:lnB w="12700" cap="flat" cmpd="sng" algn="ctr">
                       <a:solidFill>
-                        <a:srgbClr val="D9D5C8"/>
+                        <a:srgbClr val="4A1A5E"/>
                       </a:solidFill>
                       <a:prstDash val="solid"/>
                       <a:round/>
@@ -37598,7 +37598,7 @@
                       <a:r>
                         <a:rPr lang="en-US" sz="2100" dirty="0">
                           <a:solidFill>
-                            <a:schemeClr val="accent4"/>
+                            <a:schemeClr val="bg2"/>
                           </a:solidFill>
                         </a:rPr>
                         <a:t>zmodload -R complete</a:t>
@@ -37609,7 +37609,7 @@
                   <a:tcPr marL="91440" marR="91440" marT="45720" marB="45720" anchor="ctr">
                     <a:lnL w="12700" cap="flat" cmpd="sng" algn="ctr">
                       <a:solidFill>
-                        <a:srgbClr val="D9D5C8"/>
+                        <a:srgbClr val="4A1A5E"/>
                       </a:solidFill>
                       <a:prstDash val="solid"/>
                       <a:round/>
@@ -37618,7 +37618,7 @@
                     </a:lnL>
                     <a:lnR w="12700" cap="flat" cmpd="sng" algn="ctr">
                       <a:solidFill>
-                        <a:srgbClr val="D9D5C8"/>
+                        <a:srgbClr val="4A1A5E"/>
                       </a:solidFill>
                       <a:prstDash val="solid"/>
                       <a:round/>
@@ -37627,7 +37627,7 @@
                     </a:lnR>
                     <a:lnT w="12700" cap="flat" cmpd="sng" algn="ctr">
                       <a:solidFill>
-                        <a:srgbClr val="D9D5C8"/>
+                        <a:srgbClr val="4A1A5E"/>
                       </a:solidFill>
                       <a:prstDash val="solid"/>
                       <a:round/>
@@ -37636,7 +37636,7 @@
                     </a:lnT>
                     <a:lnB w="12700" cap="flat" cmpd="sng" algn="ctr">
                       <a:solidFill>
-                        <a:srgbClr val="D9D5C8"/>
+                        <a:srgbClr val="4A1A5E"/>
                       </a:solidFill>
                       <a:prstDash val="solid"/>
                       <a:round/>
@@ -37656,7 +37656,7 @@
                       <a:r>
                         <a:rPr lang="en-US" sz="2100" dirty="0">
                           <a:solidFill>
-                            <a:schemeClr val="accent4"/>
+                            <a:schemeClr val="bg2"/>
                           </a:solidFill>
                         </a:rPr>
                         <a:t>Not a gap: -R loads native Rust plugins by design</a:t>
@@ -37667,7 +37667,7 @@
                   <a:tcPr marL="91440" marR="91440" marT="45720" marB="45720" anchor="ctr">
                     <a:lnL w="12700" cap="flat" cmpd="sng" algn="ctr">
                       <a:solidFill>
-                        <a:srgbClr val="D9D5C8"/>
+                        <a:srgbClr val="4A1A5E"/>
                       </a:solidFill>
                       <a:prstDash val="solid"/>
                       <a:round/>
@@ -37676,7 +37676,7 @@
                     </a:lnL>
                     <a:lnR w="12700" cap="flat" cmpd="sng" algn="ctr">
                       <a:solidFill>
-                        <a:srgbClr val="D9D5C8"/>
+                        <a:srgbClr val="4A1A5E"/>
                       </a:solidFill>
                       <a:prstDash val="solid"/>
                       <a:round/>
@@ -37685,7 +37685,7 @@
                     </a:lnR>
                     <a:lnT w="12700" cap="flat" cmpd="sng" algn="ctr">
                       <a:solidFill>
-                        <a:srgbClr val="D9D5C8"/>
+                        <a:srgbClr val="4A1A5E"/>
                       </a:solidFill>
                       <a:prstDash val="solid"/>
                       <a:round/>
@@ -37694,7 +37694,7 @@
                     </a:lnT>
                     <a:lnB w="12700" cap="flat" cmpd="sng" algn="ctr">
                       <a:solidFill>
-                        <a:srgbClr val="D9D5C8"/>
+                        <a:srgbClr val="4A1A5E"/>
                       </a:solidFill>
                       <a:prstDash val="solid"/>
                       <a:round/>
@@ -37716,7 +37716,7 @@
                       <a:r>
                         <a:rPr lang="en-US" sz="2100" dirty="0">
                           <a:solidFill>
-                            <a:schemeClr val="accent4"/>
+                            <a:schemeClr val="bg2"/>
                           </a:solidFill>
                         </a:rPr>
                         <a:t>config_state_parity (aliases)</a:t>
@@ -37727,7 +37727,7 @@
                   <a:tcPr marL="91440" marR="91440" marT="45720" marB="45720" anchor="ctr">
                     <a:lnL w="12700" cap="flat" cmpd="sng" algn="ctr">
                       <a:solidFill>
-                        <a:srgbClr val="D9D5C8"/>
+                        <a:srgbClr val="4A1A5E"/>
                       </a:solidFill>
                       <a:prstDash val="solid"/>
                       <a:round/>
@@ -37736,7 +37736,7 @@
                     </a:lnL>
                     <a:lnR w="12700" cap="flat" cmpd="sng" algn="ctr">
                       <a:solidFill>
-                        <a:srgbClr val="D9D5C8"/>
+                        <a:srgbClr val="4A1A5E"/>
                       </a:solidFill>
                       <a:prstDash val="solid"/>
                       <a:round/>
@@ -37745,7 +37745,7 @@
                     </a:lnR>
                     <a:lnT w="12700" cap="flat" cmpd="sng" algn="ctr">
                       <a:solidFill>
-                        <a:srgbClr val="D9D5C8"/>
+                        <a:srgbClr val="4A1A5E"/>
                       </a:solidFill>
                       <a:prstDash val="solid"/>
                       <a:round/>
@@ -37754,7 +37754,7 @@
                     </a:lnT>
                     <a:lnB w="12700" cap="flat" cmpd="sng" algn="ctr">
                       <a:solidFill>
-                        <a:srgbClr val="D9D5C8"/>
+                        <a:srgbClr val="4A1A5E"/>
                       </a:solidFill>
                       <a:prstDash val="solid"/>
                       <a:round/>
@@ -37774,7 +37774,7 @@
                       <a:r>
                         <a:rPr lang="en-US" sz="2100" dirty="0">
                           <a:solidFill>
-                            <a:schemeClr val="accent4"/>
+                            <a:schemeClr val="bg2"/>
                           </a:solidFill>
                         </a:rPr>
                         <a:t>RC_QUOTES '' in alias bodies; target behaviour undecided</a:t>
@@ -37785,7 +37785,7 @@
                   <a:tcPr marL="91440" marR="91440" marT="45720" marB="45720" anchor="ctr">
                     <a:lnL w="12700" cap="flat" cmpd="sng" algn="ctr">
                       <a:solidFill>
-                        <a:srgbClr val="D9D5C8"/>
+                        <a:srgbClr val="4A1A5E"/>
                       </a:solidFill>
                       <a:prstDash val="solid"/>
                       <a:round/>
@@ -37794,7 +37794,7 @@
                     </a:lnL>
                     <a:lnR w="12700" cap="flat" cmpd="sng" algn="ctr">
                       <a:solidFill>
-                        <a:srgbClr val="D9D5C8"/>
+                        <a:srgbClr val="4A1A5E"/>
                       </a:solidFill>
                       <a:prstDash val="solid"/>
                       <a:round/>
@@ -37803,7 +37803,7 @@
                     </a:lnR>
                     <a:lnT w="12700" cap="flat" cmpd="sng" algn="ctr">
                       <a:solidFill>
-                        <a:srgbClr val="D9D5C8"/>
+                        <a:srgbClr val="4A1A5E"/>
                       </a:solidFill>
                       <a:prstDash val="solid"/>
                       <a:round/>
@@ -37812,7 +37812,7 @@
                     </a:lnT>
                     <a:lnB w="12700" cap="flat" cmpd="sng" algn="ctr">
                       <a:solidFill>
-                        <a:srgbClr val="D9D5C8"/>
+                        <a:srgbClr val="4A1A5E"/>
                       </a:solidFill>
                       <a:prstDash val="solid"/>
                       <a:round/>
@@ -37834,7 +37834,7 @@
                       <a:r>
                         <a:rPr lang="en-US" sz="2100" dirty="0">
                           <a:solidFill>
-                            <a:schemeClr val="accent4"/>
+                            <a:schemeClr val="bg2"/>
                           </a:solidFill>
                         </a:rPr>
                         <a:t>bulk_vw_fc_row_015, times_builtin_summary</a:t>
@@ -37845,7 +37845,7 @@
                   <a:tcPr marL="91440" marR="91440" marT="45720" marB="45720" anchor="ctr">
                     <a:lnL w="12700" cap="flat" cmpd="sng" algn="ctr">
                       <a:solidFill>
-                        <a:srgbClr val="D9D5C8"/>
+                        <a:srgbClr val="4A1A5E"/>
                       </a:solidFill>
                       <a:prstDash val="solid"/>
                       <a:round/>
@@ -37854,7 +37854,7 @@
                     </a:lnL>
                     <a:lnR w="12700" cap="flat" cmpd="sng" algn="ctr">
                       <a:solidFill>
-                        <a:srgbClr val="D9D5C8"/>
+                        <a:srgbClr val="4A1A5E"/>
                       </a:solidFill>
                       <a:prstDash val="solid"/>
                       <a:round/>
@@ -37863,7 +37863,7 @@
                     </a:lnR>
                     <a:lnT w="12700" cap="flat" cmpd="sng" algn="ctr">
                       <a:solidFill>
-                        <a:srgbClr val="D9D5C8"/>
+                        <a:srgbClr val="4A1A5E"/>
                       </a:solidFill>
                       <a:prstDash val="solid"/>
                       <a:round/>
@@ -37872,7 +37872,7 @@
                     </a:lnT>
                     <a:lnB w="12700" cap="flat" cmpd="sng" algn="ctr">
                       <a:solidFill>
-                        <a:srgbClr val="D9D5C8"/>
+                        <a:srgbClr val="4A1A5E"/>
                       </a:solidFill>
                       <a:prstDash val="solid"/>
                       <a:round/>
@@ -37892,7 +37892,7 @@
                       <a:r>
                         <a:rPr lang="en-US" sz="2100" dirty="0">
                           <a:solidFill>
-                            <a:schemeClr val="accent4"/>
+                            <a:schemeClr val="bg2"/>
                           </a:solidFill>
                         </a:rPr>
                         <a:t>Load artifacts; pass serially</a:t>
@@ -37903,7 +37903,7 @@
                   <a:tcPr marL="91440" marR="91440" marT="45720" marB="45720" anchor="ctr">
                     <a:lnL w="12700" cap="flat" cmpd="sng" algn="ctr">
                       <a:solidFill>
-                        <a:srgbClr val="D9D5C8"/>
+                        <a:srgbClr val="4A1A5E"/>
                       </a:solidFill>
                       <a:prstDash val="solid"/>
                       <a:round/>
@@ -37912,7 +37912,7 @@
                     </a:lnL>
                     <a:lnR w="12700" cap="flat" cmpd="sng" algn="ctr">
                       <a:solidFill>
-                        <a:srgbClr val="D9D5C8"/>
+                        <a:srgbClr val="4A1A5E"/>
                       </a:solidFill>
                       <a:prstDash val="solid"/>
                       <a:round/>
@@ -37921,7 +37921,7 @@
                     </a:lnR>
                     <a:lnT w="12700" cap="flat" cmpd="sng" algn="ctr">
                       <a:solidFill>
-                        <a:srgbClr val="D9D5C8"/>
+                        <a:srgbClr val="4A1A5E"/>
                       </a:solidFill>
                       <a:prstDash val="solid"/>
                       <a:round/>
@@ -37930,7 +37930,7 @@
                     </a:lnT>
                     <a:lnB w="12700" cap="flat" cmpd="sng" algn="ctr">
                       <a:solidFill>
-                        <a:srgbClr val="D9D5C8"/>
+                        <a:srgbClr val="4A1A5E"/>
                       </a:solidFill>
                       <a:prstDash val="solid"/>
                       <a:round/>
@@ -37974,7 +37974,7 @@
             <a:lvl1pPr>
               <a:defRPr sz="1200">
                 <a:solidFill>
-                  <a:schemeClr val="accent6"/>
+                  <a:schemeClr val="accent5"/>
                 </a:solidFill>
                 <a:latin typeface="Courier New"/>
                 <a:ea typeface="Courier New"/>
@@ -38115,7 +38115,7 @@
           </a:solidFill>
           <a:ln w="12700">
             <a:solidFill>
-              <a:srgbClr val="2C3844"/>
+              <a:srgbClr val="4A1A5E"/>
             </a:solidFill>
             <a:prstDash val="solid"/>
           </a:ln>
@@ -38257,7 +38257,7 @@
           </a:solidFill>
           <a:ln w="12700">
             <a:solidFill>
-              <a:srgbClr val="2C3844"/>
+              <a:srgbClr val="4A1A5E"/>
             </a:solidFill>
             <a:prstDash val="solid"/>
           </a:ln>
@@ -38480,7 +38480,7 @@
             <a:r>
               <a:rPr lang="en-US" sz="3600" b="1" dirty="0">
                 <a:solidFill>
-                  <a:schemeClr val="accent4"/>
+                  <a:schemeClr val="bg2"/>
                 </a:solidFill>
               </a:rPr>
               <a:t>Help wanted</a:t>
@@ -38516,7 +38516,7 @@
             <a:r>
               <a:rPr lang="en-US" sz="1200" dirty="0">
                 <a:solidFill>
-                  <a:schemeClr val="accent6"/>
+                  <a:schemeClr val="accent5"/>
                 </a:solidFill>
                 <a:latin typeface="Courier New" pitchFamily="34" charset="0"/>
                 <a:ea typeface="Courier New" pitchFamily="34" charset="-122"/>
@@ -38545,11 +38545,11 @@
             </a:avLst>
           </a:prstGeom>
           <a:solidFill>
-            <a:srgbClr val="FFFFFF"/>
+            <a:schemeClr val="tx2"/>
           </a:solidFill>
           <a:ln w="12700">
             <a:solidFill>
-              <a:srgbClr val="D9D5C8"/>
+              <a:srgbClr val="4A1A5E"/>
             </a:solidFill>
             <a:prstDash val="solid"/>
           </a:ln>
@@ -38618,7 +38618,7 @@
             <a:r>
               <a:rPr lang="en-US" sz="2800" dirty="0">
                 <a:solidFill>
-                  <a:schemeClr val="accent4"/>
+                  <a:schemeClr val="bg2"/>
                 </a:solidFill>
               </a:rPr>
               <a:t>Start using it.</a:t>
@@ -38644,11 +38644,11 @@
             </a:avLst>
           </a:prstGeom>
           <a:solidFill>
-            <a:srgbClr val="FFFFFF"/>
+            <a:schemeClr val="tx2"/>
           </a:solidFill>
           <a:ln w="12700">
             <a:solidFill>
-              <a:srgbClr val="D9D5C8"/>
+              <a:srgbClr val="4A1A5E"/>
             </a:solidFill>
             <a:prstDash val="solid"/>
           </a:ln>
@@ -38717,7 +38717,7 @@
             <a:r>
               <a:rPr lang="en-US" sz="2800" dirty="0">
                 <a:solidFill>
-                  <a:schemeClr val="accent4"/>
+                  <a:schemeClr val="bg2"/>
                 </a:solidFill>
               </a:rPr>
               <a:t>Sanity check the code parity.</a:t>
@@ -38743,11 +38743,11 @@
             </a:avLst>
           </a:prstGeom>
           <a:solidFill>
-            <a:srgbClr val="FFFFFF"/>
+            <a:schemeClr val="tx2"/>
           </a:solidFill>
           <a:ln w="12700">
             <a:solidFill>
-              <a:srgbClr val="D9D5C8"/>
+              <a:srgbClr val="4A1A5E"/>
             </a:solidFill>
             <a:prstDash val="solid"/>
           </a:ln>
@@ -38816,7 +38816,7 @@
             <a:r>
               <a:rPr lang="en-US" sz="2000" dirty="0">
                 <a:solidFill>
-                  <a:schemeClr val="accent4"/>
+                  <a:schemeClr val="bg2"/>
                 </a:solidFill>
               </a:rPr>
               <a:t>Review security, performance, energy use and hardware needs.</a:t>
@@ -38842,11 +38842,11 @@
             </a:avLst>
           </a:prstGeom>
           <a:solidFill>
-            <a:srgbClr val="FFFFFF"/>
+            <a:schemeClr val="tx2"/>
           </a:solidFill>
           <a:ln w="12700">
             <a:solidFill>
-              <a:srgbClr val="D9D5C8"/>
+              <a:srgbClr val="4A1A5E"/>
             </a:solidFill>
             <a:prstDash val="solid"/>
           </a:ln>
@@ -38915,7 +38915,7 @@
             <a:r>
               <a:rPr lang="en-US" sz="2800" dirty="0">
                 <a:solidFill>
-                  <a:schemeClr val="accent4"/>
+                  <a:schemeClr val="bg2"/>
                 </a:solidFill>
               </a:rPr>
               <a:t>Open issues.</a:t>
@@ -38941,11 +38941,11 @@
             </a:avLst>
           </a:prstGeom>
           <a:solidFill>
-            <a:srgbClr val="FFFFFF"/>
+            <a:schemeClr val="tx2"/>
           </a:solidFill>
           <a:ln w="12700">
             <a:solidFill>
-              <a:srgbClr val="D9D5C8"/>
+              <a:srgbClr val="4A1A5E"/>
             </a:solidFill>
             <a:prstDash val="solid"/>
           </a:ln>
@@ -39014,7 +39014,7 @@
             <a:r>
               <a:rPr lang="en-US" sz="2800" dirty="0">
                 <a:solidFill>
-                  <a:schemeClr val="accent4"/>
+                  <a:schemeClr val="bg2"/>
                 </a:solidFill>
               </a:rPr>
               <a:t>Get involved and ask questions.</a:t>
@@ -39053,7 +39053,7 @@
             <a:lvl1pPr>
               <a:defRPr sz="1200">
                 <a:solidFill>
-                  <a:schemeClr val="accent6"/>
+                  <a:schemeClr val="accent5"/>
                 </a:solidFill>
                 <a:latin typeface="Courier New"/>
                 <a:ea typeface="Courier New"/>
@@ -39223,7 +39223,7 @@
                   <a:tcPr marL="91440" marR="91440" marT="45720" marB="45720" anchor="ctr">
                     <a:lnL w="12700" cap="flat" cmpd="sng" algn="ctr">
                       <a:solidFill>
-                        <a:srgbClr val="2C3844"/>
+                        <a:srgbClr val="4A1A5E"/>
                       </a:solidFill>
                       <a:prstDash val="solid"/>
                       <a:round/>
@@ -39232,7 +39232,7 @@
                     </a:lnL>
                     <a:lnR w="12700" cap="flat" cmpd="sng" algn="ctr">
                       <a:solidFill>
-                        <a:srgbClr val="2C3844"/>
+                        <a:srgbClr val="4A1A5E"/>
                       </a:solidFill>
                       <a:prstDash val="solid"/>
                       <a:round/>
@@ -39241,7 +39241,7 @@
                     </a:lnR>
                     <a:lnT w="12700" cap="flat" cmpd="sng" algn="ctr">
                       <a:solidFill>
-                        <a:srgbClr val="2C3844"/>
+                        <a:srgbClr val="4A1A5E"/>
                       </a:solidFill>
                       <a:prstDash val="solid"/>
                       <a:round/>
@@ -39250,7 +39250,7 @@
                     </a:lnT>
                     <a:lnB w="12700" cap="flat" cmpd="sng" algn="ctr">
                       <a:solidFill>
-                        <a:srgbClr val="2C3844"/>
+                        <a:srgbClr val="4A1A5E"/>
                       </a:solidFill>
                       <a:prstDash val="solid"/>
                       <a:round/>
@@ -39281,7 +39281,7 @@
                   <a:tcPr marL="91440" marR="91440" marT="45720" marB="45720" anchor="ctr">
                     <a:lnL w="12700" cap="flat" cmpd="sng" algn="ctr">
                       <a:solidFill>
-                        <a:srgbClr val="2C3844"/>
+                        <a:srgbClr val="4A1A5E"/>
                       </a:solidFill>
                       <a:prstDash val="solid"/>
                       <a:round/>
@@ -39290,7 +39290,7 @@
                     </a:lnL>
                     <a:lnR w="12700" cap="flat" cmpd="sng" algn="ctr">
                       <a:solidFill>
-                        <a:srgbClr val="2C3844"/>
+                        <a:srgbClr val="4A1A5E"/>
                       </a:solidFill>
                       <a:prstDash val="solid"/>
                       <a:round/>
@@ -39299,7 +39299,7 @@
                     </a:lnR>
                     <a:lnT w="12700" cap="flat" cmpd="sng" algn="ctr">
                       <a:solidFill>
-                        <a:srgbClr val="2C3844"/>
+                        <a:srgbClr val="4A1A5E"/>
                       </a:solidFill>
                       <a:prstDash val="solid"/>
                       <a:round/>
@@ -39308,7 +39308,7 @@
                     </a:lnT>
                     <a:lnB w="12700" cap="flat" cmpd="sng" algn="ctr">
                       <a:solidFill>
-                        <a:srgbClr val="2C3844"/>
+                        <a:srgbClr val="4A1A5E"/>
                       </a:solidFill>
                       <a:prstDash val="solid"/>
                       <a:round/>
@@ -39339,7 +39339,7 @@
                   <a:tcPr marL="91440" marR="91440" marT="45720" marB="45720" anchor="ctr">
                     <a:lnL w="12700" cap="flat" cmpd="sng" algn="ctr">
                       <a:solidFill>
-                        <a:srgbClr val="2C3844"/>
+                        <a:srgbClr val="4A1A5E"/>
                       </a:solidFill>
                       <a:prstDash val="solid"/>
                       <a:round/>
@@ -39348,7 +39348,7 @@
                     </a:lnL>
                     <a:lnR w="12700" cap="flat" cmpd="sng" algn="ctr">
                       <a:solidFill>
-                        <a:srgbClr val="2C3844"/>
+                        <a:srgbClr val="4A1A5E"/>
                       </a:solidFill>
                       <a:prstDash val="solid"/>
                       <a:round/>
@@ -39357,7 +39357,7 @@
                     </a:lnR>
                     <a:lnT w="12700" cap="flat" cmpd="sng" algn="ctr">
                       <a:solidFill>
-                        <a:srgbClr val="2C3844"/>
+                        <a:srgbClr val="4A1A5E"/>
                       </a:solidFill>
                       <a:prstDash val="solid"/>
                       <a:round/>
@@ -39366,7 +39366,7 @@
                     </a:lnT>
                     <a:lnB w="12700" cap="flat" cmpd="sng" algn="ctr">
                       <a:solidFill>
-                        <a:srgbClr val="2C3844"/>
+                        <a:srgbClr val="4A1A5E"/>
                       </a:solidFill>
                       <a:prstDash val="solid"/>
                       <a:round/>
@@ -39399,7 +39399,7 @@
                   <a:tcPr marL="91440" marR="91440" marT="45720" marB="45720" anchor="ctr">
                     <a:lnL w="12700" cap="flat" cmpd="sng" algn="ctr">
                       <a:solidFill>
-                        <a:srgbClr val="2C3844"/>
+                        <a:srgbClr val="4A1A5E"/>
                       </a:solidFill>
                       <a:prstDash val="solid"/>
                       <a:round/>
@@ -39408,7 +39408,7 @@
                     </a:lnL>
                     <a:lnR w="12700" cap="flat" cmpd="sng" algn="ctr">
                       <a:solidFill>
-                        <a:srgbClr val="2C3844"/>
+                        <a:srgbClr val="4A1A5E"/>
                       </a:solidFill>
                       <a:prstDash val="solid"/>
                       <a:round/>
@@ -39417,7 +39417,7 @@
                     </a:lnR>
                     <a:lnT w="12700" cap="flat" cmpd="sng" algn="ctr">
                       <a:solidFill>
-                        <a:srgbClr val="2C3844"/>
+                        <a:srgbClr val="4A1A5E"/>
                       </a:solidFill>
                       <a:prstDash val="solid"/>
                       <a:round/>
@@ -39426,7 +39426,7 @@
                     </a:lnT>
                     <a:lnB w="12700" cap="flat" cmpd="sng" algn="ctr">
                       <a:solidFill>
-                        <a:srgbClr val="2C3844"/>
+                        <a:srgbClr val="4A1A5E"/>
                       </a:solidFill>
                       <a:prstDash val="solid"/>
                       <a:round/>
@@ -39457,7 +39457,7 @@
                   <a:tcPr marL="91440" marR="91440" marT="45720" marB="45720" anchor="ctr">
                     <a:lnL w="12700" cap="flat" cmpd="sng" algn="ctr">
                       <a:solidFill>
-                        <a:srgbClr val="2C3844"/>
+                        <a:srgbClr val="4A1A5E"/>
                       </a:solidFill>
                       <a:prstDash val="solid"/>
                       <a:round/>
@@ -39466,7 +39466,7 @@
                     </a:lnL>
                     <a:lnR w="12700" cap="flat" cmpd="sng" algn="ctr">
                       <a:solidFill>
-                        <a:srgbClr val="2C3844"/>
+                        <a:srgbClr val="4A1A5E"/>
                       </a:solidFill>
                       <a:prstDash val="solid"/>
                       <a:round/>
@@ -39475,7 +39475,7 @@
                     </a:lnR>
                     <a:lnT w="12700" cap="flat" cmpd="sng" algn="ctr">
                       <a:solidFill>
-                        <a:srgbClr val="2C3844"/>
+                        <a:srgbClr val="4A1A5E"/>
                       </a:solidFill>
                       <a:prstDash val="solid"/>
                       <a:round/>
@@ -39484,7 +39484,7 @@
                     </a:lnT>
                     <a:lnB w="12700" cap="flat" cmpd="sng" algn="ctr">
                       <a:solidFill>
-                        <a:srgbClr val="2C3844"/>
+                        <a:srgbClr val="4A1A5E"/>
                       </a:solidFill>
                       <a:prstDash val="solid"/>
                       <a:round/>
@@ -39515,7 +39515,7 @@
                   <a:tcPr marL="91440" marR="91440" marT="45720" marB="45720" anchor="ctr">
                     <a:lnL w="12700" cap="flat" cmpd="sng" algn="ctr">
                       <a:solidFill>
-                        <a:srgbClr val="2C3844"/>
+                        <a:srgbClr val="4A1A5E"/>
                       </a:solidFill>
                       <a:prstDash val="solid"/>
                       <a:round/>
@@ -39524,7 +39524,7 @@
                     </a:lnL>
                     <a:lnR w="12700" cap="flat" cmpd="sng" algn="ctr">
                       <a:solidFill>
-                        <a:srgbClr val="2C3844"/>
+                        <a:srgbClr val="4A1A5E"/>
                       </a:solidFill>
                       <a:prstDash val="solid"/>
                       <a:round/>
@@ -39533,7 +39533,7 @@
                     </a:lnR>
                     <a:lnT w="12700" cap="flat" cmpd="sng" algn="ctr">
                       <a:solidFill>
-                        <a:srgbClr val="2C3844"/>
+                        <a:srgbClr val="4A1A5E"/>
                       </a:solidFill>
                       <a:prstDash val="solid"/>
                       <a:round/>
@@ -39542,7 +39542,7 @@
                     </a:lnT>
                     <a:lnB w="12700" cap="flat" cmpd="sng" algn="ctr">
                       <a:solidFill>
-                        <a:srgbClr val="2C3844"/>
+                        <a:srgbClr val="4A1A5E"/>
                       </a:solidFill>
                       <a:prstDash val="solid"/>
                       <a:round/>
@@ -39575,7 +39575,7 @@
                   <a:tcPr marL="91440" marR="91440" marT="45720" marB="45720" anchor="ctr">
                     <a:lnL w="12700" cap="flat" cmpd="sng" algn="ctr">
                       <a:solidFill>
-                        <a:srgbClr val="2C3844"/>
+                        <a:srgbClr val="4A1A5E"/>
                       </a:solidFill>
                       <a:prstDash val="solid"/>
                       <a:round/>
@@ -39584,7 +39584,7 @@
                     </a:lnL>
                     <a:lnR w="12700" cap="flat" cmpd="sng" algn="ctr">
                       <a:solidFill>
-                        <a:srgbClr val="2C3844"/>
+                        <a:srgbClr val="4A1A5E"/>
                       </a:solidFill>
                       <a:prstDash val="solid"/>
                       <a:round/>
@@ -39593,7 +39593,7 @@
                     </a:lnR>
                     <a:lnT w="12700" cap="flat" cmpd="sng" algn="ctr">
                       <a:solidFill>
-                        <a:srgbClr val="2C3844"/>
+                        <a:srgbClr val="4A1A5E"/>
                       </a:solidFill>
                       <a:prstDash val="solid"/>
                       <a:round/>
@@ -39602,7 +39602,7 @@
                     </a:lnT>
                     <a:lnB w="12700" cap="flat" cmpd="sng" algn="ctr">
                       <a:solidFill>
-                        <a:srgbClr val="2C3844"/>
+                        <a:srgbClr val="4A1A5E"/>
                       </a:solidFill>
                       <a:prstDash val="solid"/>
                       <a:round/>
@@ -39633,7 +39633,7 @@
                   <a:tcPr marL="91440" marR="91440" marT="45720" marB="45720" anchor="ctr">
                     <a:lnL w="12700" cap="flat" cmpd="sng" algn="ctr">
                       <a:solidFill>
-                        <a:srgbClr val="2C3844"/>
+                        <a:srgbClr val="4A1A5E"/>
                       </a:solidFill>
                       <a:prstDash val="solid"/>
                       <a:round/>
@@ -39642,7 +39642,7 @@
                     </a:lnL>
                     <a:lnR w="12700" cap="flat" cmpd="sng" algn="ctr">
                       <a:solidFill>
-                        <a:srgbClr val="2C3844"/>
+                        <a:srgbClr val="4A1A5E"/>
                       </a:solidFill>
                       <a:prstDash val="solid"/>
                       <a:round/>
@@ -39651,7 +39651,7 @@
                     </a:lnR>
                     <a:lnT w="12700" cap="flat" cmpd="sng" algn="ctr">
                       <a:solidFill>
-                        <a:srgbClr val="2C3844"/>
+                        <a:srgbClr val="4A1A5E"/>
                       </a:solidFill>
                       <a:prstDash val="solid"/>
                       <a:round/>
@@ -39660,7 +39660,7 @@
                     </a:lnT>
                     <a:lnB w="12700" cap="flat" cmpd="sng" algn="ctr">
                       <a:solidFill>
-                        <a:srgbClr val="2C3844"/>
+                        <a:srgbClr val="4A1A5E"/>
                       </a:solidFill>
                       <a:prstDash val="solid"/>
                       <a:round/>
@@ -39691,7 +39691,7 @@
                   <a:tcPr marL="91440" marR="91440" marT="45720" marB="45720" anchor="ctr">
                     <a:lnL w="12700" cap="flat" cmpd="sng" algn="ctr">
                       <a:solidFill>
-                        <a:srgbClr val="2C3844"/>
+                        <a:srgbClr val="4A1A5E"/>
                       </a:solidFill>
                       <a:prstDash val="solid"/>
                       <a:round/>
@@ -39700,7 +39700,7 @@
                     </a:lnL>
                     <a:lnR w="12700" cap="flat" cmpd="sng" algn="ctr">
                       <a:solidFill>
-                        <a:srgbClr val="2C3844"/>
+                        <a:srgbClr val="4A1A5E"/>
                       </a:solidFill>
                       <a:prstDash val="solid"/>
                       <a:round/>
@@ -39709,7 +39709,7 @@
                     </a:lnR>
                     <a:lnT w="12700" cap="flat" cmpd="sng" algn="ctr">
                       <a:solidFill>
-                        <a:srgbClr val="2C3844"/>
+                        <a:srgbClr val="4A1A5E"/>
                       </a:solidFill>
                       <a:prstDash val="solid"/>
                       <a:round/>
@@ -39718,7 +39718,7 @@
                     </a:lnT>
                     <a:lnB w="12700" cap="flat" cmpd="sng" algn="ctr">
                       <a:solidFill>
-                        <a:srgbClr val="2C3844"/>
+                        <a:srgbClr val="4A1A5E"/>
                       </a:solidFill>
                       <a:prstDash val="solid"/>
                       <a:round/>
@@ -39751,7 +39751,7 @@
                   <a:tcPr marL="91440" marR="91440" marT="45720" marB="45720" anchor="ctr">
                     <a:lnL w="12700" cap="flat" cmpd="sng" algn="ctr">
                       <a:solidFill>
-                        <a:srgbClr val="2C3844"/>
+                        <a:srgbClr val="4A1A5E"/>
                       </a:solidFill>
                       <a:prstDash val="solid"/>
                       <a:round/>
@@ -39760,7 +39760,7 @@
                     </a:lnL>
                     <a:lnR w="12700" cap="flat" cmpd="sng" algn="ctr">
                       <a:solidFill>
-                        <a:srgbClr val="2C3844"/>
+                        <a:srgbClr val="4A1A5E"/>
                       </a:solidFill>
                       <a:prstDash val="solid"/>
                       <a:round/>
@@ -39769,7 +39769,7 @@
                     </a:lnR>
                     <a:lnT w="12700" cap="flat" cmpd="sng" algn="ctr">
                       <a:solidFill>
-                        <a:srgbClr val="2C3844"/>
+                        <a:srgbClr val="4A1A5E"/>
                       </a:solidFill>
                       <a:prstDash val="solid"/>
                       <a:round/>
@@ -39778,7 +39778,7 @@
                     </a:lnT>
                     <a:lnB w="12700" cap="flat" cmpd="sng" algn="ctr">
                       <a:solidFill>
-                        <a:srgbClr val="2C3844"/>
+                        <a:srgbClr val="4A1A5E"/>
                       </a:solidFill>
                       <a:prstDash val="solid"/>
                       <a:round/>
@@ -39809,7 +39809,7 @@
                   <a:tcPr marL="91440" marR="91440" marT="45720" marB="45720" anchor="ctr">
                     <a:lnL w="12700" cap="flat" cmpd="sng" algn="ctr">
                       <a:solidFill>
-                        <a:srgbClr val="2C3844"/>
+                        <a:srgbClr val="4A1A5E"/>
                       </a:solidFill>
                       <a:prstDash val="solid"/>
                       <a:round/>
@@ -39818,7 +39818,7 @@
                     </a:lnL>
                     <a:lnR w="12700" cap="flat" cmpd="sng" algn="ctr">
                       <a:solidFill>
-                        <a:srgbClr val="2C3844"/>
+                        <a:srgbClr val="4A1A5E"/>
                       </a:solidFill>
                       <a:prstDash val="solid"/>
                       <a:round/>
@@ -39827,7 +39827,7 @@
                     </a:lnR>
                     <a:lnT w="12700" cap="flat" cmpd="sng" algn="ctr">
                       <a:solidFill>
-                        <a:srgbClr val="2C3844"/>
+                        <a:srgbClr val="4A1A5E"/>
                       </a:solidFill>
                       <a:prstDash val="solid"/>
                       <a:round/>
@@ -39836,7 +39836,7 @@
                     </a:lnT>
                     <a:lnB w="12700" cap="flat" cmpd="sng" algn="ctr">
                       <a:solidFill>
-                        <a:srgbClr val="2C3844"/>
+                        <a:srgbClr val="4A1A5E"/>
                       </a:solidFill>
                       <a:prstDash val="solid"/>
                       <a:round/>
@@ -39867,7 +39867,7 @@
                   <a:tcPr marL="91440" marR="91440" marT="45720" marB="45720" anchor="ctr">
                     <a:lnL w="12700" cap="flat" cmpd="sng" algn="ctr">
                       <a:solidFill>
-                        <a:srgbClr val="2C3844"/>
+                        <a:srgbClr val="4A1A5E"/>
                       </a:solidFill>
                       <a:prstDash val="solid"/>
                       <a:round/>
@@ -39876,7 +39876,7 @@
                     </a:lnL>
                     <a:lnR w="12700" cap="flat" cmpd="sng" algn="ctr">
                       <a:solidFill>
-                        <a:srgbClr val="2C3844"/>
+                        <a:srgbClr val="4A1A5E"/>
                       </a:solidFill>
                       <a:prstDash val="solid"/>
                       <a:round/>
@@ -39885,7 +39885,7 @@
                     </a:lnR>
                     <a:lnT w="12700" cap="flat" cmpd="sng" algn="ctr">
                       <a:solidFill>
-                        <a:srgbClr val="2C3844"/>
+                        <a:srgbClr val="4A1A5E"/>
                       </a:solidFill>
                       <a:prstDash val="solid"/>
                       <a:round/>
@@ -39894,7 +39894,7 @@
                     </a:lnT>
                     <a:lnB w="12700" cap="flat" cmpd="sng" algn="ctr">
                       <a:solidFill>
-                        <a:srgbClr val="2C3844"/>
+                        <a:srgbClr val="4A1A5E"/>
                       </a:solidFill>
                       <a:prstDash val="solid"/>
                       <a:round/>
@@ -39927,7 +39927,7 @@
                   <a:tcPr marL="91440" marR="91440" marT="45720" marB="45720" anchor="ctr">
                     <a:lnL w="12700" cap="flat" cmpd="sng" algn="ctr">
                       <a:solidFill>
-                        <a:srgbClr val="2C3844"/>
+                        <a:srgbClr val="4A1A5E"/>
                       </a:solidFill>
                       <a:prstDash val="solid"/>
                       <a:round/>
@@ -39936,7 +39936,7 @@
                     </a:lnL>
                     <a:lnR w="12700" cap="flat" cmpd="sng" algn="ctr">
                       <a:solidFill>
-                        <a:srgbClr val="2C3844"/>
+                        <a:srgbClr val="4A1A5E"/>
                       </a:solidFill>
                       <a:prstDash val="solid"/>
                       <a:round/>
@@ -39945,7 +39945,7 @@
                     </a:lnR>
                     <a:lnT w="12700" cap="flat" cmpd="sng" algn="ctr">
                       <a:solidFill>
-                        <a:srgbClr val="2C3844"/>
+                        <a:srgbClr val="4A1A5E"/>
                       </a:solidFill>
                       <a:prstDash val="solid"/>
                       <a:round/>
@@ -39954,7 +39954,7 @@
                     </a:lnT>
                     <a:lnB w="12700" cap="flat" cmpd="sng" algn="ctr">
                       <a:solidFill>
-                        <a:srgbClr val="2C3844"/>
+                        <a:srgbClr val="4A1A5E"/>
                       </a:solidFill>
                       <a:prstDash val="solid"/>
                       <a:round/>
@@ -39985,7 +39985,7 @@
                   <a:tcPr marL="91440" marR="91440" marT="45720" marB="45720" anchor="ctr">
                     <a:lnL w="12700" cap="flat" cmpd="sng" algn="ctr">
                       <a:solidFill>
-                        <a:srgbClr val="2C3844"/>
+                        <a:srgbClr val="4A1A5E"/>
                       </a:solidFill>
                       <a:prstDash val="solid"/>
                       <a:round/>
@@ -39994,7 +39994,7 @@
                     </a:lnL>
                     <a:lnR w="12700" cap="flat" cmpd="sng" algn="ctr">
                       <a:solidFill>
-                        <a:srgbClr val="2C3844"/>
+                        <a:srgbClr val="4A1A5E"/>
                       </a:solidFill>
                       <a:prstDash val="solid"/>
                       <a:round/>
@@ -40003,7 +40003,7 @@
                     </a:lnR>
                     <a:lnT w="12700" cap="flat" cmpd="sng" algn="ctr">
                       <a:solidFill>
-                        <a:srgbClr val="2C3844"/>
+                        <a:srgbClr val="4A1A5E"/>
                       </a:solidFill>
                       <a:prstDash val="solid"/>
                       <a:round/>
@@ -40012,7 +40012,7 @@
                     </a:lnT>
                     <a:lnB w="12700" cap="flat" cmpd="sng" algn="ctr">
                       <a:solidFill>
-                        <a:srgbClr val="2C3844"/>
+                        <a:srgbClr val="4A1A5E"/>
                       </a:solidFill>
                       <a:prstDash val="solid"/>
                       <a:round/>
@@ -40043,7 +40043,7 @@
                   <a:tcPr marL="91440" marR="91440" marT="45720" marB="45720" anchor="ctr">
                     <a:lnL w="12700" cap="flat" cmpd="sng" algn="ctr">
                       <a:solidFill>
-                        <a:srgbClr val="2C3844"/>
+                        <a:srgbClr val="4A1A5E"/>
                       </a:solidFill>
                       <a:prstDash val="solid"/>
                       <a:round/>
@@ -40052,7 +40052,7 @@
                     </a:lnL>
                     <a:lnR w="12700" cap="flat" cmpd="sng" algn="ctr">
                       <a:solidFill>
-                        <a:srgbClr val="2C3844"/>
+                        <a:srgbClr val="4A1A5E"/>
                       </a:solidFill>
                       <a:prstDash val="solid"/>
                       <a:round/>
@@ -40061,7 +40061,7 @@
                     </a:lnR>
                     <a:lnT w="12700" cap="flat" cmpd="sng" algn="ctr">
                       <a:solidFill>
-                        <a:srgbClr val="2C3844"/>
+                        <a:srgbClr val="4A1A5E"/>
                       </a:solidFill>
                       <a:prstDash val="solid"/>
                       <a:round/>
@@ -40070,7 +40070,7 @@
                     </a:lnT>
                     <a:lnB w="12700" cap="flat" cmpd="sng" algn="ctr">
                       <a:solidFill>
-                        <a:srgbClr val="2C3844"/>
+                        <a:srgbClr val="4A1A5E"/>
                       </a:solidFill>
                       <a:prstDash val="solid"/>
                       <a:round/>
@@ -40103,7 +40103,7 @@
                   <a:tcPr marL="91440" marR="91440" marT="45720" marB="45720" anchor="ctr">
                     <a:lnL w="12700" cap="flat" cmpd="sng" algn="ctr">
                       <a:solidFill>
-                        <a:srgbClr val="2C3844"/>
+                        <a:srgbClr val="4A1A5E"/>
                       </a:solidFill>
                       <a:prstDash val="solid"/>
                       <a:round/>
@@ -40112,7 +40112,7 @@
                     </a:lnL>
                     <a:lnR w="12700" cap="flat" cmpd="sng" algn="ctr">
                       <a:solidFill>
-                        <a:srgbClr val="2C3844"/>
+                        <a:srgbClr val="4A1A5E"/>
                       </a:solidFill>
                       <a:prstDash val="solid"/>
                       <a:round/>
@@ -40121,7 +40121,7 @@
                     </a:lnR>
                     <a:lnT w="12700" cap="flat" cmpd="sng" algn="ctr">
                       <a:solidFill>
-                        <a:srgbClr val="2C3844"/>
+                        <a:srgbClr val="4A1A5E"/>
                       </a:solidFill>
                       <a:prstDash val="solid"/>
                       <a:round/>
@@ -40130,7 +40130,7 @@
                     </a:lnT>
                     <a:lnB w="12700" cap="flat" cmpd="sng" algn="ctr">
                       <a:solidFill>
-                        <a:srgbClr val="2C3844"/>
+                        <a:srgbClr val="4A1A5E"/>
                       </a:solidFill>
                       <a:prstDash val="solid"/>
                       <a:round/>
@@ -40161,7 +40161,7 @@
                   <a:tcPr marL="91440" marR="91440" marT="45720" marB="45720" anchor="ctr">
                     <a:lnL w="12700" cap="flat" cmpd="sng" algn="ctr">
                       <a:solidFill>
-                        <a:srgbClr val="2C3844"/>
+                        <a:srgbClr val="4A1A5E"/>
                       </a:solidFill>
                       <a:prstDash val="solid"/>
                       <a:round/>
@@ -40170,7 +40170,7 @@
                     </a:lnL>
                     <a:lnR w="12700" cap="flat" cmpd="sng" algn="ctr">
                       <a:solidFill>
-                        <a:srgbClr val="2C3844"/>
+                        <a:srgbClr val="4A1A5E"/>
                       </a:solidFill>
                       <a:prstDash val="solid"/>
                       <a:round/>
@@ -40179,7 +40179,7 @@
                     </a:lnR>
                     <a:lnT w="12700" cap="flat" cmpd="sng" algn="ctr">
                       <a:solidFill>
-                        <a:srgbClr val="2C3844"/>
+                        <a:srgbClr val="4A1A5E"/>
                       </a:solidFill>
                       <a:prstDash val="solid"/>
                       <a:round/>
@@ -40188,7 +40188,7 @@
                     </a:lnT>
                     <a:lnB w="12700" cap="flat" cmpd="sng" algn="ctr">
                       <a:solidFill>
-                        <a:srgbClr val="2C3844"/>
+                        <a:srgbClr val="4A1A5E"/>
                       </a:solidFill>
                       <a:prstDash val="solid"/>
                       <a:round/>
@@ -40219,7 +40219,7 @@
                   <a:tcPr marL="91440" marR="91440" marT="45720" marB="45720" anchor="ctr">
                     <a:lnL w="12700" cap="flat" cmpd="sng" algn="ctr">
                       <a:solidFill>
-                        <a:srgbClr val="2C3844"/>
+                        <a:srgbClr val="4A1A5E"/>
                       </a:solidFill>
                       <a:prstDash val="solid"/>
                       <a:round/>
@@ -40228,7 +40228,7 @@
                     </a:lnL>
                     <a:lnR w="12700" cap="flat" cmpd="sng" algn="ctr">
                       <a:solidFill>
-                        <a:srgbClr val="2C3844"/>
+                        <a:srgbClr val="4A1A5E"/>
                       </a:solidFill>
                       <a:prstDash val="solid"/>
                       <a:round/>
@@ -40237,7 +40237,7 @@
                     </a:lnR>
                     <a:lnT w="12700" cap="flat" cmpd="sng" algn="ctr">
                       <a:solidFill>
-                        <a:srgbClr val="2C3844"/>
+                        <a:srgbClr val="4A1A5E"/>
                       </a:solidFill>
                       <a:prstDash val="solid"/>
                       <a:round/>
@@ -40246,7 +40246,7 @@
                     </a:lnT>
                     <a:lnB w="12700" cap="flat" cmpd="sng" algn="ctr">
                       <a:solidFill>
-                        <a:srgbClr val="2C3844"/>
+                        <a:srgbClr val="4A1A5E"/>
                       </a:solidFill>
                       <a:prstDash val="solid"/>
                       <a:round/>
@@ -40362,7 +40362,7 @@
             <a:r>
               <a:rPr lang="en-US" sz="3600" b="1" dirty="0">
                 <a:solidFill>
-                  <a:schemeClr val="accent4"/>
+                  <a:schemeClr val="bg2"/>
                 </a:solidFill>
               </a:rPr>
               <a:t>fusevm: the engine</a:t>
@@ -40398,7 +40398,7 @@
             <a:r>
               <a:rPr lang="en-US" sz="1200" dirty="0">
                 <a:solidFill>
-                  <a:schemeClr val="accent6"/>
+                  <a:schemeClr val="accent5"/>
                 </a:solidFill>
                 <a:latin typeface="Courier New" pitchFamily="34" charset="0"/>
                 <a:ea typeface="Courier New" pitchFamily="34" charset="-122"/>
@@ -40427,11 +40427,11 @@
             </a:avLst>
           </a:prstGeom>
           <a:solidFill>
-            <a:schemeClr val="accent4"/>
+            <a:schemeClr val="tx2"/>
           </a:solidFill>
           <a:ln w="12700">
             <a:solidFill>
-              <a:schemeClr val="accent4"/>
+              <a:srgbClr val="4A1A5E"/>
             </a:solidFill>
             <a:prstDash val="solid"/>
           </a:ln>
@@ -40554,11 +40554,11 @@
             </a:avLst>
           </a:prstGeom>
           <a:solidFill>
-            <a:schemeClr val="accent4"/>
+            <a:schemeClr val="tx2"/>
           </a:solidFill>
           <a:ln w="12700">
             <a:solidFill>
-              <a:schemeClr val="accent4"/>
+              <a:srgbClr val="4A1A5E"/>
             </a:solidFill>
             <a:prstDash val="solid"/>
           </a:ln>
@@ -40681,11 +40681,11 @@
             </a:avLst>
           </a:prstGeom>
           <a:solidFill>
-            <a:schemeClr val="accent4"/>
+            <a:schemeClr val="tx2"/>
           </a:solidFill>
           <a:ln w="12700">
             <a:solidFill>
-              <a:schemeClr val="accent4"/>
+              <a:srgbClr val="4A1A5E"/>
             </a:solidFill>
             <a:prstDash val="solid"/>
           </a:ln>
@@ -40797,7 +40797,7 @@
             <a:r>
               <a:rPr lang="en-US" sz="2200" dirty="0">
                 <a:solidFill>
-                  <a:schemeClr val="accent4"/>
+                  <a:schemeClr val="bg2"/>
                 </a:solidFill>
               </a:rPr>
               <a:t>Bytecode cached across processes in rkyv images, read by mmap</a:t>
@@ -40815,7 +40815,7 @@
             <a:r>
               <a:rPr lang="en-US" sz="2200" dirty="0">
                 <a:solidFill>
-                  <a:schemeClr val="accent4"/>
+                  <a:schemeClr val="bg2"/>
                 </a:solidFill>
               </a:rPr>
               <a:t>Native code persisted across launches in a .fjit disk cache</a:t>
@@ -40833,7 +40833,7 @@
             <a:r>
               <a:rPr lang="en-US" sz="2200" dirty="0">
                 <a:solidFill>
-                  <a:schemeClr val="accent4"/>
+                  <a:schemeClr val="bg2"/>
                 </a:solidFill>
               </a:rPr>
               <a:t>--tiers reports which tier ran each chunk</a:t>
@@ -40872,7 +40872,7 @@
             <a:lvl1pPr>
               <a:defRPr sz="1200">
                 <a:solidFill>
-                  <a:schemeClr val="accent6"/>
+                  <a:schemeClr val="accent5"/>
                 </a:solidFill>
                 <a:latin typeface="Courier New"/>
                 <a:ea typeface="Courier New"/>
@@ -41043,7 +41043,7 @@
                   <a:tcPr marL="91440" marR="91440" marT="45720" marB="45720" anchor="ctr">
                     <a:lnL w="12700" cap="flat" cmpd="sng" algn="ctr">
                       <a:solidFill>
-                        <a:srgbClr val="2C3844"/>
+                        <a:srgbClr val="4A1A5E"/>
                       </a:solidFill>
                       <a:prstDash val="solid"/>
                       <a:round/>
@@ -41052,7 +41052,7 @@
                     </a:lnL>
                     <a:lnR w="12700" cap="flat" cmpd="sng" algn="ctr">
                       <a:solidFill>
-                        <a:srgbClr val="2C3844"/>
+                        <a:srgbClr val="4A1A5E"/>
                       </a:solidFill>
                       <a:prstDash val="solid"/>
                       <a:round/>
@@ -41061,7 +41061,7 @@
                     </a:lnR>
                     <a:lnT w="12700" cap="flat" cmpd="sng" algn="ctr">
                       <a:solidFill>
-                        <a:srgbClr val="2C3844"/>
+                        <a:srgbClr val="4A1A5E"/>
                       </a:solidFill>
                       <a:prstDash val="solid"/>
                       <a:round/>
@@ -41070,7 +41070,7 @@
                     </a:lnT>
                     <a:lnB w="12700" cap="flat" cmpd="sng" algn="ctr">
                       <a:solidFill>
-                        <a:srgbClr val="2C3844"/>
+                        <a:srgbClr val="4A1A5E"/>
                       </a:solidFill>
                       <a:prstDash val="solid"/>
                       <a:round/>
@@ -41101,7 +41101,7 @@
                   <a:tcPr marL="91440" marR="91440" marT="45720" marB="45720" anchor="ctr">
                     <a:lnL w="12700" cap="flat" cmpd="sng" algn="ctr">
                       <a:solidFill>
-                        <a:srgbClr val="2C3844"/>
+                        <a:srgbClr val="4A1A5E"/>
                       </a:solidFill>
                       <a:prstDash val="solid"/>
                       <a:round/>
@@ -41110,7 +41110,7 @@
                     </a:lnL>
                     <a:lnR w="12700" cap="flat" cmpd="sng" algn="ctr">
                       <a:solidFill>
-                        <a:srgbClr val="2C3844"/>
+                        <a:srgbClr val="4A1A5E"/>
                       </a:solidFill>
                       <a:prstDash val="solid"/>
                       <a:round/>
@@ -41119,7 +41119,7 @@
                     </a:lnR>
                     <a:lnT w="12700" cap="flat" cmpd="sng" algn="ctr">
                       <a:solidFill>
-                        <a:srgbClr val="2C3844"/>
+                        <a:srgbClr val="4A1A5E"/>
                       </a:solidFill>
                       <a:prstDash val="solid"/>
                       <a:round/>
@@ -41128,7 +41128,7 @@
                     </a:lnT>
                     <a:lnB w="12700" cap="flat" cmpd="sng" algn="ctr">
                       <a:solidFill>
-                        <a:srgbClr val="2C3844"/>
+                        <a:srgbClr val="4A1A5E"/>
                       </a:solidFill>
                       <a:prstDash val="solid"/>
                       <a:round/>
@@ -41159,7 +41159,7 @@
                   <a:tcPr marL="91440" marR="91440" marT="45720" marB="45720" anchor="ctr">
                     <a:lnL w="12700" cap="flat" cmpd="sng" algn="ctr">
                       <a:solidFill>
-                        <a:srgbClr val="2C3844"/>
+                        <a:srgbClr val="4A1A5E"/>
                       </a:solidFill>
                       <a:prstDash val="solid"/>
                       <a:round/>
@@ -41168,7 +41168,7 @@
                     </a:lnL>
                     <a:lnR w="12700" cap="flat" cmpd="sng" algn="ctr">
                       <a:solidFill>
-                        <a:srgbClr val="2C3844"/>
+                        <a:srgbClr val="4A1A5E"/>
                       </a:solidFill>
                       <a:prstDash val="solid"/>
                       <a:round/>
@@ -41177,7 +41177,7 @@
                     </a:lnR>
                     <a:lnT w="12700" cap="flat" cmpd="sng" algn="ctr">
                       <a:solidFill>
-                        <a:srgbClr val="2C3844"/>
+                        <a:srgbClr val="4A1A5E"/>
                       </a:solidFill>
                       <a:prstDash val="solid"/>
                       <a:round/>
@@ -41186,7 +41186,7 @@
                     </a:lnT>
                     <a:lnB w="12700" cap="flat" cmpd="sng" algn="ctr">
                       <a:solidFill>
-                        <a:srgbClr val="2C3844"/>
+                        <a:srgbClr val="4A1A5E"/>
                       </a:solidFill>
                       <a:prstDash val="solid"/>
                       <a:round/>
@@ -41217,7 +41217,7 @@
                   <a:tcPr marL="91440" marR="91440" marT="45720" marB="45720" anchor="ctr">
                     <a:lnL w="12700" cap="flat" cmpd="sng" algn="ctr">
                       <a:solidFill>
-                        <a:srgbClr val="2C3844"/>
+                        <a:srgbClr val="4A1A5E"/>
                       </a:solidFill>
                       <a:prstDash val="solid"/>
                       <a:round/>
@@ -41226,7 +41226,7 @@
                     </a:lnL>
                     <a:lnR w="12700" cap="flat" cmpd="sng" algn="ctr">
                       <a:solidFill>
-                        <a:srgbClr val="2C3844"/>
+                        <a:srgbClr val="4A1A5E"/>
                       </a:solidFill>
                       <a:prstDash val="solid"/>
                       <a:round/>
@@ -41235,7 +41235,7 @@
                     </a:lnR>
                     <a:lnT w="12700" cap="flat" cmpd="sng" algn="ctr">
                       <a:solidFill>
-                        <a:srgbClr val="2C3844"/>
+                        <a:srgbClr val="4A1A5E"/>
                       </a:solidFill>
                       <a:prstDash val="solid"/>
                       <a:round/>
@@ -41244,7 +41244,7 @@
                     </a:lnT>
                     <a:lnB w="12700" cap="flat" cmpd="sng" algn="ctr">
                       <a:solidFill>
-                        <a:srgbClr val="2C3844"/>
+                        <a:srgbClr val="4A1A5E"/>
                       </a:solidFill>
                       <a:prstDash val="solid"/>
                       <a:round/>
@@ -41277,7 +41277,7 @@
                   <a:tcPr marL="91440" marR="91440" marT="45720" marB="45720" anchor="ctr">
                     <a:lnL w="12700" cap="flat" cmpd="sng" algn="ctr">
                       <a:solidFill>
-                        <a:srgbClr val="2C3844"/>
+                        <a:srgbClr val="4A1A5E"/>
                       </a:solidFill>
                       <a:prstDash val="solid"/>
                       <a:round/>
@@ -41286,7 +41286,7 @@
                     </a:lnL>
                     <a:lnR w="12700" cap="flat" cmpd="sng" algn="ctr">
                       <a:solidFill>
-                        <a:srgbClr val="2C3844"/>
+                        <a:srgbClr val="4A1A5E"/>
                       </a:solidFill>
                       <a:prstDash val="solid"/>
                       <a:round/>
@@ -41295,7 +41295,7 @@
                     </a:lnR>
                     <a:lnT w="12700" cap="flat" cmpd="sng" algn="ctr">
                       <a:solidFill>
-                        <a:srgbClr val="2C3844"/>
+                        <a:srgbClr val="4A1A5E"/>
                       </a:solidFill>
                       <a:prstDash val="solid"/>
                       <a:round/>
@@ -41304,7 +41304,7 @@
                     </a:lnT>
                     <a:lnB w="12700" cap="flat" cmpd="sng" algn="ctr">
                       <a:solidFill>
-                        <a:srgbClr val="2C3844"/>
+                        <a:srgbClr val="4A1A5E"/>
                       </a:solidFill>
                       <a:prstDash val="solid"/>
                       <a:round/>
@@ -41335,7 +41335,7 @@
                   <a:tcPr marL="91440" marR="91440" marT="45720" marB="45720" anchor="ctr">
                     <a:lnL w="12700" cap="flat" cmpd="sng" algn="ctr">
                       <a:solidFill>
-                        <a:srgbClr val="2C3844"/>
+                        <a:srgbClr val="4A1A5E"/>
                       </a:solidFill>
                       <a:prstDash val="solid"/>
                       <a:round/>
@@ -41344,7 +41344,7 @@
                     </a:lnL>
                     <a:lnR w="12700" cap="flat" cmpd="sng" algn="ctr">
                       <a:solidFill>
-                        <a:srgbClr val="2C3844"/>
+                        <a:srgbClr val="4A1A5E"/>
                       </a:solidFill>
                       <a:prstDash val="solid"/>
                       <a:round/>
@@ -41353,7 +41353,7 @@
                     </a:lnR>
                     <a:lnT w="12700" cap="flat" cmpd="sng" algn="ctr">
                       <a:solidFill>
-                        <a:srgbClr val="2C3844"/>
+                        <a:srgbClr val="4A1A5E"/>
                       </a:solidFill>
                       <a:prstDash val="solid"/>
                       <a:round/>
@@ -41362,7 +41362,7 @@
                     </a:lnT>
                     <a:lnB w="12700" cap="flat" cmpd="sng" algn="ctr">
                       <a:solidFill>
-                        <a:srgbClr val="2C3844"/>
+                        <a:srgbClr val="4A1A5E"/>
                       </a:solidFill>
                       <a:prstDash val="solid"/>
                       <a:round/>
@@ -41393,7 +41393,7 @@
                   <a:tcPr marL="91440" marR="91440" marT="45720" marB="45720" anchor="ctr">
                     <a:lnL w="12700" cap="flat" cmpd="sng" algn="ctr">
                       <a:solidFill>
-                        <a:srgbClr val="2C3844"/>
+                        <a:srgbClr val="4A1A5E"/>
                       </a:solidFill>
                       <a:prstDash val="solid"/>
                       <a:round/>
@@ -41402,7 +41402,7 @@
                     </a:lnL>
                     <a:lnR w="12700" cap="flat" cmpd="sng" algn="ctr">
                       <a:solidFill>
-                        <a:srgbClr val="2C3844"/>
+                        <a:srgbClr val="4A1A5E"/>
                       </a:solidFill>
                       <a:prstDash val="solid"/>
                       <a:round/>
@@ -41411,7 +41411,7 @@
                     </a:lnR>
                     <a:lnT w="12700" cap="flat" cmpd="sng" algn="ctr">
                       <a:solidFill>
-                        <a:srgbClr val="2C3844"/>
+                        <a:srgbClr val="4A1A5E"/>
                       </a:solidFill>
                       <a:prstDash val="solid"/>
                       <a:round/>
@@ -41420,7 +41420,7 @@
                     </a:lnT>
                     <a:lnB w="12700" cap="flat" cmpd="sng" algn="ctr">
                       <a:solidFill>
-                        <a:srgbClr val="2C3844"/>
+                        <a:srgbClr val="4A1A5E"/>
                       </a:solidFill>
                       <a:prstDash val="solid"/>
                       <a:round/>
@@ -41451,7 +41451,7 @@
                   <a:tcPr marL="91440" marR="91440" marT="45720" marB="45720" anchor="ctr">
                     <a:lnL w="12700" cap="flat" cmpd="sng" algn="ctr">
                       <a:solidFill>
-                        <a:srgbClr val="2C3844"/>
+                        <a:srgbClr val="4A1A5E"/>
                       </a:solidFill>
                       <a:prstDash val="solid"/>
                       <a:round/>
@@ -41460,7 +41460,7 @@
                     </a:lnL>
                     <a:lnR w="12700" cap="flat" cmpd="sng" algn="ctr">
                       <a:solidFill>
-                        <a:srgbClr val="2C3844"/>
+                        <a:srgbClr val="4A1A5E"/>
                       </a:solidFill>
                       <a:prstDash val="solid"/>
                       <a:round/>
@@ -41469,7 +41469,7 @@
                     </a:lnR>
                     <a:lnT w="12700" cap="flat" cmpd="sng" algn="ctr">
                       <a:solidFill>
-                        <a:srgbClr val="2C3844"/>
+                        <a:srgbClr val="4A1A5E"/>
                       </a:solidFill>
                       <a:prstDash val="solid"/>
                       <a:round/>
@@ -41478,7 +41478,7 @@
                     </a:lnT>
                     <a:lnB w="12700" cap="flat" cmpd="sng" algn="ctr">
                       <a:solidFill>
-                        <a:srgbClr val="2C3844"/>
+                        <a:srgbClr val="4A1A5E"/>
                       </a:solidFill>
                       <a:prstDash val="solid"/>
                       <a:round/>
@@ -41511,7 +41511,7 @@
                   <a:tcPr marL="91440" marR="91440" marT="45720" marB="45720" anchor="ctr">
                     <a:lnL w="12700" cap="flat" cmpd="sng" algn="ctr">
                       <a:solidFill>
-                        <a:srgbClr val="2C3844"/>
+                        <a:srgbClr val="4A1A5E"/>
                       </a:solidFill>
                       <a:prstDash val="solid"/>
                       <a:round/>
@@ -41520,7 +41520,7 @@
                     </a:lnL>
                     <a:lnR w="12700" cap="flat" cmpd="sng" algn="ctr">
                       <a:solidFill>
-                        <a:srgbClr val="2C3844"/>
+                        <a:srgbClr val="4A1A5E"/>
                       </a:solidFill>
                       <a:prstDash val="solid"/>
                       <a:round/>
@@ -41529,7 +41529,7 @@
                     </a:lnR>
                     <a:lnT w="12700" cap="flat" cmpd="sng" algn="ctr">
                       <a:solidFill>
-                        <a:srgbClr val="2C3844"/>
+                        <a:srgbClr val="4A1A5E"/>
                       </a:solidFill>
                       <a:prstDash val="solid"/>
                       <a:round/>
@@ -41538,7 +41538,7 @@
                     </a:lnT>
                     <a:lnB w="12700" cap="flat" cmpd="sng" algn="ctr">
                       <a:solidFill>
-                        <a:srgbClr val="2C3844"/>
+                        <a:srgbClr val="4A1A5E"/>
                       </a:solidFill>
                       <a:prstDash val="solid"/>
                       <a:round/>
@@ -41569,7 +41569,7 @@
                   <a:tcPr marL="91440" marR="91440" marT="45720" marB="45720" anchor="ctr">
                     <a:lnL w="12700" cap="flat" cmpd="sng" algn="ctr">
                       <a:solidFill>
-                        <a:srgbClr val="2C3844"/>
+                        <a:srgbClr val="4A1A5E"/>
                       </a:solidFill>
                       <a:prstDash val="solid"/>
                       <a:round/>
@@ -41578,7 +41578,7 @@
                     </a:lnL>
                     <a:lnR w="12700" cap="flat" cmpd="sng" algn="ctr">
                       <a:solidFill>
-                        <a:srgbClr val="2C3844"/>
+                        <a:srgbClr val="4A1A5E"/>
                       </a:solidFill>
                       <a:prstDash val="solid"/>
                       <a:round/>
@@ -41587,7 +41587,7 @@
                     </a:lnR>
                     <a:lnT w="12700" cap="flat" cmpd="sng" algn="ctr">
                       <a:solidFill>
-                        <a:srgbClr val="2C3844"/>
+                        <a:srgbClr val="4A1A5E"/>
                       </a:solidFill>
                       <a:prstDash val="solid"/>
                       <a:round/>
@@ -41596,7 +41596,7 @@
                     </a:lnT>
                     <a:lnB w="12700" cap="flat" cmpd="sng" algn="ctr">
                       <a:solidFill>
-                        <a:srgbClr val="2C3844"/>
+                        <a:srgbClr val="4A1A5E"/>
                       </a:solidFill>
                       <a:prstDash val="solid"/>
                       <a:round/>
@@ -41627,7 +41627,7 @@
                   <a:tcPr marL="91440" marR="91440" marT="45720" marB="45720" anchor="ctr">
                     <a:lnL w="12700" cap="flat" cmpd="sng" algn="ctr">
                       <a:solidFill>
-                        <a:srgbClr val="2C3844"/>
+                        <a:srgbClr val="4A1A5E"/>
                       </a:solidFill>
                       <a:prstDash val="solid"/>
                       <a:round/>
@@ -41636,7 +41636,7 @@
                     </a:lnL>
                     <a:lnR w="12700" cap="flat" cmpd="sng" algn="ctr">
                       <a:solidFill>
-                        <a:srgbClr val="2C3844"/>
+                        <a:srgbClr val="4A1A5E"/>
                       </a:solidFill>
                       <a:prstDash val="solid"/>
                       <a:round/>
@@ -41645,7 +41645,7 @@
                     </a:lnR>
                     <a:lnT w="12700" cap="flat" cmpd="sng" algn="ctr">
                       <a:solidFill>
-                        <a:srgbClr val="2C3844"/>
+                        <a:srgbClr val="4A1A5E"/>
                       </a:solidFill>
                       <a:prstDash val="solid"/>
                       <a:round/>
@@ -41654,7 +41654,7 @@
                     </a:lnT>
                     <a:lnB w="12700" cap="flat" cmpd="sng" algn="ctr">
                       <a:solidFill>
-                        <a:srgbClr val="2C3844"/>
+                        <a:srgbClr val="4A1A5E"/>
                       </a:solidFill>
                       <a:prstDash val="solid"/>
                       <a:round/>
@@ -41685,7 +41685,7 @@
                   <a:tcPr marL="91440" marR="91440" marT="45720" marB="45720" anchor="ctr">
                     <a:lnL w="12700" cap="flat" cmpd="sng" algn="ctr">
                       <a:solidFill>
-                        <a:srgbClr val="2C3844"/>
+                        <a:srgbClr val="4A1A5E"/>
                       </a:solidFill>
                       <a:prstDash val="solid"/>
                       <a:round/>
@@ -41694,7 +41694,7 @@
                     </a:lnL>
                     <a:lnR w="12700" cap="flat" cmpd="sng" algn="ctr">
                       <a:solidFill>
-                        <a:srgbClr val="2C3844"/>
+                        <a:srgbClr val="4A1A5E"/>
                       </a:solidFill>
                       <a:prstDash val="solid"/>
                       <a:round/>
@@ -41703,7 +41703,7 @@
                     </a:lnR>
                     <a:lnT w="12700" cap="flat" cmpd="sng" algn="ctr">
                       <a:solidFill>
-                        <a:srgbClr val="2C3844"/>
+                        <a:srgbClr val="4A1A5E"/>
                       </a:solidFill>
                       <a:prstDash val="solid"/>
                       <a:round/>
@@ -41712,7 +41712,7 @@
                     </a:lnT>
                     <a:lnB w="12700" cap="flat" cmpd="sng" algn="ctr">
                       <a:solidFill>
-                        <a:srgbClr val="2C3844"/>
+                        <a:srgbClr val="4A1A5E"/>
                       </a:solidFill>
                       <a:prstDash val="solid"/>
                       <a:round/>
@@ -41745,7 +41745,7 @@
                   <a:tcPr marL="91440" marR="91440" marT="45720" marB="45720" anchor="ctr">
                     <a:lnL w="12700" cap="flat" cmpd="sng" algn="ctr">
                       <a:solidFill>
-                        <a:srgbClr val="2C3844"/>
+                        <a:srgbClr val="4A1A5E"/>
                       </a:solidFill>
                       <a:prstDash val="solid"/>
                       <a:round/>
@@ -41754,7 +41754,7 @@
                     </a:lnL>
                     <a:lnR w="12700" cap="flat" cmpd="sng" algn="ctr">
                       <a:solidFill>
-                        <a:srgbClr val="2C3844"/>
+                        <a:srgbClr val="4A1A5E"/>
                       </a:solidFill>
                       <a:prstDash val="solid"/>
                       <a:round/>
@@ -41763,7 +41763,7 @@
                     </a:lnR>
                     <a:lnT w="12700" cap="flat" cmpd="sng" algn="ctr">
                       <a:solidFill>
-                        <a:srgbClr val="2C3844"/>
+                        <a:srgbClr val="4A1A5E"/>
                       </a:solidFill>
                       <a:prstDash val="solid"/>
                       <a:round/>
@@ -41772,7 +41772,7 @@
                     </a:lnT>
                     <a:lnB w="12700" cap="flat" cmpd="sng" algn="ctr">
                       <a:solidFill>
-                        <a:srgbClr val="2C3844"/>
+                        <a:srgbClr val="4A1A5E"/>
                       </a:solidFill>
                       <a:prstDash val="solid"/>
                       <a:round/>
@@ -41803,7 +41803,7 @@
                   <a:tcPr marL="91440" marR="91440" marT="45720" marB="45720" anchor="ctr">
                     <a:lnL w="12700" cap="flat" cmpd="sng" algn="ctr">
                       <a:solidFill>
-                        <a:srgbClr val="2C3844"/>
+                        <a:srgbClr val="4A1A5E"/>
                       </a:solidFill>
                       <a:prstDash val="solid"/>
                       <a:round/>
@@ -41812,7 +41812,7 @@
                     </a:lnL>
                     <a:lnR w="12700" cap="flat" cmpd="sng" algn="ctr">
                       <a:solidFill>
-                        <a:srgbClr val="2C3844"/>
+                        <a:srgbClr val="4A1A5E"/>
                       </a:solidFill>
                       <a:prstDash val="solid"/>
                       <a:round/>
@@ -41821,7 +41821,7 @@
                     </a:lnR>
                     <a:lnT w="12700" cap="flat" cmpd="sng" algn="ctr">
                       <a:solidFill>
-                        <a:srgbClr val="2C3844"/>
+                        <a:srgbClr val="4A1A5E"/>
                       </a:solidFill>
                       <a:prstDash val="solid"/>
                       <a:round/>
@@ -41830,7 +41830,7 @@
                     </a:lnT>
                     <a:lnB w="12700" cap="flat" cmpd="sng" algn="ctr">
                       <a:solidFill>
-                        <a:srgbClr val="2C3844"/>
+                        <a:srgbClr val="4A1A5E"/>
                       </a:solidFill>
                       <a:prstDash val="solid"/>
                       <a:round/>
@@ -41861,7 +41861,7 @@
                   <a:tcPr marL="91440" marR="91440" marT="45720" marB="45720" anchor="ctr">
                     <a:lnL w="12700" cap="flat" cmpd="sng" algn="ctr">
                       <a:solidFill>
-                        <a:srgbClr val="2C3844"/>
+                        <a:srgbClr val="4A1A5E"/>
                       </a:solidFill>
                       <a:prstDash val="solid"/>
                       <a:round/>
@@ -41870,7 +41870,7 @@
                     </a:lnL>
                     <a:lnR w="12700" cap="flat" cmpd="sng" algn="ctr">
                       <a:solidFill>
-                        <a:srgbClr val="2C3844"/>
+                        <a:srgbClr val="4A1A5E"/>
                       </a:solidFill>
                       <a:prstDash val="solid"/>
                       <a:round/>
@@ -41879,7 +41879,7 @@
                     </a:lnR>
                     <a:lnT w="12700" cap="flat" cmpd="sng" algn="ctr">
                       <a:solidFill>
-                        <a:srgbClr val="2C3844"/>
+                        <a:srgbClr val="4A1A5E"/>
                       </a:solidFill>
                       <a:prstDash val="solid"/>
                       <a:round/>
@@ -41888,7 +41888,7 @@
                     </a:lnT>
                     <a:lnB w="12700" cap="flat" cmpd="sng" algn="ctr">
                       <a:solidFill>
-                        <a:srgbClr val="2C3844"/>
+                        <a:srgbClr val="4A1A5E"/>
                       </a:solidFill>
                       <a:prstDash val="solid"/>
                       <a:round/>
@@ -41919,7 +41919,7 @@
                   <a:tcPr marL="91440" marR="91440" marT="45720" marB="45720" anchor="ctr">
                     <a:lnL w="12700" cap="flat" cmpd="sng" algn="ctr">
                       <a:solidFill>
-                        <a:srgbClr val="2C3844"/>
+                        <a:srgbClr val="4A1A5E"/>
                       </a:solidFill>
                       <a:prstDash val="solid"/>
                       <a:round/>
@@ -41928,7 +41928,7 @@
                     </a:lnL>
                     <a:lnR w="12700" cap="flat" cmpd="sng" algn="ctr">
                       <a:solidFill>
-                        <a:srgbClr val="2C3844"/>
+                        <a:srgbClr val="4A1A5E"/>
                       </a:solidFill>
                       <a:prstDash val="solid"/>
                       <a:round/>
@@ -41937,7 +41937,7 @@
                     </a:lnR>
                     <a:lnT w="12700" cap="flat" cmpd="sng" algn="ctr">
                       <a:solidFill>
-                        <a:srgbClr val="2C3844"/>
+                        <a:srgbClr val="4A1A5E"/>
                       </a:solidFill>
                       <a:prstDash val="solid"/>
                       <a:round/>
@@ -41946,7 +41946,7 @@
                     </a:lnT>
                     <a:lnB w="12700" cap="flat" cmpd="sng" algn="ctr">
                       <a:solidFill>
-                        <a:srgbClr val="2C3844"/>
+                        <a:srgbClr val="4A1A5E"/>
                       </a:solidFill>
                       <a:prstDash val="solid"/>
                       <a:round/>
@@ -41979,7 +41979,7 @@
                   <a:tcPr marL="91440" marR="91440" marT="45720" marB="45720" anchor="ctr">
                     <a:lnL w="12700" cap="flat" cmpd="sng" algn="ctr">
                       <a:solidFill>
-                        <a:srgbClr val="2C3844"/>
+                        <a:srgbClr val="4A1A5E"/>
                       </a:solidFill>
                       <a:prstDash val="solid"/>
                       <a:round/>
@@ -41988,7 +41988,7 @@
                     </a:lnL>
                     <a:lnR w="12700" cap="flat" cmpd="sng" algn="ctr">
                       <a:solidFill>
-                        <a:srgbClr val="2C3844"/>
+                        <a:srgbClr val="4A1A5E"/>
                       </a:solidFill>
                       <a:prstDash val="solid"/>
                       <a:round/>
@@ -41997,7 +41997,7 @@
                     </a:lnR>
                     <a:lnT w="12700" cap="flat" cmpd="sng" algn="ctr">
                       <a:solidFill>
-                        <a:srgbClr val="2C3844"/>
+                        <a:srgbClr val="4A1A5E"/>
                       </a:solidFill>
                       <a:prstDash val="solid"/>
                       <a:round/>
@@ -42006,7 +42006,7 @@
                     </a:lnT>
                     <a:lnB w="12700" cap="flat" cmpd="sng" algn="ctr">
                       <a:solidFill>
-                        <a:srgbClr val="2C3844"/>
+                        <a:srgbClr val="4A1A5E"/>
                       </a:solidFill>
                       <a:prstDash val="solid"/>
                       <a:round/>
@@ -42037,7 +42037,7 @@
                   <a:tcPr marL="91440" marR="91440" marT="45720" marB="45720" anchor="ctr">
                     <a:lnL w="12700" cap="flat" cmpd="sng" algn="ctr">
                       <a:solidFill>
-                        <a:srgbClr val="2C3844"/>
+                        <a:srgbClr val="4A1A5E"/>
                       </a:solidFill>
                       <a:prstDash val="solid"/>
                       <a:round/>
@@ -42046,7 +42046,7 @@
                     </a:lnL>
                     <a:lnR w="12700" cap="flat" cmpd="sng" algn="ctr">
                       <a:solidFill>
-                        <a:srgbClr val="2C3844"/>
+                        <a:srgbClr val="4A1A5E"/>
                       </a:solidFill>
                       <a:prstDash val="solid"/>
                       <a:round/>
@@ -42055,7 +42055,7 @@
                     </a:lnR>
                     <a:lnT w="12700" cap="flat" cmpd="sng" algn="ctr">
                       <a:solidFill>
-                        <a:srgbClr val="2C3844"/>
+                        <a:srgbClr val="4A1A5E"/>
                       </a:solidFill>
                       <a:prstDash val="solid"/>
                       <a:round/>
@@ -42064,7 +42064,7 @@
                     </a:lnT>
                     <a:lnB w="12700" cap="flat" cmpd="sng" algn="ctr">
                       <a:solidFill>
-                        <a:srgbClr val="2C3844"/>
+                        <a:srgbClr val="4A1A5E"/>
                       </a:solidFill>
                       <a:prstDash val="solid"/>
                       <a:round/>
@@ -42095,7 +42095,7 @@
                   <a:tcPr marL="91440" marR="91440" marT="45720" marB="45720" anchor="ctr">
                     <a:lnL w="12700" cap="flat" cmpd="sng" algn="ctr">
                       <a:solidFill>
-                        <a:srgbClr val="2C3844"/>
+                        <a:srgbClr val="4A1A5E"/>
                       </a:solidFill>
                       <a:prstDash val="solid"/>
                       <a:round/>
@@ -42104,7 +42104,7 @@
                     </a:lnL>
                     <a:lnR w="12700" cap="flat" cmpd="sng" algn="ctr">
                       <a:solidFill>
-                        <a:srgbClr val="2C3844"/>
+                        <a:srgbClr val="4A1A5E"/>
                       </a:solidFill>
                       <a:prstDash val="solid"/>
                       <a:round/>
@@ -42113,7 +42113,7 @@
                     </a:lnR>
                     <a:lnT w="12700" cap="flat" cmpd="sng" algn="ctr">
                       <a:solidFill>
-                        <a:srgbClr val="2C3844"/>
+                        <a:srgbClr val="4A1A5E"/>
                       </a:solidFill>
                       <a:prstDash val="solid"/>
                       <a:round/>
@@ -42122,7 +42122,7 @@
                     </a:lnT>
                     <a:lnB w="12700" cap="flat" cmpd="sng" algn="ctr">
                       <a:solidFill>
-                        <a:srgbClr val="2C3844"/>
+                        <a:srgbClr val="4A1A5E"/>
                       </a:solidFill>
                       <a:prstDash val="solid"/>
                       <a:round/>
@@ -42153,7 +42153,7 @@
                   <a:tcPr marL="91440" marR="91440" marT="45720" marB="45720" anchor="ctr">
                     <a:lnL w="12700" cap="flat" cmpd="sng" algn="ctr">
                       <a:solidFill>
-                        <a:srgbClr val="2C3844"/>
+                        <a:srgbClr val="4A1A5E"/>
                       </a:solidFill>
                       <a:prstDash val="solid"/>
                       <a:round/>
@@ -42162,7 +42162,7 @@
                     </a:lnL>
                     <a:lnR w="12700" cap="flat" cmpd="sng" algn="ctr">
                       <a:solidFill>
-                        <a:srgbClr val="2C3844"/>
+                        <a:srgbClr val="4A1A5E"/>
                       </a:solidFill>
                       <a:prstDash val="solid"/>
                       <a:round/>
@@ -42171,7 +42171,7 @@
                     </a:lnR>
                     <a:lnT w="12700" cap="flat" cmpd="sng" algn="ctr">
                       <a:solidFill>
-                        <a:srgbClr val="2C3844"/>
+                        <a:srgbClr val="4A1A5E"/>
                       </a:solidFill>
                       <a:prstDash val="solid"/>
                       <a:round/>
@@ -42180,7 +42180,7 @@
                     </a:lnT>
                     <a:lnB w="12700" cap="flat" cmpd="sng" algn="ctr">
                       <a:solidFill>
-                        <a:srgbClr val="2C3844"/>
+                        <a:srgbClr val="4A1A5E"/>
                       </a:solidFill>
                       <a:prstDash val="solid"/>
                       <a:round/>
@@ -42213,7 +42213,7 @@
                   <a:tcPr marL="91440" marR="91440" marT="45720" marB="45720" anchor="ctr">
                     <a:lnL w="12700" cap="flat" cmpd="sng" algn="ctr">
                       <a:solidFill>
-                        <a:srgbClr val="2C3844"/>
+                        <a:srgbClr val="4A1A5E"/>
                       </a:solidFill>
                       <a:prstDash val="solid"/>
                       <a:round/>
@@ -42222,7 +42222,7 @@
                     </a:lnL>
                     <a:lnR w="12700" cap="flat" cmpd="sng" algn="ctr">
                       <a:solidFill>
-                        <a:srgbClr val="2C3844"/>
+                        <a:srgbClr val="4A1A5E"/>
                       </a:solidFill>
                       <a:prstDash val="solid"/>
                       <a:round/>
@@ -42231,7 +42231,7 @@
                     </a:lnR>
                     <a:lnT w="12700" cap="flat" cmpd="sng" algn="ctr">
                       <a:solidFill>
-                        <a:srgbClr val="2C3844"/>
+                        <a:srgbClr val="4A1A5E"/>
                       </a:solidFill>
                       <a:prstDash val="solid"/>
                       <a:round/>
@@ -42240,7 +42240,7 @@
                     </a:lnT>
                     <a:lnB w="12700" cap="flat" cmpd="sng" algn="ctr">
                       <a:solidFill>
-                        <a:srgbClr val="2C3844"/>
+                        <a:srgbClr val="4A1A5E"/>
                       </a:solidFill>
                       <a:prstDash val="solid"/>
                       <a:round/>
@@ -42278,7 +42278,7 @@
                   <a:tcPr marL="91440" marR="91440" marT="45720" marB="45720" anchor="ctr">
                     <a:lnL w="12700" cap="flat" cmpd="sng" algn="ctr">
                       <a:solidFill>
-                        <a:srgbClr val="2C3844"/>
+                        <a:srgbClr val="4A1A5E"/>
                       </a:solidFill>
                       <a:prstDash val="solid"/>
                       <a:round/>
@@ -42287,7 +42287,7 @@
                     </a:lnL>
                     <a:lnR w="12700" cap="flat" cmpd="sng" algn="ctr">
                       <a:solidFill>
-                        <a:srgbClr val="2C3844"/>
+                        <a:srgbClr val="4A1A5E"/>
                       </a:solidFill>
                       <a:prstDash val="solid"/>
                       <a:round/>
@@ -42296,7 +42296,7 @@
                     </a:lnR>
                     <a:lnT w="12700" cap="flat" cmpd="sng" algn="ctr">
                       <a:solidFill>
-                        <a:srgbClr val="2C3844"/>
+                        <a:srgbClr val="4A1A5E"/>
                       </a:solidFill>
                       <a:prstDash val="solid"/>
                       <a:round/>
@@ -42305,7 +42305,7 @@
                     </a:lnT>
                     <a:lnB w="12700" cap="flat" cmpd="sng" algn="ctr">
                       <a:solidFill>
-                        <a:srgbClr val="2C3844"/>
+                        <a:srgbClr val="4A1A5E"/>
                       </a:solidFill>
                       <a:prstDash val="solid"/>
                       <a:round/>
@@ -42336,7 +42336,7 @@
                   <a:tcPr marL="91440" marR="91440" marT="45720" marB="45720" anchor="ctr">
                     <a:lnL w="12700" cap="flat" cmpd="sng" algn="ctr">
                       <a:solidFill>
-                        <a:srgbClr val="2C3844"/>
+                        <a:srgbClr val="4A1A5E"/>
                       </a:solidFill>
                       <a:prstDash val="solid"/>
                       <a:round/>
@@ -42345,7 +42345,7 @@
                     </a:lnL>
                     <a:lnR w="12700" cap="flat" cmpd="sng" algn="ctr">
                       <a:solidFill>
-                        <a:srgbClr val="2C3844"/>
+                        <a:srgbClr val="4A1A5E"/>
                       </a:solidFill>
                       <a:prstDash val="solid"/>
                       <a:round/>
@@ -42354,7 +42354,7 @@
                     </a:lnR>
                     <a:lnT w="12700" cap="flat" cmpd="sng" algn="ctr">
                       <a:solidFill>
-                        <a:srgbClr val="2C3844"/>
+                        <a:srgbClr val="4A1A5E"/>
                       </a:solidFill>
                       <a:prstDash val="solid"/>
                       <a:round/>
@@ -42363,7 +42363,7 @@
                     </a:lnT>
                     <a:lnB w="12700" cap="flat" cmpd="sng" algn="ctr">
                       <a:solidFill>
-                        <a:srgbClr val="2C3844"/>
+                        <a:srgbClr val="4A1A5E"/>
                       </a:solidFill>
                       <a:prstDash val="solid"/>
                       <a:round/>
@@ -42394,7 +42394,7 @@
                   <a:tcPr marL="91440" marR="91440" marT="45720" marB="45720" anchor="ctr">
                     <a:lnL w="12700" cap="flat" cmpd="sng" algn="ctr">
                       <a:solidFill>
-                        <a:srgbClr val="2C3844"/>
+                        <a:srgbClr val="4A1A5E"/>
                       </a:solidFill>
                       <a:prstDash val="solid"/>
                       <a:round/>
@@ -42403,7 +42403,7 @@
                     </a:lnL>
                     <a:lnR w="12700" cap="flat" cmpd="sng" algn="ctr">
                       <a:solidFill>
-                        <a:srgbClr val="2C3844"/>
+                        <a:srgbClr val="4A1A5E"/>
                       </a:solidFill>
                       <a:prstDash val="solid"/>
                       <a:round/>
@@ -42412,7 +42412,7 @@
                     </a:lnR>
                     <a:lnT w="12700" cap="flat" cmpd="sng" algn="ctr">
                       <a:solidFill>
-                        <a:srgbClr val="2C3844"/>
+                        <a:srgbClr val="4A1A5E"/>
                       </a:solidFill>
                       <a:prstDash val="solid"/>
                       <a:round/>
@@ -42421,7 +42421,7 @@
                     </a:lnT>
                     <a:lnB w="12700" cap="flat" cmpd="sng" algn="ctr">
                       <a:solidFill>
-                        <a:srgbClr val="2C3844"/>
+                        <a:srgbClr val="4A1A5E"/>
                       </a:solidFill>
                       <a:prstDash val="solid"/>
                       <a:round/>
@@ -42496,40 +42496,40 @@
   <a:themeElements>
     <a:clrScheme name="zshrs talk">
       <a:dk1>
-        <a:srgbClr val="0F1419"/>
+        <a:srgbClr val="05050A"/>
       </a:dk1>
       <a:lt1>
-        <a:srgbClr val="F2F0E9"/>
+        <a:srgbClr val="0D0A1E"/>
       </a:lt1>
       <a:dk2>
-        <a:srgbClr val="1A222B"/>
+        <a:srgbClr val="11112A"/>
       </a:dk2>
       <a:lt2>
-        <a:srgbClr val="E8E6DF"/>
+        <a:srgbClr val="E6F4FF"/>
       </a:lt2>
       <a:accent1>
-        <a:srgbClr val="5CC8D7"/>
+        <a:srgbClr val="05D9E8"/>
       </a:accent1>
       <a:accent2>
-        <a:srgbClr val="1B7F8E"/>
+        <a:srgbClr val="05D9E8"/>
       </a:accent2>
       <a:accent3>
-        <a:srgbClr val="F2994A"/>
+        <a:srgbClr val="FF2A6D"/>
       </a:accent3>
       <a:accent4>
-        <a:srgbClr val="14181D"/>
+        <a:srgbClr val="D300C5"/>
       </a:accent4>
       <a:accent5>
-        <a:srgbClr val="9AA4AE"/>
+        <a:srgbClr val="9A9AB8"/>
       </a:accent5>
       <a:accent6>
-        <a:srgbClr val="4A5158"/>
+        <a:srgbClr val="6A6A8C"/>
       </a:accent6>
       <a:hlink>
-        <a:srgbClr val="5CC8D7"/>
+        <a:srgbClr val="05D9E8"/>
       </a:hlink>
       <a:folHlink>
-        <a:srgbClr val="9AA4AE"/>
+        <a:srgbClr val="9A9AB8"/>
       </a:folHlink>
     </a:clrScheme>
     <a:fontScheme name="zshrs talk">
